--- a/exec-deck/output/H&L Weekly Update - WC 12 Oct 2026.pptx
+++ b/exec-deck/output/H&L Weekly Update - WC 12 Oct 2026.pptx
@@ -32040,7 +32040,7 @@
                 <a:ea typeface="Poppins" pitchFamily="34" charset="-122"/>
                 <a:cs typeface="Poppins" pitchFamily="34" charset="-120"/>
               </a:rPr>
-              <a:t>billable utilisation 11.5% — 39.5h of 342h; last week restated 21.3h → 30.3h, so this is a floor again</a:t>
+              <a:t>billable utilisation 13.0% — 39.5h of 304h with Isayah out; last week restated 21.3h → 30.3h, so this is a floor again</a:t>
             </a:r>
             <a:endParaRPr lang="en-US" sz="900" dirty="0"/>
           </a:p>
@@ -45932,7 +45932,7 @@
                 <a:ea typeface="Poppins" pitchFamily="34" charset="-122"/>
                 <a:cs typeface="Poppins" pitchFamily="34" charset="-120"/>
               </a:rPr>
-              <a:t>11.5%</a:t>
+              <a:t>13%</a:t>
             </a:r>
             <a:endParaRPr lang="en-US" sz="2600" dirty="0"/>
           </a:p>
@@ -45971,7 +45971,7 @@
                 <a:ea typeface="Poppins" pitchFamily="34" charset="-122"/>
                 <a:cs typeface="Poppins" pitchFamily="34" charset="-120"/>
               </a:rPr>
-              <a:t>39.45h billed of 342h available · target 50% · Rhys logged half of it</a:t>
+              <a:t>39.45h billed of 304h available · target 50% · Rhys logged half of it</a:t>
             </a:r>
             <a:endParaRPr lang="en-US" sz="780" dirty="0"/>
           </a:p>
@@ -46078,7 +46078,7 @@
                 <a:ea typeface="Poppins" pitchFamily="34" charset="-122"/>
                 <a:cs typeface="Poppins" pitchFamily="34" charset="-120"/>
               </a:rPr>
-              <a:t>342h</a:t>
+              <a:t>304h</a:t>
             </a:r>
             <a:endParaRPr lang="en-US" sz="2600" dirty="0"/>
           </a:p>
@@ -46117,7 +46117,7 @@
                 <a:ea typeface="Poppins" pitchFamily="34" charset="-122"/>
                 <a:cs typeface="Poppins" pitchFamily="34" charset="-120"/>
               </a:rPr>
-              <a:t>9 people assigned to PS-pipeline tickets × 38h standard week</a:t>
+              <a:t>8 available × 38h · Isayah Kuhlmann on leave</a:t>
             </a:r>
             <a:endParaRPr lang="en-US" sz="780" dirty="0"/>
           </a:p>
@@ -46555,7 +46555,7 @@
         <p:spPr>
           <a:xfrm>
             <a:off x="2944368" y="3017520"/>
-            <a:ext cx="5486" cy="1744675"/>
+            <a:ext cx="5486" cy="1723136"/>
           </a:xfrm>
           <a:prstGeom prst="rect">
             <a:avLst/>
@@ -46614,7 +46614,7 @@
         <p:spPr>
           <a:xfrm>
             <a:off x="3419856" y="3017520"/>
-            <a:ext cx="5486" cy="1744675"/>
+            <a:ext cx="5486" cy="1723136"/>
           </a:xfrm>
           <a:prstGeom prst="rect">
             <a:avLst/>
@@ -46673,7 +46673,7 @@
         <p:spPr>
           <a:xfrm>
             <a:off x="3895344" y="3017520"/>
-            <a:ext cx="5486" cy="1744675"/>
+            <a:ext cx="5486" cy="1723136"/>
           </a:xfrm>
           <a:prstGeom prst="rect">
             <a:avLst/>
@@ -46732,7 +46732,7 @@
         <p:spPr>
           <a:xfrm>
             <a:off x="4370832" y="3017520"/>
-            <a:ext cx="5486" cy="1744675"/>
+            <a:ext cx="5486" cy="1723136"/>
           </a:xfrm>
           <a:prstGeom prst="rect">
             <a:avLst/>
@@ -46791,7 +46791,7 @@
         <p:spPr>
           <a:xfrm>
             <a:off x="4846320" y="3017520"/>
-            <a:ext cx="5486" cy="1744675"/>
+            <a:ext cx="5486" cy="1723136"/>
           </a:xfrm>
           <a:prstGeom prst="rect">
             <a:avLst/>
@@ -46811,7 +46811,7 @@
         <p:spPr>
           <a:xfrm>
             <a:off x="640080" y="3054096"/>
-            <a:ext cx="1783080" cy="193853"/>
+            <a:ext cx="1783080" cy="215392"/>
           </a:xfrm>
           <a:prstGeom prst="rect">
             <a:avLst/>
@@ -46849,7 +46849,7 @@
         </p:nvSpPr>
         <p:spPr>
           <a:xfrm>
-            <a:off x="2468880" y="3121304"/>
+            <a:off x="2468880" y="3132074"/>
             <a:ext cx="2377440" cy="59436"/>
           </a:xfrm>
           <a:prstGeom prst="roundRect">
@@ -46871,7 +46871,7 @@
         </p:nvSpPr>
         <p:spPr>
           <a:xfrm>
-            <a:off x="2468880" y="3121304"/>
+            <a:off x="2468880" y="3132074"/>
             <a:ext cx="1219627" cy="59436"/>
           </a:xfrm>
           <a:prstGeom prst="roundRect">
@@ -46894,7 +46894,7 @@
         <p:spPr>
           <a:xfrm>
             <a:off x="5029200" y="3054096"/>
-            <a:ext cx="822960" cy="193853"/>
+            <a:ext cx="822960" cy="215392"/>
           </a:xfrm>
           <a:prstGeom prst="rect">
             <a:avLst/>
@@ -46933,7 +46933,7 @@
         <p:spPr>
           <a:xfrm>
             <a:off x="5943600" y="3054096"/>
-            <a:ext cx="822960" cy="193853"/>
+            <a:ext cx="822960" cy="215392"/>
           </a:xfrm>
           <a:prstGeom prst="rect">
             <a:avLst/>
@@ -46971,8 +46971,8 @@
         </p:nvSpPr>
         <p:spPr>
           <a:xfrm>
-            <a:off x="640080" y="3247949"/>
-            <a:ext cx="1783080" cy="193853"/>
+            <a:off x="640080" y="3269488"/>
+            <a:ext cx="1783080" cy="215392"/>
           </a:xfrm>
           <a:prstGeom prst="rect">
             <a:avLst/>
@@ -47010,7 +47010,7 @@
         </p:nvSpPr>
         <p:spPr>
           <a:xfrm>
-            <a:off x="2468880" y="3315157"/>
+            <a:off x="2468880" y="3347466"/>
             <a:ext cx="2377440" cy="59436"/>
           </a:xfrm>
           <a:prstGeom prst="roundRect">
@@ -47032,7 +47032,7 @@
         </p:nvSpPr>
         <p:spPr>
           <a:xfrm>
-            <a:off x="2468880" y="3315157"/>
+            <a:off x="2468880" y="3347466"/>
             <a:ext cx="406542" cy="59436"/>
           </a:xfrm>
           <a:prstGeom prst="roundRect">
@@ -47054,8 +47054,8 @@
         </p:nvSpPr>
         <p:spPr>
           <a:xfrm>
-            <a:off x="5029200" y="3247949"/>
-            <a:ext cx="822960" cy="193853"/>
+            <a:off x="5029200" y="3269488"/>
+            <a:ext cx="822960" cy="215392"/>
           </a:xfrm>
           <a:prstGeom prst="rect">
             <a:avLst/>
@@ -47093,8 +47093,8 @@
         </p:nvSpPr>
         <p:spPr>
           <a:xfrm>
-            <a:off x="5943600" y="3247949"/>
-            <a:ext cx="822960" cy="193853"/>
+            <a:off x="5943600" y="3269488"/>
+            <a:ext cx="822960" cy="215392"/>
           </a:xfrm>
           <a:prstGeom prst="rect">
             <a:avLst/>
@@ -47132,8 +47132,8 @@
         </p:nvSpPr>
         <p:spPr>
           <a:xfrm>
-            <a:off x="640080" y="3441802"/>
-            <a:ext cx="1783080" cy="193853"/>
+            <a:off x="640080" y="3484880"/>
+            <a:ext cx="1783080" cy="215392"/>
           </a:xfrm>
           <a:prstGeom prst="rect">
             <a:avLst/>
@@ -47171,7 +47171,7 @@
         </p:nvSpPr>
         <p:spPr>
           <a:xfrm>
-            <a:off x="2468880" y="3509010"/>
+            <a:off x="2468880" y="3562858"/>
             <a:ext cx="2377440" cy="59436"/>
           </a:xfrm>
           <a:prstGeom prst="roundRect">
@@ -47193,7 +47193,7 @@
         </p:nvSpPr>
         <p:spPr>
           <a:xfrm>
-            <a:off x="2468880" y="3509010"/>
+            <a:off x="2468880" y="3562858"/>
             <a:ext cx="358993" cy="59436"/>
           </a:xfrm>
           <a:prstGeom prst="roundRect">
@@ -47215,8 +47215,8 @@
         </p:nvSpPr>
         <p:spPr>
           <a:xfrm>
-            <a:off x="5029200" y="3441802"/>
-            <a:ext cx="822960" cy="193853"/>
+            <a:off x="5029200" y="3484880"/>
+            <a:ext cx="822960" cy="215392"/>
           </a:xfrm>
           <a:prstGeom prst="rect">
             <a:avLst/>
@@ -47254,8 +47254,8 @@
         </p:nvSpPr>
         <p:spPr>
           <a:xfrm>
-            <a:off x="5943600" y="3441802"/>
-            <a:ext cx="822960" cy="193853"/>
+            <a:off x="5943600" y="3484880"/>
+            <a:ext cx="822960" cy="215392"/>
           </a:xfrm>
           <a:prstGeom prst="rect">
             <a:avLst/>
@@ -47293,8 +47293,8 @@
         </p:nvSpPr>
         <p:spPr>
           <a:xfrm>
-            <a:off x="640080" y="3635654"/>
-            <a:ext cx="1783080" cy="193853"/>
+            <a:off x="640080" y="3700272"/>
+            <a:ext cx="1783080" cy="215392"/>
           </a:xfrm>
           <a:prstGeom prst="rect">
             <a:avLst/>
@@ -47332,7 +47332,7 @@
         </p:nvSpPr>
         <p:spPr>
           <a:xfrm>
-            <a:off x="2468880" y="3702863"/>
+            <a:off x="2468880" y="3778250"/>
             <a:ext cx="2377440" cy="59436"/>
           </a:xfrm>
           <a:prstGeom prst="roundRect">
@@ -47354,7 +47354,7 @@
         </p:nvSpPr>
         <p:spPr>
           <a:xfrm>
-            <a:off x="2468880" y="3702863"/>
+            <a:off x="2468880" y="3778250"/>
             <a:ext cx="280538" cy="59436"/>
           </a:xfrm>
           <a:prstGeom prst="roundRect">
@@ -47376,8 +47376,8 @@
         </p:nvSpPr>
         <p:spPr>
           <a:xfrm>
-            <a:off x="5029200" y="3635654"/>
-            <a:ext cx="822960" cy="193853"/>
+            <a:off x="5029200" y="3700272"/>
+            <a:ext cx="822960" cy="215392"/>
           </a:xfrm>
           <a:prstGeom prst="rect">
             <a:avLst/>
@@ -47415,8 +47415,8 @@
         </p:nvSpPr>
         <p:spPr>
           <a:xfrm>
-            <a:off x="5943600" y="3635654"/>
-            <a:ext cx="822960" cy="193853"/>
+            <a:off x="5943600" y="3700272"/>
+            <a:ext cx="822960" cy="215392"/>
           </a:xfrm>
           <a:prstGeom prst="rect">
             <a:avLst/>
@@ -47454,8 +47454,8 @@
         </p:nvSpPr>
         <p:spPr>
           <a:xfrm>
-            <a:off x="640080" y="3829507"/>
-            <a:ext cx="1783080" cy="193853"/>
+            <a:off x="640080" y="3915664"/>
+            <a:ext cx="1783080" cy="215392"/>
           </a:xfrm>
           <a:prstGeom prst="rect">
             <a:avLst/>
@@ -47493,7 +47493,7 @@
         </p:nvSpPr>
         <p:spPr>
           <a:xfrm>
-            <a:off x="2468880" y="3896716"/>
+            <a:off x="2468880" y="3993642"/>
             <a:ext cx="2377440" cy="59436"/>
           </a:xfrm>
           <a:prstGeom prst="roundRect">
@@ -47515,7 +47515,7 @@
         </p:nvSpPr>
         <p:spPr>
           <a:xfrm>
-            <a:off x="2468880" y="3896716"/>
+            <a:off x="2468880" y="3993642"/>
             <a:ext cx="92720" cy="59436"/>
           </a:xfrm>
           <a:prstGeom prst="roundRect">
@@ -47537,8 +47537,8 @@
         </p:nvSpPr>
         <p:spPr>
           <a:xfrm>
-            <a:off x="5029200" y="3829507"/>
-            <a:ext cx="822960" cy="193853"/>
+            <a:off x="5029200" y="3915664"/>
+            <a:ext cx="822960" cy="215392"/>
           </a:xfrm>
           <a:prstGeom prst="rect">
             <a:avLst/>
@@ -47576,8 +47576,8 @@
         </p:nvSpPr>
         <p:spPr>
           <a:xfrm>
-            <a:off x="5943600" y="3829507"/>
-            <a:ext cx="822960" cy="193853"/>
+            <a:off x="5943600" y="3915664"/>
+            <a:ext cx="822960" cy="215392"/>
           </a:xfrm>
           <a:prstGeom prst="rect">
             <a:avLst/>
@@ -47615,8 +47615,8 @@
         </p:nvSpPr>
         <p:spPr>
           <a:xfrm>
-            <a:off x="640080" y="4023360"/>
-            <a:ext cx="1783080" cy="193853"/>
+            <a:off x="640080" y="4131056"/>
+            <a:ext cx="1783080" cy="215392"/>
           </a:xfrm>
           <a:prstGeom prst="rect">
             <a:avLst/>
@@ -47654,7 +47654,7 @@
         </p:nvSpPr>
         <p:spPr>
           <a:xfrm>
-            <a:off x="2468880" y="4090568"/>
+            <a:off x="2468880" y="4209034"/>
             <a:ext cx="2377440" cy="59436"/>
           </a:xfrm>
           <a:prstGeom prst="roundRect">
@@ -47676,7 +47676,7 @@
         </p:nvSpPr>
         <p:spPr>
           <a:xfrm>
-            <a:off x="2468880" y="4090568"/>
+            <a:off x="2468880" y="4209034"/>
             <a:ext cx="68946" cy="59436"/>
           </a:xfrm>
           <a:prstGeom prst="roundRect">
@@ -47698,8 +47698,8 @@
         </p:nvSpPr>
         <p:spPr>
           <a:xfrm>
-            <a:off x="5029200" y="4023360"/>
-            <a:ext cx="822960" cy="193853"/>
+            <a:off x="5029200" y="4131056"/>
+            <a:ext cx="822960" cy="215392"/>
           </a:xfrm>
           <a:prstGeom prst="rect">
             <a:avLst/>
@@ -47737,8 +47737,8 @@
         </p:nvSpPr>
         <p:spPr>
           <a:xfrm>
-            <a:off x="5943600" y="4023360"/>
-            <a:ext cx="822960" cy="193853"/>
+            <a:off x="5943600" y="4131056"/>
+            <a:ext cx="822960" cy="215392"/>
           </a:xfrm>
           <a:prstGeom prst="rect">
             <a:avLst/>
@@ -47776,8 +47776,8 @@
         </p:nvSpPr>
         <p:spPr>
           <a:xfrm>
-            <a:off x="640080" y="4217213"/>
-            <a:ext cx="1783080" cy="193853"/>
+            <a:off x="640080" y="4346448"/>
+            <a:ext cx="1783080" cy="215392"/>
           </a:xfrm>
           <a:prstGeom prst="rect">
             <a:avLst/>
@@ -47815,7 +47815,7 @@
         </p:nvSpPr>
         <p:spPr>
           <a:xfrm>
-            <a:off x="2468880" y="4284421"/>
+            <a:off x="2468880" y="4424426"/>
             <a:ext cx="2377440" cy="59436"/>
           </a:xfrm>
           <a:prstGeom prst="roundRect">
@@ -47837,7 +47837,7 @@
         </p:nvSpPr>
         <p:spPr>
           <a:xfrm>
-            <a:off x="2468880" y="4284421"/>
+            <a:off x="2468880" y="4424426"/>
             <a:ext cx="45720" cy="59436"/>
           </a:xfrm>
           <a:prstGeom prst="roundRect">
@@ -47859,8 +47859,8 @@
         </p:nvSpPr>
         <p:spPr>
           <a:xfrm>
-            <a:off x="5029200" y="4217213"/>
-            <a:ext cx="822960" cy="193853"/>
+            <a:off x="5029200" y="4346448"/>
+            <a:ext cx="822960" cy="215392"/>
           </a:xfrm>
           <a:prstGeom prst="rect">
             <a:avLst/>
@@ -47898,8 +47898,8 @@
         </p:nvSpPr>
         <p:spPr>
           <a:xfrm>
-            <a:off x="5943600" y="4217213"/>
-            <a:ext cx="822960" cy="193853"/>
+            <a:off x="5943600" y="4346448"/>
+            <a:ext cx="822960" cy="215392"/>
           </a:xfrm>
           <a:prstGeom prst="rect">
             <a:avLst/>
@@ -47937,8 +47937,8 @@
         </p:nvSpPr>
         <p:spPr>
           <a:xfrm>
-            <a:off x="640080" y="4411066"/>
-            <a:ext cx="1783080" cy="193853"/>
+            <a:off x="640080" y="4561840"/>
+            <a:ext cx="1783080" cy="215392"/>
           </a:xfrm>
           <a:prstGeom prst="rect">
             <a:avLst/>
@@ -47962,7 +47962,7 @@
                 <a:ea typeface="Poppins" pitchFamily="34" charset="-122"/>
                 <a:cs typeface="Poppins" pitchFamily="34" charset="-120"/>
               </a:rPr>
-              <a:t>Isayah Kuhlmann</a:t>
+              <a:t>Karim AlRifaii</a:t>
             </a:r>
             <a:endParaRPr lang="en-US" sz="800" dirty="0"/>
           </a:p>
@@ -47976,7 +47976,7 @@
         </p:nvSpPr>
         <p:spPr>
           <a:xfrm>
-            <a:off x="2468880" y="4478274"/>
+            <a:off x="2468880" y="4639818"/>
             <a:ext cx="2377440" cy="59436"/>
           </a:xfrm>
           <a:prstGeom prst="roundRect">
@@ -47998,8 +47998,8 @@
         </p:nvSpPr>
         <p:spPr>
           <a:xfrm>
-            <a:off x="5029200" y="4411066"/>
-            <a:ext cx="822960" cy="193853"/>
+            <a:off x="5029200" y="4561840"/>
+            <a:ext cx="822960" cy="215392"/>
           </a:xfrm>
           <a:prstGeom prst="rect">
             <a:avLst/>
@@ -48037,8 +48037,8 @@
         </p:nvSpPr>
         <p:spPr>
           <a:xfrm>
-            <a:off x="5943600" y="4411066"/>
-            <a:ext cx="822960" cy="193853"/>
+            <a:off x="5943600" y="4561840"/>
+            <a:ext cx="822960" cy="215392"/>
           </a:xfrm>
           <a:prstGeom prst="rect">
             <a:avLst/>
@@ -48070,14 +48070,34 @@
       </p:sp>
       <p:sp>
         <p:nvSpPr>
-          <p:cNvPr id="82" name="Text 80"/>
-          <p:cNvSpPr txBox="1"/>
-          <p:nvPr/>
-        </p:nvSpPr>
-        <p:spPr>
-          <a:xfrm>
-            <a:off x="640080" y="4604918"/>
-            <a:ext cx="1783080" cy="193853"/>
+          <p:cNvPr id="82" name="Shape 80"/>
+          <p:cNvSpPr/>
+          <p:nvPr/>
+        </p:nvSpPr>
+        <p:spPr>
+          <a:xfrm>
+            <a:off x="640080" y="4795520"/>
+            <a:ext cx="6126480" cy="10973"/>
+          </a:xfrm>
+          <a:prstGeom prst="rect">
+            <a:avLst/>
+          </a:prstGeom>
+          <a:solidFill>
+            <a:srgbClr val="12293A"/>
+          </a:solidFill>
+          <a:ln/>
+        </p:spPr>
+      </p:sp>
+      <p:sp>
+        <p:nvSpPr>
+          <p:cNvPr id="83" name="Text 81"/>
+          <p:cNvSpPr txBox="1"/>
+          <p:nvPr/>
+        </p:nvSpPr>
+        <p:spPr>
+          <a:xfrm>
+            <a:off x="640080" y="4822952"/>
+            <a:ext cx="1783080" cy="215392"/>
           </a:xfrm>
           <a:prstGeom prst="rect">
             <a:avLst/>
@@ -48093,7 +48113,46 @@
               <a:buNone/>
             </a:pPr>
             <a:r>
-              <a:rPr lang="en-US" sz="800" dirty="0">
+              <a:rPr lang="en-US" sz="850" b="1" dirty="0">
+                <a:solidFill>
+                  <a:srgbClr val="12293A"/>
+                </a:solidFill>
+                <a:latin typeface="Poppins" pitchFamily="34" charset="0"/>
+                <a:ea typeface="Poppins" pitchFamily="34" charset="-122"/>
+                <a:cs typeface="Poppins" pitchFamily="34" charset="-120"/>
+              </a:rPr>
+              <a:t>TOTAL</a:t>
+            </a:r>
+            <a:endParaRPr lang="en-US" sz="850" dirty="0"/>
+          </a:p>
+        </p:txBody>
+      </p:sp>
+      <p:sp>
+        <p:nvSpPr>
+          <p:cNvPr id="84" name="Text 82"/>
+          <p:cNvSpPr txBox="1"/>
+          <p:nvPr/>
+        </p:nvSpPr>
+        <p:spPr>
+          <a:xfrm>
+            <a:off x="2468880" y="4822952"/>
+            <a:ext cx="2377440" cy="215392"/>
+          </a:xfrm>
+          <a:prstGeom prst="rect">
+            <a:avLst/>
+          </a:prstGeom>
+          <a:noFill/>
+          <a:ln/>
+        </p:spPr>
+        <p:txBody>
+          <a:bodyPr wrap="square" lIns="0" tIns="0" rIns="0" bIns="0" rtlCol="0" anchor="ctr"/>
+          <a:lstStyle/>
+          <a:p>
+            <a:pPr indent="0" marL="0">
+              <a:buNone/>
+            </a:pPr>
+            <a:r>
+              <a:rPr lang="en-US" sz="700" dirty="0">
                 <a:solidFill>
                   <a:srgbClr val="5E7280"/>
                 </a:solidFill>
@@ -48101,44 +48160,22 @@
                 <a:ea typeface="Poppins" pitchFamily="34" charset="-122"/>
                 <a:cs typeface="Poppins" pitchFamily="34" charset="-120"/>
               </a:rPr>
-              <a:t>Karim AlRifaii</a:t>
-            </a:r>
-            <a:endParaRPr lang="en-US" sz="800" dirty="0"/>
-          </a:p>
-        </p:txBody>
-      </p:sp>
-      <p:sp>
-        <p:nvSpPr>
-          <p:cNvPr id="83" name="Shape 81"/>
-          <p:cNvSpPr/>
-          <p:nvPr/>
-        </p:nvSpPr>
-        <p:spPr>
-          <a:xfrm>
-            <a:off x="2468880" y="4672127"/>
-            <a:ext cx="2377440" cy="59436"/>
-          </a:xfrm>
-          <a:prstGeom prst="roundRect">
-            <a:avLst>
-              <a:gd name="adj" fmla="val 49231"/>
-            </a:avLst>
-          </a:prstGeom>
-          <a:solidFill>
-            <a:srgbClr val="E2EAEE"/>
-          </a:solidFill>
-          <a:ln/>
-        </p:spPr>
-      </p:sp>
-      <p:sp>
-        <p:nvSpPr>
-          <p:cNvPr id="84" name="Text 82"/>
-          <p:cNvSpPr txBox="1"/>
-          <p:nvPr/>
-        </p:nvSpPr>
-        <p:spPr>
-          <a:xfrm>
-            <a:off x="5029200" y="4604918"/>
-            <a:ext cx="822960" cy="193853"/>
+              <a:t>8 PS people × 38h = 304h available</a:t>
+            </a:r>
+            <a:endParaRPr lang="en-US" sz="700" dirty="0"/>
+          </a:p>
+        </p:txBody>
+      </p:sp>
+      <p:sp>
+        <p:nvSpPr>
+          <p:cNvPr id="85" name="Text 83"/>
+          <p:cNvSpPr txBox="1"/>
+          <p:nvPr/>
+        </p:nvSpPr>
+        <p:spPr>
+          <a:xfrm>
+            <a:off x="5029200" y="4822952"/>
+            <a:ext cx="822960" cy="215392"/>
           </a:xfrm>
           <a:prstGeom prst="rect">
             <a:avLst/>
@@ -48154,30 +48191,30 @@
               <a:buNone/>
             </a:pPr>
             <a:r>
-              <a:rPr lang="en-US" sz="800" dirty="0">
-                <a:solidFill>
-                  <a:srgbClr val="8FA1AC"/>
-                </a:solidFill>
-                <a:latin typeface="Poppins" pitchFamily="34" charset="0"/>
-                <a:ea typeface="Poppins" pitchFamily="34" charset="-122"/>
-                <a:cs typeface="Poppins" pitchFamily="34" charset="-120"/>
-              </a:rPr>
-              <a:t>—</a:t>
-            </a:r>
-            <a:endParaRPr lang="en-US" sz="800" dirty="0"/>
-          </a:p>
-        </p:txBody>
-      </p:sp>
-      <p:sp>
-        <p:nvSpPr>
-          <p:cNvPr id="85" name="Text 83"/>
-          <p:cNvSpPr txBox="1"/>
-          <p:nvPr/>
-        </p:nvSpPr>
-        <p:spPr>
-          <a:xfrm>
-            <a:off x="5943600" y="4604918"/>
-            <a:ext cx="822960" cy="193853"/>
+              <a:rPr lang="en-US" sz="950" b="1" dirty="0">
+                <a:solidFill>
+                  <a:srgbClr val="2C8394"/>
+                </a:solidFill>
+                <a:latin typeface="Poppins" pitchFamily="34" charset="0"/>
+                <a:ea typeface="Poppins" pitchFamily="34" charset="-122"/>
+                <a:cs typeface="Poppins" pitchFamily="34" charset="-120"/>
+              </a:rPr>
+              <a:t>39.45h</a:t>
+            </a:r>
+            <a:endParaRPr lang="en-US" sz="950" dirty="0"/>
+          </a:p>
+        </p:txBody>
+      </p:sp>
+      <p:sp>
+        <p:nvSpPr>
+          <p:cNvPr id="86" name="Text 84"/>
+          <p:cNvSpPr txBox="1"/>
+          <p:nvPr/>
+        </p:nvSpPr>
+        <p:spPr>
+          <a:xfrm>
+            <a:off x="5943600" y="4822952"/>
+            <a:ext cx="822960" cy="215392"/>
           </a:xfrm>
           <a:prstGeom prst="rect">
             <a:avLst/>
@@ -48193,199 +48230,23 @@
               <a:buNone/>
             </a:pPr>
             <a:r>
-              <a:rPr lang="en-US" sz="600" dirty="0">
-                <a:solidFill>
-                  <a:srgbClr val="8FA1AC"/>
-                </a:solidFill>
-                <a:latin typeface="Poppins" pitchFamily="34" charset="0"/>
-                <a:ea typeface="Poppins" pitchFamily="34" charset="-122"/>
-                <a:cs typeface="Poppins" pitchFamily="34" charset="-120"/>
-              </a:rPr>
-              <a:t>no time logged</a:t>
-            </a:r>
-            <a:endParaRPr lang="en-US" sz="600" dirty="0"/>
-          </a:p>
-        </p:txBody>
-      </p:sp>
-      <p:sp>
-        <p:nvSpPr>
-          <p:cNvPr id="86" name="Shape 84"/>
-          <p:cNvSpPr/>
-          <p:nvPr/>
-        </p:nvSpPr>
-        <p:spPr>
-          <a:xfrm>
-            <a:off x="640080" y="4817059"/>
-            <a:ext cx="6126480" cy="10973"/>
-          </a:xfrm>
-          <a:prstGeom prst="rect">
-            <a:avLst/>
-          </a:prstGeom>
-          <a:solidFill>
-            <a:srgbClr val="12293A"/>
-          </a:solidFill>
-          <a:ln/>
-        </p:spPr>
+              <a:rPr lang="en-US" sz="950" b="1" dirty="0">
+                <a:solidFill>
+                  <a:srgbClr val="C88A2E"/>
+                </a:solidFill>
+                <a:latin typeface="Poppins" pitchFamily="34" charset="0"/>
+                <a:ea typeface="Poppins" pitchFamily="34" charset="-122"/>
+                <a:cs typeface="Poppins" pitchFamily="34" charset="-120"/>
+              </a:rPr>
+              <a:t>13.0%</a:t>
+            </a:r>
+            <a:endParaRPr lang="en-US" sz="950" dirty="0"/>
+          </a:p>
+        </p:txBody>
       </p:sp>
       <p:sp>
         <p:nvSpPr>
           <p:cNvPr id="87" name="Text 85"/>
-          <p:cNvSpPr txBox="1"/>
-          <p:nvPr/>
-        </p:nvSpPr>
-        <p:spPr>
-          <a:xfrm>
-            <a:off x="640080" y="4844491"/>
-            <a:ext cx="1783080" cy="193853"/>
-          </a:xfrm>
-          <a:prstGeom prst="rect">
-            <a:avLst/>
-          </a:prstGeom>
-          <a:noFill/>
-          <a:ln/>
-        </p:spPr>
-        <p:txBody>
-          <a:bodyPr wrap="square" lIns="0" tIns="0" rIns="0" bIns="0" rtlCol="0" anchor="ctr"/>
-          <a:lstStyle/>
-          <a:p>
-            <a:pPr indent="0" marL="0">
-              <a:buNone/>
-            </a:pPr>
-            <a:r>
-              <a:rPr lang="en-US" sz="850" b="1" dirty="0">
-                <a:solidFill>
-                  <a:srgbClr val="12293A"/>
-                </a:solidFill>
-                <a:latin typeface="Poppins" pitchFamily="34" charset="0"/>
-                <a:ea typeface="Poppins" pitchFamily="34" charset="-122"/>
-                <a:cs typeface="Poppins" pitchFamily="34" charset="-120"/>
-              </a:rPr>
-              <a:t>TOTAL</a:t>
-            </a:r>
-            <a:endParaRPr lang="en-US" sz="850" dirty="0"/>
-          </a:p>
-        </p:txBody>
-      </p:sp>
-      <p:sp>
-        <p:nvSpPr>
-          <p:cNvPr id="88" name="Text 86"/>
-          <p:cNvSpPr txBox="1"/>
-          <p:nvPr/>
-        </p:nvSpPr>
-        <p:spPr>
-          <a:xfrm>
-            <a:off x="2468880" y="4844491"/>
-            <a:ext cx="2377440" cy="193853"/>
-          </a:xfrm>
-          <a:prstGeom prst="rect">
-            <a:avLst/>
-          </a:prstGeom>
-          <a:noFill/>
-          <a:ln/>
-        </p:spPr>
-        <p:txBody>
-          <a:bodyPr wrap="square" lIns="0" tIns="0" rIns="0" bIns="0" rtlCol="0" anchor="ctr"/>
-          <a:lstStyle/>
-          <a:p>
-            <a:pPr indent="0" marL="0">
-              <a:buNone/>
-            </a:pPr>
-            <a:r>
-              <a:rPr lang="en-US" sz="700" dirty="0">
-                <a:solidFill>
-                  <a:srgbClr val="5E7280"/>
-                </a:solidFill>
-                <a:latin typeface="Poppins" pitchFamily="34" charset="0"/>
-                <a:ea typeface="Poppins" pitchFamily="34" charset="-122"/>
-                <a:cs typeface="Poppins" pitchFamily="34" charset="-120"/>
-              </a:rPr>
-              <a:t>9 PS people × 38h = 342h available</a:t>
-            </a:r>
-            <a:endParaRPr lang="en-US" sz="700" dirty="0"/>
-          </a:p>
-        </p:txBody>
-      </p:sp>
-      <p:sp>
-        <p:nvSpPr>
-          <p:cNvPr id="89" name="Text 87"/>
-          <p:cNvSpPr txBox="1"/>
-          <p:nvPr/>
-        </p:nvSpPr>
-        <p:spPr>
-          <a:xfrm>
-            <a:off x="5029200" y="4844491"/>
-            <a:ext cx="822960" cy="193853"/>
-          </a:xfrm>
-          <a:prstGeom prst="rect">
-            <a:avLst/>
-          </a:prstGeom>
-          <a:noFill/>
-          <a:ln/>
-        </p:spPr>
-        <p:txBody>
-          <a:bodyPr wrap="square" lIns="0" tIns="0" rIns="0" bIns="0" rtlCol="0" anchor="ctr"/>
-          <a:lstStyle/>
-          <a:p>
-            <a:pPr algn="r" indent="0" marL="0">
-              <a:buNone/>
-            </a:pPr>
-            <a:r>
-              <a:rPr lang="en-US" sz="950" b="1" dirty="0">
-                <a:solidFill>
-                  <a:srgbClr val="2C8394"/>
-                </a:solidFill>
-                <a:latin typeface="Poppins" pitchFamily="34" charset="0"/>
-                <a:ea typeface="Poppins" pitchFamily="34" charset="-122"/>
-                <a:cs typeface="Poppins" pitchFamily="34" charset="-120"/>
-              </a:rPr>
-              <a:t>39.45h</a:t>
-            </a:r>
-            <a:endParaRPr lang="en-US" sz="950" dirty="0"/>
-          </a:p>
-        </p:txBody>
-      </p:sp>
-      <p:sp>
-        <p:nvSpPr>
-          <p:cNvPr id="90" name="Text 88"/>
-          <p:cNvSpPr txBox="1"/>
-          <p:nvPr/>
-        </p:nvSpPr>
-        <p:spPr>
-          <a:xfrm>
-            <a:off x="5943600" y="4844491"/>
-            <a:ext cx="822960" cy="193853"/>
-          </a:xfrm>
-          <a:prstGeom prst="rect">
-            <a:avLst/>
-          </a:prstGeom>
-          <a:noFill/>
-          <a:ln/>
-        </p:spPr>
-        <p:txBody>
-          <a:bodyPr wrap="square" lIns="0" tIns="0" rIns="0" bIns="0" rtlCol="0" anchor="ctr"/>
-          <a:lstStyle/>
-          <a:p>
-            <a:pPr algn="r" indent="0" marL="0">
-              <a:buNone/>
-            </a:pPr>
-            <a:r>
-              <a:rPr lang="en-US" sz="950" b="1" dirty="0">
-                <a:solidFill>
-                  <a:srgbClr val="C88A2E"/>
-                </a:solidFill>
-                <a:latin typeface="Poppins" pitchFamily="34" charset="0"/>
-                <a:ea typeface="Poppins" pitchFamily="34" charset="-122"/>
-                <a:cs typeface="Poppins" pitchFamily="34" charset="-120"/>
-              </a:rPr>
-              <a:t>11.5%</a:t>
-            </a:r>
-            <a:endParaRPr lang="en-US" sz="950" dirty="0"/>
-          </a:p>
-        </p:txBody>
-      </p:sp>
-      <p:sp>
-        <p:nvSpPr>
-          <p:cNvPr id="91" name="Text 89"/>
           <p:cNvSpPr txBox="1"/>
           <p:nvPr/>
         </p:nvSpPr>
@@ -48416,7 +48277,7 @@
                 <a:ea typeface="Poppins" pitchFamily="34" charset="-122"/>
                 <a:cs typeface="Poppins" pitchFamily="34" charset="-120"/>
               </a:rPr>
-              <a:t>Available staff = the 9 Professional Services people holding PS-pipeline tickets this week, at 38h each. No leave reported. Lopez, Hikuroa, Magabo, Ho, Fenwick and Hettiarachchy hold PS tickets but are not PS staff — they and their hours are excluded; none carried hours this week.</a:t>
+              <a:t>Available staff = the 8 Professional Services people holding PS-pipeline tickets this week and not on leave, at 38h each. Isayah Kuhlmann was on leave and is out of the base. Lopez, Hikuroa, Magabo, Ho, Fenwick and Hettiarachchy hold PS tickets but are not PS staff — they and their hours are excluded; none carried hours this week.</a:t>
             </a:r>
             <a:endParaRPr lang="en-US" sz="580" dirty="0"/>
           </a:p>
@@ -48424,7 +48285,7 @@
       </p:sp>
       <p:sp>
         <p:nvSpPr>
-          <p:cNvPr id="92" name="Shape 90"/>
+          <p:cNvPr id="88" name="Shape 86"/>
           <p:cNvSpPr/>
           <p:nvPr/>
         </p:nvSpPr>
@@ -48453,7 +48314,7 @@
       </p:sp>
       <p:sp>
         <p:nvSpPr>
-          <p:cNvPr id="93" name="Text 91"/>
+          <p:cNvPr id="89" name="Text 87"/>
           <p:cNvSpPr txBox="1"/>
           <p:nvPr/>
         </p:nvSpPr>
@@ -48506,7 +48367,7 @@
       </p:sp>
       <p:sp>
         <p:nvSpPr>
-          <p:cNvPr id="94" name="Text 92"/>
+          <p:cNvPr id="90" name="Text 88"/>
           <p:cNvSpPr txBox="1"/>
           <p:nvPr/>
         </p:nvSpPr>
@@ -48545,7 +48406,7 @@
       </p:sp>
       <p:sp>
         <p:nvSpPr>
-          <p:cNvPr id="95" name="Text 93"/>
+          <p:cNvPr id="91" name="Text 89"/>
           <p:cNvSpPr txBox="1"/>
           <p:nvPr/>
         </p:nvSpPr>
@@ -48584,7 +48445,7 @@
       </p:sp>
       <p:sp>
         <p:nvSpPr>
-          <p:cNvPr id="96" name="Text 94"/>
+          <p:cNvPr id="92" name="Text 90"/>
           <p:cNvSpPr txBox="1"/>
           <p:nvPr/>
         </p:nvSpPr>
@@ -48623,7 +48484,7 @@
       </p:sp>
       <p:sp>
         <p:nvSpPr>
-          <p:cNvPr id="97" name="Text 95"/>
+          <p:cNvPr id="93" name="Text 91"/>
           <p:cNvSpPr txBox="1"/>
           <p:nvPr/>
         </p:nvSpPr>
@@ -48662,7 +48523,7 @@
       </p:sp>
       <p:sp>
         <p:nvSpPr>
-          <p:cNvPr id="98" name="Shape 96"/>
+          <p:cNvPr id="94" name="Shape 92"/>
           <p:cNvSpPr/>
           <p:nvPr/>
         </p:nvSpPr>
@@ -48684,7 +48545,7 @@
       </p:sp>
       <p:sp>
         <p:nvSpPr>
-          <p:cNvPr id="99" name="Shape 97"/>
+          <p:cNvPr id="95" name="Shape 93"/>
           <p:cNvSpPr/>
           <p:nvPr/>
         </p:nvSpPr>
@@ -48706,7 +48567,7 @@
       </p:sp>
       <p:sp>
         <p:nvSpPr>
-          <p:cNvPr id="100" name="Text 98"/>
+          <p:cNvPr id="96" name="Text 94"/>
           <p:cNvSpPr txBox="1"/>
           <p:nvPr/>
         </p:nvSpPr>
@@ -48745,7 +48606,7 @@
       </p:sp>
       <p:sp>
         <p:nvSpPr>
-          <p:cNvPr id="101" name="Text 99"/>
+          <p:cNvPr id="97" name="Text 95"/>
           <p:cNvSpPr txBox="1"/>
           <p:nvPr/>
         </p:nvSpPr>
@@ -48784,7 +48645,7 @@
       </p:sp>
       <p:sp>
         <p:nvSpPr>
-          <p:cNvPr id="102" name="Text 100"/>
+          <p:cNvPr id="98" name="Text 96"/>
           <p:cNvSpPr txBox="1"/>
           <p:nvPr/>
         </p:nvSpPr>
@@ -48823,7 +48684,7 @@
       </p:sp>
       <p:sp>
         <p:nvSpPr>
-          <p:cNvPr id="103" name="Shape 101"/>
+          <p:cNvPr id="99" name="Shape 97"/>
           <p:cNvSpPr/>
           <p:nvPr/>
         </p:nvSpPr>
@@ -48845,7 +48706,7 @@
       </p:sp>
       <p:sp>
         <p:nvSpPr>
-          <p:cNvPr id="104" name="Shape 102"/>
+          <p:cNvPr id="100" name="Shape 98"/>
           <p:cNvSpPr/>
           <p:nvPr/>
         </p:nvSpPr>
@@ -48867,7 +48728,7 @@
       </p:sp>
       <p:sp>
         <p:nvSpPr>
-          <p:cNvPr id="105" name="Text 103"/>
+          <p:cNvPr id="101" name="Text 99"/>
           <p:cNvSpPr txBox="1"/>
           <p:nvPr/>
         </p:nvSpPr>
@@ -48906,7 +48767,7 @@
       </p:sp>
       <p:sp>
         <p:nvSpPr>
-          <p:cNvPr id="106" name="Text 104"/>
+          <p:cNvPr id="102" name="Text 100"/>
           <p:cNvSpPr txBox="1"/>
           <p:nvPr/>
         </p:nvSpPr>
@@ -48945,7 +48806,7 @@
       </p:sp>
       <p:sp>
         <p:nvSpPr>
-          <p:cNvPr id="107" name="Text 105"/>
+          <p:cNvPr id="103" name="Text 101"/>
           <p:cNvSpPr txBox="1"/>
           <p:nvPr/>
         </p:nvSpPr>
@@ -48984,7 +48845,7 @@
       </p:sp>
       <p:sp>
         <p:nvSpPr>
-          <p:cNvPr id="108" name="Shape 106"/>
+          <p:cNvPr id="104" name="Shape 102"/>
           <p:cNvSpPr/>
           <p:nvPr/>
         </p:nvSpPr>
@@ -49006,7 +48867,7 @@
       </p:sp>
       <p:sp>
         <p:nvSpPr>
-          <p:cNvPr id="109" name="Shape 107"/>
+          <p:cNvPr id="105" name="Shape 103"/>
           <p:cNvSpPr/>
           <p:nvPr/>
         </p:nvSpPr>
@@ -49028,7 +48889,7 @@
       </p:sp>
       <p:sp>
         <p:nvSpPr>
-          <p:cNvPr id="110" name="Text 108"/>
+          <p:cNvPr id="106" name="Text 104"/>
           <p:cNvSpPr txBox="1"/>
           <p:nvPr/>
         </p:nvSpPr>
@@ -49067,7 +48928,7 @@
       </p:sp>
       <p:sp>
         <p:nvSpPr>
-          <p:cNvPr id="111" name="Text 109"/>
+          <p:cNvPr id="107" name="Text 105"/>
           <p:cNvSpPr txBox="1"/>
           <p:nvPr/>
         </p:nvSpPr>
@@ -49106,7 +48967,7 @@
       </p:sp>
       <p:sp>
         <p:nvSpPr>
-          <p:cNvPr id="112" name="Text 110"/>
+          <p:cNvPr id="108" name="Text 106"/>
           <p:cNvSpPr txBox="1"/>
           <p:nvPr/>
         </p:nvSpPr>
@@ -49145,7 +49006,7 @@
       </p:sp>
       <p:sp>
         <p:nvSpPr>
-          <p:cNvPr id="113" name="Shape 111"/>
+          <p:cNvPr id="109" name="Shape 107"/>
           <p:cNvSpPr/>
           <p:nvPr/>
         </p:nvSpPr>
@@ -49167,7 +49028,7 @@
       </p:sp>
       <p:sp>
         <p:nvSpPr>
-          <p:cNvPr id="114" name="Shape 112"/>
+          <p:cNvPr id="110" name="Shape 108"/>
           <p:cNvSpPr/>
           <p:nvPr/>
         </p:nvSpPr>
@@ -49189,7 +49050,7 @@
       </p:sp>
       <p:sp>
         <p:nvSpPr>
-          <p:cNvPr id="115" name="Text 113"/>
+          <p:cNvPr id="111" name="Text 109"/>
           <p:cNvSpPr txBox="1"/>
           <p:nvPr/>
         </p:nvSpPr>
@@ -49228,7 +49089,7 @@
       </p:sp>
       <p:sp>
         <p:nvSpPr>
-          <p:cNvPr id="116" name="Text 114"/>
+          <p:cNvPr id="112" name="Text 110"/>
           <p:cNvSpPr txBox="1"/>
           <p:nvPr/>
         </p:nvSpPr>
@@ -49267,7 +49128,7 @@
       </p:sp>
       <p:sp>
         <p:nvSpPr>
-          <p:cNvPr id="117" name="Text 115"/>
+          <p:cNvPr id="113" name="Text 111"/>
           <p:cNvSpPr txBox="1"/>
           <p:nvPr/>
         </p:nvSpPr>
@@ -49306,7 +49167,7 @@
       </p:sp>
       <p:sp>
         <p:nvSpPr>
-          <p:cNvPr id="118" name="Shape 116"/>
+          <p:cNvPr id="114" name="Shape 112"/>
           <p:cNvSpPr/>
           <p:nvPr/>
         </p:nvSpPr>
@@ -49328,7 +49189,7 @@
       </p:sp>
       <p:sp>
         <p:nvSpPr>
-          <p:cNvPr id="119" name="Text 117"/>
+          <p:cNvPr id="115" name="Text 113"/>
           <p:cNvSpPr txBox="1"/>
           <p:nvPr/>
         </p:nvSpPr>
@@ -49367,7 +49228,7 @@
       </p:sp>
       <p:sp>
         <p:nvSpPr>
-          <p:cNvPr id="120" name="Text 118"/>
+          <p:cNvPr id="116" name="Text 114"/>
           <p:cNvSpPr txBox="1"/>
           <p:nvPr/>
         </p:nvSpPr>
@@ -49406,7 +49267,7 @@
       </p:sp>
       <p:sp>
         <p:nvSpPr>
-          <p:cNvPr id="121" name="Shape 119"/>
+          <p:cNvPr id="117" name="Shape 115"/>
           <p:cNvSpPr/>
           <p:nvPr/>
         </p:nvSpPr>
@@ -49426,7 +49287,7 @@
       </p:sp>
       <p:sp>
         <p:nvSpPr>
-          <p:cNvPr id="122" name="Text 120"/>
+          <p:cNvPr id="118" name="Text 116"/>
           <p:cNvSpPr txBox="1"/>
           <p:nvPr/>
         </p:nvSpPr>
@@ -49465,7 +49326,7 @@
       </p:sp>
       <p:sp>
         <p:nvSpPr>
-          <p:cNvPr id="123" name="Text 121"/>
+          <p:cNvPr id="119" name="Text 117"/>
           <p:cNvSpPr txBox="1"/>
           <p:nvPr/>
         </p:nvSpPr>
@@ -49504,7 +49365,7 @@
       </p:sp>
       <p:sp>
         <p:nvSpPr>
-          <p:cNvPr id="124" name="Text 122"/>
+          <p:cNvPr id="120" name="Text 118"/>
           <p:cNvSpPr txBox="1"/>
           <p:nvPr/>
         </p:nvSpPr>
@@ -49543,7 +49404,7 @@
       </p:sp>
       <p:sp>
         <p:nvSpPr>
-          <p:cNvPr id="125" name="Text 123"/>
+          <p:cNvPr id="121" name="Text 119"/>
           <p:cNvSpPr txBox="1"/>
           <p:nvPr/>
         </p:nvSpPr>
@@ -49582,7 +49443,7 @@
       </p:sp>
       <p:sp>
         <p:nvSpPr>
-          <p:cNvPr id="126" name="Shape 124"/>
+          <p:cNvPr id="122" name="Shape 120"/>
           <p:cNvSpPr/>
           <p:nvPr/>
         </p:nvSpPr>
@@ -49611,7 +49472,7 @@
       </p:sp>
       <p:sp>
         <p:nvSpPr>
-          <p:cNvPr id="127" name="Text 125"/>
+          <p:cNvPr id="123" name="Text 121"/>
           <p:cNvSpPr txBox="1"/>
           <p:nvPr/>
         </p:nvSpPr>
@@ -49664,7 +49525,7 @@
       </p:sp>
       <p:sp>
         <p:nvSpPr>
-          <p:cNvPr id="128" name="Text 126"/>
+          <p:cNvPr id="124" name="Text 122"/>
           <p:cNvSpPr txBox="1"/>
           <p:nvPr/>
         </p:nvSpPr>
@@ -49703,7 +49564,7 @@
       </p:sp>
       <p:sp>
         <p:nvSpPr>
-          <p:cNvPr id="129" name="Text 127"/>
+          <p:cNvPr id="125" name="Text 123"/>
           <p:cNvSpPr txBox="1"/>
           <p:nvPr/>
         </p:nvSpPr>
@@ -49742,7 +49603,7 @@
       </p:sp>
       <p:sp>
         <p:nvSpPr>
-          <p:cNvPr id="130" name="Text 128"/>
+          <p:cNvPr id="126" name="Text 124"/>
           <p:cNvSpPr txBox="1"/>
           <p:nvPr/>
         </p:nvSpPr>
@@ -49781,7 +49642,7 @@
       </p:sp>
       <p:sp>
         <p:nvSpPr>
-          <p:cNvPr id="131" name="Text 129"/>
+          <p:cNvPr id="127" name="Text 125"/>
           <p:cNvSpPr txBox="1"/>
           <p:nvPr/>
         </p:nvSpPr>
@@ -49820,7 +49681,7 @@
       </p:sp>
       <p:sp>
         <p:nvSpPr>
-          <p:cNvPr id="132" name="Text 130"/>
+          <p:cNvPr id="128" name="Text 126"/>
           <p:cNvSpPr txBox="1"/>
           <p:nvPr/>
         </p:nvSpPr>
@@ -49859,7 +49720,7 @@
       </p:sp>
       <p:sp>
         <p:nvSpPr>
-          <p:cNvPr id="133" name="Shape 131"/>
+          <p:cNvPr id="129" name="Shape 127"/>
           <p:cNvSpPr/>
           <p:nvPr/>
         </p:nvSpPr>
@@ -49879,7 +49740,7 @@
       </p:sp>
       <p:sp>
         <p:nvSpPr>
-          <p:cNvPr id="134" name="Text 132"/>
+          <p:cNvPr id="130" name="Text 128"/>
           <p:cNvSpPr txBox="1"/>
           <p:nvPr/>
         </p:nvSpPr>
@@ -49918,7 +49779,7 @@
       </p:sp>
       <p:sp>
         <p:nvSpPr>
-          <p:cNvPr id="135" name="Text 133"/>
+          <p:cNvPr id="131" name="Text 129"/>
           <p:cNvSpPr txBox="1"/>
           <p:nvPr/>
         </p:nvSpPr>
@@ -49957,7 +49818,7 @@
       </p:sp>
       <p:sp>
         <p:nvSpPr>
-          <p:cNvPr id="136" name="Text 134"/>
+          <p:cNvPr id="132" name="Text 130"/>
           <p:cNvSpPr txBox="1"/>
           <p:nvPr/>
         </p:nvSpPr>
@@ -49996,7 +49857,7 @@
       </p:sp>
       <p:sp>
         <p:nvSpPr>
-          <p:cNvPr id="137" name="Text 135"/>
+          <p:cNvPr id="133" name="Text 131"/>
           <p:cNvSpPr txBox="1"/>
           <p:nvPr/>
         </p:nvSpPr>
@@ -50035,7 +49896,7 @@
       </p:sp>
       <p:sp>
         <p:nvSpPr>
-          <p:cNvPr id="138" name="Text 136"/>
+          <p:cNvPr id="134" name="Text 132"/>
           <p:cNvSpPr txBox="1"/>
           <p:nvPr/>
         </p:nvSpPr>
@@ -50074,7 +49935,7 @@
       </p:sp>
       <p:sp>
         <p:nvSpPr>
-          <p:cNvPr id="139" name="Shape 137"/>
+          <p:cNvPr id="135" name="Shape 133"/>
           <p:cNvSpPr/>
           <p:nvPr/>
         </p:nvSpPr>
@@ -50094,7 +49955,7 @@
       </p:sp>
       <p:sp>
         <p:nvSpPr>
-          <p:cNvPr id="140" name="Text 138"/>
+          <p:cNvPr id="136" name="Text 134"/>
           <p:cNvSpPr txBox="1"/>
           <p:nvPr/>
         </p:nvSpPr>
@@ -50133,7 +49994,7 @@
       </p:sp>
       <p:sp>
         <p:nvSpPr>
-          <p:cNvPr id="141" name="Text 139"/>
+          <p:cNvPr id="137" name="Text 135"/>
           <p:cNvSpPr txBox="1"/>
           <p:nvPr/>
         </p:nvSpPr>
@@ -50172,7 +50033,7 @@
       </p:sp>
       <p:sp>
         <p:nvSpPr>
-          <p:cNvPr id="142" name="Text 140"/>
+          <p:cNvPr id="138" name="Text 136"/>
           <p:cNvSpPr txBox="1"/>
           <p:nvPr/>
         </p:nvSpPr>
@@ -50211,7 +50072,7 @@
       </p:sp>
       <p:sp>
         <p:nvSpPr>
-          <p:cNvPr id="143" name="Text 141"/>
+          <p:cNvPr id="139" name="Text 137"/>
           <p:cNvSpPr txBox="1"/>
           <p:nvPr/>
         </p:nvSpPr>
@@ -50250,7 +50111,7 @@
       </p:sp>
       <p:sp>
         <p:nvSpPr>
-          <p:cNvPr id="144" name="Text 142"/>
+          <p:cNvPr id="140" name="Text 138"/>
           <p:cNvSpPr txBox="1"/>
           <p:nvPr/>
         </p:nvSpPr>
@@ -50289,7 +50150,7 @@
       </p:sp>
       <p:sp>
         <p:nvSpPr>
-          <p:cNvPr id="145" name="Shape 143"/>
+          <p:cNvPr id="141" name="Shape 139"/>
           <p:cNvSpPr/>
           <p:nvPr/>
         </p:nvSpPr>
@@ -50309,7 +50170,7 @@
       </p:sp>
       <p:sp>
         <p:nvSpPr>
-          <p:cNvPr id="146" name="Text 144"/>
+          <p:cNvPr id="142" name="Text 140"/>
           <p:cNvSpPr txBox="1"/>
           <p:nvPr/>
         </p:nvSpPr>
@@ -50348,7 +50209,7 @@
       </p:sp>
       <p:sp>
         <p:nvSpPr>
-          <p:cNvPr id="147" name="Text 145"/>
+          <p:cNvPr id="143" name="Text 141"/>
           <p:cNvSpPr txBox="1"/>
           <p:nvPr/>
         </p:nvSpPr>
@@ -50387,7 +50248,7 @@
       </p:sp>
       <p:sp>
         <p:nvSpPr>
-          <p:cNvPr id="148" name="Text 146"/>
+          <p:cNvPr id="144" name="Text 142"/>
           <p:cNvSpPr txBox="1"/>
           <p:nvPr/>
         </p:nvSpPr>
@@ -50426,7 +50287,7 @@
       </p:sp>
       <p:sp>
         <p:nvSpPr>
-          <p:cNvPr id="149" name="Text 147"/>
+          <p:cNvPr id="145" name="Text 143"/>
           <p:cNvSpPr txBox="1"/>
           <p:nvPr/>
         </p:nvSpPr>
@@ -50465,7 +50326,7 @@
       </p:sp>
       <p:sp>
         <p:nvSpPr>
-          <p:cNvPr id="150" name="Text 148"/>
+          <p:cNvPr id="146" name="Text 144"/>
           <p:cNvSpPr txBox="1"/>
           <p:nvPr/>
         </p:nvSpPr>
@@ -50504,7 +50365,7 @@
       </p:sp>
       <p:sp>
         <p:nvSpPr>
-          <p:cNvPr id="151" name="Shape 149"/>
+          <p:cNvPr id="147" name="Shape 145"/>
           <p:cNvSpPr/>
           <p:nvPr/>
         </p:nvSpPr>
@@ -50524,7 +50385,7 @@
       </p:sp>
       <p:sp>
         <p:nvSpPr>
-          <p:cNvPr id="152" name="Text 150"/>
+          <p:cNvPr id="148" name="Text 146"/>
           <p:cNvSpPr txBox="1"/>
           <p:nvPr/>
         </p:nvSpPr>
@@ -50563,7 +50424,7 @@
       </p:sp>
       <p:sp>
         <p:nvSpPr>
-          <p:cNvPr id="153" name="Text 151"/>
+          <p:cNvPr id="149" name="Text 147"/>
           <p:cNvSpPr txBox="1"/>
           <p:nvPr/>
         </p:nvSpPr>
@@ -50602,7 +50463,7 @@
       </p:sp>
       <p:sp>
         <p:nvSpPr>
-          <p:cNvPr id="154" name="Text 152"/>
+          <p:cNvPr id="150" name="Text 148"/>
           <p:cNvSpPr txBox="1"/>
           <p:nvPr/>
         </p:nvSpPr>
@@ -50641,7 +50502,7 @@
       </p:sp>
       <p:sp>
         <p:nvSpPr>
-          <p:cNvPr id="155" name="Text 153"/>
+          <p:cNvPr id="151" name="Text 149"/>
           <p:cNvSpPr txBox="1"/>
           <p:nvPr/>
         </p:nvSpPr>
@@ -50672,7 +50533,7 @@
                 <a:ea typeface="Poppins" pitchFamily="34" charset="-122"/>
                 <a:cs typeface="Poppins" pitchFamily="34" charset="-120"/>
               </a:rPr>
-              <a:t>11.5%</a:t>
+              <a:t>13.0%</a:t>
             </a:r>
             <a:endParaRPr lang="en-US" sz="750" dirty="0"/>
           </a:p>
@@ -50680,7 +50541,7 @@
       </p:sp>
       <p:sp>
         <p:nvSpPr>
-          <p:cNvPr id="156" name="Text 154"/>
+          <p:cNvPr id="152" name="Text 150"/>
           <p:cNvSpPr txBox="1"/>
           <p:nvPr/>
         </p:nvSpPr>
@@ -50719,7 +50580,7 @@
       </p:sp>
       <p:sp>
         <p:nvSpPr>
-          <p:cNvPr id="157" name="Text 155"/>
+          <p:cNvPr id="153" name="Text 151"/>
           <p:cNvSpPr txBox="1"/>
           <p:nvPr/>
         </p:nvSpPr>
@@ -50750,7 +50611,7 @@
                 <a:ea typeface="Poppins" pitchFamily="34" charset="-122"/>
                 <a:cs typeface="Poppins" pitchFamily="34" charset="-120"/>
               </a:rPr>
-              <a:t>Base is available staff × 38h: 9 every week except 28 Sep–4 Oct (7, Rhys and Rodney on leave). PS-pipeline tickets by Sydney week.</a:t>
+              <a:t>Base is available staff × 38h: 9 for the September weeks, 7 for 28 Sep–4 Oct (Rhys and Rodney on leave) and 8 for 12–18 Oct (Isayah on leave). PS-pipeline tickets by Sydney week.</a:t>
             </a:r>
             <a:endParaRPr lang="en-US" sz="580" dirty="0"/>
           </a:p>
@@ -50758,7 +50619,7 @@
       </p:sp>
       <p:sp>
         <p:nvSpPr>
-          <p:cNvPr id="158" name="Shape 156"/>
+          <p:cNvPr id="154" name="Shape 152"/>
           <p:cNvSpPr/>
           <p:nvPr/>
         </p:nvSpPr>
@@ -50787,7 +50648,7 @@
       </p:sp>
       <p:sp>
         <p:nvSpPr>
-          <p:cNvPr id="159" name="Text 157"/>
+          <p:cNvPr id="155" name="Text 153"/>
           <p:cNvSpPr txBox="1"/>
           <p:nvPr/>
         </p:nvSpPr>
@@ -50826,7 +50687,7 @@
       </p:sp>
       <p:sp>
         <p:nvSpPr>
-          <p:cNvPr id="160" name="Text 158"/>
+          <p:cNvPr id="156" name="Text 154"/>
           <p:cNvSpPr txBox="1"/>
           <p:nvPr/>
         </p:nvSpPr>
@@ -50888,7 +50749,7 @@
                 <a:ea typeface="Poppins" pitchFamily="34" charset="-122"/>
                 <a:cs typeface="Poppins" pitchFamily="34" charset="-120"/>
               </a:rPr>
-              <a:t>5–11 Oct went out at 21.25h (6.2%) and now reads 30.25h (8.8%); 21–27 Sep has grown again to 44.50h from the 20.75h first published. Only 28 Sep–4 Oct sits below its first number, and that is the attribution fix from last week. Treat 11.5% as a floor.</a:t>
+              <a:t>5–11 Oct went out at 21.25h (6.2%) and now reads 30.25h (8.8%); 21–27 Sep has grown again to 44.50h from the 20.75h first published. Only 28 Sep–4 Oct sits below its first number, and that is the attribution fix from last week. Treat 13.0% as a floor.</a:t>
             </a:r>
             <a:endParaRPr lang="en-US" sz="900" dirty="0"/>
           </a:p>
@@ -50936,7 +50797,7 @@
                 <a:ea typeface="Poppins" pitchFamily="34" charset="-122"/>
                 <a:cs typeface="Poppins" pitchFamily="34" charset="-120"/>
               </a:rPr>
-              <a:t>Rhys Woolcock 19.50h — half the week — against Joshua Casey 6.50h and Rodney Nolan 5.75h; Isayah Kuhlmann and Karim AlRifaii logged nothing. Strip Rhys out and utilisation is 5.8%.</a:t>
+              <a:t>Rhys Woolcock 19.50h — half the week — against Joshua Casey 6.50h and Rodney Nolan 5.75h; Karim AlRifaii logged nothing. Strip Rhys out and utilisation is 6.6%.</a:t>
             </a:r>
             <a:endParaRPr lang="en-US" sz="900" dirty="0"/>
           </a:p>
@@ -50944,7 +50805,7 @@
       </p:sp>
       <p:sp>
         <p:nvSpPr>
-          <p:cNvPr id="161" name="Shape 159"/>
+          <p:cNvPr id="157" name="Shape 155"/>
           <p:cNvSpPr/>
           <p:nvPr/>
         </p:nvSpPr>
@@ -50966,7 +50827,7 @@
       </p:sp>
       <p:sp>
         <p:nvSpPr>
-          <p:cNvPr id="162" name="Text 160"/>
+          <p:cNvPr id="158" name="Text 156"/>
           <p:cNvSpPr txBox="1"/>
           <p:nvPr/>
         </p:nvSpPr>

--- a/exec-deck/output/H&L Weekly Update - WC 12 Oct 2026.pptx
+++ b/exec-deck/output/H&L Weekly Update - WC 12 Oct 2026.pptx
@@ -20903,7 +20903,7 @@
                 <a:ea typeface="Poppins" pitchFamily="34" charset="-122"/>
                 <a:cs typeface="Poppins" pitchFamily="34" charset="-120"/>
               </a:rPr>
-              <a:t>39 of 47</a:t>
+              <a:t>40 of 51</a:t>
             </a:r>
             <a:endParaRPr lang="en-US" sz="2600" dirty="0"/>
           </a:p>
@@ -20942,7 +20942,7 @@
                 <a:ea typeface="Poppins" pitchFamily="34" charset="-122"/>
                 <a:cs typeface="Poppins" pitchFamily="34" charset="-120"/>
               </a:rPr>
-              <a:t>weekly active · 12 daily · 42 monthly</a:t>
+              <a:t>weekly active · 14 daily · 45 monthly</a:t>
             </a:r>
             <a:endParaRPr lang="en-US" sz="780" dirty="0"/>
           </a:p>
@@ -21049,7 +21049,7 @@
                 <a:ea typeface="Poppins" pitchFamily="34" charset="-122"/>
                 <a:cs typeface="Poppins" pitchFamily="34" charset="-120"/>
               </a:rPr>
-              <a:t>111,689</a:t>
+              <a:t>329,436</a:t>
             </a:r>
             <a:endParaRPr lang="en-US" sz="2400" dirty="0"/>
           </a:p>
@@ -21088,7 +21088,7 @@
                 <a:ea typeface="Poppins" pitchFamily="34" charset="-122"/>
                 <a:cs typeface="Poppins" pitchFamily="34" charset="-120"/>
               </a:rPr>
-              <a:t>1–12 Oct · October month-to-date at the 12 Oct capture — no capture received this week, so this figure is a week stale</a:t>
+              <a:t>1–18 Oct · October month-to-date at the 19 Oct capture, up from 111,689 a week ago; the admin capture gives month totals only, so there is no weekly split</a:t>
             </a:r>
             <a:endParaRPr lang="en-US" sz="780" dirty="0"/>
           </a:p>
@@ -21232,7 +21232,7 @@
         <p:spPr>
           <a:xfrm>
             <a:off x="7498080" y="1335024"/>
-            <a:ext cx="855878" cy="91440"/>
+            <a:ext cx="921715" cy="91440"/>
           </a:xfrm>
           <a:prstGeom prst="roundRect">
             <a:avLst>
@@ -21278,7 +21278,7 @@
                 <a:ea typeface="Poppins" pitchFamily="34" charset="-122"/>
                 <a:cs typeface="Poppins" pitchFamily="34" charset="-120"/>
               </a:rPr>
-              <a:t>26%</a:t>
+              <a:t>28%</a:t>
             </a:r>
             <a:endParaRPr lang="en-US" sz="800" dirty="0"/>
           </a:p>
@@ -21354,7 +21354,7 @@
         <p:spPr>
           <a:xfrm>
             <a:off x="7498080" y="1517904"/>
-            <a:ext cx="790042" cy="91440"/>
+            <a:ext cx="757123" cy="91440"/>
           </a:xfrm>
           <a:prstGeom prst="roundRect">
             <a:avLst>
@@ -21400,7 +21400,7 @@
                 <a:ea typeface="Poppins" pitchFamily="34" charset="-122"/>
                 <a:cs typeface="Poppins" pitchFamily="34" charset="-120"/>
               </a:rPr>
-              <a:t>24%</a:t>
+              <a:t>23%</a:t>
             </a:r>
             <a:endParaRPr lang="en-US" sz="800" dirty="0"/>
           </a:p>
@@ -21476,7 +21476,7 @@
         <p:spPr>
           <a:xfrm>
             <a:off x="7498080" y="1700784"/>
-            <a:ext cx="230429" cy="91440"/>
+            <a:ext cx="559613" cy="91440"/>
           </a:xfrm>
           <a:prstGeom prst="roundRect">
             <a:avLst>
@@ -21522,7 +21522,7 @@
                 <a:ea typeface="Poppins" pitchFamily="34" charset="-122"/>
                 <a:cs typeface="Poppins" pitchFamily="34" charset="-120"/>
               </a:rPr>
-              <a:t>7%</a:t>
+              <a:t>17%</a:t>
             </a:r>
             <a:endParaRPr lang="en-US" sz="800" dirty="0"/>
           </a:p>
@@ -21922,7 +21922,7 @@
         <p:spPr>
           <a:xfrm>
             <a:off x="594360" y="2816352"/>
-            <a:ext cx="1417320" cy="164592"/>
+            <a:ext cx="1417320" cy="150460"/>
           </a:xfrm>
           <a:prstGeom prst="rect">
             <a:avLst/>
@@ -21961,7 +21961,7 @@
         <p:spPr>
           <a:xfrm>
             <a:off x="2084832" y="2823667"/>
-            <a:ext cx="996696" cy="150876"/>
+            <a:ext cx="996696" cy="136744"/>
           </a:xfrm>
           <a:prstGeom prst="rect">
             <a:avLst/>
@@ -21981,7 +21981,7 @@
         <p:spPr>
           <a:xfrm>
             <a:off x="2057400" y="2816352"/>
-            <a:ext cx="1051560" cy="164592"/>
+            <a:ext cx="1051560" cy="150460"/>
           </a:xfrm>
           <a:prstGeom prst="rect">
             <a:avLst/>
@@ -22020,7 +22020,7 @@
         <p:spPr>
           <a:xfrm>
             <a:off x="3163824" y="2823667"/>
-            <a:ext cx="996696" cy="150876"/>
+            <a:ext cx="996696" cy="136744"/>
           </a:xfrm>
           <a:prstGeom prst="rect">
             <a:avLst/>
@@ -22040,7 +22040,7 @@
         <p:spPr>
           <a:xfrm>
             <a:off x="3136392" y="2816352"/>
-            <a:ext cx="1051560" cy="164592"/>
+            <a:ext cx="1051560" cy="150460"/>
           </a:xfrm>
           <a:prstGeom prst="rect">
             <a:avLst/>
@@ -22079,7 +22079,7 @@
         <p:spPr>
           <a:xfrm>
             <a:off x="4242816" y="2823667"/>
-            <a:ext cx="996696" cy="150876"/>
+            <a:ext cx="996696" cy="136744"/>
           </a:xfrm>
           <a:prstGeom prst="rect">
             <a:avLst/>
@@ -22099,7 +22099,7 @@
         <p:spPr>
           <a:xfrm>
             <a:off x="4215384" y="2816352"/>
-            <a:ext cx="1051560" cy="164592"/>
+            <a:ext cx="1051560" cy="150460"/>
           </a:xfrm>
           <a:prstGeom prst="rect">
             <a:avLst/>
@@ -22138,7 +22138,7 @@
         <p:spPr>
           <a:xfrm>
             <a:off x="5294376" y="2816352"/>
-            <a:ext cx="1051560" cy="164592"/>
+            <a:ext cx="1051560" cy="150460"/>
           </a:xfrm>
           <a:prstGeom prst="rect">
             <a:avLst/>
@@ -22177,7 +22177,7 @@
         <p:spPr>
           <a:xfrm>
             <a:off x="6400800" y="2816352"/>
-            <a:ext cx="1280160" cy="164592"/>
+            <a:ext cx="1280160" cy="150460"/>
           </a:xfrm>
           <a:prstGeom prst="rect">
             <a:avLst/>
@@ -22215,8 +22215,8 @@
         </p:nvSpPr>
         <p:spPr>
           <a:xfrm>
-            <a:off x="594360" y="2990088"/>
-            <a:ext cx="1417320" cy="164592"/>
+            <a:off x="594360" y="2975956"/>
+            <a:ext cx="1417320" cy="150460"/>
           </a:xfrm>
           <a:prstGeom prst="rect">
             <a:avLst/>
@@ -22254,8 +22254,8 @@
         </p:nvSpPr>
         <p:spPr>
           <a:xfrm>
-            <a:off x="2084832" y="2997403"/>
-            <a:ext cx="996696" cy="150876"/>
+            <a:off x="2084832" y="2983272"/>
+            <a:ext cx="996696" cy="136744"/>
           </a:xfrm>
           <a:prstGeom prst="rect">
             <a:avLst/>
@@ -22274,8 +22274,8 @@
         </p:nvSpPr>
         <p:spPr>
           <a:xfrm>
-            <a:off x="2057400" y="2990088"/>
-            <a:ext cx="1051560" cy="164592"/>
+            <a:off x="2057400" y="2975956"/>
+            <a:ext cx="1051560" cy="150460"/>
           </a:xfrm>
           <a:prstGeom prst="rect">
             <a:avLst/>
@@ -22313,8 +22313,8 @@
         </p:nvSpPr>
         <p:spPr>
           <a:xfrm>
-            <a:off x="3163824" y="2997403"/>
-            <a:ext cx="996696" cy="150876"/>
+            <a:off x="3163824" y="2983272"/>
+            <a:ext cx="996696" cy="136744"/>
           </a:xfrm>
           <a:prstGeom prst="rect">
             <a:avLst/>
@@ -22333,8 +22333,8 @@
         </p:nvSpPr>
         <p:spPr>
           <a:xfrm>
-            <a:off x="3136392" y="2990088"/>
-            <a:ext cx="1051560" cy="164592"/>
+            <a:off x="3136392" y="2975956"/>
+            <a:ext cx="1051560" cy="150460"/>
           </a:xfrm>
           <a:prstGeom prst="rect">
             <a:avLst/>
@@ -22372,8 +22372,67 @@
         </p:nvSpPr>
         <p:spPr>
           <a:xfrm>
-            <a:off x="4242816" y="2997403"/>
-            <a:ext cx="996696" cy="150876"/>
+            <a:off x="4242816" y="2983272"/>
+            <a:ext cx="996696" cy="136744"/>
+          </a:xfrm>
+          <a:prstGeom prst="rect">
+            <a:avLst/>
+          </a:prstGeom>
+          <a:solidFill>
+            <a:srgbClr val="B5D9E0"/>
+          </a:solidFill>
+          <a:ln/>
+        </p:spPr>
+      </p:sp>
+      <p:sp>
+        <p:nvSpPr>
+          <p:cNvPr id="61" name="Text 59"/>
+          <p:cNvSpPr txBox="1"/>
+          <p:nvPr/>
+        </p:nvSpPr>
+        <p:spPr>
+          <a:xfrm>
+            <a:off x="4215384" y="2975956"/>
+            <a:ext cx="1051560" cy="150460"/>
+          </a:xfrm>
+          <a:prstGeom prst="rect">
+            <a:avLst/>
+          </a:prstGeom>
+          <a:noFill/>
+          <a:ln/>
+        </p:spPr>
+        <p:txBody>
+          <a:bodyPr wrap="square" lIns="0" tIns="0" rIns="0" bIns="0" rtlCol="0" anchor="ctr"/>
+          <a:lstStyle/>
+          <a:p>
+            <a:pPr algn="ctr" indent="0" marL="0">
+              <a:buNone/>
+            </a:pPr>
+            <a:r>
+              <a:rPr lang="en-US" sz="680" dirty="0">
+                <a:solidFill>
+                  <a:srgbClr val="12293A"/>
+                </a:solidFill>
+                <a:latin typeface="Poppins" pitchFamily="34" charset="0"/>
+                <a:ea typeface="Poppins" pitchFamily="34" charset="-122"/>
+                <a:cs typeface="Poppins" pitchFamily="34" charset="-120"/>
+              </a:rPr>
+              <a:t>99,693</a:t>
+            </a:r>
+            <a:endParaRPr lang="en-US" sz="680" dirty="0"/>
+          </a:p>
+        </p:txBody>
+      </p:sp>
+      <p:sp>
+        <p:nvSpPr>
+          <p:cNvPr id="62" name="Shape 60"/>
+          <p:cNvSpPr/>
+          <p:nvPr/>
+        </p:nvSpPr>
+        <p:spPr>
+          <a:xfrm>
+            <a:off x="5321808" y="2983272"/>
+            <a:ext cx="996696" cy="136744"/>
           </a:xfrm>
           <a:prstGeom prst="rect">
             <a:avLst/>
@@ -22386,14 +22445,14 @@
       </p:sp>
       <p:sp>
         <p:nvSpPr>
-          <p:cNvPr id="61" name="Text 59"/>
-          <p:cNvSpPr txBox="1"/>
-          <p:nvPr/>
-        </p:nvSpPr>
-        <p:spPr>
-          <a:xfrm>
-            <a:off x="4215384" y="2990088"/>
-            <a:ext cx="1051560" cy="164592"/>
+          <p:cNvPr id="63" name="Text 61"/>
+          <p:cNvSpPr txBox="1"/>
+          <p:nvPr/>
+        </p:nvSpPr>
+        <p:spPr>
+          <a:xfrm>
+            <a:off x="5294376" y="2975956"/>
+            <a:ext cx="1051560" cy="150460"/>
           </a:xfrm>
           <a:prstGeom prst="rect">
             <a:avLst/>
@@ -22417,7 +22476,7 @@
                 <a:ea typeface="Poppins" pitchFamily="34" charset="-122"/>
                 <a:cs typeface="Poppins" pitchFamily="34" charset="-120"/>
               </a:rPr>
-              <a:t>99,693</a:t>
+              <a:t>170,962</a:t>
             </a:r>
             <a:endParaRPr lang="en-US" sz="680" dirty="0"/>
           </a:p>
@@ -22425,14 +22484,4164 @@
       </p:sp>
       <p:sp>
         <p:nvSpPr>
-          <p:cNvPr id="62" name="Shape 60"/>
-          <p:cNvSpPr/>
-          <p:nvPr/>
-        </p:nvSpPr>
-        <p:spPr>
-          <a:xfrm>
-            <a:off x="5321808" y="2997403"/>
-            <a:ext cx="996696" cy="150876"/>
+          <p:cNvPr id="64" name="Text 62"/>
+          <p:cNvSpPr txBox="1"/>
+          <p:nvPr/>
+        </p:nvSpPr>
+        <p:spPr>
+          <a:xfrm>
+            <a:off x="6400800" y="2975956"/>
+            <a:ext cx="1280160" cy="150460"/>
+          </a:xfrm>
+          <a:prstGeom prst="rect">
+            <a:avLst/>
+          </a:prstGeom>
+          <a:noFill/>
+          <a:ln/>
+        </p:spPr>
+        <p:txBody>
+          <a:bodyPr wrap="square" lIns="0" tIns="0" rIns="0" bIns="0" rtlCol="0" anchor="ctr"/>
+          <a:lstStyle/>
+          <a:p>
+            <a:pPr algn="r" indent="0" marL="0">
+              <a:buNone/>
+            </a:pPr>
+            <a:r>
+              <a:rPr lang="en-US" sz="700" b="1" dirty="0">
+                <a:solidFill>
+                  <a:srgbClr val="5E7280"/>
+                </a:solidFill>
+                <a:latin typeface="Poppins" pitchFamily="34" charset="0"/>
+                <a:ea typeface="Poppins" pitchFamily="34" charset="-122"/>
+                <a:cs typeface="Poppins" pitchFamily="34" charset="-120"/>
+              </a:rPr>
+              <a:t>324,631</a:t>
+            </a:r>
+            <a:endParaRPr lang="en-US" sz="700" dirty="0"/>
+          </a:p>
+        </p:txBody>
+      </p:sp>
+      <p:sp>
+        <p:nvSpPr>
+          <p:cNvPr id="65" name="Text 63"/>
+          <p:cNvSpPr txBox="1"/>
+          <p:nvPr/>
+        </p:nvSpPr>
+        <p:spPr>
+          <a:xfrm>
+            <a:off x="594360" y="3135561"/>
+            <a:ext cx="1417320" cy="150460"/>
+          </a:xfrm>
+          <a:prstGeom prst="rect">
+            <a:avLst/>
+          </a:prstGeom>
+          <a:noFill/>
+          <a:ln/>
+        </p:spPr>
+        <p:txBody>
+          <a:bodyPr wrap="square" lIns="0" tIns="0" rIns="0" bIns="0" rtlCol="0" anchor="ctr"/>
+          <a:lstStyle/>
+          <a:p>
+            <a:pPr indent="0" marL="0">
+              <a:buNone/>
+            </a:pPr>
+            <a:r>
+              <a:rPr lang="en-US" sz="720" b="1" dirty="0">
+                <a:solidFill>
+                  <a:srgbClr val="12293A"/>
+                </a:solidFill>
+                <a:latin typeface="Poppins" pitchFamily="34" charset="0"/>
+                <a:ea typeface="Poppins" pitchFamily="34" charset="-122"/>
+                <a:cs typeface="Poppins" pitchFamily="34" charset="-120"/>
+              </a:rPr>
+              <a:t>Daniel Maddern</a:t>
+            </a:r>
+            <a:endParaRPr lang="en-US" sz="720" dirty="0"/>
+          </a:p>
+        </p:txBody>
+      </p:sp>
+      <p:sp>
+        <p:nvSpPr>
+          <p:cNvPr id="66" name="Text 64"/>
+          <p:cNvSpPr txBox="1"/>
+          <p:nvPr/>
+        </p:nvSpPr>
+        <p:spPr>
+          <a:xfrm>
+            <a:off x="2057400" y="3135561"/>
+            <a:ext cx="1051560" cy="150460"/>
+          </a:xfrm>
+          <a:prstGeom prst="rect">
+            <a:avLst/>
+          </a:prstGeom>
+          <a:noFill/>
+          <a:ln/>
+        </p:spPr>
+        <p:txBody>
+          <a:bodyPr wrap="square" lIns="0" tIns="0" rIns="0" bIns="0" rtlCol="0" anchor="ctr"/>
+          <a:lstStyle/>
+          <a:p>
+            <a:pPr algn="ctr" indent="0" marL="0">
+              <a:buNone/>
+            </a:pPr>
+            <a:r>
+              <a:rPr lang="en-US" sz="680" dirty="0">
+                <a:solidFill>
+                  <a:srgbClr val="8FA1AC"/>
+                </a:solidFill>
+                <a:latin typeface="Poppins" pitchFamily="34" charset="0"/>
+                <a:ea typeface="Poppins" pitchFamily="34" charset="-122"/>
+                <a:cs typeface="Poppins" pitchFamily="34" charset="-120"/>
+              </a:rPr>
+              <a:t>—</a:t>
+            </a:r>
+            <a:endParaRPr lang="en-US" sz="680" dirty="0"/>
+          </a:p>
+        </p:txBody>
+      </p:sp>
+      <p:sp>
+        <p:nvSpPr>
+          <p:cNvPr id="67" name="Text 65"/>
+          <p:cNvSpPr txBox="1"/>
+          <p:nvPr/>
+        </p:nvSpPr>
+        <p:spPr>
+          <a:xfrm>
+            <a:off x="3136392" y="3135561"/>
+            <a:ext cx="1051560" cy="150460"/>
+          </a:xfrm>
+          <a:prstGeom prst="rect">
+            <a:avLst/>
+          </a:prstGeom>
+          <a:noFill/>
+          <a:ln/>
+        </p:spPr>
+        <p:txBody>
+          <a:bodyPr wrap="square" lIns="0" tIns="0" rIns="0" bIns="0" rtlCol="0" anchor="ctr"/>
+          <a:lstStyle/>
+          <a:p>
+            <a:pPr algn="ctr" indent="0" marL="0">
+              <a:buNone/>
+            </a:pPr>
+            <a:r>
+              <a:rPr lang="en-US" sz="680" dirty="0">
+                <a:solidFill>
+                  <a:srgbClr val="8FA1AC"/>
+                </a:solidFill>
+                <a:latin typeface="Poppins" pitchFamily="34" charset="0"/>
+                <a:ea typeface="Poppins" pitchFamily="34" charset="-122"/>
+                <a:cs typeface="Poppins" pitchFamily="34" charset="-120"/>
+              </a:rPr>
+              <a:t>—</a:t>
+            </a:r>
+            <a:endParaRPr lang="en-US" sz="680" dirty="0"/>
+          </a:p>
+        </p:txBody>
+      </p:sp>
+      <p:sp>
+        <p:nvSpPr>
+          <p:cNvPr id="68" name="Text 66"/>
+          <p:cNvSpPr txBox="1"/>
+          <p:nvPr/>
+        </p:nvSpPr>
+        <p:spPr>
+          <a:xfrm>
+            <a:off x="4215384" y="3135561"/>
+            <a:ext cx="1051560" cy="150460"/>
+          </a:xfrm>
+          <a:prstGeom prst="rect">
+            <a:avLst/>
+          </a:prstGeom>
+          <a:noFill/>
+          <a:ln/>
+        </p:spPr>
+        <p:txBody>
+          <a:bodyPr wrap="square" lIns="0" tIns="0" rIns="0" bIns="0" rtlCol="0" anchor="ctr"/>
+          <a:lstStyle/>
+          <a:p>
+            <a:pPr algn="ctr" indent="0" marL="0">
+              <a:buNone/>
+            </a:pPr>
+            <a:r>
+              <a:rPr lang="en-US" sz="680" dirty="0">
+                <a:solidFill>
+                  <a:srgbClr val="8FA1AC"/>
+                </a:solidFill>
+                <a:latin typeface="Poppins" pitchFamily="34" charset="0"/>
+                <a:ea typeface="Poppins" pitchFamily="34" charset="-122"/>
+                <a:cs typeface="Poppins" pitchFamily="34" charset="-120"/>
+              </a:rPr>
+              <a:t>—</a:t>
+            </a:r>
+            <a:endParaRPr lang="en-US" sz="680" dirty="0"/>
+          </a:p>
+        </p:txBody>
+      </p:sp>
+      <p:sp>
+        <p:nvSpPr>
+          <p:cNvPr id="69" name="Shape 67"/>
+          <p:cNvSpPr/>
+          <p:nvPr/>
+        </p:nvSpPr>
+        <p:spPr>
+          <a:xfrm>
+            <a:off x="5321808" y="3142876"/>
+            <a:ext cx="996696" cy="136744"/>
+          </a:xfrm>
+          <a:prstGeom prst="rect">
+            <a:avLst/>
+          </a:prstGeom>
+          <a:solidFill>
+            <a:srgbClr val="D4E9ED"/>
+          </a:solidFill>
+          <a:ln/>
+        </p:spPr>
+      </p:sp>
+      <p:sp>
+        <p:nvSpPr>
+          <p:cNvPr id="70" name="Text 68"/>
+          <p:cNvSpPr txBox="1"/>
+          <p:nvPr/>
+        </p:nvSpPr>
+        <p:spPr>
+          <a:xfrm>
+            <a:off x="5294376" y="3135561"/>
+            <a:ext cx="1051560" cy="150460"/>
+          </a:xfrm>
+          <a:prstGeom prst="rect">
+            <a:avLst/>
+          </a:prstGeom>
+          <a:noFill/>
+          <a:ln/>
+        </p:spPr>
+        <p:txBody>
+          <a:bodyPr wrap="square" lIns="0" tIns="0" rIns="0" bIns="0" rtlCol="0" anchor="ctr"/>
+          <a:lstStyle/>
+          <a:p>
+            <a:pPr algn="ctr" indent="0" marL="0">
+              <a:buNone/>
+            </a:pPr>
+            <a:r>
+              <a:rPr lang="en-US" sz="680" dirty="0">
+                <a:solidFill>
+                  <a:srgbClr val="12293A"/>
+                </a:solidFill>
+                <a:latin typeface="Poppins" pitchFamily="34" charset="0"/>
+                <a:ea typeface="Poppins" pitchFamily="34" charset="-122"/>
+                <a:cs typeface="Poppins" pitchFamily="34" charset="-120"/>
+              </a:rPr>
+              <a:t>43,288</a:t>
+            </a:r>
+            <a:endParaRPr lang="en-US" sz="680" dirty="0"/>
+          </a:p>
+        </p:txBody>
+      </p:sp>
+      <p:sp>
+        <p:nvSpPr>
+          <p:cNvPr id="71" name="Text 69"/>
+          <p:cNvSpPr txBox="1"/>
+          <p:nvPr/>
+        </p:nvSpPr>
+        <p:spPr>
+          <a:xfrm>
+            <a:off x="6400800" y="3135561"/>
+            <a:ext cx="1280160" cy="150460"/>
+          </a:xfrm>
+          <a:prstGeom prst="rect">
+            <a:avLst/>
+          </a:prstGeom>
+          <a:noFill/>
+          <a:ln/>
+        </p:spPr>
+        <p:txBody>
+          <a:bodyPr wrap="square" lIns="0" tIns="0" rIns="0" bIns="0" rtlCol="0" anchor="ctr"/>
+          <a:lstStyle/>
+          <a:p>
+            <a:pPr algn="r" indent="0" marL="0">
+              <a:buNone/>
+            </a:pPr>
+            <a:r>
+              <a:rPr lang="en-US" sz="700" b="1" dirty="0">
+                <a:solidFill>
+                  <a:srgbClr val="5E7280"/>
+                </a:solidFill>
+                <a:latin typeface="Poppins" pitchFamily="34" charset="0"/>
+                <a:ea typeface="Poppins" pitchFamily="34" charset="-122"/>
+                <a:cs typeface="Poppins" pitchFamily="34" charset="-120"/>
+              </a:rPr>
+              <a:t>43,288</a:t>
+            </a:r>
+            <a:endParaRPr lang="en-US" sz="700" dirty="0"/>
+          </a:p>
+        </p:txBody>
+      </p:sp>
+      <p:sp>
+        <p:nvSpPr>
+          <p:cNvPr id="72" name="Text 70"/>
+          <p:cNvSpPr txBox="1"/>
+          <p:nvPr/>
+        </p:nvSpPr>
+        <p:spPr>
+          <a:xfrm>
+            <a:off x="594360" y="3295165"/>
+            <a:ext cx="1417320" cy="150460"/>
+          </a:xfrm>
+          <a:prstGeom prst="rect">
+            <a:avLst/>
+          </a:prstGeom>
+          <a:noFill/>
+          <a:ln/>
+        </p:spPr>
+        <p:txBody>
+          <a:bodyPr wrap="square" lIns="0" tIns="0" rIns="0" bIns="0" rtlCol="0" anchor="ctr"/>
+          <a:lstStyle/>
+          <a:p>
+            <a:pPr indent="0" marL="0">
+              <a:buNone/>
+            </a:pPr>
+            <a:r>
+              <a:rPr lang="en-US" sz="720" b="1" dirty="0">
+                <a:solidFill>
+                  <a:srgbClr val="12293A"/>
+                </a:solidFill>
+                <a:latin typeface="Poppins" pitchFamily="34" charset="0"/>
+                <a:ea typeface="Poppins" pitchFamily="34" charset="-122"/>
+                <a:cs typeface="Poppins" pitchFamily="34" charset="-120"/>
+              </a:rPr>
+              <a:t>Hawraa Khalil</a:t>
+            </a:r>
+            <a:endParaRPr lang="en-US" sz="720" dirty="0"/>
+          </a:p>
+        </p:txBody>
+      </p:sp>
+      <p:sp>
+        <p:nvSpPr>
+          <p:cNvPr id="73" name="Shape 71"/>
+          <p:cNvSpPr/>
+          <p:nvPr/>
+        </p:nvSpPr>
+        <p:spPr>
+          <a:xfrm>
+            <a:off x="2084832" y="3302480"/>
+            <a:ext cx="996696" cy="136744"/>
+          </a:xfrm>
+          <a:prstGeom prst="rect">
+            <a:avLst/>
+          </a:prstGeom>
+          <a:solidFill>
+            <a:srgbClr val="EDF5F7"/>
+          </a:solidFill>
+          <a:ln/>
+        </p:spPr>
+      </p:sp>
+      <p:sp>
+        <p:nvSpPr>
+          <p:cNvPr id="74" name="Text 72"/>
+          <p:cNvSpPr txBox="1"/>
+          <p:nvPr/>
+        </p:nvSpPr>
+        <p:spPr>
+          <a:xfrm>
+            <a:off x="2057400" y="3295165"/>
+            <a:ext cx="1051560" cy="150460"/>
+          </a:xfrm>
+          <a:prstGeom prst="rect">
+            <a:avLst/>
+          </a:prstGeom>
+          <a:noFill/>
+          <a:ln/>
+        </p:spPr>
+        <p:txBody>
+          <a:bodyPr wrap="square" lIns="0" tIns="0" rIns="0" bIns="0" rtlCol="0" anchor="ctr"/>
+          <a:lstStyle/>
+          <a:p>
+            <a:pPr algn="ctr" indent="0" marL="0">
+              <a:buNone/>
+            </a:pPr>
+            <a:r>
+              <a:rPr lang="en-US" sz="680" dirty="0">
+                <a:solidFill>
+                  <a:srgbClr val="12293A"/>
+                </a:solidFill>
+                <a:latin typeface="Poppins" pitchFamily="34" charset="0"/>
+                <a:ea typeface="Poppins" pitchFamily="34" charset="-122"/>
+                <a:cs typeface="Poppins" pitchFamily="34" charset="-120"/>
+              </a:rPr>
+              <a:t>28,536</a:t>
+            </a:r>
+            <a:endParaRPr lang="en-US" sz="680" dirty="0"/>
+          </a:p>
+        </p:txBody>
+      </p:sp>
+      <p:sp>
+        <p:nvSpPr>
+          <p:cNvPr id="75" name="Shape 73"/>
+          <p:cNvSpPr/>
+          <p:nvPr/>
+        </p:nvSpPr>
+        <p:spPr>
+          <a:xfrm>
+            <a:off x="3163824" y="3302480"/>
+            <a:ext cx="996696" cy="136744"/>
+          </a:xfrm>
+          <a:prstGeom prst="rect">
+            <a:avLst/>
+          </a:prstGeom>
+          <a:solidFill>
+            <a:srgbClr val="EDF5F7"/>
+          </a:solidFill>
+          <a:ln/>
+        </p:spPr>
+      </p:sp>
+      <p:sp>
+        <p:nvSpPr>
+          <p:cNvPr id="76" name="Text 74"/>
+          <p:cNvSpPr txBox="1"/>
+          <p:nvPr/>
+        </p:nvSpPr>
+        <p:spPr>
+          <a:xfrm>
+            <a:off x="3136392" y="3295165"/>
+            <a:ext cx="1051560" cy="150460"/>
+          </a:xfrm>
+          <a:prstGeom prst="rect">
+            <a:avLst/>
+          </a:prstGeom>
+          <a:noFill/>
+          <a:ln/>
+        </p:spPr>
+        <p:txBody>
+          <a:bodyPr wrap="square" lIns="0" tIns="0" rIns="0" bIns="0" rtlCol="0" anchor="ctr"/>
+          <a:lstStyle/>
+          <a:p>
+            <a:pPr algn="ctr" indent="0" marL="0">
+              <a:buNone/>
+            </a:pPr>
+            <a:r>
+              <a:rPr lang="en-US" sz="680" dirty="0">
+                <a:solidFill>
+                  <a:srgbClr val="12293A"/>
+                </a:solidFill>
+                <a:latin typeface="Poppins" pitchFamily="34" charset="0"/>
+                <a:ea typeface="Poppins" pitchFamily="34" charset="-122"/>
+                <a:cs typeface="Poppins" pitchFamily="34" charset="-120"/>
+              </a:rPr>
+              <a:t>23,285</a:t>
+            </a:r>
+            <a:endParaRPr lang="en-US" sz="680" dirty="0"/>
+          </a:p>
+        </p:txBody>
+      </p:sp>
+      <p:sp>
+        <p:nvSpPr>
+          <p:cNvPr id="77" name="Shape 75"/>
+          <p:cNvSpPr/>
+          <p:nvPr/>
+        </p:nvSpPr>
+        <p:spPr>
+          <a:xfrm>
+            <a:off x="4242816" y="3302480"/>
+            <a:ext cx="996696" cy="136744"/>
+          </a:xfrm>
+          <a:prstGeom prst="rect">
+            <a:avLst/>
+          </a:prstGeom>
+          <a:solidFill>
+            <a:srgbClr val="EDF5F7"/>
+          </a:solidFill>
+          <a:ln/>
+        </p:spPr>
+      </p:sp>
+      <p:sp>
+        <p:nvSpPr>
+          <p:cNvPr id="78" name="Text 76"/>
+          <p:cNvSpPr txBox="1"/>
+          <p:nvPr/>
+        </p:nvSpPr>
+        <p:spPr>
+          <a:xfrm>
+            <a:off x="4215384" y="3295165"/>
+            <a:ext cx="1051560" cy="150460"/>
+          </a:xfrm>
+          <a:prstGeom prst="rect">
+            <a:avLst/>
+          </a:prstGeom>
+          <a:noFill/>
+          <a:ln/>
+        </p:spPr>
+        <p:txBody>
+          <a:bodyPr wrap="square" lIns="0" tIns="0" rIns="0" bIns="0" rtlCol="0" anchor="ctr"/>
+          <a:lstStyle/>
+          <a:p>
+            <a:pPr algn="ctr" indent="0" marL="0">
+              <a:buNone/>
+            </a:pPr>
+            <a:r>
+              <a:rPr lang="en-US" sz="680" dirty="0">
+                <a:solidFill>
+                  <a:srgbClr val="12293A"/>
+                </a:solidFill>
+                <a:latin typeface="Poppins" pitchFamily="34" charset="0"/>
+                <a:ea typeface="Poppins" pitchFamily="34" charset="-122"/>
+                <a:cs typeface="Poppins" pitchFamily="34" charset="-120"/>
+              </a:rPr>
+              <a:t>19,047</a:t>
+            </a:r>
+            <a:endParaRPr lang="en-US" sz="680" dirty="0"/>
+          </a:p>
+        </p:txBody>
+      </p:sp>
+      <p:sp>
+        <p:nvSpPr>
+          <p:cNvPr id="79" name="Text 77"/>
+          <p:cNvSpPr txBox="1"/>
+          <p:nvPr/>
+        </p:nvSpPr>
+        <p:spPr>
+          <a:xfrm>
+            <a:off x="5294376" y="3295165"/>
+            <a:ext cx="1051560" cy="150460"/>
+          </a:xfrm>
+          <a:prstGeom prst="rect">
+            <a:avLst/>
+          </a:prstGeom>
+          <a:noFill/>
+          <a:ln/>
+        </p:spPr>
+        <p:txBody>
+          <a:bodyPr wrap="square" lIns="0" tIns="0" rIns="0" bIns="0" rtlCol="0" anchor="ctr"/>
+          <a:lstStyle/>
+          <a:p>
+            <a:pPr algn="ctr" indent="0" marL="0">
+              <a:buNone/>
+            </a:pPr>
+            <a:r>
+              <a:rPr lang="en-US" sz="680" dirty="0">
+                <a:solidFill>
+                  <a:srgbClr val="8FA1AC"/>
+                </a:solidFill>
+                <a:latin typeface="Poppins" pitchFamily="34" charset="0"/>
+                <a:ea typeface="Poppins" pitchFamily="34" charset="-122"/>
+                <a:cs typeface="Poppins" pitchFamily="34" charset="-120"/>
+              </a:rPr>
+              <a:t>—</a:t>
+            </a:r>
+            <a:endParaRPr lang="en-US" sz="680" dirty="0"/>
+          </a:p>
+        </p:txBody>
+      </p:sp>
+      <p:sp>
+        <p:nvSpPr>
+          <p:cNvPr id="80" name="Text 78"/>
+          <p:cNvSpPr txBox="1"/>
+          <p:nvPr/>
+        </p:nvSpPr>
+        <p:spPr>
+          <a:xfrm>
+            <a:off x="6400800" y="3295165"/>
+            <a:ext cx="1280160" cy="150460"/>
+          </a:xfrm>
+          <a:prstGeom prst="rect">
+            <a:avLst/>
+          </a:prstGeom>
+          <a:noFill/>
+          <a:ln/>
+        </p:spPr>
+        <p:txBody>
+          <a:bodyPr wrap="square" lIns="0" tIns="0" rIns="0" bIns="0" rtlCol="0" anchor="ctr"/>
+          <a:lstStyle/>
+          <a:p>
+            <a:pPr algn="r" indent="0" marL="0">
+              <a:buNone/>
+            </a:pPr>
+            <a:r>
+              <a:rPr lang="en-US" sz="700" b="1" dirty="0">
+                <a:solidFill>
+                  <a:srgbClr val="5E7280"/>
+                </a:solidFill>
+                <a:latin typeface="Poppins" pitchFamily="34" charset="0"/>
+                <a:ea typeface="Poppins" pitchFamily="34" charset="-122"/>
+                <a:cs typeface="Poppins" pitchFamily="34" charset="-120"/>
+              </a:rPr>
+              <a:t>70,868</a:t>
+            </a:r>
+            <a:endParaRPr lang="en-US" sz="700" dirty="0"/>
+          </a:p>
+        </p:txBody>
+      </p:sp>
+      <p:sp>
+        <p:nvSpPr>
+          <p:cNvPr id="81" name="Text 79"/>
+          <p:cNvSpPr txBox="1"/>
+          <p:nvPr/>
+        </p:nvSpPr>
+        <p:spPr>
+          <a:xfrm>
+            <a:off x="594360" y="3454769"/>
+            <a:ext cx="1417320" cy="150460"/>
+          </a:xfrm>
+          <a:prstGeom prst="rect">
+            <a:avLst/>
+          </a:prstGeom>
+          <a:noFill/>
+          <a:ln/>
+        </p:spPr>
+        <p:txBody>
+          <a:bodyPr wrap="square" lIns="0" tIns="0" rIns="0" bIns="0" rtlCol="0" anchor="ctr"/>
+          <a:lstStyle/>
+          <a:p>
+            <a:pPr indent="0" marL="0">
+              <a:buNone/>
+            </a:pPr>
+            <a:r>
+              <a:rPr lang="en-US" sz="720" b="1" dirty="0">
+                <a:solidFill>
+                  <a:srgbClr val="12293A"/>
+                </a:solidFill>
+                <a:latin typeface="Poppins" pitchFamily="34" charset="0"/>
+                <a:ea typeface="Poppins" pitchFamily="34" charset="-122"/>
+                <a:cs typeface="Poppins" pitchFamily="34" charset="-120"/>
+              </a:rPr>
+              <a:t>Ciaran Dempsey</a:t>
+            </a:r>
+            <a:endParaRPr lang="en-US" sz="720" dirty="0"/>
+          </a:p>
+        </p:txBody>
+      </p:sp>
+      <p:sp>
+        <p:nvSpPr>
+          <p:cNvPr id="82" name="Shape 80"/>
+          <p:cNvSpPr/>
+          <p:nvPr/>
+        </p:nvSpPr>
+        <p:spPr>
+          <a:xfrm>
+            <a:off x="2084832" y="3462085"/>
+            <a:ext cx="996696" cy="136744"/>
+          </a:xfrm>
+          <a:prstGeom prst="rect">
+            <a:avLst/>
+          </a:prstGeom>
+          <a:solidFill>
+            <a:srgbClr val="EDF5F7"/>
+          </a:solidFill>
+          <a:ln/>
+        </p:spPr>
+      </p:sp>
+      <p:sp>
+        <p:nvSpPr>
+          <p:cNvPr id="83" name="Text 81"/>
+          <p:cNvSpPr txBox="1"/>
+          <p:nvPr/>
+        </p:nvSpPr>
+        <p:spPr>
+          <a:xfrm>
+            <a:off x="2057400" y="3454769"/>
+            <a:ext cx="1051560" cy="150460"/>
+          </a:xfrm>
+          <a:prstGeom prst="rect">
+            <a:avLst/>
+          </a:prstGeom>
+          <a:noFill/>
+          <a:ln/>
+        </p:spPr>
+        <p:txBody>
+          <a:bodyPr wrap="square" lIns="0" tIns="0" rIns="0" bIns="0" rtlCol="0" anchor="ctr"/>
+          <a:lstStyle/>
+          <a:p>
+            <a:pPr algn="ctr" indent="0" marL="0">
+              <a:buNone/>
+            </a:pPr>
+            <a:r>
+              <a:rPr lang="en-US" sz="680" dirty="0">
+                <a:solidFill>
+                  <a:srgbClr val="12293A"/>
+                </a:solidFill>
+                <a:latin typeface="Poppins" pitchFamily="34" charset="0"/>
+                <a:ea typeface="Poppins" pitchFamily="34" charset="-122"/>
+                <a:cs typeface="Poppins" pitchFamily="34" charset="-120"/>
+              </a:rPr>
+              <a:t>18,918</a:t>
+            </a:r>
+            <a:endParaRPr lang="en-US" sz="680" dirty="0"/>
+          </a:p>
+        </p:txBody>
+      </p:sp>
+      <p:sp>
+        <p:nvSpPr>
+          <p:cNvPr id="84" name="Shape 82"/>
+          <p:cNvSpPr/>
+          <p:nvPr/>
+        </p:nvSpPr>
+        <p:spPr>
+          <a:xfrm>
+            <a:off x="3163824" y="3462085"/>
+            <a:ext cx="996696" cy="136744"/>
+          </a:xfrm>
+          <a:prstGeom prst="rect">
+            <a:avLst/>
+          </a:prstGeom>
+          <a:solidFill>
+            <a:srgbClr val="EDF5F7"/>
+          </a:solidFill>
+          <a:ln/>
+        </p:spPr>
+      </p:sp>
+      <p:sp>
+        <p:nvSpPr>
+          <p:cNvPr id="85" name="Text 83"/>
+          <p:cNvSpPr txBox="1"/>
+          <p:nvPr/>
+        </p:nvSpPr>
+        <p:spPr>
+          <a:xfrm>
+            <a:off x="3136392" y="3454769"/>
+            <a:ext cx="1051560" cy="150460"/>
+          </a:xfrm>
+          <a:prstGeom prst="rect">
+            <a:avLst/>
+          </a:prstGeom>
+          <a:noFill/>
+          <a:ln/>
+        </p:spPr>
+        <p:txBody>
+          <a:bodyPr wrap="square" lIns="0" tIns="0" rIns="0" bIns="0" rtlCol="0" anchor="ctr"/>
+          <a:lstStyle/>
+          <a:p>
+            <a:pPr algn="ctr" indent="0" marL="0">
+              <a:buNone/>
+            </a:pPr>
+            <a:r>
+              <a:rPr lang="en-US" sz="680" dirty="0">
+                <a:solidFill>
+                  <a:srgbClr val="12293A"/>
+                </a:solidFill>
+                <a:latin typeface="Poppins" pitchFamily="34" charset="0"/>
+                <a:ea typeface="Poppins" pitchFamily="34" charset="-122"/>
+                <a:cs typeface="Poppins" pitchFamily="34" charset="-120"/>
+              </a:rPr>
+              <a:t>23,650</a:t>
+            </a:r>
+            <a:endParaRPr lang="en-US" sz="680" dirty="0"/>
+          </a:p>
+        </p:txBody>
+      </p:sp>
+      <p:sp>
+        <p:nvSpPr>
+          <p:cNvPr id="86" name="Shape 84"/>
+          <p:cNvSpPr/>
+          <p:nvPr/>
+        </p:nvSpPr>
+        <p:spPr>
+          <a:xfrm>
+            <a:off x="4242816" y="3462085"/>
+            <a:ext cx="996696" cy="136744"/>
+          </a:xfrm>
+          <a:prstGeom prst="rect">
+            <a:avLst/>
+          </a:prstGeom>
+          <a:solidFill>
+            <a:srgbClr val="EDF5F7"/>
+          </a:solidFill>
+          <a:ln/>
+        </p:spPr>
+      </p:sp>
+      <p:sp>
+        <p:nvSpPr>
+          <p:cNvPr id="87" name="Text 85"/>
+          <p:cNvSpPr txBox="1"/>
+          <p:nvPr/>
+        </p:nvSpPr>
+        <p:spPr>
+          <a:xfrm>
+            <a:off x="4215384" y="3454769"/>
+            <a:ext cx="1051560" cy="150460"/>
+          </a:xfrm>
+          <a:prstGeom prst="rect">
+            <a:avLst/>
+          </a:prstGeom>
+          <a:noFill/>
+          <a:ln/>
+        </p:spPr>
+        <p:txBody>
+          <a:bodyPr wrap="square" lIns="0" tIns="0" rIns="0" bIns="0" rtlCol="0" anchor="ctr"/>
+          <a:lstStyle/>
+          <a:p>
+            <a:pPr algn="ctr" indent="0" marL="0">
+              <a:buNone/>
+            </a:pPr>
+            <a:r>
+              <a:rPr lang="en-US" sz="680" dirty="0">
+                <a:solidFill>
+                  <a:srgbClr val="12293A"/>
+                </a:solidFill>
+                <a:latin typeface="Poppins" pitchFamily="34" charset="0"/>
+                <a:ea typeface="Poppins" pitchFamily="34" charset="-122"/>
+                <a:cs typeface="Poppins" pitchFamily="34" charset="-120"/>
+              </a:rPr>
+              <a:t>24,443</a:t>
+            </a:r>
+            <a:endParaRPr lang="en-US" sz="680" dirty="0"/>
+          </a:p>
+        </p:txBody>
+      </p:sp>
+      <p:sp>
+        <p:nvSpPr>
+          <p:cNvPr id="88" name="Shape 86"/>
+          <p:cNvSpPr/>
+          <p:nvPr/>
+        </p:nvSpPr>
+        <p:spPr>
+          <a:xfrm>
+            <a:off x="5321808" y="3462085"/>
+            <a:ext cx="996696" cy="136744"/>
+          </a:xfrm>
+          <a:prstGeom prst="rect">
+            <a:avLst/>
+          </a:prstGeom>
+          <a:solidFill>
+            <a:srgbClr val="EDF5F7"/>
+          </a:solidFill>
+          <a:ln/>
+        </p:spPr>
+      </p:sp>
+      <p:sp>
+        <p:nvSpPr>
+          <p:cNvPr id="89" name="Text 87"/>
+          <p:cNvSpPr txBox="1"/>
+          <p:nvPr/>
+        </p:nvSpPr>
+        <p:spPr>
+          <a:xfrm>
+            <a:off x="5294376" y="3454769"/>
+            <a:ext cx="1051560" cy="150460"/>
+          </a:xfrm>
+          <a:prstGeom prst="rect">
+            <a:avLst/>
+          </a:prstGeom>
+          <a:noFill/>
+          <a:ln/>
+        </p:spPr>
+        <p:txBody>
+          <a:bodyPr wrap="square" lIns="0" tIns="0" rIns="0" bIns="0" rtlCol="0" anchor="ctr"/>
+          <a:lstStyle/>
+          <a:p>
+            <a:pPr algn="ctr" indent="0" marL="0">
+              <a:buNone/>
+            </a:pPr>
+            <a:r>
+              <a:rPr lang="en-US" sz="680" dirty="0">
+                <a:solidFill>
+                  <a:srgbClr val="12293A"/>
+                </a:solidFill>
+                <a:latin typeface="Poppins" pitchFamily="34" charset="0"/>
+                <a:ea typeface="Poppins" pitchFamily="34" charset="-122"/>
+                <a:cs typeface="Poppins" pitchFamily="34" charset="-120"/>
+              </a:rPr>
+              <a:t>2,971</a:t>
+            </a:r>
+            <a:endParaRPr lang="en-US" sz="680" dirty="0"/>
+          </a:p>
+        </p:txBody>
+      </p:sp>
+      <p:sp>
+        <p:nvSpPr>
+          <p:cNvPr id="90" name="Text 88"/>
+          <p:cNvSpPr txBox="1"/>
+          <p:nvPr/>
+        </p:nvSpPr>
+        <p:spPr>
+          <a:xfrm>
+            <a:off x="6400800" y="3454769"/>
+            <a:ext cx="1280160" cy="150460"/>
+          </a:xfrm>
+          <a:prstGeom prst="rect">
+            <a:avLst/>
+          </a:prstGeom>
+          <a:noFill/>
+          <a:ln/>
+        </p:spPr>
+        <p:txBody>
+          <a:bodyPr wrap="square" lIns="0" tIns="0" rIns="0" bIns="0" rtlCol="0" anchor="ctr"/>
+          <a:lstStyle/>
+          <a:p>
+            <a:pPr algn="r" indent="0" marL="0">
+              <a:buNone/>
+            </a:pPr>
+            <a:r>
+              <a:rPr lang="en-US" sz="700" b="1" dirty="0">
+                <a:solidFill>
+                  <a:srgbClr val="5E7280"/>
+                </a:solidFill>
+                <a:latin typeface="Poppins" pitchFamily="34" charset="0"/>
+                <a:ea typeface="Poppins" pitchFamily="34" charset="-122"/>
+                <a:cs typeface="Poppins" pitchFamily="34" charset="-120"/>
+              </a:rPr>
+              <a:t>69,982</a:t>
+            </a:r>
+            <a:endParaRPr lang="en-US" sz="700" dirty="0"/>
+          </a:p>
+        </p:txBody>
+      </p:sp>
+      <p:sp>
+        <p:nvSpPr>
+          <p:cNvPr id="91" name="Text 89"/>
+          <p:cNvSpPr txBox="1"/>
+          <p:nvPr/>
+        </p:nvSpPr>
+        <p:spPr>
+          <a:xfrm>
+            <a:off x="594360" y="3614374"/>
+            <a:ext cx="1417320" cy="150460"/>
+          </a:xfrm>
+          <a:prstGeom prst="rect">
+            <a:avLst/>
+          </a:prstGeom>
+          <a:noFill/>
+          <a:ln/>
+        </p:spPr>
+        <p:txBody>
+          <a:bodyPr wrap="square" lIns="0" tIns="0" rIns="0" bIns="0" rtlCol="0" anchor="ctr"/>
+          <a:lstStyle/>
+          <a:p>
+            <a:pPr indent="0" marL="0">
+              <a:buNone/>
+            </a:pPr>
+            <a:r>
+              <a:rPr lang="en-US" sz="720" b="1" dirty="0">
+                <a:solidFill>
+                  <a:srgbClr val="12293A"/>
+                </a:solidFill>
+                <a:latin typeface="Poppins" pitchFamily="34" charset="0"/>
+                <a:ea typeface="Poppins" pitchFamily="34" charset="-122"/>
+                <a:cs typeface="Poppins" pitchFamily="34" charset="-120"/>
+              </a:rPr>
+              <a:t>David Corbett</a:t>
+            </a:r>
+            <a:endParaRPr lang="en-US" sz="720" dirty="0"/>
+          </a:p>
+        </p:txBody>
+      </p:sp>
+      <p:sp>
+        <p:nvSpPr>
+          <p:cNvPr id="92" name="Shape 90"/>
+          <p:cNvSpPr/>
+          <p:nvPr/>
+        </p:nvSpPr>
+        <p:spPr>
+          <a:xfrm>
+            <a:off x="2084832" y="3621689"/>
+            <a:ext cx="996696" cy="136744"/>
+          </a:xfrm>
+          <a:prstGeom prst="rect">
+            <a:avLst/>
+          </a:prstGeom>
+          <a:solidFill>
+            <a:srgbClr val="EDF5F7"/>
+          </a:solidFill>
+          <a:ln/>
+        </p:spPr>
+      </p:sp>
+      <p:sp>
+        <p:nvSpPr>
+          <p:cNvPr id="93" name="Text 91"/>
+          <p:cNvSpPr txBox="1"/>
+          <p:nvPr/>
+        </p:nvSpPr>
+        <p:spPr>
+          <a:xfrm>
+            <a:off x="2057400" y="3614374"/>
+            <a:ext cx="1051560" cy="150460"/>
+          </a:xfrm>
+          <a:prstGeom prst="rect">
+            <a:avLst/>
+          </a:prstGeom>
+          <a:noFill/>
+          <a:ln/>
+        </p:spPr>
+        <p:txBody>
+          <a:bodyPr wrap="square" lIns="0" tIns="0" rIns="0" bIns="0" rtlCol="0" anchor="ctr"/>
+          <a:lstStyle/>
+          <a:p>
+            <a:pPr algn="ctr" indent="0" marL="0">
+              <a:buNone/>
+            </a:pPr>
+            <a:r>
+              <a:rPr lang="en-US" sz="680" dirty="0">
+                <a:solidFill>
+                  <a:srgbClr val="12293A"/>
+                </a:solidFill>
+                <a:latin typeface="Poppins" pitchFamily="34" charset="0"/>
+                <a:ea typeface="Poppins" pitchFamily="34" charset="-122"/>
+                <a:cs typeface="Poppins" pitchFamily="34" charset="-120"/>
+              </a:rPr>
+              <a:t>27,031</a:t>
+            </a:r>
+            <a:endParaRPr lang="en-US" sz="680" dirty="0"/>
+          </a:p>
+        </p:txBody>
+      </p:sp>
+      <p:sp>
+        <p:nvSpPr>
+          <p:cNvPr id="94" name="Shape 92"/>
+          <p:cNvSpPr/>
+          <p:nvPr/>
+        </p:nvSpPr>
+        <p:spPr>
+          <a:xfrm>
+            <a:off x="3163824" y="3621689"/>
+            <a:ext cx="996696" cy="136744"/>
+          </a:xfrm>
+          <a:prstGeom prst="rect">
+            <a:avLst/>
+          </a:prstGeom>
+          <a:solidFill>
+            <a:srgbClr val="EDF5F7"/>
+          </a:solidFill>
+          <a:ln/>
+        </p:spPr>
+      </p:sp>
+      <p:sp>
+        <p:nvSpPr>
+          <p:cNvPr id="95" name="Text 93"/>
+          <p:cNvSpPr txBox="1"/>
+          <p:nvPr/>
+        </p:nvSpPr>
+        <p:spPr>
+          <a:xfrm>
+            <a:off x="3136392" y="3614374"/>
+            <a:ext cx="1051560" cy="150460"/>
+          </a:xfrm>
+          <a:prstGeom prst="rect">
+            <a:avLst/>
+          </a:prstGeom>
+          <a:noFill/>
+          <a:ln/>
+        </p:spPr>
+        <p:txBody>
+          <a:bodyPr wrap="square" lIns="0" tIns="0" rIns="0" bIns="0" rtlCol="0" anchor="ctr"/>
+          <a:lstStyle/>
+          <a:p>
+            <a:pPr algn="ctr" indent="0" marL="0">
+              <a:buNone/>
+            </a:pPr>
+            <a:r>
+              <a:rPr lang="en-US" sz="680" dirty="0">
+                <a:solidFill>
+                  <a:srgbClr val="12293A"/>
+                </a:solidFill>
+                <a:latin typeface="Poppins" pitchFamily="34" charset="0"/>
+                <a:ea typeface="Poppins" pitchFamily="34" charset="-122"/>
+                <a:cs typeface="Poppins" pitchFamily="34" charset="-120"/>
+              </a:rPr>
+              <a:t>10,145</a:t>
+            </a:r>
+            <a:endParaRPr lang="en-US" sz="680" dirty="0"/>
+          </a:p>
+        </p:txBody>
+      </p:sp>
+      <p:sp>
+        <p:nvSpPr>
+          <p:cNvPr id="96" name="Shape 94"/>
+          <p:cNvSpPr/>
+          <p:nvPr/>
+        </p:nvSpPr>
+        <p:spPr>
+          <a:xfrm>
+            <a:off x="4242816" y="3621689"/>
+            <a:ext cx="996696" cy="136744"/>
+          </a:xfrm>
+          <a:prstGeom prst="rect">
+            <a:avLst/>
+          </a:prstGeom>
+          <a:solidFill>
+            <a:srgbClr val="EDF5F7"/>
+          </a:solidFill>
+          <a:ln/>
+        </p:spPr>
+      </p:sp>
+      <p:sp>
+        <p:nvSpPr>
+          <p:cNvPr id="97" name="Text 95"/>
+          <p:cNvSpPr txBox="1"/>
+          <p:nvPr/>
+        </p:nvSpPr>
+        <p:spPr>
+          <a:xfrm>
+            <a:off x="4215384" y="3614374"/>
+            <a:ext cx="1051560" cy="150460"/>
+          </a:xfrm>
+          <a:prstGeom prst="rect">
+            <a:avLst/>
+          </a:prstGeom>
+          <a:noFill/>
+          <a:ln/>
+        </p:spPr>
+        <p:txBody>
+          <a:bodyPr wrap="square" lIns="0" tIns="0" rIns="0" bIns="0" rtlCol="0" anchor="ctr"/>
+          <a:lstStyle/>
+          <a:p>
+            <a:pPr algn="ctr" indent="0" marL="0">
+              <a:buNone/>
+            </a:pPr>
+            <a:r>
+              <a:rPr lang="en-US" sz="680" dirty="0">
+                <a:solidFill>
+                  <a:srgbClr val="12293A"/>
+                </a:solidFill>
+                <a:latin typeface="Poppins" pitchFamily="34" charset="0"/>
+                <a:ea typeface="Poppins" pitchFamily="34" charset="-122"/>
+                <a:cs typeface="Poppins" pitchFamily="34" charset="-120"/>
+              </a:rPr>
+              <a:t>30,828</a:t>
+            </a:r>
+            <a:endParaRPr lang="en-US" sz="680" dirty="0"/>
+          </a:p>
+        </p:txBody>
+      </p:sp>
+      <p:sp>
+        <p:nvSpPr>
+          <p:cNvPr id="98" name="Shape 96"/>
+          <p:cNvSpPr/>
+          <p:nvPr/>
+        </p:nvSpPr>
+        <p:spPr>
+          <a:xfrm>
+            <a:off x="5321808" y="3621689"/>
+            <a:ext cx="996696" cy="136744"/>
+          </a:xfrm>
+          <a:prstGeom prst="rect">
+            <a:avLst/>
+          </a:prstGeom>
+          <a:solidFill>
+            <a:srgbClr val="EDF5F7"/>
+          </a:solidFill>
+          <a:ln/>
+        </p:spPr>
+      </p:sp>
+      <p:sp>
+        <p:nvSpPr>
+          <p:cNvPr id="99" name="Text 97"/>
+          <p:cNvSpPr txBox="1"/>
+          <p:nvPr/>
+        </p:nvSpPr>
+        <p:spPr>
+          <a:xfrm>
+            <a:off x="5294376" y="3614374"/>
+            <a:ext cx="1051560" cy="150460"/>
+          </a:xfrm>
+          <a:prstGeom prst="rect">
+            <a:avLst/>
+          </a:prstGeom>
+          <a:noFill/>
+          <a:ln/>
+        </p:spPr>
+        <p:txBody>
+          <a:bodyPr wrap="square" lIns="0" tIns="0" rIns="0" bIns="0" rtlCol="0" anchor="ctr"/>
+          <a:lstStyle/>
+          <a:p>
+            <a:pPr algn="ctr" indent="0" marL="0">
+              <a:buNone/>
+            </a:pPr>
+            <a:r>
+              <a:rPr lang="en-US" sz="680" dirty="0">
+                <a:solidFill>
+                  <a:srgbClr val="12293A"/>
+                </a:solidFill>
+                <a:latin typeface="Poppins" pitchFamily="34" charset="0"/>
+                <a:ea typeface="Poppins" pitchFamily="34" charset="-122"/>
+                <a:cs typeface="Poppins" pitchFamily="34" charset="-120"/>
+              </a:rPr>
+              <a:t>21,999</a:t>
+            </a:r>
+            <a:endParaRPr lang="en-US" sz="680" dirty="0"/>
+          </a:p>
+        </p:txBody>
+      </p:sp>
+      <p:sp>
+        <p:nvSpPr>
+          <p:cNvPr id="100" name="Text 98"/>
+          <p:cNvSpPr txBox="1"/>
+          <p:nvPr/>
+        </p:nvSpPr>
+        <p:spPr>
+          <a:xfrm>
+            <a:off x="6400800" y="3614374"/>
+            <a:ext cx="1280160" cy="150460"/>
+          </a:xfrm>
+          <a:prstGeom prst="rect">
+            <a:avLst/>
+          </a:prstGeom>
+          <a:noFill/>
+          <a:ln/>
+        </p:spPr>
+        <p:txBody>
+          <a:bodyPr wrap="square" lIns="0" tIns="0" rIns="0" bIns="0" rtlCol="0" anchor="ctr"/>
+          <a:lstStyle/>
+          <a:p>
+            <a:pPr algn="r" indent="0" marL="0">
+              <a:buNone/>
+            </a:pPr>
+            <a:r>
+              <a:rPr lang="en-US" sz="700" b="1" dirty="0">
+                <a:solidFill>
+                  <a:srgbClr val="5E7280"/>
+                </a:solidFill>
+                <a:latin typeface="Poppins" pitchFamily="34" charset="0"/>
+                <a:ea typeface="Poppins" pitchFamily="34" charset="-122"/>
+                <a:cs typeface="Poppins" pitchFamily="34" charset="-120"/>
+              </a:rPr>
+              <a:t>90,003</a:t>
+            </a:r>
+            <a:endParaRPr lang="en-US" sz="700" dirty="0"/>
+          </a:p>
+        </p:txBody>
+      </p:sp>
+      <p:sp>
+        <p:nvSpPr>
+          <p:cNvPr id="101" name="Text 99"/>
+          <p:cNvSpPr txBox="1"/>
+          <p:nvPr/>
+        </p:nvSpPr>
+        <p:spPr>
+          <a:xfrm>
+            <a:off x="594360" y="3773978"/>
+            <a:ext cx="1417320" cy="150460"/>
+          </a:xfrm>
+          <a:prstGeom prst="rect">
+            <a:avLst/>
+          </a:prstGeom>
+          <a:noFill/>
+          <a:ln/>
+        </p:spPr>
+        <p:txBody>
+          <a:bodyPr wrap="square" lIns="0" tIns="0" rIns="0" bIns="0" rtlCol="0" anchor="ctr"/>
+          <a:lstStyle/>
+          <a:p>
+            <a:pPr indent="0" marL="0">
+              <a:buNone/>
+            </a:pPr>
+            <a:r>
+              <a:rPr lang="en-US" sz="720" b="1" dirty="0">
+                <a:solidFill>
+                  <a:srgbClr val="12293A"/>
+                </a:solidFill>
+                <a:latin typeface="Poppins" pitchFamily="34" charset="0"/>
+                <a:ea typeface="Poppins" pitchFamily="34" charset="-122"/>
+                <a:cs typeface="Poppins" pitchFamily="34" charset="-120"/>
+              </a:rPr>
+              <a:t>Chris Huang</a:t>
+            </a:r>
+            <a:endParaRPr lang="en-US" sz="720" dirty="0"/>
+          </a:p>
+        </p:txBody>
+      </p:sp>
+      <p:sp>
+        <p:nvSpPr>
+          <p:cNvPr id="102" name="Shape 100"/>
+          <p:cNvSpPr/>
+          <p:nvPr/>
+        </p:nvSpPr>
+        <p:spPr>
+          <a:xfrm>
+            <a:off x="2084832" y="3781293"/>
+            <a:ext cx="996696" cy="136744"/>
+          </a:xfrm>
+          <a:prstGeom prst="rect">
+            <a:avLst/>
+          </a:prstGeom>
+          <a:solidFill>
+            <a:srgbClr val="EDF5F7"/>
+          </a:solidFill>
+          <a:ln/>
+        </p:spPr>
+      </p:sp>
+      <p:sp>
+        <p:nvSpPr>
+          <p:cNvPr id="103" name="Text 101"/>
+          <p:cNvSpPr txBox="1"/>
+          <p:nvPr/>
+        </p:nvSpPr>
+        <p:spPr>
+          <a:xfrm>
+            <a:off x="2057400" y="3773978"/>
+            <a:ext cx="1051560" cy="150460"/>
+          </a:xfrm>
+          <a:prstGeom prst="rect">
+            <a:avLst/>
+          </a:prstGeom>
+          <a:noFill/>
+          <a:ln/>
+        </p:spPr>
+        <p:txBody>
+          <a:bodyPr wrap="square" lIns="0" tIns="0" rIns="0" bIns="0" rtlCol="0" anchor="ctr"/>
+          <a:lstStyle/>
+          <a:p>
+            <a:pPr algn="ctr" indent="0" marL="0">
+              <a:buNone/>
+            </a:pPr>
+            <a:r>
+              <a:rPr lang="en-US" sz="680" dirty="0">
+                <a:solidFill>
+                  <a:srgbClr val="12293A"/>
+                </a:solidFill>
+                <a:latin typeface="Poppins" pitchFamily="34" charset="0"/>
+                <a:ea typeface="Poppins" pitchFamily="34" charset="-122"/>
+                <a:cs typeface="Poppins" pitchFamily="34" charset="-120"/>
+              </a:rPr>
+              <a:t>19,535</a:t>
+            </a:r>
+            <a:endParaRPr lang="en-US" sz="680" dirty="0"/>
+          </a:p>
+        </p:txBody>
+      </p:sp>
+      <p:sp>
+        <p:nvSpPr>
+          <p:cNvPr id="104" name="Shape 102"/>
+          <p:cNvSpPr/>
+          <p:nvPr/>
+        </p:nvSpPr>
+        <p:spPr>
+          <a:xfrm>
+            <a:off x="3163824" y="3781293"/>
+            <a:ext cx="996696" cy="136744"/>
+          </a:xfrm>
+          <a:prstGeom prst="rect">
+            <a:avLst/>
+          </a:prstGeom>
+          <a:solidFill>
+            <a:srgbClr val="EDF5F7"/>
+          </a:solidFill>
+          <a:ln/>
+        </p:spPr>
+      </p:sp>
+      <p:sp>
+        <p:nvSpPr>
+          <p:cNvPr id="105" name="Text 103"/>
+          <p:cNvSpPr txBox="1"/>
+          <p:nvPr/>
+        </p:nvSpPr>
+        <p:spPr>
+          <a:xfrm>
+            <a:off x="3136392" y="3773978"/>
+            <a:ext cx="1051560" cy="150460"/>
+          </a:xfrm>
+          <a:prstGeom prst="rect">
+            <a:avLst/>
+          </a:prstGeom>
+          <a:noFill/>
+          <a:ln/>
+        </p:spPr>
+        <p:txBody>
+          <a:bodyPr wrap="square" lIns="0" tIns="0" rIns="0" bIns="0" rtlCol="0" anchor="ctr"/>
+          <a:lstStyle/>
+          <a:p>
+            <a:pPr algn="ctr" indent="0" marL="0">
+              <a:buNone/>
+            </a:pPr>
+            <a:r>
+              <a:rPr lang="en-US" sz="680" dirty="0">
+                <a:solidFill>
+                  <a:srgbClr val="12293A"/>
+                </a:solidFill>
+                <a:latin typeface="Poppins" pitchFamily="34" charset="0"/>
+                <a:ea typeface="Poppins" pitchFamily="34" charset="-122"/>
+                <a:cs typeface="Poppins" pitchFamily="34" charset="-120"/>
+              </a:rPr>
+              <a:t>12,856</a:t>
+            </a:r>
+            <a:endParaRPr lang="en-US" sz="680" dirty="0"/>
+          </a:p>
+        </p:txBody>
+      </p:sp>
+      <p:sp>
+        <p:nvSpPr>
+          <p:cNvPr id="106" name="Shape 104"/>
+          <p:cNvSpPr/>
+          <p:nvPr/>
+        </p:nvSpPr>
+        <p:spPr>
+          <a:xfrm>
+            <a:off x="4242816" y="3781293"/>
+            <a:ext cx="996696" cy="136744"/>
+          </a:xfrm>
+          <a:prstGeom prst="rect">
+            <a:avLst/>
+          </a:prstGeom>
+          <a:solidFill>
+            <a:srgbClr val="EDF5F7"/>
+          </a:solidFill>
+          <a:ln/>
+        </p:spPr>
+      </p:sp>
+      <p:sp>
+        <p:nvSpPr>
+          <p:cNvPr id="107" name="Text 105"/>
+          <p:cNvSpPr txBox="1"/>
+          <p:nvPr/>
+        </p:nvSpPr>
+        <p:spPr>
+          <a:xfrm>
+            <a:off x="4215384" y="3773978"/>
+            <a:ext cx="1051560" cy="150460"/>
+          </a:xfrm>
+          <a:prstGeom prst="rect">
+            <a:avLst/>
+          </a:prstGeom>
+          <a:noFill/>
+          <a:ln/>
+        </p:spPr>
+        <p:txBody>
+          <a:bodyPr wrap="square" lIns="0" tIns="0" rIns="0" bIns="0" rtlCol="0" anchor="ctr"/>
+          <a:lstStyle/>
+          <a:p>
+            <a:pPr algn="ctr" indent="0" marL="0">
+              <a:buNone/>
+            </a:pPr>
+            <a:r>
+              <a:rPr lang="en-US" sz="680" dirty="0">
+                <a:solidFill>
+                  <a:srgbClr val="12293A"/>
+                </a:solidFill>
+                <a:latin typeface="Poppins" pitchFamily="34" charset="0"/>
+                <a:ea typeface="Poppins" pitchFamily="34" charset="-122"/>
+                <a:cs typeface="Poppins" pitchFamily="34" charset="-120"/>
+              </a:rPr>
+              <a:t>17,516</a:t>
+            </a:r>
+            <a:endParaRPr lang="en-US" sz="680" dirty="0"/>
+          </a:p>
+        </p:txBody>
+      </p:sp>
+      <p:sp>
+        <p:nvSpPr>
+          <p:cNvPr id="108" name="Shape 106"/>
+          <p:cNvSpPr/>
+          <p:nvPr/>
+        </p:nvSpPr>
+        <p:spPr>
+          <a:xfrm>
+            <a:off x="5321808" y="3781293"/>
+            <a:ext cx="996696" cy="136744"/>
+          </a:xfrm>
+          <a:prstGeom prst="rect">
+            <a:avLst/>
+          </a:prstGeom>
+          <a:solidFill>
+            <a:srgbClr val="EDF5F7"/>
+          </a:solidFill>
+          <a:ln/>
+        </p:spPr>
+      </p:sp>
+      <p:sp>
+        <p:nvSpPr>
+          <p:cNvPr id="109" name="Text 107"/>
+          <p:cNvSpPr txBox="1"/>
+          <p:nvPr/>
+        </p:nvSpPr>
+        <p:spPr>
+          <a:xfrm>
+            <a:off x="5294376" y="3773978"/>
+            <a:ext cx="1051560" cy="150460"/>
+          </a:xfrm>
+          <a:prstGeom prst="rect">
+            <a:avLst/>
+          </a:prstGeom>
+          <a:noFill/>
+          <a:ln/>
+        </p:spPr>
+        <p:txBody>
+          <a:bodyPr wrap="square" lIns="0" tIns="0" rIns="0" bIns="0" rtlCol="0" anchor="ctr"/>
+          <a:lstStyle/>
+          <a:p>
+            <a:pPr algn="ctr" indent="0" marL="0">
+              <a:buNone/>
+            </a:pPr>
+            <a:r>
+              <a:rPr lang="en-US" sz="680" dirty="0">
+                <a:solidFill>
+                  <a:srgbClr val="12293A"/>
+                </a:solidFill>
+                <a:latin typeface="Poppins" pitchFamily="34" charset="0"/>
+                <a:ea typeface="Poppins" pitchFamily="34" charset="-122"/>
+                <a:cs typeface="Poppins" pitchFamily="34" charset="-120"/>
+              </a:rPr>
+              <a:t>5,907</a:t>
+            </a:r>
+            <a:endParaRPr lang="en-US" sz="680" dirty="0"/>
+          </a:p>
+        </p:txBody>
+      </p:sp>
+      <p:sp>
+        <p:nvSpPr>
+          <p:cNvPr id="110" name="Text 108"/>
+          <p:cNvSpPr txBox="1"/>
+          <p:nvPr/>
+        </p:nvSpPr>
+        <p:spPr>
+          <a:xfrm>
+            <a:off x="6400800" y="3773978"/>
+            <a:ext cx="1280160" cy="150460"/>
+          </a:xfrm>
+          <a:prstGeom prst="rect">
+            <a:avLst/>
+          </a:prstGeom>
+          <a:noFill/>
+          <a:ln/>
+        </p:spPr>
+        <p:txBody>
+          <a:bodyPr wrap="square" lIns="0" tIns="0" rIns="0" bIns="0" rtlCol="0" anchor="ctr"/>
+          <a:lstStyle/>
+          <a:p>
+            <a:pPr algn="r" indent="0" marL="0">
+              <a:buNone/>
+            </a:pPr>
+            <a:r>
+              <a:rPr lang="en-US" sz="700" b="1" dirty="0">
+                <a:solidFill>
+                  <a:srgbClr val="5E7280"/>
+                </a:solidFill>
+                <a:latin typeface="Poppins" pitchFamily="34" charset="0"/>
+                <a:ea typeface="Poppins" pitchFamily="34" charset="-122"/>
+                <a:cs typeface="Poppins" pitchFamily="34" charset="-120"/>
+              </a:rPr>
+              <a:t>55,814</a:t>
+            </a:r>
+            <a:endParaRPr lang="en-US" sz="700" dirty="0"/>
+          </a:p>
+        </p:txBody>
+      </p:sp>
+      <p:sp>
+        <p:nvSpPr>
+          <p:cNvPr id="111" name="Text 109"/>
+          <p:cNvSpPr txBox="1"/>
+          <p:nvPr/>
+        </p:nvSpPr>
+        <p:spPr>
+          <a:xfrm>
+            <a:off x="594360" y="3933583"/>
+            <a:ext cx="1417320" cy="150460"/>
+          </a:xfrm>
+          <a:prstGeom prst="rect">
+            <a:avLst/>
+          </a:prstGeom>
+          <a:noFill/>
+          <a:ln/>
+        </p:spPr>
+        <p:txBody>
+          <a:bodyPr wrap="square" lIns="0" tIns="0" rIns="0" bIns="0" rtlCol="0" anchor="ctr"/>
+          <a:lstStyle/>
+          <a:p>
+            <a:pPr indent="0" marL="0">
+              <a:buNone/>
+            </a:pPr>
+            <a:r>
+              <a:rPr lang="en-US" sz="720" b="1" dirty="0">
+                <a:solidFill>
+                  <a:srgbClr val="12293A"/>
+                </a:solidFill>
+                <a:latin typeface="Poppins" pitchFamily="34" charset="0"/>
+                <a:ea typeface="Poppins" pitchFamily="34" charset="-122"/>
+                <a:cs typeface="Poppins" pitchFamily="34" charset="-120"/>
+              </a:rPr>
+              <a:t>Rahul Kumar</a:t>
+            </a:r>
+            <a:endParaRPr lang="en-US" sz="720" dirty="0"/>
+          </a:p>
+        </p:txBody>
+      </p:sp>
+      <p:sp>
+        <p:nvSpPr>
+          <p:cNvPr id="112" name="Text 110"/>
+          <p:cNvSpPr txBox="1"/>
+          <p:nvPr/>
+        </p:nvSpPr>
+        <p:spPr>
+          <a:xfrm>
+            <a:off x="2057400" y="3933583"/>
+            <a:ext cx="1051560" cy="150460"/>
+          </a:xfrm>
+          <a:prstGeom prst="rect">
+            <a:avLst/>
+          </a:prstGeom>
+          <a:noFill/>
+          <a:ln/>
+        </p:spPr>
+        <p:txBody>
+          <a:bodyPr wrap="square" lIns="0" tIns="0" rIns="0" bIns="0" rtlCol="0" anchor="ctr"/>
+          <a:lstStyle/>
+          <a:p>
+            <a:pPr algn="ctr" indent="0" marL="0">
+              <a:buNone/>
+            </a:pPr>
+            <a:r>
+              <a:rPr lang="en-US" sz="680" dirty="0">
+                <a:solidFill>
+                  <a:srgbClr val="8FA1AC"/>
+                </a:solidFill>
+                <a:latin typeface="Poppins" pitchFamily="34" charset="0"/>
+                <a:ea typeface="Poppins" pitchFamily="34" charset="-122"/>
+                <a:cs typeface="Poppins" pitchFamily="34" charset="-120"/>
+              </a:rPr>
+              <a:t>—</a:t>
+            </a:r>
+            <a:endParaRPr lang="en-US" sz="680" dirty="0"/>
+          </a:p>
+        </p:txBody>
+      </p:sp>
+      <p:sp>
+        <p:nvSpPr>
+          <p:cNvPr id="113" name="Shape 111"/>
+          <p:cNvSpPr/>
+          <p:nvPr/>
+        </p:nvSpPr>
+        <p:spPr>
+          <a:xfrm>
+            <a:off x="3163824" y="3940898"/>
+            <a:ext cx="996696" cy="136744"/>
+          </a:xfrm>
+          <a:prstGeom prst="rect">
+            <a:avLst/>
+          </a:prstGeom>
+          <a:solidFill>
+            <a:srgbClr val="D4E9ED"/>
+          </a:solidFill>
+          <a:ln/>
+        </p:spPr>
+      </p:sp>
+      <p:sp>
+        <p:nvSpPr>
+          <p:cNvPr id="114" name="Text 112"/>
+          <p:cNvSpPr txBox="1"/>
+          <p:nvPr/>
+        </p:nvSpPr>
+        <p:spPr>
+          <a:xfrm>
+            <a:off x="3136392" y="3933583"/>
+            <a:ext cx="1051560" cy="150460"/>
+          </a:xfrm>
+          <a:prstGeom prst="rect">
+            <a:avLst/>
+          </a:prstGeom>
+          <a:noFill/>
+          <a:ln/>
+        </p:spPr>
+        <p:txBody>
+          <a:bodyPr wrap="square" lIns="0" tIns="0" rIns="0" bIns="0" rtlCol="0" anchor="ctr"/>
+          <a:lstStyle/>
+          <a:p>
+            <a:pPr algn="ctr" indent="0" marL="0">
+              <a:buNone/>
+            </a:pPr>
+            <a:r>
+              <a:rPr lang="en-US" sz="680" dirty="0">
+                <a:solidFill>
+                  <a:srgbClr val="12293A"/>
+                </a:solidFill>
+                <a:latin typeface="Poppins" pitchFamily="34" charset="0"/>
+                <a:ea typeface="Poppins" pitchFamily="34" charset="-122"/>
+                <a:cs typeface="Poppins" pitchFamily="34" charset="-120"/>
+              </a:rPr>
+              <a:t>42,859</a:t>
+            </a:r>
+            <a:endParaRPr lang="en-US" sz="680" dirty="0"/>
+          </a:p>
+        </p:txBody>
+      </p:sp>
+      <p:sp>
+        <p:nvSpPr>
+          <p:cNvPr id="115" name="Shape 113"/>
+          <p:cNvSpPr/>
+          <p:nvPr/>
+        </p:nvSpPr>
+        <p:spPr>
+          <a:xfrm>
+            <a:off x="4242816" y="3940898"/>
+            <a:ext cx="996696" cy="136744"/>
+          </a:xfrm>
+          <a:prstGeom prst="rect">
+            <a:avLst/>
+          </a:prstGeom>
+          <a:solidFill>
+            <a:srgbClr val="EDF5F7"/>
+          </a:solidFill>
+          <a:ln/>
+        </p:spPr>
+      </p:sp>
+      <p:sp>
+        <p:nvSpPr>
+          <p:cNvPr id="116" name="Text 114"/>
+          <p:cNvSpPr txBox="1"/>
+          <p:nvPr/>
+        </p:nvSpPr>
+        <p:spPr>
+          <a:xfrm>
+            <a:off x="4215384" y="3933583"/>
+            <a:ext cx="1051560" cy="150460"/>
+          </a:xfrm>
+          <a:prstGeom prst="rect">
+            <a:avLst/>
+          </a:prstGeom>
+          <a:noFill/>
+          <a:ln/>
+        </p:spPr>
+        <p:txBody>
+          <a:bodyPr wrap="square" lIns="0" tIns="0" rIns="0" bIns="0" rtlCol="0" anchor="ctr"/>
+          <a:lstStyle/>
+          <a:p>
+            <a:pPr algn="ctr" indent="0" marL="0">
+              <a:buNone/>
+            </a:pPr>
+            <a:r>
+              <a:rPr lang="en-US" sz="680" dirty="0">
+                <a:solidFill>
+                  <a:srgbClr val="12293A"/>
+                </a:solidFill>
+                <a:latin typeface="Poppins" pitchFamily="34" charset="0"/>
+                <a:ea typeface="Poppins" pitchFamily="34" charset="-122"/>
+                <a:cs typeface="Poppins" pitchFamily="34" charset="-120"/>
+              </a:rPr>
+              <a:t>23,286</a:t>
+            </a:r>
+            <a:endParaRPr lang="en-US" sz="680" dirty="0"/>
+          </a:p>
+        </p:txBody>
+      </p:sp>
+      <p:sp>
+        <p:nvSpPr>
+          <p:cNvPr id="117" name="Shape 115"/>
+          <p:cNvSpPr/>
+          <p:nvPr/>
+        </p:nvSpPr>
+        <p:spPr>
+          <a:xfrm>
+            <a:off x="5321808" y="3940898"/>
+            <a:ext cx="996696" cy="136744"/>
+          </a:xfrm>
+          <a:prstGeom prst="rect">
+            <a:avLst/>
+          </a:prstGeom>
+          <a:solidFill>
+            <a:srgbClr val="EDF5F7"/>
+          </a:solidFill>
+          <a:ln/>
+        </p:spPr>
+      </p:sp>
+      <p:sp>
+        <p:nvSpPr>
+          <p:cNvPr id="118" name="Text 116"/>
+          <p:cNvSpPr txBox="1"/>
+          <p:nvPr/>
+        </p:nvSpPr>
+        <p:spPr>
+          <a:xfrm>
+            <a:off x="5294376" y="3933583"/>
+            <a:ext cx="1051560" cy="150460"/>
+          </a:xfrm>
+          <a:prstGeom prst="rect">
+            <a:avLst/>
+          </a:prstGeom>
+          <a:noFill/>
+          <a:ln/>
+        </p:spPr>
+        <p:txBody>
+          <a:bodyPr wrap="square" lIns="0" tIns="0" rIns="0" bIns="0" rtlCol="0" anchor="ctr"/>
+          <a:lstStyle/>
+          <a:p>
+            <a:pPr algn="ctr" indent="0" marL="0">
+              <a:buNone/>
+            </a:pPr>
+            <a:r>
+              <a:rPr lang="en-US" sz="680" dirty="0">
+                <a:solidFill>
+                  <a:srgbClr val="12293A"/>
+                </a:solidFill>
+                <a:latin typeface="Poppins" pitchFamily="34" charset="0"/>
+                <a:ea typeface="Poppins" pitchFamily="34" charset="-122"/>
+                <a:cs typeface="Poppins" pitchFamily="34" charset="-120"/>
+              </a:rPr>
+              <a:t>17,140</a:t>
+            </a:r>
+            <a:endParaRPr lang="en-US" sz="680" dirty="0"/>
+          </a:p>
+        </p:txBody>
+      </p:sp>
+      <p:sp>
+        <p:nvSpPr>
+          <p:cNvPr id="119" name="Text 117"/>
+          <p:cNvSpPr txBox="1"/>
+          <p:nvPr/>
+        </p:nvSpPr>
+        <p:spPr>
+          <a:xfrm>
+            <a:off x="6400800" y="3933583"/>
+            <a:ext cx="1280160" cy="150460"/>
+          </a:xfrm>
+          <a:prstGeom prst="rect">
+            <a:avLst/>
+          </a:prstGeom>
+          <a:noFill/>
+          <a:ln/>
+        </p:spPr>
+        <p:txBody>
+          <a:bodyPr wrap="square" lIns="0" tIns="0" rIns="0" bIns="0" rtlCol="0" anchor="ctr"/>
+          <a:lstStyle/>
+          <a:p>
+            <a:pPr algn="r" indent="0" marL="0">
+              <a:buNone/>
+            </a:pPr>
+            <a:r>
+              <a:rPr lang="en-US" sz="700" b="1" dirty="0">
+                <a:solidFill>
+                  <a:srgbClr val="5E7280"/>
+                </a:solidFill>
+                <a:latin typeface="Poppins" pitchFamily="34" charset="0"/>
+                <a:ea typeface="Poppins" pitchFamily="34" charset="-122"/>
+                <a:cs typeface="Poppins" pitchFamily="34" charset="-120"/>
+              </a:rPr>
+              <a:t>83,285</a:t>
+            </a:r>
+            <a:endParaRPr lang="en-US" sz="700" dirty="0"/>
+          </a:p>
+        </p:txBody>
+      </p:sp>
+      <p:sp>
+        <p:nvSpPr>
+          <p:cNvPr id="120" name="Text 118"/>
+          <p:cNvSpPr txBox="1"/>
+          <p:nvPr/>
+        </p:nvSpPr>
+        <p:spPr>
+          <a:xfrm>
+            <a:off x="594360" y="4093187"/>
+            <a:ext cx="1417320" cy="150460"/>
+          </a:xfrm>
+          <a:prstGeom prst="rect">
+            <a:avLst/>
+          </a:prstGeom>
+          <a:noFill/>
+          <a:ln/>
+        </p:spPr>
+        <p:txBody>
+          <a:bodyPr wrap="square" lIns="0" tIns="0" rIns="0" bIns="0" rtlCol="0" anchor="ctr"/>
+          <a:lstStyle/>
+          <a:p>
+            <a:pPr indent="0" marL="0">
+              <a:buNone/>
+            </a:pPr>
+            <a:r>
+              <a:rPr lang="en-US" sz="720" b="1" dirty="0">
+                <a:solidFill>
+                  <a:srgbClr val="12293A"/>
+                </a:solidFill>
+                <a:latin typeface="Poppins" pitchFamily="34" charset="0"/>
+                <a:ea typeface="Poppins" pitchFamily="34" charset="-122"/>
+                <a:cs typeface="Poppins" pitchFamily="34" charset="-120"/>
+              </a:rPr>
+              <a:t>Mohamed Ammar</a:t>
+            </a:r>
+            <a:endParaRPr lang="en-US" sz="720" dirty="0"/>
+          </a:p>
+        </p:txBody>
+      </p:sp>
+      <p:sp>
+        <p:nvSpPr>
+          <p:cNvPr id="121" name="Shape 119"/>
+          <p:cNvSpPr/>
+          <p:nvPr/>
+        </p:nvSpPr>
+        <p:spPr>
+          <a:xfrm>
+            <a:off x="2084832" y="4100502"/>
+            <a:ext cx="996696" cy="136744"/>
+          </a:xfrm>
+          <a:prstGeom prst="rect">
+            <a:avLst/>
+          </a:prstGeom>
+          <a:solidFill>
+            <a:srgbClr val="EDF5F7"/>
+          </a:solidFill>
+          <a:ln/>
+        </p:spPr>
+      </p:sp>
+      <p:sp>
+        <p:nvSpPr>
+          <p:cNvPr id="122" name="Text 120"/>
+          <p:cNvSpPr txBox="1"/>
+          <p:nvPr/>
+        </p:nvSpPr>
+        <p:spPr>
+          <a:xfrm>
+            <a:off x="2057400" y="4093187"/>
+            <a:ext cx="1051560" cy="150460"/>
+          </a:xfrm>
+          <a:prstGeom prst="rect">
+            <a:avLst/>
+          </a:prstGeom>
+          <a:noFill/>
+          <a:ln/>
+        </p:spPr>
+        <p:txBody>
+          <a:bodyPr wrap="square" lIns="0" tIns="0" rIns="0" bIns="0" rtlCol="0" anchor="ctr"/>
+          <a:lstStyle/>
+          <a:p>
+            <a:pPr algn="ctr" indent="0" marL="0">
+              <a:buNone/>
+            </a:pPr>
+            <a:r>
+              <a:rPr lang="en-US" sz="680" dirty="0">
+                <a:solidFill>
+                  <a:srgbClr val="12293A"/>
+                </a:solidFill>
+                <a:latin typeface="Poppins" pitchFamily="34" charset="0"/>
+                <a:ea typeface="Poppins" pitchFamily="34" charset="-122"/>
+                <a:cs typeface="Poppins" pitchFamily="34" charset="-120"/>
+              </a:rPr>
+              <a:t>6,582</a:t>
+            </a:r>
+            <a:endParaRPr lang="en-US" sz="680" dirty="0"/>
+          </a:p>
+        </p:txBody>
+      </p:sp>
+      <p:sp>
+        <p:nvSpPr>
+          <p:cNvPr id="123" name="Shape 121"/>
+          <p:cNvSpPr/>
+          <p:nvPr/>
+        </p:nvSpPr>
+        <p:spPr>
+          <a:xfrm>
+            <a:off x="3163824" y="4100502"/>
+            <a:ext cx="996696" cy="136744"/>
+          </a:xfrm>
+          <a:prstGeom prst="rect">
+            <a:avLst/>
+          </a:prstGeom>
+          <a:solidFill>
+            <a:srgbClr val="EDF5F7"/>
+          </a:solidFill>
+          <a:ln/>
+        </p:spPr>
+      </p:sp>
+      <p:sp>
+        <p:nvSpPr>
+          <p:cNvPr id="124" name="Text 122"/>
+          <p:cNvSpPr txBox="1"/>
+          <p:nvPr/>
+        </p:nvSpPr>
+        <p:spPr>
+          <a:xfrm>
+            <a:off x="3136392" y="4093187"/>
+            <a:ext cx="1051560" cy="150460"/>
+          </a:xfrm>
+          <a:prstGeom prst="rect">
+            <a:avLst/>
+          </a:prstGeom>
+          <a:noFill/>
+          <a:ln/>
+        </p:spPr>
+        <p:txBody>
+          <a:bodyPr wrap="square" lIns="0" tIns="0" rIns="0" bIns="0" rtlCol="0" anchor="ctr"/>
+          <a:lstStyle/>
+          <a:p>
+            <a:pPr algn="ctr" indent="0" marL="0">
+              <a:buNone/>
+            </a:pPr>
+            <a:r>
+              <a:rPr lang="en-US" sz="680" dirty="0">
+                <a:solidFill>
+                  <a:srgbClr val="12293A"/>
+                </a:solidFill>
+                <a:latin typeface="Poppins" pitchFamily="34" charset="0"/>
+                <a:ea typeface="Poppins" pitchFamily="34" charset="-122"/>
+                <a:cs typeface="Poppins" pitchFamily="34" charset="-120"/>
+              </a:rPr>
+              <a:t>23,266</a:t>
+            </a:r>
+            <a:endParaRPr lang="en-US" sz="680" dirty="0"/>
+          </a:p>
+        </p:txBody>
+      </p:sp>
+      <p:sp>
+        <p:nvSpPr>
+          <p:cNvPr id="125" name="Shape 123"/>
+          <p:cNvSpPr/>
+          <p:nvPr/>
+        </p:nvSpPr>
+        <p:spPr>
+          <a:xfrm>
+            <a:off x="4242816" y="4100502"/>
+            <a:ext cx="996696" cy="136744"/>
+          </a:xfrm>
+          <a:prstGeom prst="rect">
+            <a:avLst/>
+          </a:prstGeom>
+          <a:solidFill>
+            <a:srgbClr val="EDF5F7"/>
+          </a:solidFill>
+          <a:ln/>
+        </p:spPr>
+      </p:sp>
+      <p:sp>
+        <p:nvSpPr>
+          <p:cNvPr id="126" name="Text 124"/>
+          <p:cNvSpPr txBox="1"/>
+          <p:nvPr/>
+        </p:nvSpPr>
+        <p:spPr>
+          <a:xfrm>
+            <a:off x="4215384" y="4093187"/>
+            <a:ext cx="1051560" cy="150460"/>
+          </a:xfrm>
+          <a:prstGeom prst="rect">
+            <a:avLst/>
+          </a:prstGeom>
+          <a:noFill/>
+          <a:ln/>
+        </p:spPr>
+        <p:txBody>
+          <a:bodyPr wrap="square" lIns="0" tIns="0" rIns="0" bIns="0" rtlCol="0" anchor="ctr"/>
+          <a:lstStyle/>
+          <a:p>
+            <a:pPr algn="ctr" indent="0" marL="0">
+              <a:buNone/>
+            </a:pPr>
+            <a:r>
+              <a:rPr lang="en-US" sz="680" dirty="0">
+                <a:solidFill>
+                  <a:srgbClr val="12293A"/>
+                </a:solidFill>
+                <a:latin typeface="Poppins" pitchFamily="34" charset="0"/>
+                <a:ea typeface="Poppins" pitchFamily="34" charset="-122"/>
+                <a:cs typeface="Poppins" pitchFamily="34" charset="-120"/>
+              </a:rPr>
+              <a:t>4,322</a:t>
+            </a:r>
+            <a:endParaRPr lang="en-US" sz="680" dirty="0"/>
+          </a:p>
+        </p:txBody>
+      </p:sp>
+      <p:sp>
+        <p:nvSpPr>
+          <p:cNvPr id="127" name="Shape 125"/>
+          <p:cNvSpPr/>
+          <p:nvPr/>
+        </p:nvSpPr>
+        <p:spPr>
+          <a:xfrm>
+            <a:off x="5321808" y="4100502"/>
+            <a:ext cx="996696" cy="136744"/>
+          </a:xfrm>
+          <a:prstGeom prst="rect">
+            <a:avLst/>
+          </a:prstGeom>
+          <a:solidFill>
+            <a:srgbClr val="EDF5F7"/>
+          </a:solidFill>
+          <a:ln/>
+        </p:spPr>
+      </p:sp>
+      <p:sp>
+        <p:nvSpPr>
+          <p:cNvPr id="128" name="Text 126"/>
+          <p:cNvSpPr txBox="1"/>
+          <p:nvPr/>
+        </p:nvSpPr>
+        <p:spPr>
+          <a:xfrm>
+            <a:off x="5294376" y="4093187"/>
+            <a:ext cx="1051560" cy="150460"/>
+          </a:xfrm>
+          <a:prstGeom prst="rect">
+            <a:avLst/>
+          </a:prstGeom>
+          <a:noFill/>
+          <a:ln/>
+        </p:spPr>
+        <p:txBody>
+          <a:bodyPr wrap="square" lIns="0" tIns="0" rIns="0" bIns="0" rtlCol="0" anchor="ctr"/>
+          <a:lstStyle/>
+          <a:p>
+            <a:pPr algn="ctr" indent="0" marL="0">
+              <a:buNone/>
+            </a:pPr>
+            <a:r>
+              <a:rPr lang="en-US" sz="680" dirty="0">
+                <a:solidFill>
+                  <a:srgbClr val="12293A"/>
+                </a:solidFill>
+                <a:latin typeface="Poppins" pitchFamily="34" charset="0"/>
+                <a:ea typeface="Poppins" pitchFamily="34" charset="-122"/>
+                <a:cs typeface="Poppins" pitchFamily="34" charset="-120"/>
+              </a:rPr>
+              <a:t>5,548</a:t>
+            </a:r>
+            <a:endParaRPr lang="en-US" sz="680" dirty="0"/>
+          </a:p>
+        </p:txBody>
+      </p:sp>
+      <p:sp>
+        <p:nvSpPr>
+          <p:cNvPr id="129" name="Text 127"/>
+          <p:cNvSpPr txBox="1"/>
+          <p:nvPr/>
+        </p:nvSpPr>
+        <p:spPr>
+          <a:xfrm>
+            <a:off x="6400800" y="4093187"/>
+            <a:ext cx="1280160" cy="150460"/>
+          </a:xfrm>
+          <a:prstGeom prst="rect">
+            <a:avLst/>
+          </a:prstGeom>
+          <a:noFill/>
+          <a:ln/>
+        </p:spPr>
+        <p:txBody>
+          <a:bodyPr wrap="square" lIns="0" tIns="0" rIns="0" bIns="0" rtlCol="0" anchor="ctr"/>
+          <a:lstStyle/>
+          <a:p>
+            <a:pPr algn="r" indent="0" marL="0">
+              <a:buNone/>
+            </a:pPr>
+            <a:r>
+              <a:rPr lang="en-US" sz="700" b="1" dirty="0">
+                <a:solidFill>
+                  <a:srgbClr val="5E7280"/>
+                </a:solidFill>
+                <a:latin typeface="Poppins" pitchFamily="34" charset="0"/>
+                <a:ea typeface="Poppins" pitchFamily="34" charset="-122"/>
+                <a:cs typeface="Poppins" pitchFamily="34" charset="-120"/>
+              </a:rPr>
+              <a:t>39,718</a:t>
+            </a:r>
+            <a:endParaRPr lang="en-US" sz="700" dirty="0"/>
+          </a:p>
+        </p:txBody>
+      </p:sp>
+      <p:sp>
+        <p:nvSpPr>
+          <p:cNvPr id="130" name="Text 128"/>
+          <p:cNvSpPr txBox="1"/>
+          <p:nvPr/>
+        </p:nvSpPr>
+        <p:spPr>
+          <a:xfrm>
+            <a:off x="594360" y="4252791"/>
+            <a:ext cx="1417320" cy="150460"/>
+          </a:xfrm>
+          <a:prstGeom prst="rect">
+            <a:avLst/>
+          </a:prstGeom>
+          <a:noFill/>
+          <a:ln/>
+        </p:spPr>
+        <p:txBody>
+          <a:bodyPr wrap="square" lIns="0" tIns="0" rIns="0" bIns="0" rtlCol="0" anchor="ctr"/>
+          <a:lstStyle/>
+          <a:p>
+            <a:pPr indent="0" marL="0">
+              <a:buNone/>
+            </a:pPr>
+            <a:r>
+              <a:rPr lang="en-US" sz="720" b="1" dirty="0">
+                <a:solidFill>
+                  <a:srgbClr val="12293A"/>
+                </a:solidFill>
+                <a:latin typeface="Poppins" pitchFamily="34" charset="0"/>
+                <a:ea typeface="Poppins" pitchFamily="34" charset="-122"/>
+                <a:cs typeface="Poppins" pitchFamily="34" charset="-120"/>
+              </a:rPr>
+              <a:t>Tony Ghoussein</a:t>
+            </a:r>
+            <a:endParaRPr lang="en-US" sz="720" dirty="0"/>
+          </a:p>
+        </p:txBody>
+      </p:sp>
+      <p:sp>
+        <p:nvSpPr>
+          <p:cNvPr id="131" name="Shape 129"/>
+          <p:cNvSpPr/>
+          <p:nvPr/>
+        </p:nvSpPr>
+        <p:spPr>
+          <a:xfrm>
+            <a:off x="2084832" y="4260106"/>
+            <a:ext cx="996696" cy="136744"/>
+          </a:xfrm>
+          <a:prstGeom prst="rect">
+            <a:avLst/>
+          </a:prstGeom>
+          <a:solidFill>
+            <a:srgbClr val="EDF5F7"/>
+          </a:solidFill>
+          <a:ln/>
+        </p:spPr>
+      </p:sp>
+      <p:sp>
+        <p:nvSpPr>
+          <p:cNvPr id="132" name="Text 130"/>
+          <p:cNvSpPr txBox="1"/>
+          <p:nvPr/>
+        </p:nvSpPr>
+        <p:spPr>
+          <a:xfrm>
+            <a:off x="2057400" y="4252791"/>
+            <a:ext cx="1051560" cy="150460"/>
+          </a:xfrm>
+          <a:prstGeom prst="rect">
+            <a:avLst/>
+          </a:prstGeom>
+          <a:noFill/>
+          <a:ln/>
+        </p:spPr>
+        <p:txBody>
+          <a:bodyPr wrap="square" lIns="0" tIns="0" rIns="0" bIns="0" rtlCol="0" anchor="ctr"/>
+          <a:lstStyle/>
+          <a:p>
+            <a:pPr algn="ctr" indent="0" marL="0">
+              <a:buNone/>
+            </a:pPr>
+            <a:r>
+              <a:rPr lang="en-US" sz="680" dirty="0">
+                <a:solidFill>
+                  <a:srgbClr val="12293A"/>
+                </a:solidFill>
+                <a:latin typeface="Poppins" pitchFamily="34" charset="0"/>
+                <a:ea typeface="Poppins" pitchFamily="34" charset="-122"/>
+                <a:cs typeface="Poppins" pitchFamily="34" charset="-120"/>
+              </a:rPr>
+              <a:t>6,208</a:t>
+            </a:r>
+            <a:endParaRPr lang="en-US" sz="680" dirty="0"/>
+          </a:p>
+        </p:txBody>
+      </p:sp>
+      <p:sp>
+        <p:nvSpPr>
+          <p:cNvPr id="133" name="Shape 131"/>
+          <p:cNvSpPr/>
+          <p:nvPr/>
+        </p:nvSpPr>
+        <p:spPr>
+          <a:xfrm>
+            <a:off x="3163824" y="4260106"/>
+            <a:ext cx="996696" cy="136744"/>
+          </a:xfrm>
+          <a:prstGeom prst="rect">
+            <a:avLst/>
+          </a:prstGeom>
+          <a:solidFill>
+            <a:srgbClr val="EDF5F7"/>
+          </a:solidFill>
+          <a:ln/>
+        </p:spPr>
+      </p:sp>
+      <p:sp>
+        <p:nvSpPr>
+          <p:cNvPr id="134" name="Text 132"/>
+          <p:cNvSpPr txBox="1"/>
+          <p:nvPr/>
+        </p:nvSpPr>
+        <p:spPr>
+          <a:xfrm>
+            <a:off x="3136392" y="4252791"/>
+            <a:ext cx="1051560" cy="150460"/>
+          </a:xfrm>
+          <a:prstGeom prst="rect">
+            <a:avLst/>
+          </a:prstGeom>
+          <a:noFill/>
+          <a:ln/>
+        </p:spPr>
+        <p:txBody>
+          <a:bodyPr wrap="square" lIns="0" tIns="0" rIns="0" bIns="0" rtlCol="0" anchor="ctr"/>
+          <a:lstStyle/>
+          <a:p>
+            <a:pPr algn="ctr" indent="0" marL="0">
+              <a:buNone/>
+            </a:pPr>
+            <a:r>
+              <a:rPr lang="en-US" sz="680" dirty="0">
+                <a:solidFill>
+                  <a:srgbClr val="12293A"/>
+                </a:solidFill>
+                <a:latin typeface="Poppins" pitchFamily="34" charset="0"/>
+                <a:ea typeface="Poppins" pitchFamily="34" charset="-122"/>
+                <a:cs typeface="Poppins" pitchFamily="34" charset="-120"/>
+              </a:rPr>
+              <a:t>10,369</a:t>
+            </a:r>
+            <a:endParaRPr lang="en-US" sz="680" dirty="0"/>
+          </a:p>
+        </p:txBody>
+      </p:sp>
+      <p:sp>
+        <p:nvSpPr>
+          <p:cNvPr id="135" name="Shape 133"/>
+          <p:cNvSpPr/>
+          <p:nvPr/>
+        </p:nvSpPr>
+        <p:spPr>
+          <a:xfrm>
+            <a:off x="4242816" y="4260106"/>
+            <a:ext cx="996696" cy="136744"/>
+          </a:xfrm>
+          <a:prstGeom prst="rect">
+            <a:avLst/>
+          </a:prstGeom>
+          <a:solidFill>
+            <a:srgbClr val="EDF5F7"/>
+          </a:solidFill>
+          <a:ln/>
+        </p:spPr>
+      </p:sp>
+      <p:sp>
+        <p:nvSpPr>
+          <p:cNvPr id="136" name="Text 134"/>
+          <p:cNvSpPr txBox="1"/>
+          <p:nvPr/>
+        </p:nvSpPr>
+        <p:spPr>
+          <a:xfrm>
+            <a:off x="4215384" y="4252791"/>
+            <a:ext cx="1051560" cy="150460"/>
+          </a:xfrm>
+          <a:prstGeom prst="rect">
+            <a:avLst/>
+          </a:prstGeom>
+          <a:noFill/>
+          <a:ln/>
+        </p:spPr>
+        <p:txBody>
+          <a:bodyPr wrap="square" lIns="0" tIns="0" rIns="0" bIns="0" rtlCol="0" anchor="ctr"/>
+          <a:lstStyle/>
+          <a:p>
+            <a:pPr algn="ctr" indent="0" marL="0">
+              <a:buNone/>
+            </a:pPr>
+            <a:r>
+              <a:rPr lang="en-US" sz="680" dirty="0">
+                <a:solidFill>
+                  <a:srgbClr val="12293A"/>
+                </a:solidFill>
+                <a:latin typeface="Poppins" pitchFamily="34" charset="0"/>
+                <a:ea typeface="Poppins" pitchFamily="34" charset="-122"/>
+                <a:cs typeface="Poppins" pitchFamily="34" charset="-120"/>
+              </a:rPr>
+              <a:t>11,891</a:t>
+            </a:r>
+            <a:endParaRPr lang="en-US" sz="680" dirty="0"/>
+          </a:p>
+        </p:txBody>
+      </p:sp>
+      <p:sp>
+        <p:nvSpPr>
+          <p:cNvPr id="137" name="Shape 135"/>
+          <p:cNvSpPr/>
+          <p:nvPr/>
+        </p:nvSpPr>
+        <p:spPr>
+          <a:xfrm>
+            <a:off x="5321808" y="4260106"/>
+            <a:ext cx="996696" cy="136744"/>
+          </a:xfrm>
+          <a:prstGeom prst="rect">
+            <a:avLst/>
+          </a:prstGeom>
+          <a:solidFill>
+            <a:srgbClr val="EDF5F7"/>
+          </a:solidFill>
+          <a:ln/>
+        </p:spPr>
+      </p:sp>
+      <p:sp>
+        <p:nvSpPr>
+          <p:cNvPr id="138" name="Text 136"/>
+          <p:cNvSpPr txBox="1"/>
+          <p:nvPr/>
+        </p:nvSpPr>
+        <p:spPr>
+          <a:xfrm>
+            <a:off x="5294376" y="4252791"/>
+            <a:ext cx="1051560" cy="150460"/>
+          </a:xfrm>
+          <a:prstGeom prst="rect">
+            <a:avLst/>
+          </a:prstGeom>
+          <a:noFill/>
+          <a:ln/>
+        </p:spPr>
+        <p:txBody>
+          <a:bodyPr wrap="square" lIns="0" tIns="0" rIns="0" bIns="0" rtlCol="0" anchor="ctr"/>
+          <a:lstStyle/>
+          <a:p>
+            <a:pPr algn="ctr" indent="0" marL="0">
+              <a:buNone/>
+            </a:pPr>
+            <a:r>
+              <a:rPr lang="en-US" sz="680" dirty="0">
+                <a:solidFill>
+                  <a:srgbClr val="12293A"/>
+                </a:solidFill>
+                <a:latin typeface="Poppins" pitchFamily="34" charset="0"/>
+                <a:ea typeface="Poppins" pitchFamily="34" charset="-122"/>
+                <a:cs typeface="Poppins" pitchFamily="34" charset="-120"/>
+              </a:rPr>
+              <a:t>26,261</a:t>
+            </a:r>
+            <a:endParaRPr lang="en-US" sz="680" dirty="0"/>
+          </a:p>
+        </p:txBody>
+      </p:sp>
+      <p:sp>
+        <p:nvSpPr>
+          <p:cNvPr id="139" name="Text 137"/>
+          <p:cNvSpPr txBox="1"/>
+          <p:nvPr/>
+        </p:nvSpPr>
+        <p:spPr>
+          <a:xfrm>
+            <a:off x="6400800" y="4252791"/>
+            <a:ext cx="1280160" cy="150460"/>
+          </a:xfrm>
+          <a:prstGeom prst="rect">
+            <a:avLst/>
+          </a:prstGeom>
+          <a:noFill/>
+          <a:ln/>
+        </p:spPr>
+        <p:txBody>
+          <a:bodyPr wrap="square" lIns="0" tIns="0" rIns="0" bIns="0" rtlCol="0" anchor="ctr"/>
+          <a:lstStyle/>
+          <a:p>
+            <a:pPr algn="r" indent="0" marL="0">
+              <a:buNone/>
+            </a:pPr>
+            <a:r>
+              <a:rPr lang="en-US" sz="700" b="1" dirty="0">
+                <a:solidFill>
+                  <a:srgbClr val="5E7280"/>
+                </a:solidFill>
+                <a:latin typeface="Poppins" pitchFamily="34" charset="0"/>
+                <a:ea typeface="Poppins" pitchFamily="34" charset="-122"/>
+                <a:cs typeface="Poppins" pitchFamily="34" charset="-120"/>
+              </a:rPr>
+              <a:t>54,729</a:t>
+            </a:r>
+            <a:endParaRPr lang="en-US" sz="700" dirty="0"/>
+          </a:p>
+        </p:txBody>
+      </p:sp>
+      <p:sp>
+        <p:nvSpPr>
+          <p:cNvPr id="140" name="Text 138"/>
+          <p:cNvSpPr txBox="1"/>
+          <p:nvPr/>
+        </p:nvSpPr>
+        <p:spPr>
+          <a:xfrm>
+            <a:off x="594360" y="4412396"/>
+            <a:ext cx="1417320" cy="150460"/>
+          </a:xfrm>
+          <a:prstGeom prst="rect">
+            <a:avLst/>
+          </a:prstGeom>
+          <a:noFill/>
+          <a:ln/>
+        </p:spPr>
+        <p:txBody>
+          <a:bodyPr wrap="square" lIns="0" tIns="0" rIns="0" bIns="0" rtlCol="0" anchor="ctr"/>
+          <a:lstStyle/>
+          <a:p>
+            <a:pPr indent="0" marL="0">
+              <a:buNone/>
+            </a:pPr>
+            <a:r>
+              <a:rPr lang="en-US" sz="720" b="1" dirty="0">
+                <a:solidFill>
+                  <a:srgbClr val="12293A"/>
+                </a:solidFill>
+                <a:latin typeface="Poppins" pitchFamily="34" charset="0"/>
+                <a:ea typeface="Poppins" pitchFamily="34" charset="-122"/>
+                <a:cs typeface="Poppins" pitchFamily="34" charset="-120"/>
+              </a:rPr>
+              <a:t>Eric Cruz</a:t>
+            </a:r>
+            <a:endParaRPr lang="en-US" sz="720" dirty="0"/>
+          </a:p>
+        </p:txBody>
+      </p:sp>
+      <p:sp>
+        <p:nvSpPr>
+          <p:cNvPr id="141" name="Shape 139"/>
+          <p:cNvSpPr/>
+          <p:nvPr/>
+        </p:nvSpPr>
+        <p:spPr>
+          <a:xfrm>
+            <a:off x="2084832" y="4419711"/>
+            <a:ext cx="996696" cy="136744"/>
+          </a:xfrm>
+          <a:prstGeom prst="rect">
+            <a:avLst/>
+          </a:prstGeom>
+          <a:solidFill>
+            <a:srgbClr val="EDF5F7"/>
+          </a:solidFill>
+          <a:ln/>
+        </p:spPr>
+      </p:sp>
+      <p:sp>
+        <p:nvSpPr>
+          <p:cNvPr id="142" name="Text 140"/>
+          <p:cNvSpPr txBox="1"/>
+          <p:nvPr/>
+        </p:nvSpPr>
+        <p:spPr>
+          <a:xfrm>
+            <a:off x="2057400" y="4412396"/>
+            <a:ext cx="1051560" cy="150460"/>
+          </a:xfrm>
+          <a:prstGeom prst="rect">
+            <a:avLst/>
+          </a:prstGeom>
+          <a:noFill/>
+          <a:ln/>
+        </p:spPr>
+        <p:txBody>
+          <a:bodyPr wrap="square" lIns="0" tIns="0" rIns="0" bIns="0" rtlCol="0" anchor="ctr"/>
+          <a:lstStyle/>
+          <a:p>
+            <a:pPr algn="ctr" indent="0" marL="0">
+              <a:buNone/>
+            </a:pPr>
+            <a:r>
+              <a:rPr lang="en-US" sz="680" dirty="0">
+                <a:solidFill>
+                  <a:srgbClr val="12293A"/>
+                </a:solidFill>
+                <a:latin typeface="Poppins" pitchFamily="34" charset="0"/>
+                <a:ea typeface="Poppins" pitchFamily="34" charset="-122"/>
+                <a:cs typeface="Poppins" pitchFamily="34" charset="-120"/>
+              </a:rPr>
+              <a:t>2,970</a:t>
+            </a:r>
+            <a:endParaRPr lang="en-US" sz="680" dirty="0"/>
+          </a:p>
+        </p:txBody>
+      </p:sp>
+      <p:sp>
+        <p:nvSpPr>
+          <p:cNvPr id="143" name="Shape 141"/>
+          <p:cNvSpPr/>
+          <p:nvPr/>
+        </p:nvSpPr>
+        <p:spPr>
+          <a:xfrm>
+            <a:off x="3163824" y="4419711"/>
+            <a:ext cx="996696" cy="136744"/>
+          </a:xfrm>
+          <a:prstGeom prst="rect">
+            <a:avLst/>
+          </a:prstGeom>
+          <a:solidFill>
+            <a:srgbClr val="EDF5F7"/>
+          </a:solidFill>
+          <a:ln/>
+        </p:spPr>
+      </p:sp>
+      <p:sp>
+        <p:nvSpPr>
+          <p:cNvPr id="144" name="Text 142"/>
+          <p:cNvSpPr txBox="1"/>
+          <p:nvPr/>
+        </p:nvSpPr>
+        <p:spPr>
+          <a:xfrm>
+            <a:off x="3136392" y="4412396"/>
+            <a:ext cx="1051560" cy="150460"/>
+          </a:xfrm>
+          <a:prstGeom prst="rect">
+            <a:avLst/>
+          </a:prstGeom>
+          <a:noFill/>
+          <a:ln/>
+        </p:spPr>
+        <p:txBody>
+          <a:bodyPr wrap="square" lIns="0" tIns="0" rIns="0" bIns="0" rtlCol="0" anchor="ctr"/>
+          <a:lstStyle/>
+          <a:p>
+            <a:pPr algn="ctr" indent="0" marL="0">
+              <a:buNone/>
+            </a:pPr>
+            <a:r>
+              <a:rPr lang="en-US" sz="680" dirty="0">
+                <a:solidFill>
+                  <a:srgbClr val="12293A"/>
+                </a:solidFill>
+                <a:latin typeface="Poppins" pitchFamily="34" charset="0"/>
+                <a:ea typeface="Poppins" pitchFamily="34" charset="-122"/>
+                <a:cs typeface="Poppins" pitchFamily="34" charset="-120"/>
+              </a:rPr>
+              <a:t>7,237</a:t>
+            </a:r>
+            <a:endParaRPr lang="en-US" sz="680" dirty="0"/>
+          </a:p>
+        </p:txBody>
+      </p:sp>
+      <p:sp>
+        <p:nvSpPr>
+          <p:cNvPr id="145" name="Shape 143"/>
+          <p:cNvSpPr/>
+          <p:nvPr/>
+        </p:nvSpPr>
+        <p:spPr>
+          <a:xfrm>
+            <a:off x="4242816" y="4419711"/>
+            <a:ext cx="996696" cy="136744"/>
+          </a:xfrm>
+          <a:prstGeom prst="rect">
+            <a:avLst/>
+          </a:prstGeom>
+          <a:solidFill>
+            <a:srgbClr val="EDF5F7"/>
+          </a:solidFill>
+          <a:ln/>
+        </p:spPr>
+      </p:sp>
+      <p:sp>
+        <p:nvSpPr>
+          <p:cNvPr id="146" name="Text 144"/>
+          <p:cNvSpPr txBox="1"/>
+          <p:nvPr/>
+        </p:nvSpPr>
+        <p:spPr>
+          <a:xfrm>
+            <a:off x="4215384" y="4412396"/>
+            <a:ext cx="1051560" cy="150460"/>
+          </a:xfrm>
+          <a:prstGeom prst="rect">
+            <a:avLst/>
+          </a:prstGeom>
+          <a:noFill/>
+          <a:ln/>
+        </p:spPr>
+        <p:txBody>
+          <a:bodyPr wrap="square" lIns="0" tIns="0" rIns="0" bIns="0" rtlCol="0" anchor="ctr"/>
+          <a:lstStyle/>
+          <a:p>
+            <a:pPr algn="ctr" indent="0" marL="0">
+              <a:buNone/>
+            </a:pPr>
+            <a:r>
+              <a:rPr lang="en-US" sz="680" dirty="0">
+                <a:solidFill>
+                  <a:srgbClr val="12293A"/>
+                </a:solidFill>
+                <a:latin typeface="Poppins" pitchFamily="34" charset="0"/>
+                <a:ea typeface="Poppins" pitchFamily="34" charset="-122"/>
+                <a:cs typeface="Poppins" pitchFamily="34" charset="-120"/>
+              </a:rPr>
+              <a:t>19,289</a:t>
+            </a:r>
+            <a:endParaRPr lang="en-US" sz="680" dirty="0"/>
+          </a:p>
+        </p:txBody>
+      </p:sp>
+      <p:sp>
+        <p:nvSpPr>
+          <p:cNvPr id="147" name="Shape 145"/>
+          <p:cNvSpPr/>
+          <p:nvPr/>
+        </p:nvSpPr>
+        <p:spPr>
+          <a:xfrm>
+            <a:off x="5321808" y="4419711"/>
+            <a:ext cx="996696" cy="136744"/>
+          </a:xfrm>
+          <a:prstGeom prst="rect">
+            <a:avLst/>
+          </a:prstGeom>
+          <a:solidFill>
+            <a:srgbClr val="EDF5F7"/>
+          </a:solidFill>
+          <a:ln/>
+        </p:spPr>
+      </p:sp>
+      <p:sp>
+        <p:nvSpPr>
+          <p:cNvPr id="148" name="Text 146"/>
+          <p:cNvSpPr txBox="1"/>
+          <p:nvPr/>
+        </p:nvSpPr>
+        <p:spPr>
+          <a:xfrm>
+            <a:off x="5294376" y="4412396"/>
+            <a:ext cx="1051560" cy="150460"/>
+          </a:xfrm>
+          <a:prstGeom prst="rect">
+            <a:avLst/>
+          </a:prstGeom>
+          <a:noFill/>
+          <a:ln/>
+        </p:spPr>
+        <p:txBody>
+          <a:bodyPr wrap="square" lIns="0" tIns="0" rIns="0" bIns="0" rtlCol="0" anchor="ctr"/>
+          <a:lstStyle/>
+          <a:p>
+            <a:pPr algn="ctr" indent="0" marL="0">
+              <a:buNone/>
+            </a:pPr>
+            <a:r>
+              <a:rPr lang="en-US" sz="680" dirty="0">
+                <a:solidFill>
+                  <a:srgbClr val="12293A"/>
+                </a:solidFill>
+                <a:latin typeface="Poppins" pitchFamily="34" charset="0"/>
+                <a:ea typeface="Poppins" pitchFamily="34" charset="-122"/>
+                <a:cs typeface="Poppins" pitchFamily="34" charset="-120"/>
+              </a:rPr>
+              <a:t>3,890</a:t>
+            </a:r>
+            <a:endParaRPr lang="en-US" sz="680" dirty="0"/>
+          </a:p>
+        </p:txBody>
+      </p:sp>
+      <p:sp>
+        <p:nvSpPr>
+          <p:cNvPr id="149" name="Text 147"/>
+          <p:cNvSpPr txBox="1"/>
+          <p:nvPr/>
+        </p:nvSpPr>
+        <p:spPr>
+          <a:xfrm>
+            <a:off x="6400800" y="4412396"/>
+            <a:ext cx="1280160" cy="150460"/>
+          </a:xfrm>
+          <a:prstGeom prst="rect">
+            <a:avLst/>
+          </a:prstGeom>
+          <a:noFill/>
+          <a:ln/>
+        </p:spPr>
+        <p:txBody>
+          <a:bodyPr wrap="square" lIns="0" tIns="0" rIns="0" bIns="0" rtlCol="0" anchor="ctr"/>
+          <a:lstStyle/>
+          <a:p>
+            <a:pPr algn="r" indent="0" marL="0">
+              <a:buNone/>
+            </a:pPr>
+            <a:r>
+              <a:rPr lang="en-US" sz="700" b="1" dirty="0">
+                <a:solidFill>
+                  <a:srgbClr val="5E7280"/>
+                </a:solidFill>
+                <a:latin typeface="Poppins" pitchFamily="34" charset="0"/>
+                <a:ea typeface="Poppins" pitchFamily="34" charset="-122"/>
+                <a:cs typeface="Poppins" pitchFamily="34" charset="-120"/>
+              </a:rPr>
+              <a:t>33,386</a:t>
+            </a:r>
+            <a:endParaRPr lang="en-US" sz="700" dirty="0"/>
+          </a:p>
+        </p:txBody>
+      </p:sp>
+      <p:sp>
+        <p:nvSpPr>
+          <p:cNvPr id="150" name="Shape 148"/>
+          <p:cNvSpPr/>
+          <p:nvPr/>
+        </p:nvSpPr>
+        <p:spPr>
+          <a:xfrm>
+            <a:off x="594360" y="4572000"/>
+            <a:ext cx="7132320" cy="10973"/>
+          </a:xfrm>
+          <a:prstGeom prst="rect">
+            <a:avLst/>
+          </a:prstGeom>
+          <a:solidFill>
+            <a:srgbClr val="12293A"/>
+          </a:solidFill>
+          <a:ln/>
+        </p:spPr>
+      </p:sp>
+      <p:sp>
+        <p:nvSpPr>
+          <p:cNvPr id="151" name="Text 149"/>
+          <p:cNvSpPr txBox="1"/>
+          <p:nvPr/>
+        </p:nvSpPr>
+        <p:spPr>
+          <a:xfrm>
+            <a:off x="594360" y="4599432"/>
+            <a:ext cx="1417320" cy="201168"/>
+          </a:xfrm>
+          <a:prstGeom prst="rect">
+            <a:avLst/>
+          </a:prstGeom>
+          <a:noFill/>
+          <a:ln/>
+        </p:spPr>
+        <p:txBody>
+          <a:bodyPr wrap="square" lIns="0" tIns="0" rIns="0" bIns="0" rtlCol="0" anchor="ctr"/>
+          <a:lstStyle/>
+          <a:p>
+            <a:pPr indent="0" marL="0">
+              <a:buNone/>
+            </a:pPr>
+            <a:r>
+              <a:rPr lang="en-US" sz="750" b="1" dirty="0">
+                <a:solidFill>
+                  <a:srgbClr val="12293A"/>
+                </a:solidFill>
+                <a:latin typeface="Poppins" pitchFamily="34" charset="0"/>
+                <a:ea typeface="Poppins" pitchFamily="34" charset="-122"/>
+                <a:cs typeface="Poppins" pitchFamily="34" charset="-120"/>
+              </a:rPr>
+              <a:t>ALL DEVELOPERS</a:t>
+            </a:r>
+            <a:endParaRPr lang="en-US" sz="750" dirty="0"/>
+          </a:p>
+        </p:txBody>
+      </p:sp>
+      <p:sp>
+        <p:nvSpPr>
+          <p:cNvPr id="152" name="Text 150"/>
+          <p:cNvSpPr txBox="1"/>
+          <p:nvPr/>
+        </p:nvSpPr>
+        <p:spPr>
+          <a:xfrm>
+            <a:off x="2057400" y="4599432"/>
+            <a:ext cx="1051560" cy="201168"/>
+          </a:xfrm>
+          <a:prstGeom prst="rect">
+            <a:avLst/>
+          </a:prstGeom>
+          <a:noFill/>
+          <a:ln/>
+        </p:spPr>
+        <p:txBody>
+          <a:bodyPr wrap="square" lIns="0" tIns="0" rIns="0" bIns="0" rtlCol="0" anchor="ctr"/>
+          <a:lstStyle/>
+          <a:p>
+            <a:pPr algn="ctr" indent="0" marL="0">
+              <a:buNone/>
+            </a:pPr>
+            <a:r>
+              <a:rPr lang="en-US" sz="750" b="1" dirty="0">
+                <a:solidFill>
+                  <a:srgbClr val="2C8394"/>
+                </a:solidFill>
+                <a:latin typeface="Poppins" pitchFamily="34" charset="0"/>
+                <a:ea typeface="Poppins" pitchFamily="34" charset="-122"/>
+                <a:cs typeface="Poppins" pitchFamily="34" charset="-120"/>
+              </a:rPr>
+              <a:t>228,132</a:t>
+            </a:r>
+            <a:endParaRPr lang="en-US" sz="750" dirty="0"/>
+          </a:p>
+        </p:txBody>
+      </p:sp>
+      <p:sp>
+        <p:nvSpPr>
+          <p:cNvPr id="153" name="Text 151"/>
+          <p:cNvSpPr txBox="1"/>
+          <p:nvPr/>
+        </p:nvSpPr>
+        <p:spPr>
+          <a:xfrm>
+            <a:off x="3136392" y="4599432"/>
+            <a:ext cx="1051560" cy="201168"/>
+          </a:xfrm>
+          <a:prstGeom prst="rect">
+            <a:avLst/>
+          </a:prstGeom>
+          <a:noFill/>
+          <a:ln/>
+        </p:spPr>
+        <p:txBody>
+          <a:bodyPr wrap="square" lIns="0" tIns="0" rIns="0" bIns="0" rtlCol="0" anchor="ctr"/>
+          <a:lstStyle/>
+          <a:p>
+            <a:pPr algn="ctr" indent="0" marL="0">
+              <a:buNone/>
+            </a:pPr>
+            <a:r>
+              <a:rPr lang="en-US" sz="750" b="1" dirty="0">
+                <a:solidFill>
+                  <a:srgbClr val="2C8394"/>
+                </a:solidFill>
+                <a:latin typeface="Poppins" pitchFamily="34" charset="0"/>
+                <a:ea typeface="Poppins" pitchFamily="34" charset="-122"/>
+                <a:cs typeface="Poppins" pitchFamily="34" charset="-120"/>
+              </a:rPr>
+              <a:t>293,419</a:t>
+            </a:r>
+            <a:endParaRPr lang="en-US" sz="750" dirty="0"/>
+          </a:p>
+        </p:txBody>
+      </p:sp>
+      <p:sp>
+        <p:nvSpPr>
+          <p:cNvPr id="154" name="Text 152"/>
+          <p:cNvSpPr txBox="1"/>
+          <p:nvPr/>
+        </p:nvSpPr>
+        <p:spPr>
+          <a:xfrm>
+            <a:off x="4215384" y="4599432"/>
+            <a:ext cx="1051560" cy="201168"/>
+          </a:xfrm>
+          <a:prstGeom prst="rect">
+            <a:avLst/>
+          </a:prstGeom>
+          <a:noFill/>
+          <a:ln/>
+        </p:spPr>
+        <p:txBody>
+          <a:bodyPr wrap="square" lIns="0" tIns="0" rIns="0" bIns="0" rtlCol="0" anchor="ctr"/>
+          <a:lstStyle/>
+          <a:p>
+            <a:pPr algn="ctr" indent="0" marL="0">
+              <a:buNone/>
+            </a:pPr>
+            <a:r>
+              <a:rPr lang="en-US" sz="750" b="1" dirty="0">
+                <a:solidFill>
+                  <a:srgbClr val="2C8394"/>
+                </a:solidFill>
+                <a:latin typeface="Poppins" pitchFamily="34" charset="0"/>
+                <a:ea typeface="Poppins" pitchFamily="34" charset="-122"/>
+                <a:cs typeface="Poppins" pitchFamily="34" charset="-120"/>
+              </a:rPr>
+              <a:t>277,261</a:t>
+            </a:r>
+            <a:endParaRPr lang="en-US" sz="750" dirty="0"/>
+          </a:p>
+        </p:txBody>
+      </p:sp>
+      <p:sp>
+        <p:nvSpPr>
+          <p:cNvPr id="155" name="Text 153"/>
+          <p:cNvSpPr txBox="1"/>
+          <p:nvPr/>
+        </p:nvSpPr>
+        <p:spPr>
+          <a:xfrm>
+            <a:off x="5294376" y="4599432"/>
+            <a:ext cx="1051560" cy="201168"/>
+          </a:xfrm>
+          <a:prstGeom prst="rect">
+            <a:avLst/>
+          </a:prstGeom>
+          <a:noFill/>
+          <a:ln/>
+        </p:spPr>
+        <p:txBody>
+          <a:bodyPr wrap="square" lIns="0" tIns="0" rIns="0" bIns="0" rtlCol="0" anchor="ctr"/>
+          <a:lstStyle/>
+          <a:p>
+            <a:pPr algn="ctr" indent="0" marL="0">
+              <a:buNone/>
+            </a:pPr>
+            <a:r>
+              <a:rPr lang="en-US" sz="750" b="1" dirty="0">
+                <a:solidFill>
+                  <a:srgbClr val="2C8394"/>
+                </a:solidFill>
+                <a:latin typeface="Poppins" pitchFamily="34" charset="0"/>
+                <a:ea typeface="Poppins" pitchFamily="34" charset="-122"/>
+                <a:cs typeface="Poppins" pitchFamily="34" charset="-120"/>
+              </a:rPr>
+              <a:t>329,436</a:t>
+            </a:r>
+            <a:endParaRPr lang="en-US" sz="750" dirty="0"/>
+          </a:p>
+        </p:txBody>
+      </p:sp>
+      <p:sp>
+        <p:nvSpPr>
+          <p:cNvPr id="156" name="Text 154"/>
+          <p:cNvSpPr txBox="1"/>
+          <p:nvPr/>
+        </p:nvSpPr>
+        <p:spPr>
+          <a:xfrm>
+            <a:off x="6400800" y="4599432"/>
+            <a:ext cx="1280160" cy="201168"/>
+          </a:xfrm>
+          <a:prstGeom prst="rect">
+            <a:avLst/>
+          </a:prstGeom>
+          <a:noFill/>
+          <a:ln/>
+        </p:spPr>
+        <p:txBody>
+          <a:bodyPr wrap="square" lIns="0" tIns="0" rIns="0" bIns="0" rtlCol="0" anchor="ctr"/>
+          <a:lstStyle/>
+          <a:p>
+            <a:pPr algn="r" indent="0" marL="0">
+              <a:buNone/>
+            </a:pPr>
+            <a:r>
+              <a:rPr lang="en-US" sz="750" b="1" dirty="0">
+                <a:solidFill>
+                  <a:srgbClr val="2C8394"/>
+                </a:solidFill>
+                <a:latin typeface="Poppins" pitchFamily="34" charset="0"/>
+                <a:ea typeface="Poppins" pitchFamily="34" charset="-122"/>
+                <a:cs typeface="Poppins" pitchFamily="34" charset="-120"/>
+              </a:rPr>
+              <a:t>1,128,248</a:t>
+            </a:r>
+            <a:endParaRPr lang="en-US" sz="750" dirty="0"/>
+          </a:p>
+        </p:txBody>
+      </p:sp>
+      <p:sp>
+        <p:nvSpPr>
+          <p:cNvPr id="157" name="Text 155"/>
+          <p:cNvSpPr txBox="1"/>
+          <p:nvPr/>
+        </p:nvSpPr>
+        <p:spPr>
+          <a:xfrm>
+            <a:off x="594360" y="4910328"/>
+            <a:ext cx="1417320" cy="201168"/>
+          </a:xfrm>
+          <a:prstGeom prst="rect">
+            <a:avLst/>
+          </a:prstGeom>
+          <a:noFill/>
+          <a:ln/>
+        </p:spPr>
+        <p:txBody>
+          <a:bodyPr wrap="square" lIns="0" tIns="0" rIns="0" bIns="0" rtlCol="0" anchor="ctr"/>
+          <a:lstStyle/>
+          <a:p>
+            <a:pPr indent="0" marL="0">
+              <a:buNone/>
+            </a:pPr>
+            <a:r>
+              <a:rPr lang="en-US" sz="750" b="1" dirty="0">
+                <a:solidFill>
+                  <a:srgbClr val="12293A"/>
+                </a:solidFill>
+                <a:latin typeface="Poppins" pitchFamily="34" charset="0"/>
+                <a:ea typeface="Poppins" pitchFamily="34" charset="-122"/>
+                <a:cs typeface="Poppins" pitchFamily="34" charset="-120"/>
+              </a:rPr>
+              <a:t>BY WEEK  </a:t>
+            </a:r>
+            <a:pPr indent="0" marL="0">
+              <a:buNone/>
+            </a:pPr>
+            <a:r>
+              <a:rPr lang="en-US" sz="600" dirty="0">
+                <a:solidFill>
+                  <a:srgbClr val="8FA1AC"/>
+                </a:solidFill>
+                <a:latin typeface="Poppins" pitchFamily="34" charset="0"/>
+                <a:ea typeface="Poppins" pitchFamily="34" charset="-122"/>
+                <a:cs typeface="Poppins" pitchFamily="34" charset="-120"/>
+              </a:rPr>
+              <a:t>cell = one week</a:t>
+            </a:r>
+            <a:endParaRPr lang="en-US" sz="750" dirty="0"/>
+          </a:p>
+        </p:txBody>
+      </p:sp>
+      <p:sp>
+        <p:nvSpPr>
+          <p:cNvPr id="158" name="Shape 156"/>
+          <p:cNvSpPr/>
+          <p:nvPr/>
+        </p:nvSpPr>
+        <p:spPr>
+          <a:xfrm>
+            <a:off x="2075688" y="4910328"/>
+            <a:ext cx="365107" cy="219456"/>
+          </a:xfrm>
+          <a:prstGeom prst="rect">
+            <a:avLst/>
+          </a:prstGeom>
+          <a:solidFill>
+            <a:srgbClr val="D4E9ED"/>
+          </a:solidFill>
+          <a:ln/>
+        </p:spPr>
+      </p:sp>
+      <p:sp>
+        <p:nvSpPr>
+          <p:cNvPr id="159" name="Text 157"/>
+          <p:cNvSpPr txBox="1"/>
+          <p:nvPr/>
+        </p:nvSpPr>
+        <p:spPr>
+          <a:xfrm>
+            <a:off x="2057400" y="4910328"/>
+            <a:ext cx="401683" cy="219456"/>
+          </a:xfrm>
+          <a:prstGeom prst="rect">
+            <a:avLst/>
+          </a:prstGeom>
+          <a:noFill/>
+          <a:ln/>
+        </p:spPr>
+        <p:txBody>
+          <a:bodyPr wrap="square" lIns="0" tIns="0" rIns="0" bIns="0" rtlCol="0" anchor="ctr"/>
+          <a:lstStyle/>
+          <a:p>
+            <a:pPr algn="ctr" indent="0" marL="0">
+              <a:buNone/>
+            </a:pPr>
+            <a:r>
+              <a:rPr lang="en-US" sz="620" dirty="0">
+                <a:solidFill>
+                  <a:srgbClr val="12293A"/>
+                </a:solidFill>
+                <a:latin typeface="Poppins" pitchFamily="34" charset="0"/>
+                <a:ea typeface="Poppins" pitchFamily="34" charset="-122"/>
+                <a:cs typeface="Poppins" pitchFamily="34" charset="-120"/>
+              </a:rPr>
+              <a:t>28k</a:t>
+            </a:r>
+            <a:endParaRPr lang="en-US" sz="620" dirty="0"/>
+          </a:p>
+        </p:txBody>
+      </p:sp>
+      <p:sp>
+        <p:nvSpPr>
+          <p:cNvPr id="160" name="Text 158"/>
+          <p:cNvSpPr txBox="1"/>
+          <p:nvPr/>
+        </p:nvSpPr>
+        <p:spPr>
+          <a:xfrm>
+            <a:off x="2057400" y="5138928"/>
+            <a:ext cx="401683" cy="146304"/>
+          </a:xfrm>
+          <a:prstGeom prst="rect">
+            <a:avLst/>
+          </a:prstGeom>
+          <a:noFill/>
+          <a:ln/>
+        </p:spPr>
+        <p:txBody>
+          <a:bodyPr wrap="square" lIns="0" tIns="0" rIns="0" bIns="0" rtlCol="0" anchor="ctr"/>
+          <a:lstStyle/>
+          <a:p>
+            <a:pPr algn="ctr" indent="0" marL="0">
+              <a:buNone/>
+            </a:pPr>
+            <a:r>
+              <a:rPr lang="en-US" sz="550" dirty="0">
+                <a:solidFill>
+                  <a:srgbClr val="8FA1AC"/>
+                </a:solidFill>
+                <a:latin typeface="Poppins" pitchFamily="34" charset="0"/>
+                <a:ea typeface="Poppins" pitchFamily="34" charset="-122"/>
+                <a:cs typeface="Poppins" pitchFamily="34" charset="-120"/>
+              </a:rPr>
+              <a:t>07</a:t>
+            </a:r>
+            <a:endParaRPr lang="en-US" sz="550" dirty="0"/>
+          </a:p>
+        </p:txBody>
+      </p:sp>
+      <p:sp>
+        <p:nvSpPr>
+          <p:cNvPr id="161" name="Shape 159"/>
+          <p:cNvSpPr/>
+          <p:nvPr/>
+        </p:nvSpPr>
+        <p:spPr>
+          <a:xfrm>
+            <a:off x="2477371" y="4910328"/>
+            <a:ext cx="365107" cy="219456"/>
+          </a:xfrm>
+          <a:prstGeom prst="rect">
+            <a:avLst/>
+          </a:prstGeom>
+          <a:solidFill>
+            <a:srgbClr val="D4E9ED"/>
+          </a:solidFill>
+          <a:ln/>
+        </p:spPr>
+      </p:sp>
+      <p:sp>
+        <p:nvSpPr>
+          <p:cNvPr id="162" name="Text 160"/>
+          <p:cNvSpPr txBox="1"/>
+          <p:nvPr/>
+        </p:nvSpPr>
+        <p:spPr>
+          <a:xfrm>
+            <a:off x="2459083" y="4910328"/>
+            <a:ext cx="401683" cy="219456"/>
+          </a:xfrm>
+          <a:prstGeom prst="rect">
+            <a:avLst/>
+          </a:prstGeom>
+          <a:noFill/>
+          <a:ln/>
+        </p:spPr>
+        <p:txBody>
+          <a:bodyPr wrap="square" lIns="0" tIns="0" rIns="0" bIns="0" rtlCol="0" anchor="ctr"/>
+          <a:lstStyle/>
+          <a:p>
+            <a:pPr algn="ctr" indent="0" marL="0">
+              <a:buNone/>
+            </a:pPr>
+            <a:r>
+              <a:rPr lang="en-US" sz="620" dirty="0">
+                <a:solidFill>
+                  <a:srgbClr val="12293A"/>
+                </a:solidFill>
+                <a:latin typeface="Poppins" pitchFamily="34" charset="0"/>
+                <a:ea typeface="Poppins" pitchFamily="34" charset="-122"/>
+                <a:cs typeface="Poppins" pitchFamily="34" charset="-120"/>
+              </a:rPr>
+              <a:t>28k</a:t>
+            </a:r>
+            <a:endParaRPr lang="en-US" sz="620" dirty="0"/>
+          </a:p>
+        </p:txBody>
+      </p:sp>
+      <p:sp>
+        <p:nvSpPr>
+          <p:cNvPr id="163" name="Text 161"/>
+          <p:cNvSpPr txBox="1"/>
+          <p:nvPr/>
+        </p:nvSpPr>
+        <p:spPr>
+          <a:xfrm>
+            <a:off x="2459083" y="5138928"/>
+            <a:ext cx="401683" cy="146304"/>
+          </a:xfrm>
+          <a:prstGeom prst="rect">
+            <a:avLst/>
+          </a:prstGeom>
+          <a:noFill/>
+          <a:ln/>
+        </p:spPr>
+        <p:txBody>
+          <a:bodyPr wrap="square" lIns="0" tIns="0" rIns="0" bIns="0" rtlCol="0" anchor="ctr"/>
+          <a:lstStyle/>
+          <a:p>
+            <a:pPr algn="ctr" indent="0" marL="0">
+              <a:buNone/>
+            </a:pPr>
+            <a:r>
+              <a:rPr lang="en-US" sz="550" dirty="0">
+                <a:solidFill>
+                  <a:srgbClr val="8FA1AC"/>
+                </a:solidFill>
+                <a:latin typeface="Poppins" pitchFamily="34" charset="0"/>
+                <a:ea typeface="Poppins" pitchFamily="34" charset="-122"/>
+                <a:cs typeface="Poppins" pitchFamily="34" charset="-120"/>
+              </a:rPr>
+              <a:t>14</a:t>
+            </a:r>
+            <a:endParaRPr lang="en-US" sz="550" dirty="0"/>
+          </a:p>
+        </p:txBody>
+      </p:sp>
+      <p:sp>
+        <p:nvSpPr>
+          <p:cNvPr id="164" name="Shape 162"/>
+          <p:cNvSpPr/>
+          <p:nvPr/>
+        </p:nvSpPr>
+        <p:spPr>
+          <a:xfrm>
+            <a:off x="2879054" y="4910328"/>
+            <a:ext cx="365107" cy="219456"/>
+          </a:xfrm>
+          <a:prstGeom prst="rect">
+            <a:avLst/>
+          </a:prstGeom>
+          <a:solidFill>
+            <a:srgbClr val="D4E9ED"/>
+          </a:solidFill>
+          <a:ln/>
+        </p:spPr>
+      </p:sp>
+      <p:sp>
+        <p:nvSpPr>
+          <p:cNvPr id="165" name="Text 163"/>
+          <p:cNvSpPr txBox="1"/>
+          <p:nvPr/>
+        </p:nvSpPr>
+        <p:spPr>
+          <a:xfrm>
+            <a:off x="2860766" y="4910328"/>
+            <a:ext cx="401683" cy="219456"/>
+          </a:xfrm>
+          <a:prstGeom prst="rect">
+            <a:avLst/>
+          </a:prstGeom>
+          <a:noFill/>
+          <a:ln/>
+        </p:spPr>
+        <p:txBody>
+          <a:bodyPr wrap="square" lIns="0" tIns="0" rIns="0" bIns="0" rtlCol="0" anchor="ctr"/>
+          <a:lstStyle/>
+          <a:p>
+            <a:pPr algn="ctr" indent="0" marL="0">
+              <a:buNone/>
+            </a:pPr>
+            <a:r>
+              <a:rPr lang="en-US" sz="620" dirty="0">
+                <a:solidFill>
+                  <a:srgbClr val="12293A"/>
+                </a:solidFill>
+                <a:latin typeface="Poppins" pitchFamily="34" charset="0"/>
+                <a:ea typeface="Poppins" pitchFamily="34" charset="-122"/>
+                <a:cs typeface="Poppins" pitchFamily="34" charset="-120"/>
+              </a:rPr>
+              <a:t>28k</a:t>
+            </a:r>
+            <a:endParaRPr lang="en-US" sz="620" dirty="0"/>
+          </a:p>
+        </p:txBody>
+      </p:sp>
+      <p:sp>
+        <p:nvSpPr>
+          <p:cNvPr id="166" name="Text 164"/>
+          <p:cNvSpPr txBox="1"/>
+          <p:nvPr/>
+        </p:nvSpPr>
+        <p:spPr>
+          <a:xfrm>
+            <a:off x="2860766" y="5138928"/>
+            <a:ext cx="401683" cy="146304"/>
+          </a:xfrm>
+          <a:prstGeom prst="rect">
+            <a:avLst/>
+          </a:prstGeom>
+          <a:noFill/>
+          <a:ln/>
+        </p:spPr>
+        <p:txBody>
+          <a:bodyPr wrap="square" lIns="0" tIns="0" rIns="0" bIns="0" rtlCol="0" anchor="ctr"/>
+          <a:lstStyle/>
+          <a:p>
+            <a:pPr algn="ctr" indent="0" marL="0">
+              <a:buNone/>
+            </a:pPr>
+            <a:r>
+              <a:rPr lang="en-US" sz="550" dirty="0">
+                <a:solidFill>
+                  <a:srgbClr val="8FA1AC"/>
+                </a:solidFill>
+                <a:latin typeface="Poppins" pitchFamily="34" charset="0"/>
+                <a:ea typeface="Poppins" pitchFamily="34" charset="-122"/>
+                <a:cs typeface="Poppins" pitchFamily="34" charset="-120"/>
+              </a:rPr>
+              <a:t>21</a:t>
+            </a:r>
+            <a:endParaRPr lang="en-US" sz="550" dirty="0"/>
+          </a:p>
+        </p:txBody>
+      </p:sp>
+      <p:sp>
+        <p:nvSpPr>
+          <p:cNvPr id="167" name="Shape 165"/>
+          <p:cNvSpPr/>
+          <p:nvPr/>
+        </p:nvSpPr>
+        <p:spPr>
+          <a:xfrm>
+            <a:off x="3280737" y="4910328"/>
+            <a:ext cx="365107" cy="219456"/>
+          </a:xfrm>
+          <a:prstGeom prst="rect">
+            <a:avLst/>
+          </a:prstGeom>
+          <a:solidFill>
+            <a:srgbClr val="B5D9E0"/>
+          </a:solidFill>
+          <a:ln/>
+        </p:spPr>
+      </p:sp>
+      <p:sp>
+        <p:nvSpPr>
+          <p:cNvPr id="168" name="Text 166"/>
+          <p:cNvSpPr txBox="1"/>
+          <p:nvPr/>
+        </p:nvSpPr>
+        <p:spPr>
+          <a:xfrm>
+            <a:off x="3262449" y="4910328"/>
+            <a:ext cx="401683" cy="219456"/>
+          </a:xfrm>
+          <a:prstGeom prst="rect">
+            <a:avLst/>
+          </a:prstGeom>
+          <a:noFill/>
+          <a:ln/>
+        </p:spPr>
+        <p:txBody>
+          <a:bodyPr wrap="square" lIns="0" tIns="0" rIns="0" bIns="0" rtlCol="0" anchor="ctr"/>
+          <a:lstStyle/>
+          <a:p>
+            <a:pPr algn="ctr" indent="0" marL="0">
+              <a:buNone/>
+            </a:pPr>
+            <a:r>
+              <a:rPr lang="en-US" sz="620" dirty="0">
+                <a:solidFill>
+                  <a:srgbClr val="12293A"/>
+                </a:solidFill>
+                <a:latin typeface="Poppins" pitchFamily="34" charset="0"/>
+                <a:ea typeface="Poppins" pitchFamily="34" charset="-122"/>
+                <a:cs typeface="Poppins" pitchFamily="34" charset="-120"/>
+              </a:rPr>
+              <a:t>41k</a:t>
+            </a:r>
+            <a:endParaRPr lang="en-US" sz="620" dirty="0"/>
+          </a:p>
+        </p:txBody>
+      </p:sp>
+      <p:sp>
+        <p:nvSpPr>
+          <p:cNvPr id="169" name="Text 167"/>
+          <p:cNvSpPr txBox="1"/>
+          <p:nvPr/>
+        </p:nvSpPr>
+        <p:spPr>
+          <a:xfrm>
+            <a:off x="3262449" y="5138928"/>
+            <a:ext cx="401683" cy="146304"/>
+          </a:xfrm>
+          <a:prstGeom prst="rect">
+            <a:avLst/>
+          </a:prstGeom>
+          <a:noFill/>
+          <a:ln/>
+        </p:spPr>
+        <p:txBody>
+          <a:bodyPr wrap="square" lIns="0" tIns="0" rIns="0" bIns="0" rtlCol="0" anchor="ctr"/>
+          <a:lstStyle/>
+          <a:p>
+            <a:pPr algn="ctr" indent="0" marL="0">
+              <a:buNone/>
+            </a:pPr>
+            <a:r>
+              <a:rPr lang="en-US" sz="550" dirty="0">
+                <a:solidFill>
+                  <a:srgbClr val="8FA1AC"/>
+                </a:solidFill>
+                <a:latin typeface="Poppins" pitchFamily="34" charset="0"/>
+                <a:ea typeface="Poppins" pitchFamily="34" charset="-122"/>
+                <a:cs typeface="Poppins" pitchFamily="34" charset="-120"/>
+              </a:rPr>
+              <a:t>28</a:t>
+            </a:r>
+            <a:endParaRPr lang="en-US" sz="550" dirty="0"/>
+          </a:p>
+        </p:txBody>
+      </p:sp>
+      <p:sp>
+        <p:nvSpPr>
+          <p:cNvPr id="170" name="Shape 168"/>
+          <p:cNvSpPr/>
+          <p:nvPr/>
+        </p:nvSpPr>
+        <p:spPr>
+          <a:xfrm>
+            <a:off x="3682419" y="4910328"/>
+            <a:ext cx="365107" cy="219456"/>
+          </a:xfrm>
+          <a:prstGeom prst="rect">
+            <a:avLst/>
+          </a:prstGeom>
+          <a:solidFill>
+            <a:srgbClr val="B5D9E0"/>
+          </a:solidFill>
+          <a:ln/>
+        </p:spPr>
+      </p:sp>
+      <p:sp>
+        <p:nvSpPr>
+          <p:cNvPr id="171" name="Text 169"/>
+          <p:cNvSpPr txBox="1"/>
+          <p:nvPr/>
+        </p:nvSpPr>
+        <p:spPr>
+          <a:xfrm>
+            <a:off x="3664131" y="4910328"/>
+            <a:ext cx="401683" cy="219456"/>
+          </a:xfrm>
+          <a:prstGeom prst="rect">
+            <a:avLst/>
+          </a:prstGeom>
+          <a:noFill/>
+          <a:ln/>
+        </p:spPr>
+        <p:txBody>
+          <a:bodyPr wrap="square" lIns="0" tIns="0" rIns="0" bIns="0" rtlCol="0" anchor="ctr"/>
+          <a:lstStyle/>
+          <a:p>
+            <a:pPr algn="ctr" indent="0" marL="0">
+              <a:buNone/>
+            </a:pPr>
+            <a:r>
+              <a:rPr lang="en-US" sz="620" dirty="0">
+                <a:solidFill>
+                  <a:srgbClr val="12293A"/>
+                </a:solidFill>
+                <a:latin typeface="Poppins" pitchFamily="34" charset="0"/>
+                <a:ea typeface="Poppins" pitchFamily="34" charset="-122"/>
+                <a:cs typeface="Poppins" pitchFamily="34" charset="-120"/>
+              </a:rPr>
+              <a:t>52k</a:t>
+            </a:r>
+            <a:endParaRPr lang="en-US" sz="620" dirty="0"/>
+          </a:p>
+        </p:txBody>
+      </p:sp>
+      <p:sp>
+        <p:nvSpPr>
+          <p:cNvPr id="172" name="Text 170"/>
+          <p:cNvSpPr txBox="1"/>
+          <p:nvPr/>
+        </p:nvSpPr>
+        <p:spPr>
+          <a:xfrm>
+            <a:off x="3664131" y="5138928"/>
+            <a:ext cx="401683" cy="146304"/>
+          </a:xfrm>
+          <a:prstGeom prst="rect">
+            <a:avLst/>
+          </a:prstGeom>
+          <a:noFill/>
+          <a:ln/>
+        </p:spPr>
+        <p:txBody>
+          <a:bodyPr wrap="square" lIns="0" tIns="0" rIns="0" bIns="0" rtlCol="0" anchor="ctr"/>
+          <a:lstStyle/>
+          <a:p>
+            <a:pPr algn="ctr" indent="0" marL="0">
+              <a:buNone/>
+            </a:pPr>
+            <a:r>
+              <a:rPr lang="en-US" sz="550" dirty="0">
+                <a:solidFill>
+                  <a:srgbClr val="8FA1AC"/>
+                </a:solidFill>
+                <a:latin typeface="Poppins" pitchFamily="34" charset="0"/>
+                <a:ea typeface="Poppins" pitchFamily="34" charset="-122"/>
+                <a:cs typeface="Poppins" pitchFamily="34" charset="-120"/>
+              </a:rPr>
+              <a:t>05</a:t>
+            </a:r>
+            <a:endParaRPr lang="en-US" sz="550" dirty="0"/>
+          </a:p>
+        </p:txBody>
+      </p:sp>
+      <p:sp>
+        <p:nvSpPr>
+          <p:cNvPr id="173" name="Shape 171"/>
+          <p:cNvSpPr/>
+          <p:nvPr/>
+        </p:nvSpPr>
+        <p:spPr>
+          <a:xfrm>
+            <a:off x="4084102" y="4910328"/>
+            <a:ext cx="365107" cy="219456"/>
+          </a:xfrm>
+          <a:prstGeom prst="rect">
+            <a:avLst/>
+          </a:prstGeom>
+          <a:solidFill>
+            <a:srgbClr val="B5D9E0"/>
+          </a:solidFill>
+          <a:ln/>
+        </p:spPr>
+      </p:sp>
+      <p:sp>
+        <p:nvSpPr>
+          <p:cNvPr id="174" name="Text 172"/>
+          <p:cNvSpPr txBox="1"/>
+          <p:nvPr/>
+        </p:nvSpPr>
+        <p:spPr>
+          <a:xfrm>
+            <a:off x="4065814" y="4910328"/>
+            <a:ext cx="401683" cy="219456"/>
+          </a:xfrm>
+          <a:prstGeom prst="rect">
+            <a:avLst/>
+          </a:prstGeom>
+          <a:noFill/>
+          <a:ln/>
+        </p:spPr>
+        <p:txBody>
+          <a:bodyPr wrap="square" lIns="0" tIns="0" rIns="0" bIns="0" rtlCol="0" anchor="ctr"/>
+          <a:lstStyle/>
+          <a:p>
+            <a:pPr algn="ctr" indent="0" marL="0">
+              <a:buNone/>
+            </a:pPr>
+            <a:r>
+              <a:rPr lang="en-US" sz="620" dirty="0">
+                <a:solidFill>
+                  <a:srgbClr val="12293A"/>
+                </a:solidFill>
+                <a:latin typeface="Poppins" pitchFamily="34" charset="0"/>
+                <a:ea typeface="Poppins" pitchFamily="34" charset="-122"/>
+                <a:cs typeface="Poppins" pitchFamily="34" charset="-120"/>
+              </a:rPr>
+              <a:t>52k</a:t>
+            </a:r>
+            <a:endParaRPr lang="en-US" sz="620" dirty="0"/>
+          </a:p>
+        </p:txBody>
+      </p:sp>
+      <p:sp>
+        <p:nvSpPr>
+          <p:cNvPr id="175" name="Text 173"/>
+          <p:cNvSpPr txBox="1"/>
+          <p:nvPr/>
+        </p:nvSpPr>
+        <p:spPr>
+          <a:xfrm>
+            <a:off x="4065814" y="5138928"/>
+            <a:ext cx="401683" cy="146304"/>
+          </a:xfrm>
+          <a:prstGeom prst="rect">
+            <a:avLst/>
+          </a:prstGeom>
+          <a:noFill/>
+          <a:ln/>
+        </p:spPr>
+        <p:txBody>
+          <a:bodyPr wrap="square" lIns="0" tIns="0" rIns="0" bIns="0" rtlCol="0" anchor="ctr"/>
+          <a:lstStyle/>
+          <a:p>
+            <a:pPr algn="ctr" indent="0" marL="0">
+              <a:buNone/>
+            </a:pPr>
+            <a:r>
+              <a:rPr lang="en-US" sz="550" dirty="0">
+                <a:solidFill>
+                  <a:srgbClr val="8FA1AC"/>
+                </a:solidFill>
+                <a:latin typeface="Poppins" pitchFamily="34" charset="0"/>
+                <a:ea typeface="Poppins" pitchFamily="34" charset="-122"/>
+                <a:cs typeface="Poppins" pitchFamily="34" charset="-120"/>
+              </a:rPr>
+              <a:t>12</a:t>
+            </a:r>
+            <a:endParaRPr lang="en-US" sz="550" dirty="0"/>
+          </a:p>
+        </p:txBody>
+      </p:sp>
+      <p:sp>
+        <p:nvSpPr>
+          <p:cNvPr id="176" name="Shape 174"/>
+          <p:cNvSpPr/>
+          <p:nvPr/>
+        </p:nvSpPr>
+        <p:spPr>
+          <a:xfrm>
+            <a:off x="4485785" y="4910328"/>
+            <a:ext cx="365107" cy="219456"/>
+          </a:xfrm>
+          <a:prstGeom prst="rect">
+            <a:avLst/>
+          </a:prstGeom>
+          <a:solidFill>
+            <a:srgbClr val="B5D9E0"/>
+          </a:solidFill>
+          <a:ln/>
+        </p:spPr>
+      </p:sp>
+      <p:sp>
+        <p:nvSpPr>
+          <p:cNvPr id="177" name="Text 175"/>
+          <p:cNvSpPr txBox="1"/>
+          <p:nvPr/>
+        </p:nvSpPr>
+        <p:spPr>
+          <a:xfrm>
+            <a:off x="4467497" y="4910328"/>
+            <a:ext cx="401683" cy="219456"/>
+          </a:xfrm>
+          <a:prstGeom prst="rect">
+            <a:avLst/>
+          </a:prstGeom>
+          <a:noFill/>
+          <a:ln/>
+        </p:spPr>
+        <p:txBody>
+          <a:bodyPr wrap="square" lIns="0" tIns="0" rIns="0" bIns="0" rtlCol="0" anchor="ctr"/>
+          <a:lstStyle/>
+          <a:p>
+            <a:pPr algn="ctr" indent="0" marL="0">
+              <a:buNone/>
+            </a:pPr>
+            <a:r>
+              <a:rPr lang="en-US" sz="620" dirty="0">
+                <a:solidFill>
+                  <a:srgbClr val="12293A"/>
+                </a:solidFill>
+                <a:latin typeface="Poppins" pitchFamily="34" charset="0"/>
+                <a:ea typeface="Poppins" pitchFamily="34" charset="-122"/>
+                <a:cs typeface="Poppins" pitchFamily="34" charset="-120"/>
+              </a:rPr>
+              <a:t>52k</a:t>
+            </a:r>
+            <a:endParaRPr lang="en-US" sz="620" dirty="0"/>
+          </a:p>
+        </p:txBody>
+      </p:sp>
+      <p:sp>
+        <p:nvSpPr>
+          <p:cNvPr id="178" name="Text 176"/>
+          <p:cNvSpPr txBox="1"/>
+          <p:nvPr/>
+        </p:nvSpPr>
+        <p:spPr>
+          <a:xfrm>
+            <a:off x="4467497" y="5138928"/>
+            <a:ext cx="401683" cy="146304"/>
+          </a:xfrm>
+          <a:prstGeom prst="rect">
+            <a:avLst/>
+          </a:prstGeom>
+          <a:noFill/>
+          <a:ln/>
+        </p:spPr>
+        <p:txBody>
+          <a:bodyPr wrap="square" lIns="0" tIns="0" rIns="0" bIns="0" rtlCol="0" anchor="ctr"/>
+          <a:lstStyle/>
+          <a:p>
+            <a:pPr algn="ctr" indent="0" marL="0">
+              <a:buNone/>
+            </a:pPr>
+            <a:r>
+              <a:rPr lang="en-US" sz="550" dirty="0">
+                <a:solidFill>
+                  <a:srgbClr val="8FA1AC"/>
+                </a:solidFill>
+                <a:latin typeface="Poppins" pitchFamily="34" charset="0"/>
+                <a:ea typeface="Poppins" pitchFamily="34" charset="-122"/>
+                <a:cs typeface="Poppins" pitchFamily="34" charset="-120"/>
+              </a:rPr>
+              <a:t>19</a:t>
+            </a:r>
+            <a:endParaRPr lang="en-US" sz="550" dirty="0"/>
+          </a:p>
+        </p:txBody>
+      </p:sp>
+      <p:sp>
+        <p:nvSpPr>
+          <p:cNvPr id="179" name="Shape 177"/>
+          <p:cNvSpPr/>
+          <p:nvPr/>
+        </p:nvSpPr>
+        <p:spPr>
+          <a:xfrm>
+            <a:off x="4887468" y="4910328"/>
+            <a:ext cx="365107" cy="219456"/>
+          </a:xfrm>
+          <a:prstGeom prst="rect">
+            <a:avLst/>
+          </a:prstGeom>
+          <a:solidFill>
+            <a:srgbClr val="B5D9E0"/>
+          </a:solidFill>
+          <a:ln/>
+        </p:spPr>
+      </p:sp>
+      <p:sp>
+        <p:nvSpPr>
+          <p:cNvPr id="180" name="Text 178"/>
+          <p:cNvSpPr txBox="1"/>
+          <p:nvPr/>
+        </p:nvSpPr>
+        <p:spPr>
+          <a:xfrm>
+            <a:off x="4869180" y="4910328"/>
+            <a:ext cx="401683" cy="219456"/>
+          </a:xfrm>
+          <a:prstGeom prst="rect">
+            <a:avLst/>
+          </a:prstGeom>
+          <a:noFill/>
+          <a:ln/>
+        </p:spPr>
+        <p:txBody>
+          <a:bodyPr wrap="square" lIns="0" tIns="0" rIns="0" bIns="0" rtlCol="0" anchor="ctr"/>
+          <a:lstStyle/>
+          <a:p>
+            <a:pPr algn="ctr" indent="0" marL="0">
+              <a:buNone/>
+            </a:pPr>
+            <a:r>
+              <a:rPr lang="en-US" sz="620" dirty="0">
+                <a:solidFill>
+                  <a:srgbClr val="12293A"/>
+                </a:solidFill>
+                <a:latin typeface="Poppins" pitchFamily="34" charset="0"/>
+                <a:ea typeface="Poppins" pitchFamily="34" charset="-122"/>
+                <a:cs typeface="Poppins" pitchFamily="34" charset="-120"/>
+              </a:rPr>
+              <a:t>48k</a:t>
+            </a:r>
+            <a:endParaRPr lang="en-US" sz="620" dirty="0"/>
+          </a:p>
+        </p:txBody>
+      </p:sp>
+      <p:sp>
+        <p:nvSpPr>
+          <p:cNvPr id="181" name="Text 179"/>
+          <p:cNvSpPr txBox="1"/>
+          <p:nvPr/>
+        </p:nvSpPr>
+        <p:spPr>
+          <a:xfrm>
+            <a:off x="4869180" y="5138928"/>
+            <a:ext cx="401683" cy="146304"/>
+          </a:xfrm>
+          <a:prstGeom prst="rect">
+            <a:avLst/>
+          </a:prstGeom>
+          <a:noFill/>
+          <a:ln/>
+        </p:spPr>
+        <p:txBody>
+          <a:bodyPr wrap="square" lIns="0" tIns="0" rIns="0" bIns="0" rtlCol="0" anchor="ctr"/>
+          <a:lstStyle/>
+          <a:p>
+            <a:pPr algn="ctr" indent="0" marL="0">
+              <a:buNone/>
+            </a:pPr>
+            <a:r>
+              <a:rPr lang="en-US" sz="550" dirty="0">
+                <a:solidFill>
+                  <a:srgbClr val="8FA1AC"/>
+                </a:solidFill>
+                <a:latin typeface="Poppins" pitchFamily="34" charset="0"/>
+                <a:ea typeface="Poppins" pitchFamily="34" charset="-122"/>
+                <a:cs typeface="Poppins" pitchFamily="34" charset="-120"/>
+              </a:rPr>
+              <a:t>26</a:t>
+            </a:r>
+            <a:endParaRPr lang="en-US" sz="550" dirty="0"/>
+          </a:p>
+        </p:txBody>
+      </p:sp>
+      <p:sp>
+        <p:nvSpPr>
+          <p:cNvPr id="182" name="Shape 180"/>
+          <p:cNvSpPr/>
+          <p:nvPr/>
+        </p:nvSpPr>
+        <p:spPr>
+          <a:xfrm>
+            <a:off x="5289151" y="4910328"/>
+            <a:ext cx="365107" cy="219456"/>
+          </a:xfrm>
+          <a:prstGeom prst="rect">
+            <a:avLst/>
+          </a:prstGeom>
+          <a:solidFill>
+            <a:srgbClr val="D4E9ED"/>
+          </a:solidFill>
+          <a:ln/>
+        </p:spPr>
+      </p:sp>
+      <p:sp>
+        <p:nvSpPr>
+          <p:cNvPr id="183" name="Text 181"/>
+          <p:cNvSpPr txBox="1"/>
+          <p:nvPr/>
+        </p:nvSpPr>
+        <p:spPr>
+          <a:xfrm>
+            <a:off x="5270863" y="4910328"/>
+            <a:ext cx="401683" cy="219456"/>
+          </a:xfrm>
+          <a:prstGeom prst="rect">
+            <a:avLst/>
+          </a:prstGeom>
+          <a:noFill/>
+          <a:ln/>
+        </p:spPr>
+        <p:txBody>
+          <a:bodyPr wrap="square" lIns="0" tIns="0" rIns="0" bIns="0" rtlCol="0" anchor="ctr"/>
+          <a:lstStyle/>
+          <a:p>
+            <a:pPr algn="ctr" indent="0" marL="0">
+              <a:buNone/>
+            </a:pPr>
+            <a:r>
+              <a:rPr lang="en-US" sz="620" dirty="0">
+                <a:solidFill>
+                  <a:srgbClr val="12293A"/>
+                </a:solidFill>
+                <a:latin typeface="Poppins" pitchFamily="34" charset="0"/>
+                <a:ea typeface="Poppins" pitchFamily="34" charset="-122"/>
+                <a:cs typeface="Poppins" pitchFamily="34" charset="-120"/>
+              </a:rPr>
+              <a:t>28k</a:t>
+            </a:r>
+            <a:endParaRPr lang="en-US" sz="620" dirty="0"/>
+          </a:p>
+        </p:txBody>
+      </p:sp>
+      <p:sp>
+        <p:nvSpPr>
+          <p:cNvPr id="184" name="Text 182"/>
+          <p:cNvSpPr txBox="1"/>
+          <p:nvPr/>
+        </p:nvSpPr>
+        <p:spPr>
+          <a:xfrm>
+            <a:off x="5270863" y="5138928"/>
+            <a:ext cx="401683" cy="146304"/>
+          </a:xfrm>
+          <a:prstGeom prst="rect">
+            <a:avLst/>
+          </a:prstGeom>
+          <a:noFill/>
+          <a:ln/>
+        </p:spPr>
+        <p:txBody>
+          <a:bodyPr wrap="square" lIns="0" tIns="0" rIns="0" bIns="0" rtlCol="0" anchor="ctr"/>
+          <a:lstStyle/>
+          <a:p>
+            <a:pPr algn="ctr" indent="0" marL="0">
+              <a:buNone/>
+            </a:pPr>
+            <a:r>
+              <a:rPr lang="en-US" sz="550" dirty="0">
+                <a:solidFill>
+                  <a:srgbClr val="8FA1AC"/>
+                </a:solidFill>
+                <a:latin typeface="Poppins" pitchFamily="34" charset="0"/>
+                <a:ea typeface="Poppins" pitchFamily="34" charset="-122"/>
+                <a:cs typeface="Poppins" pitchFamily="34" charset="-120"/>
+              </a:rPr>
+              <a:t>02</a:t>
+            </a:r>
+            <a:endParaRPr lang="en-US" sz="550" dirty="0"/>
+          </a:p>
+        </p:txBody>
+      </p:sp>
+      <p:sp>
+        <p:nvSpPr>
+          <p:cNvPr id="185" name="Shape 183"/>
+          <p:cNvSpPr/>
+          <p:nvPr/>
+        </p:nvSpPr>
+        <p:spPr>
+          <a:xfrm>
+            <a:off x="5690834" y="4910328"/>
+            <a:ext cx="365107" cy="219456"/>
+          </a:xfrm>
+          <a:prstGeom prst="rect">
+            <a:avLst/>
+          </a:prstGeom>
+          <a:solidFill>
+            <a:srgbClr val="2C8394"/>
+          </a:solidFill>
+          <a:ln/>
+        </p:spPr>
+      </p:sp>
+      <p:sp>
+        <p:nvSpPr>
+          <p:cNvPr id="186" name="Text 184"/>
+          <p:cNvSpPr txBox="1"/>
+          <p:nvPr/>
+        </p:nvSpPr>
+        <p:spPr>
+          <a:xfrm>
+            <a:off x="5672546" y="4910328"/>
+            <a:ext cx="401683" cy="219456"/>
+          </a:xfrm>
+          <a:prstGeom prst="rect">
+            <a:avLst/>
+          </a:prstGeom>
+          <a:noFill/>
+          <a:ln/>
+        </p:spPr>
+        <p:txBody>
+          <a:bodyPr wrap="square" lIns="0" tIns="0" rIns="0" bIns="0" rtlCol="0" anchor="ctr"/>
+          <a:lstStyle/>
+          <a:p>
+            <a:pPr algn="ctr" indent="0" marL="0">
+              <a:buNone/>
+            </a:pPr>
+            <a:r>
+              <a:rPr lang="en-US" sz="620" b="1" dirty="0">
+                <a:solidFill>
+                  <a:srgbClr val="FFFFFF"/>
+                </a:solidFill>
+                <a:latin typeface="Poppins" pitchFamily="34" charset="0"/>
+                <a:ea typeface="Poppins" pitchFamily="34" charset="-122"/>
+                <a:cs typeface="Poppins" pitchFamily="34" charset="-120"/>
+              </a:rPr>
+              <a:t>78k</a:t>
+            </a:r>
+            <a:endParaRPr lang="en-US" sz="620" dirty="0"/>
+          </a:p>
+        </p:txBody>
+      </p:sp>
+      <p:sp>
+        <p:nvSpPr>
+          <p:cNvPr id="187" name="Text 185"/>
+          <p:cNvSpPr txBox="1"/>
+          <p:nvPr/>
+        </p:nvSpPr>
+        <p:spPr>
+          <a:xfrm>
+            <a:off x="5672546" y="5138928"/>
+            <a:ext cx="401683" cy="146304"/>
+          </a:xfrm>
+          <a:prstGeom prst="rect">
+            <a:avLst/>
+          </a:prstGeom>
+          <a:noFill/>
+          <a:ln/>
+        </p:spPr>
+        <p:txBody>
+          <a:bodyPr wrap="square" lIns="0" tIns="0" rIns="0" bIns="0" rtlCol="0" anchor="ctr"/>
+          <a:lstStyle/>
+          <a:p>
+            <a:pPr algn="ctr" indent="0" marL="0">
+              <a:buNone/>
+            </a:pPr>
+            <a:r>
+              <a:rPr lang="en-US" sz="550" dirty="0">
+                <a:solidFill>
+                  <a:srgbClr val="8FA1AC"/>
+                </a:solidFill>
+                <a:latin typeface="Poppins" pitchFamily="34" charset="0"/>
+                <a:ea typeface="Poppins" pitchFamily="34" charset="-122"/>
+                <a:cs typeface="Poppins" pitchFamily="34" charset="-120"/>
+              </a:rPr>
+              <a:t>09</a:t>
+            </a:r>
+            <a:endParaRPr lang="en-US" sz="550" dirty="0"/>
+          </a:p>
+        </p:txBody>
+      </p:sp>
+      <p:sp>
+        <p:nvSpPr>
+          <p:cNvPr id="188" name="Shape 186"/>
+          <p:cNvSpPr/>
+          <p:nvPr/>
+        </p:nvSpPr>
+        <p:spPr>
+          <a:xfrm>
+            <a:off x="6092517" y="4910328"/>
+            <a:ext cx="365107" cy="219456"/>
+          </a:xfrm>
+          <a:prstGeom prst="rect">
+            <a:avLst/>
+          </a:prstGeom>
+          <a:solidFill>
+            <a:srgbClr val="2C8394"/>
+          </a:solidFill>
+          <a:ln/>
+        </p:spPr>
+      </p:sp>
+      <p:sp>
+        <p:nvSpPr>
+          <p:cNvPr id="189" name="Text 187"/>
+          <p:cNvSpPr txBox="1"/>
+          <p:nvPr/>
+        </p:nvSpPr>
+        <p:spPr>
+          <a:xfrm>
+            <a:off x="6074229" y="4910328"/>
+            <a:ext cx="401683" cy="219456"/>
+          </a:xfrm>
+          <a:prstGeom prst="rect">
+            <a:avLst/>
+          </a:prstGeom>
+          <a:noFill/>
+          <a:ln/>
+        </p:spPr>
+        <p:txBody>
+          <a:bodyPr wrap="square" lIns="0" tIns="0" rIns="0" bIns="0" rtlCol="0" anchor="ctr"/>
+          <a:lstStyle/>
+          <a:p>
+            <a:pPr algn="ctr" indent="0" marL="0">
+              <a:buNone/>
+            </a:pPr>
+            <a:r>
+              <a:rPr lang="en-US" sz="620" b="1" dirty="0">
+                <a:solidFill>
+                  <a:srgbClr val="FFFFFF"/>
+                </a:solidFill>
+                <a:latin typeface="Poppins" pitchFamily="34" charset="0"/>
+                <a:ea typeface="Poppins" pitchFamily="34" charset="-122"/>
+                <a:cs typeface="Poppins" pitchFamily="34" charset="-120"/>
+              </a:rPr>
+              <a:t>87k</a:t>
+            </a:r>
+            <a:endParaRPr lang="en-US" sz="620" dirty="0"/>
+          </a:p>
+        </p:txBody>
+      </p:sp>
+      <p:sp>
+        <p:nvSpPr>
+          <p:cNvPr id="190" name="Text 188"/>
+          <p:cNvSpPr txBox="1"/>
+          <p:nvPr/>
+        </p:nvSpPr>
+        <p:spPr>
+          <a:xfrm>
+            <a:off x="6074229" y="5138928"/>
+            <a:ext cx="401683" cy="146304"/>
+          </a:xfrm>
+          <a:prstGeom prst="rect">
+            <a:avLst/>
+          </a:prstGeom>
+          <a:noFill/>
+          <a:ln/>
+        </p:spPr>
+        <p:txBody>
+          <a:bodyPr wrap="square" lIns="0" tIns="0" rIns="0" bIns="0" rtlCol="0" anchor="ctr"/>
+          <a:lstStyle/>
+          <a:p>
+            <a:pPr algn="ctr" indent="0" marL="0">
+              <a:buNone/>
+            </a:pPr>
+            <a:r>
+              <a:rPr lang="en-US" sz="550" dirty="0">
+                <a:solidFill>
+                  <a:srgbClr val="8FA1AC"/>
+                </a:solidFill>
+                <a:latin typeface="Poppins" pitchFamily="34" charset="0"/>
+                <a:ea typeface="Poppins" pitchFamily="34" charset="-122"/>
+                <a:cs typeface="Poppins" pitchFamily="34" charset="-120"/>
+              </a:rPr>
+              <a:t>16</a:t>
+            </a:r>
+            <a:endParaRPr lang="en-US" sz="550" dirty="0"/>
+          </a:p>
+        </p:txBody>
+      </p:sp>
+      <p:sp>
+        <p:nvSpPr>
+          <p:cNvPr id="191" name="Shape 189"/>
+          <p:cNvSpPr/>
+          <p:nvPr/>
+        </p:nvSpPr>
+        <p:spPr>
+          <a:xfrm>
+            <a:off x="6494199" y="4910328"/>
+            <a:ext cx="365107" cy="219456"/>
           </a:xfrm>
           <a:prstGeom prst="rect">
             <a:avLst/>
@@ -22445,14 +26654,14 @@
       </p:sp>
       <p:sp>
         <p:nvSpPr>
-          <p:cNvPr id="63" name="Text 61"/>
-          <p:cNvSpPr txBox="1"/>
-          <p:nvPr/>
-        </p:nvSpPr>
-        <p:spPr>
-          <a:xfrm>
-            <a:off x="5294376" y="2990088"/>
-            <a:ext cx="1051560" cy="164592"/>
+          <p:cNvPr id="192" name="Text 190"/>
+          <p:cNvSpPr txBox="1"/>
+          <p:nvPr/>
+        </p:nvSpPr>
+        <p:spPr>
+          <a:xfrm>
+            <a:off x="6475911" y="4910328"/>
+            <a:ext cx="401683" cy="219456"/>
           </a:xfrm>
           <a:prstGeom prst="rect">
             <a:avLst/>
@@ -22468,7 +26677,7 @@
               <a:buNone/>
             </a:pPr>
             <a:r>
-              <a:rPr lang="en-US" sz="680" dirty="0">
+              <a:rPr lang="en-US" sz="620" dirty="0">
                 <a:solidFill>
                   <a:srgbClr val="12293A"/>
                 </a:solidFill>
@@ -22476,77 +26685,97 @@
                 <a:ea typeface="Poppins" pitchFamily="34" charset="-122"/>
                 <a:cs typeface="Poppins" pitchFamily="34" charset="-120"/>
               </a:rPr>
-              <a:t>77,260</a:t>
-            </a:r>
-            <a:endParaRPr lang="en-US" sz="680" dirty="0"/>
-          </a:p>
-        </p:txBody>
-      </p:sp>
-      <p:sp>
-        <p:nvSpPr>
-          <p:cNvPr id="64" name="Text 62"/>
-          <p:cNvSpPr txBox="1"/>
-          <p:nvPr/>
-        </p:nvSpPr>
-        <p:spPr>
-          <a:xfrm>
-            <a:off x="6400800" y="2990088"/>
-            <a:ext cx="1280160" cy="164592"/>
-          </a:xfrm>
-          <a:prstGeom prst="rect">
-            <a:avLst/>
-          </a:prstGeom>
-          <a:noFill/>
-          <a:ln/>
-        </p:spPr>
-        <p:txBody>
-          <a:bodyPr wrap="square" lIns="0" tIns="0" rIns="0" bIns="0" rtlCol="0" anchor="ctr"/>
-          <a:lstStyle/>
-          <a:p>
-            <a:pPr algn="r" indent="0" marL="0">
-              <a:buNone/>
-            </a:pPr>
-            <a:r>
-              <a:rPr lang="en-US" sz="700" b="1" dirty="0">
-                <a:solidFill>
-                  <a:srgbClr val="5E7280"/>
-                </a:solidFill>
-                <a:latin typeface="Poppins" pitchFamily="34" charset="0"/>
-                <a:ea typeface="Poppins" pitchFamily="34" charset="-122"/>
-                <a:cs typeface="Poppins" pitchFamily="34" charset="-120"/>
-              </a:rPr>
-              <a:t>230,929</a:t>
-            </a:r>
-            <a:endParaRPr lang="en-US" sz="700" dirty="0"/>
-          </a:p>
-        </p:txBody>
-      </p:sp>
-      <p:sp>
-        <p:nvSpPr>
-          <p:cNvPr id="65" name="Text 63"/>
-          <p:cNvSpPr txBox="1"/>
-          <p:nvPr/>
-        </p:nvSpPr>
-        <p:spPr>
-          <a:xfrm>
-            <a:off x="594360" y="3163824"/>
-            <a:ext cx="1417320" cy="164592"/>
-          </a:xfrm>
-          <a:prstGeom prst="rect">
-            <a:avLst/>
-          </a:prstGeom>
-          <a:noFill/>
-          <a:ln/>
-        </p:spPr>
-        <p:txBody>
-          <a:bodyPr wrap="square" lIns="0" tIns="0" rIns="0" bIns="0" rtlCol="0" anchor="ctr"/>
-          <a:lstStyle/>
-          <a:p>
-            <a:pPr indent="0" marL="0">
-              <a:buNone/>
-            </a:pPr>
-            <a:r>
-              <a:rPr lang="en-US" sz="720" b="1" dirty="0">
+              <a:t>68k</a:t>
+            </a:r>
+            <a:endParaRPr lang="en-US" sz="620" dirty="0"/>
+          </a:p>
+        </p:txBody>
+      </p:sp>
+      <p:sp>
+        <p:nvSpPr>
+          <p:cNvPr id="193" name="Text 191"/>
+          <p:cNvSpPr txBox="1"/>
+          <p:nvPr/>
+        </p:nvSpPr>
+        <p:spPr>
+          <a:xfrm>
+            <a:off x="6475911" y="5138928"/>
+            <a:ext cx="401683" cy="146304"/>
+          </a:xfrm>
+          <a:prstGeom prst="rect">
+            <a:avLst/>
+          </a:prstGeom>
+          <a:noFill/>
+          <a:ln/>
+        </p:spPr>
+        <p:txBody>
+          <a:bodyPr wrap="square" lIns="0" tIns="0" rIns="0" bIns="0" rtlCol="0" anchor="ctr"/>
+          <a:lstStyle/>
+          <a:p>
+            <a:pPr algn="ctr" indent="0" marL="0">
+              <a:buNone/>
+            </a:pPr>
+            <a:r>
+              <a:rPr lang="en-US" sz="550" dirty="0">
+                <a:solidFill>
+                  <a:srgbClr val="8FA1AC"/>
+                </a:solidFill>
+                <a:latin typeface="Poppins" pitchFamily="34" charset="0"/>
+                <a:ea typeface="Poppins" pitchFamily="34" charset="-122"/>
+                <a:cs typeface="Poppins" pitchFamily="34" charset="-120"/>
+              </a:rPr>
+              <a:t>23</a:t>
+            </a:r>
+            <a:endParaRPr lang="en-US" sz="550" dirty="0"/>
+          </a:p>
+        </p:txBody>
+      </p:sp>
+      <p:sp>
+        <p:nvSpPr>
+          <p:cNvPr id="194" name="Shape 192"/>
+          <p:cNvSpPr/>
+          <p:nvPr/>
+        </p:nvSpPr>
+        <p:spPr>
+          <a:xfrm>
+            <a:off x="6895882" y="4910328"/>
+            <a:ext cx="365107" cy="219456"/>
+          </a:xfrm>
+          <a:prstGeom prst="rect">
+            <a:avLst/>
+          </a:prstGeom>
+          <a:solidFill>
+            <a:srgbClr val="8FC3CC"/>
+          </a:solidFill>
+          <a:ln/>
+        </p:spPr>
+      </p:sp>
+      <p:sp>
+        <p:nvSpPr>
+          <p:cNvPr id="195" name="Text 193"/>
+          <p:cNvSpPr txBox="1"/>
+          <p:nvPr/>
+        </p:nvSpPr>
+        <p:spPr>
+          <a:xfrm>
+            <a:off x="6877594" y="4910328"/>
+            <a:ext cx="401683" cy="219456"/>
+          </a:xfrm>
+          <a:prstGeom prst="rect">
+            <a:avLst/>
+          </a:prstGeom>
+          <a:noFill/>
+          <a:ln/>
+        </p:spPr>
+        <p:txBody>
+          <a:bodyPr wrap="square" lIns="0" tIns="0" rIns="0" bIns="0" rtlCol="0" anchor="ctr"/>
+          <a:lstStyle/>
+          <a:p>
+            <a:pPr algn="ctr" indent="0" marL="0">
+              <a:buNone/>
+            </a:pPr>
+            <a:r>
+              <a:rPr lang="en-US" sz="620" dirty="0">
                 <a:solidFill>
                   <a:srgbClr val="12293A"/>
                 </a:solidFill>
@@ -22554,42 +26783,22 @@
                 <a:ea typeface="Poppins" pitchFamily="34" charset="-122"/>
                 <a:cs typeface="Poppins" pitchFamily="34" charset="-120"/>
               </a:rPr>
-              <a:t>Hawraa Khalil</a:t>
-            </a:r>
-            <a:endParaRPr lang="en-US" sz="720" dirty="0"/>
-          </a:p>
-        </p:txBody>
-      </p:sp>
-      <p:sp>
-        <p:nvSpPr>
-          <p:cNvPr id="66" name="Shape 64"/>
-          <p:cNvSpPr/>
-          <p:nvPr/>
-        </p:nvSpPr>
-        <p:spPr>
-          <a:xfrm>
-            <a:off x="2084832" y="3171139"/>
-            <a:ext cx="996696" cy="150876"/>
-          </a:xfrm>
-          <a:prstGeom prst="rect">
-            <a:avLst/>
-          </a:prstGeom>
-          <a:solidFill>
-            <a:srgbClr val="D4E9ED"/>
-          </a:solidFill>
-          <a:ln/>
-        </p:spPr>
-      </p:sp>
-      <p:sp>
-        <p:nvSpPr>
-          <p:cNvPr id="67" name="Text 65"/>
-          <p:cNvSpPr txBox="1"/>
-          <p:nvPr/>
-        </p:nvSpPr>
-        <p:spPr>
-          <a:xfrm>
-            <a:off x="2057400" y="3163824"/>
-            <a:ext cx="1051560" cy="164592"/>
+              <a:t>60k</a:t>
+            </a:r>
+            <a:endParaRPr lang="en-US" sz="620" dirty="0"/>
+          </a:p>
+        </p:txBody>
+      </p:sp>
+      <p:sp>
+        <p:nvSpPr>
+          <p:cNvPr id="196" name="Text 194"/>
+          <p:cNvSpPr txBox="1"/>
+          <p:nvPr/>
+        </p:nvSpPr>
+        <p:spPr>
+          <a:xfrm>
+            <a:off x="6877594" y="5138928"/>
+            <a:ext cx="401683" cy="146304"/>
           </a:xfrm>
           <a:prstGeom prst="rect">
             <a:avLst/>
@@ -22605,7 +26814,66 @@
               <a:buNone/>
             </a:pPr>
             <a:r>
-              <a:rPr lang="en-US" sz="680" dirty="0">
+              <a:rPr lang="en-US" sz="550" dirty="0">
+                <a:solidFill>
+                  <a:srgbClr val="8FA1AC"/>
+                </a:solidFill>
+                <a:latin typeface="Poppins" pitchFamily="34" charset="0"/>
+                <a:ea typeface="Poppins" pitchFamily="34" charset="-122"/>
+                <a:cs typeface="Poppins" pitchFamily="34" charset="-120"/>
+              </a:rPr>
+              <a:t>30</a:t>
+            </a:r>
+            <a:endParaRPr lang="en-US" sz="550" dirty="0"/>
+          </a:p>
+        </p:txBody>
+      </p:sp>
+      <p:sp>
+        <p:nvSpPr>
+          <p:cNvPr id="197" name="Shape 195"/>
+          <p:cNvSpPr/>
+          <p:nvPr/>
+        </p:nvSpPr>
+        <p:spPr>
+          <a:xfrm>
+            <a:off x="7297565" y="4910328"/>
+            <a:ext cx="365107" cy="219456"/>
+          </a:xfrm>
+          <a:prstGeom prst="rect">
+            <a:avLst/>
+          </a:prstGeom>
+          <a:solidFill>
+            <a:srgbClr val="8FC3CC"/>
+          </a:solidFill>
+          <a:ln/>
+        </p:spPr>
+      </p:sp>
+      <p:sp>
+        <p:nvSpPr>
+          <p:cNvPr id="198" name="Text 196"/>
+          <p:cNvSpPr txBox="1"/>
+          <p:nvPr/>
+        </p:nvSpPr>
+        <p:spPr>
+          <a:xfrm>
+            <a:off x="7279277" y="4910328"/>
+            <a:ext cx="401683" cy="219456"/>
+          </a:xfrm>
+          <a:prstGeom prst="rect">
+            <a:avLst/>
+          </a:prstGeom>
+          <a:noFill/>
+          <a:ln/>
+        </p:spPr>
+        <p:txBody>
+          <a:bodyPr wrap="square" lIns="0" tIns="0" rIns="0" bIns="0" rtlCol="0" anchor="ctr"/>
+          <a:lstStyle/>
+          <a:p>
+            <a:pPr algn="ctr" indent="0" marL="0">
+              <a:buNone/>
+            </a:pPr>
+            <a:r>
+              <a:rPr lang="en-US" sz="620" dirty="0">
                 <a:solidFill>
                   <a:srgbClr val="12293A"/>
                 </a:solidFill>
@@ -22613,42 +26881,22 @@
                 <a:ea typeface="Poppins" pitchFamily="34" charset="-122"/>
                 <a:cs typeface="Poppins" pitchFamily="34" charset="-120"/>
               </a:rPr>
-              <a:t>28,536</a:t>
-            </a:r>
-            <a:endParaRPr lang="en-US" sz="680" dirty="0"/>
-          </a:p>
-        </p:txBody>
-      </p:sp>
-      <p:sp>
-        <p:nvSpPr>
-          <p:cNvPr id="68" name="Shape 66"/>
-          <p:cNvSpPr/>
-          <p:nvPr/>
-        </p:nvSpPr>
-        <p:spPr>
-          <a:xfrm>
-            <a:off x="3163824" y="3171139"/>
-            <a:ext cx="996696" cy="150876"/>
-          </a:xfrm>
-          <a:prstGeom prst="rect">
-            <a:avLst/>
-          </a:prstGeom>
-          <a:solidFill>
-            <a:srgbClr val="D4E9ED"/>
-          </a:solidFill>
-          <a:ln/>
-        </p:spPr>
-      </p:sp>
-      <p:sp>
-        <p:nvSpPr>
-          <p:cNvPr id="69" name="Text 67"/>
-          <p:cNvSpPr txBox="1"/>
-          <p:nvPr/>
-        </p:nvSpPr>
-        <p:spPr>
-          <a:xfrm>
-            <a:off x="3136392" y="3163824"/>
-            <a:ext cx="1051560" cy="164592"/>
+              <a:t>66k</a:t>
+            </a:r>
+            <a:endParaRPr lang="en-US" sz="620" dirty="0"/>
+          </a:p>
+        </p:txBody>
+      </p:sp>
+      <p:sp>
+        <p:nvSpPr>
+          <p:cNvPr id="199" name="Text 197"/>
+          <p:cNvSpPr txBox="1"/>
+          <p:nvPr/>
+        </p:nvSpPr>
+        <p:spPr>
+          <a:xfrm>
+            <a:off x="7279277" y="5138928"/>
+            <a:ext cx="401683" cy="146304"/>
           </a:xfrm>
           <a:prstGeom prst="rect">
             <a:avLst/>
@@ -22664,105 +26912,7 @@
               <a:buNone/>
             </a:pPr>
             <a:r>
-              <a:rPr lang="en-US" sz="680" dirty="0">
-                <a:solidFill>
-                  <a:srgbClr val="12293A"/>
-                </a:solidFill>
-                <a:latin typeface="Poppins" pitchFamily="34" charset="0"/>
-                <a:ea typeface="Poppins" pitchFamily="34" charset="-122"/>
-                <a:cs typeface="Poppins" pitchFamily="34" charset="-120"/>
-              </a:rPr>
-              <a:t>23,285</a:t>
-            </a:r>
-            <a:endParaRPr lang="en-US" sz="680" dirty="0"/>
-          </a:p>
-        </p:txBody>
-      </p:sp>
-      <p:sp>
-        <p:nvSpPr>
-          <p:cNvPr id="70" name="Shape 68"/>
-          <p:cNvSpPr/>
-          <p:nvPr/>
-        </p:nvSpPr>
-        <p:spPr>
-          <a:xfrm>
-            <a:off x="4242816" y="3171139"/>
-            <a:ext cx="996696" cy="150876"/>
-          </a:xfrm>
-          <a:prstGeom prst="rect">
-            <a:avLst/>
-          </a:prstGeom>
-          <a:solidFill>
-            <a:srgbClr val="EDF5F7"/>
-          </a:solidFill>
-          <a:ln/>
-        </p:spPr>
-      </p:sp>
-      <p:sp>
-        <p:nvSpPr>
-          <p:cNvPr id="71" name="Text 69"/>
-          <p:cNvSpPr txBox="1"/>
-          <p:nvPr/>
-        </p:nvSpPr>
-        <p:spPr>
-          <a:xfrm>
-            <a:off x="4215384" y="3163824"/>
-            <a:ext cx="1051560" cy="164592"/>
-          </a:xfrm>
-          <a:prstGeom prst="rect">
-            <a:avLst/>
-          </a:prstGeom>
-          <a:noFill/>
-          <a:ln/>
-        </p:spPr>
-        <p:txBody>
-          <a:bodyPr wrap="square" lIns="0" tIns="0" rIns="0" bIns="0" rtlCol="0" anchor="ctr"/>
-          <a:lstStyle/>
-          <a:p>
-            <a:pPr algn="ctr" indent="0" marL="0">
-              <a:buNone/>
-            </a:pPr>
-            <a:r>
-              <a:rPr lang="en-US" sz="680" dirty="0">
-                <a:solidFill>
-                  <a:srgbClr val="12293A"/>
-                </a:solidFill>
-                <a:latin typeface="Poppins" pitchFamily="34" charset="0"/>
-                <a:ea typeface="Poppins" pitchFamily="34" charset="-122"/>
-                <a:cs typeface="Poppins" pitchFamily="34" charset="-120"/>
-              </a:rPr>
-              <a:t>19,047</a:t>
-            </a:r>
-            <a:endParaRPr lang="en-US" sz="680" dirty="0"/>
-          </a:p>
-        </p:txBody>
-      </p:sp>
-      <p:sp>
-        <p:nvSpPr>
-          <p:cNvPr id="72" name="Text 70"/>
-          <p:cNvSpPr txBox="1"/>
-          <p:nvPr/>
-        </p:nvSpPr>
-        <p:spPr>
-          <a:xfrm>
-            <a:off x="5294376" y="3163824"/>
-            <a:ext cx="1051560" cy="164592"/>
-          </a:xfrm>
-          <a:prstGeom prst="rect">
-            <a:avLst/>
-          </a:prstGeom>
-          <a:noFill/>
-          <a:ln/>
-        </p:spPr>
-        <p:txBody>
-          <a:bodyPr wrap="square" lIns="0" tIns="0" rIns="0" bIns="0" rtlCol="0" anchor="ctr"/>
-          <a:lstStyle/>
-          <a:p>
-            <a:pPr algn="ctr" indent="0" marL="0">
-              <a:buNone/>
-            </a:pPr>
-            <a:r>
-              <a:rPr lang="en-US" sz="680" dirty="0">
+              <a:rPr lang="en-US" sz="550" dirty="0">
                 <a:solidFill>
                   <a:srgbClr val="8FA1AC"/>
                 </a:solidFill>
@@ -22770,2629 +26920,7 @@
                 <a:ea typeface="Poppins" pitchFamily="34" charset="-122"/>
                 <a:cs typeface="Poppins" pitchFamily="34" charset="-120"/>
               </a:rPr>
-              <a:t>—</a:t>
-            </a:r>
-            <a:endParaRPr lang="en-US" sz="680" dirty="0"/>
-          </a:p>
-        </p:txBody>
-      </p:sp>
-      <p:sp>
-        <p:nvSpPr>
-          <p:cNvPr id="73" name="Text 71"/>
-          <p:cNvSpPr txBox="1"/>
-          <p:nvPr/>
-        </p:nvSpPr>
-        <p:spPr>
-          <a:xfrm>
-            <a:off x="6400800" y="3163824"/>
-            <a:ext cx="1280160" cy="164592"/>
-          </a:xfrm>
-          <a:prstGeom prst="rect">
-            <a:avLst/>
-          </a:prstGeom>
-          <a:noFill/>
-          <a:ln/>
-        </p:spPr>
-        <p:txBody>
-          <a:bodyPr wrap="square" lIns="0" tIns="0" rIns="0" bIns="0" rtlCol="0" anchor="ctr"/>
-          <a:lstStyle/>
-          <a:p>
-            <a:pPr algn="r" indent="0" marL="0">
-              <a:buNone/>
-            </a:pPr>
-            <a:r>
-              <a:rPr lang="en-US" sz="700" b="1" dirty="0">
-                <a:solidFill>
-                  <a:srgbClr val="5E7280"/>
-                </a:solidFill>
-                <a:latin typeface="Poppins" pitchFamily="34" charset="0"/>
-                <a:ea typeface="Poppins" pitchFamily="34" charset="-122"/>
-                <a:cs typeface="Poppins" pitchFamily="34" charset="-120"/>
-              </a:rPr>
-              <a:t>70,868</a:t>
-            </a:r>
-            <a:endParaRPr lang="en-US" sz="700" dirty="0"/>
-          </a:p>
-        </p:txBody>
-      </p:sp>
-      <p:sp>
-        <p:nvSpPr>
-          <p:cNvPr id="74" name="Text 72"/>
-          <p:cNvSpPr txBox="1"/>
-          <p:nvPr/>
-        </p:nvSpPr>
-        <p:spPr>
-          <a:xfrm>
-            <a:off x="594360" y="3337560"/>
-            <a:ext cx="1417320" cy="164592"/>
-          </a:xfrm>
-          <a:prstGeom prst="rect">
-            <a:avLst/>
-          </a:prstGeom>
-          <a:noFill/>
-          <a:ln/>
-        </p:spPr>
-        <p:txBody>
-          <a:bodyPr wrap="square" lIns="0" tIns="0" rIns="0" bIns="0" rtlCol="0" anchor="ctr"/>
-          <a:lstStyle/>
-          <a:p>
-            <a:pPr indent="0" marL="0">
-              <a:buNone/>
-            </a:pPr>
-            <a:r>
-              <a:rPr lang="en-US" sz="720" b="1" dirty="0">
-                <a:solidFill>
-                  <a:srgbClr val="12293A"/>
-                </a:solidFill>
-                <a:latin typeface="Poppins" pitchFamily="34" charset="0"/>
-                <a:ea typeface="Poppins" pitchFamily="34" charset="-122"/>
-                <a:cs typeface="Poppins" pitchFamily="34" charset="-120"/>
-              </a:rPr>
-              <a:t>Ciaran Dempsey</a:t>
-            </a:r>
-            <a:endParaRPr lang="en-US" sz="720" dirty="0"/>
-          </a:p>
-        </p:txBody>
-      </p:sp>
-      <p:sp>
-        <p:nvSpPr>
-          <p:cNvPr id="75" name="Shape 73"/>
-          <p:cNvSpPr/>
-          <p:nvPr/>
-        </p:nvSpPr>
-        <p:spPr>
-          <a:xfrm>
-            <a:off x="2084832" y="3344875"/>
-            <a:ext cx="996696" cy="150876"/>
-          </a:xfrm>
-          <a:prstGeom prst="rect">
-            <a:avLst/>
-          </a:prstGeom>
-          <a:solidFill>
-            <a:srgbClr val="EDF5F7"/>
-          </a:solidFill>
-          <a:ln/>
-        </p:spPr>
-      </p:sp>
-      <p:sp>
-        <p:nvSpPr>
-          <p:cNvPr id="76" name="Text 74"/>
-          <p:cNvSpPr txBox="1"/>
-          <p:nvPr/>
-        </p:nvSpPr>
-        <p:spPr>
-          <a:xfrm>
-            <a:off x="2057400" y="3337560"/>
-            <a:ext cx="1051560" cy="164592"/>
-          </a:xfrm>
-          <a:prstGeom prst="rect">
-            <a:avLst/>
-          </a:prstGeom>
-          <a:noFill/>
-          <a:ln/>
-        </p:spPr>
-        <p:txBody>
-          <a:bodyPr wrap="square" lIns="0" tIns="0" rIns="0" bIns="0" rtlCol="0" anchor="ctr"/>
-          <a:lstStyle/>
-          <a:p>
-            <a:pPr algn="ctr" indent="0" marL="0">
-              <a:buNone/>
-            </a:pPr>
-            <a:r>
-              <a:rPr lang="en-US" sz="680" dirty="0">
-                <a:solidFill>
-                  <a:srgbClr val="12293A"/>
-                </a:solidFill>
-                <a:latin typeface="Poppins" pitchFamily="34" charset="0"/>
-                <a:ea typeface="Poppins" pitchFamily="34" charset="-122"/>
-                <a:cs typeface="Poppins" pitchFamily="34" charset="-120"/>
-              </a:rPr>
-              <a:t>18,918</a:t>
-            </a:r>
-            <a:endParaRPr lang="en-US" sz="680" dirty="0"/>
-          </a:p>
-        </p:txBody>
-      </p:sp>
-      <p:sp>
-        <p:nvSpPr>
-          <p:cNvPr id="77" name="Shape 75"/>
-          <p:cNvSpPr/>
-          <p:nvPr/>
-        </p:nvSpPr>
-        <p:spPr>
-          <a:xfrm>
-            <a:off x="3163824" y="3344875"/>
-            <a:ext cx="996696" cy="150876"/>
-          </a:xfrm>
-          <a:prstGeom prst="rect">
-            <a:avLst/>
-          </a:prstGeom>
-          <a:solidFill>
-            <a:srgbClr val="D4E9ED"/>
-          </a:solidFill>
-          <a:ln/>
-        </p:spPr>
-      </p:sp>
-      <p:sp>
-        <p:nvSpPr>
-          <p:cNvPr id="78" name="Text 76"/>
-          <p:cNvSpPr txBox="1"/>
-          <p:nvPr/>
-        </p:nvSpPr>
-        <p:spPr>
-          <a:xfrm>
-            <a:off x="3136392" y="3337560"/>
-            <a:ext cx="1051560" cy="164592"/>
-          </a:xfrm>
-          <a:prstGeom prst="rect">
-            <a:avLst/>
-          </a:prstGeom>
-          <a:noFill/>
-          <a:ln/>
-        </p:spPr>
-        <p:txBody>
-          <a:bodyPr wrap="square" lIns="0" tIns="0" rIns="0" bIns="0" rtlCol="0" anchor="ctr"/>
-          <a:lstStyle/>
-          <a:p>
-            <a:pPr algn="ctr" indent="0" marL="0">
-              <a:buNone/>
-            </a:pPr>
-            <a:r>
-              <a:rPr lang="en-US" sz="680" dirty="0">
-                <a:solidFill>
-                  <a:srgbClr val="12293A"/>
-                </a:solidFill>
-                <a:latin typeface="Poppins" pitchFamily="34" charset="0"/>
-                <a:ea typeface="Poppins" pitchFamily="34" charset="-122"/>
-                <a:cs typeface="Poppins" pitchFamily="34" charset="-120"/>
-              </a:rPr>
-              <a:t>23,650</a:t>
-            </a:r>
-            <a:endParaRPr lang="en-US" sz="680" dirty="0"/>
-          </a:p>
-        </p:txBody>
-      </p:sp>
-      <p:sp>
-        <p:nvSpPr>
-          <p:cNvPr id="79" name="Shape 77"/>
-          <p:cNvSpPr/>
-          <p:nvPr/>
-        </p:nvSpPr>
-        <p:spPr>
-          <a:xfrm>
-            <a:off x="4242816" y="3344875"/>
-            <a:ext cx="996696" cy="150876"/>
-          </a:xfrm>
-          <a:prstGeom prst="rect">
-            <a:avLst/>
-          </a:prstGeom>
-          <a:solidFill>
-            <a:srgbClr val="D4E9ED"/>
-          </a:solidFill>
-          <a:ln/>
-        </p:spPr>
-      </p:sp>
-      <p:sp>
-        <p:nvSpPr>
-          <p:cNvPr id="80" name="Text 78"/>
-          <p:cNvSpPr txBox="1"/>
-          <p:nvPr/>
-        </p:nvSpPr>
-        <p:spPr>
-          <a:xfrm>
-            <a:off x="4215384" y="3337560"/>
-            <a:ext cx="1051560" cy="164592"/>
-          </a:xfrm>
-          <a:prstGeom prst="rect">
-            <a:avLst/>
-          </a:prstGeom>
-          <a:noFill/>
-          <a:ln/>
-        </p:spPr>
-        <p:txBody>
-          <a:bodyPr wrap="square" lIns="0" tIns="0" rIns="0" bIns="0" rtlCol="0" anchor="ctr"/>
-          <a:lstStyle/>
-          <a:p>
-            <a:pPr algn="ctr" indent="0" marL="0">
-              <a:buNone/>
-            </a:pPr>
-            <a:r>
-              <a:rPr lang="en-US" sz="680" dirty="0">
-                <a:solidFill>
-                  <a:srgbClr val="12293A"/>
-                </a:solidFill>
-                <a:latin typeface="Poppins" pitchFamily="34" charset="0"/>
-                <a:ea typeface="Poppins" pitchFamily="34" charset="-122"/>
-                <a:cs typeface="Poppins" pitchFamily="34" charset="-120"/>
-              </a:rPr>
-              <a:t>24,443</a:t>
-            </a:r>
-            <a:endParaRPr lang="en-US" sz="680" dirty="0"/>
-          </a:p>
-        </p:txBody>
-      </p:sp>
-      <p:sp>
-        <p:nvSpPr>
-          <p:cNvPr id="81" name="Shape 79"/>
-          <p:cNvSpPr/>
-          <p:nvPr/>
-        </p:nvSpPr>
-        <p:spPr>
-          <a:xfrm>
-            <a:off x="5321808" y="3344875"/>
-            <a:ext cx="996696" cy="150876"/>
-          </a:xfrm>
-          <a:prstGeom prst="rect">
-            <a:avLst/>
-          </a:prstGeom>
-          <a:solidFill>
-            <a:srgbClr val="EDF5F7"/>
-          </a:solidFill>
-          <a:ln/>
-        </p:spPr>
-      </p:sp>
-      <p:sp>
-        <p:nvSpPr>
-          <p:cNvPr id="82" name="Text 80"/>
-          <p:cNvSpPr txBox="1"/>
-          <p:nvPr/>
-        </p:nvSpPr>
-        <p:spPr>
-          <a:xfrm>
-            <a:off x="5294376" y="3337560"/>
-            <a:ext cx="1051560" cy="164592"/>
-          </a:xfrm>
-          <a:prstGeom prst="rect">
-            <a:avLst/>
-          </a:prstGeom>
-          <a:noFill/>
-          <a:ln/>
-        </p:spPr>
-        <p:txBody>
-          <a:bodyPr wrap="square" lIns="0" tIns="0" rIns="0" bIns="0" rtlCol="0" anchor="ctr"/>
-          <a:lstStyle/>
-          <a:p>
-            <a:pPr algn="ctr" indent="0" marL="0">
-              <a:buNone/>
-            </a:pPr>
-            <a:r>
-              <a:rPr lang="en-US" sz="680" dirty="0">
-                <a:solidFill>
-                  <a:srgbClr val="12293A"/>
-                </a:solidFill>
-                <a:latin typeface="Poppins" pitchFamily="34" charset="0"/>
-                <a:ea typeface="Poppins" pitchFamily="34" charset="-122"/>
-                <a:cs typeface="Poppins" pitchFamily="34" charset="-120"/>
-              </a:rPr>
-              <a:t>1,321</a:t>
-            </a:r>
-            <a:endParaRPr lang="en-US" sz="680" dirty="0"/>
-          </a:p>
-        </p:txBody>
-      </p:sp>
-      <p:sp>
-        <p:nvSpPr>
-          <p:cNvPr id="83" name="Text 81"/>
-          <p:cNvSpPr txBox="1"/>
-          <p:nvPr/>
-        </p:nvSpPr>
-        <p:spPr>
-          <a:xfrm>
-            <a:off x="6400800" y="3337560"/>
-            <a:ext cx="1280160" cy="164592"/>
-          </a:xfrm>
-          <a:prstGeom prst="rect">
-            <a:avLst/>
-          </a:prstGeom>
-          <a:noFill/>
-          <a:ln/>
-        </p:spPr>
-        <p:txBody>
-          <a:bodyPr wrap="square" lIns="0" tIns="0" rIns="0" bIns="0" rtlCol="0" anchor="ctr"/>
-          <a:lstStyle/>
-          <a:p>
-            <a:pPr algn="r" indent="0" marL="0">
-              <a:buNone/>
-            </a:pPr>
-            <a:r>
-              <a:rPr lang="en-US" sz="700" b="1" dirty="0">
-                <a:solidFill>
-                  <a:srgbClr val="5E7280"/>
-                </a:solidFill>
-                <a:latin typeface="Poppins" pitchFamily="34" charset="0"/>
-                <a:ea typeface="Poppins" pitchFamily="34" charset="-122"/>
-                <a:cs typeface="Poppins" pitchFamily="34" charset="-120"/>
-              </a:rPr>
-              <a:t>68,332</a:t>
-            </a:r>
-            <a:endParaRPr lang="en-US" sz="700" dirty="0"/>
-          </a:p>
-        </p:txBody>
-      </p:sp>
-      <p:sp>
-        <p:nvSpPr>
-          <p:cNvPr id="84" name="Text 82"/>
-          <p:cNvSpPr txBox="1"/>
-          <p:nvPr/>
-        </p:nvSpPr>
-        <p:spPr>
-          <a:xfrm>
-            <a:off x="594360" y="3511296"/>
-            <a:ext cx="1417320" cy="164592"/>
-          </a:xfrm>
-          <a:prstGeom prst="rect">
-            <a:avLst/>
-          </a:prstGeom>
-          <a:noFill/>
-          <a:ln/>
-        </p:spPr>
-        <p:txBody>
-          <a:bodyPr wrap="square" lIns="0" tIns="0" rIns="0" bIns="0" rtlCol="0" anchor="ctr"/>
-          <a:lstStyle/>
-          <a:p>
-            <a:pPr indent="0" marL="0">
-              <a:buNone/>
-            </a:pPr>
-            <a:r>
-              <a:rPr lang="en-US" sz="720" b="1" dirty="0">
-                <a:solidFill>
-                  <a:srgbClr val="12293A"/>
-                </a:solidFill>
-                <a:latin typeface="Poppins" pitchFamily="34" charset="0"/>
-                <a:ea typeface="Poppins" pitchFamily="34" charset="-122"/>
-                <a:cs typeface="Poppins" pitchFamily="34" charset="-120"/>
-              </a:rPr>
-              <a:t>David Corbett</a:t>
-            </a:r>
-            <a:endParaRPr lang="en-US" sz="720" dirty="0"/>
-          </a:p>
-        </p:txBody>
-      </p:sp>
-      <p:sp>
-        <p:nvSpPr>
-          <p:cNvPr id="85" name="Shape 83"/>
-          <p:cNvSpPr/>
-          <p:nvPr/>
-        </p:nvSpPr>
-        <p:spPr>
-          <a:xfrm>
-            <a:off x="2084832" y="3518611"/>
-            <a:ext cx="996696" cy="150876"/>
-          </a:xfrm>
-          <a:prstGeom prst="rect">
-            <a:avLst/>
-          </a:prstGeom>
-          <a:solidFill>
-            <a:srgbClr val="D4E9ED"/>
-          </a:solidFill>
-          <a:ln/>
-        </p:spPr>
-      </p:sp>
-      <p:sp>
-        <p:nvSpPr>
-          <p:cNvPr id="86" name="Text 84"/>
-          <p:cNvSpPr txBox="1"/>
-          <p:nvPr/>
-        </p:nvSpPr>
-        <p:spPr>
-          <a:xfrm>
-            <a:off x="2057400" y="3511296"/>
-            <a:ext cx="1051560" cy="164592"/>
-          </a:xfrm>
-          <a:prstGeom prst="rect">
-            <a:avLst/>
-          </a:prstGeom>
-          <a:noFill/>
-          <a:ln/>
-        </p:spPr>
-        <p:txBody>
-          <a:bodyPr wrap="square" lIns="0" tIns="0" rIns="0" bIns="0" rtlCol="0" anchor="ctr"/>
-          <a:lstStyle/>
-          <a:p>
-            <a:pPr algn="ctr" indent="0" marL="0">
-              <a:buNone/>
-            </a:pPr>
-            <a:r>
-              <a:rPr lang="en-US" sz="680" dirty="0">
-                <a:solidFill>
-                  <a:srgbClr val="12293A"/>
-                </a:solidFill>
-                <a:latin typeface="Poppins" pitchFamily="34" charset="0"/>
-                <a:ea typeface="Poppins" pitchFamily="34" charset="-122"/>
-                <a:cs typeface="Poppins" pitchFamily="34" charset="-120"/>
-              </a:rPr>
-              <a:t>27,031</a:t>
-            </a:r>
-            <a:endParaRPr lang="en-US" sz="680" dirty="0"/>
-          </a:p>
-        </p:txBody>
-      </p:sp>
-      <p:sp>
-        <p:nvSpPr>
-          <p:cNvPr id="87" name="Shape 85"/>
-          <p:cNvSpPr/>
-          <p:nvPr/>
-        </p:nvSpPr>
-        <p:spPr>
-          <a:xfrm>
-            <a:off x="3163824" y="3518611"/>
-            <a:ext cx="996696" cy="150876"/>
-          </a:xfrm>
-          <a:prstGeom prst="rect">
-            <a:avLst/>
-          </a:prstGeom>
-          <a:solidFill>
-            <a:srgbClr val="EDF5F7"/>
-          </a:solidFill>
-          <a:ln/>
-        </p:spPr>
-      </p:sp>
-      <p:sp>
-        <p:nvSpPr>
-          <p:cNvPr id="88" name="Text 86"/>
-          <p:cNvSpPr txBox="1"/>
-          <p:nvPr/>
-        </p:nvSpPr>
-        <p:spPr>
-          <a:xfrm>
-            <a:off x="3136392" y="3511296"/>
-            <a:ext cx="1051560" cy="164592"/>
-          </a:xfrm>
-          <a:prstGeom prst="rect">
-            <a:avLst/>
-          </a:prstGeom>
-          <a:noFill/>
-          <a:ln/>
-        </p:spPr>
-        <p:txBody>
-          <a:bodyPr wrap="square" lIns="0" tIns="0" rIns="0" bIns="0" rtlCol="0" anchor="ctr"/>
-          <a:lstStyle/>
-          <a:p>
-            <a:pPr algn="ctr" indent="0" marL="0">
-              <a:buNone/>
-            </a:pPr>
-            <a:r>
-              <a:rPr lang="en-US" sz="680" dirty="0">
-                <a:solidFill>
-                  <a:srgbClr val="12293A"/>
-                </a:solidFill>
-                <a:latin typeface="Poppins" pitchFamily="34" charset="0"/>
-                <a:ea typeface="Poppins" pitchFamily="34" charset="-122"/>
-                <a:cs typeface="Poppins" pitchFamily="34" charset="-120"/>
-              </a:rPr>
-              <a:t>10,145</a:t>
-            </a:r>
-            <a:endParaRPr lang="en-US" sz="680" dirty="0"/>
-          </a:p>
-        </p:txBody>
-      </p:sp>
-      <p:sp>
-        <p:nvSpPr>
-          <p:cNvPr id="89" name="Shape 87"/>
-          <p:cNvSpPr/>
-          <p:nvPr/>
-        </p:nvSpPr>
-        <p:spPr>
-          <a:xfrm>
-            <a:off x="4242816" y="3518611"/>
-            <a:ext cx="996696" cy="150876"/>
-          </a:xfrm>
-          <a:prstGeom prst="rect">
-            <a:avLst/>
-          </a:prstGeom>
-          <a:solidFill>
-            <a:srgbClr val="D4E9ED"/>
-          </a:solidFill>
-          <a:ln/>
-        </p:spPr>
-      </p:sp>
-      <p:sp>
-        <p:nvSpPr>
-          <p:cNvPr id="90" name="Text 88"/>
-          <p:cNvSpPr txBox="1"/>
-          <p:nvPr/>
-        </p:nvSpPr>
-        <p:spPr>
-          <a:xfrm>
-            <a:off x="4215384" y="3511296"/>
-            <a:ext cx="1051560" cy="164592"/>
-          </a:xfrm>
-          <a:prstGeom prst="rect">
-            <a:avLst/>
-          </a:prstGeom>
-          <a:noFill/>
-          <a:ln/>
-        </p:spPr>
-        <p:txBody>
-          <a:bodyPr wrap="square" lIns="0" tIns="0" rIns="0" bIns="0" rtlCol="0" anchor="ctr"/>
-          <a:lstStyle/>
-          <a:p>
-            <a:pPr algn="ctr" indent="0" marL="0">
-              <a:buNone/>
-            </a:pPr>
-            <a:r>
-              <a:rPr lang="en-US" sz="680" dirty="0">
-                <a:solidFill>
-                  <a:srgbClr val="12293A"/>
-                </a:solidFill>
-                <a:latin typeface="Poppins" pitchFamily="34" charset="0"/>
-                <a:ea typeface="Poppins" pitchFamily="34" charset="-122"/>
-                <a:cs typeface="Poppins" pitchFamily="34" charset="-120"/>
-              </a:rPr>
-              <a:t>30,828</a:t>
-            </a:r>
-            <a:endParaRPr lang="en-US" sz="680" dirty="0"/>
-          </a:p>
-        </p:txBody>
-      </p:sp>
-      <p:sp>
-        <p:nvSpPr>
-          <p:cNvPr id="91" name="Shape 89"/>
-          <p:cNvSpPr/>
-          <p:nvPr/>
-        </p:nvSpPr>
-        <p:spPr>
-          <a:xfrm>
-            <a:off x="5321808" y="3518611"/>
-            <a:ext cx="996696" cy="150876"/>
-          </a:xfrm>
-          <a:prstGeom prst="rect">
-            <a:avLst/>
-          </a:prstGeom>
-          <a:solidFill>
-            <a:srgbClr val="EDF5F7"/>
-          </a:solidFill>
-          <a:ln/>
-        </p:spPr>
-      </p:sp>
-      <p:sp>
-        <p:nvSpPr>
-          <p:cNvPr id="92" name="Text 90"/>
-          <p:cNvSpPr txBox="1"/>
-          <p:nvPr/>
-        </p:nvSpPr>
-        <p:spPr>
-          <a:xfrm>
-            <a:off x="5294376" y="3511296"/>
-            <a:ext cx="1051560" cy="164592"/>
-          </a:xfrm>
-          <a:prstGeom prst="rect">
-            <a:avLst/>
-          </a:prstGeom>
-          <a:noFill/>
-          <a:ln/>
-        </p:spPr>
-        <p:txBody>
-          <a:bodyPr wrap="square" lIns="0" tIns="0" rIns="0" bIns="0" rtlCol="0" anchor="ctr"/>
-          <a:lstStyle/>
-          <a:p>
-            <a:pPr algn="ctr" indent="0" marL="0">
-              <a:buNone/>
-            </a:pPr>
-            <a:r>
-              <a:rPr lang="en-US" sz="680" dirty="0">
-                <a:solidFill>
-                  <a:srgbClr val="12293A"/>
-                </a:solidFill>
-                <a:latin typeface="Poppins" pitchFamily="34" charset="0"/>
-                <a:ea typeface="Poppins" pitchFamily="34" charset="-122"/>
-                <a:cs typeface="Poppins" pitchFamily="34" charset="-120"/>
-              </a:rPr>
-              <a:t>6,988</a:t>
-            </a:r>
-            <a:endParaRPr lang="en-US" sz="680" dirty="0"/>
-          </a:p>
-        </p:txBody>
-      </p:sp>
-      <p:sp>
-        <p:nvSpPr>
-          <p:cNvPr id="93" name="Text 91"/>
-          <p:cNvSpPr txBox="1"/>
-          <p:nvPr/>
-        </p:nvSpPr>
-        <p:spPr>
-          <a:xfrm>
-            <a:off x="6400800" y="3511296"/>
-            <a:ext cx="1280160" cy="164592"/>
-          </a:xfrm>
-          <a:prstGeom prst="rect">
-            <a:avLst/>
-          </a:prstGeom>
-          <a:noFill/>
-          <a:ln/>
-        </p:spPr>
-        <p:txBody>
-          <a:bodyPr wrap="square" lIns="0" tIns="0" rIns="0" bIns="0" rtlCol="0" anchor="ctr"/>
-          <a:lstStyle/>
-          <a:p>
-            <a:pPr algn="r" indent="0" marL="0">
-              <a:buNone/>
-            </a:pPr>
-            <a:r>
-              <a:rPr lang="en-US" sz="700" b="1" dirty="0">
-                <a:solidFill>
-                  <a:srgbClr val="5E7280"/>
-                </a:solidFill>
-                <a:latin typeface="Poppins" pitchFamily="34" charset="0"/>
-                <a:ea typeface="Poppins" pitchFamily="34" charset="-122"/>
-                <a:cs typeface="Poppins" pitchFamily="34" charset="-120"/>
-              </a:rPr>
-              <a:t>74,992</a:t>
-            </a:r>
-            <a:endParaRPr lang="en-US" sz="700" dirty="0"/>
-          </a:p>
-        </p:txBody>
-      </p:sp>
-      <p:sp>
-        <p:nvSpPr>
-          <p:cNvPr id="94" name="Text 92"/>
-          <p:cNvSpPr txBox="1"/>
-          <p:nvPr/>
-        </p:nvSpPr>
-        <p:spPr>
-          <a:xfrm>
-            <a:off x="594360" y="3685032"/>
-            <a:ext cx="1417320" cy="164592"/>
-          </a:xfrm>
-          <a:prstGeom prst="rect">
-            <a:avLst/>
-          </a:prstGeom>
-          <a:noFill/>
-          <a:ln/>
-        </p:spPr>
-        <p:txBody>
-          <a:bodyPr wrap="square" lIns="0" tIns="0" rIns="0" bIns="0" rtlCol="0" anchor="ctr"/>
-          <a:lstStyle/>
-          <a:p>
-            <a:pPr indent="0" marL="0">
-              <a:buNone/>
-            </a:pPr>
-            <a:r>
-              <a:rPr lang="en-US" sz="720" b="1" dirty="0">
-                <a:solidFill>
-                  <a:srgbClr val="12293A"/>
-                </a:solidFill>
-                <a:latin typeface="Poppins" pitchFamily="34" charset="0"/>
-                <a:ea typeface="Poppins" pitchFamily="34" charset="-122"/>
-                <a:cs typeface="Poppins" pitchFamily="34" charset="-120"/>
-              </a:rPr>
-              <a:t>Chris Huang</a:t>
-            </a:r>
-            <a:endParaRPr lang="en-US" sz="720" dirty="0"/>
-          </a:p>
-        </p:txBody>
-      </p:sp>
-      <p:sp>
-        <p:nvSpPr>
-          <p:cNvPr id="95" name="Shape 93"/>
-          <p:cNvSpPr/>
-          <p:nvPr/>
-        </p:nvSpPr>
-        <p:spPr>
-          <a:xfrm>
-            <a:off x="2084832" y="3692347"/>
-            <a:ext cx="996696" cy="150876"/>
-          </a:xfrm>
-          <a:prstGeom prst="rect">
-            <a:avLst/>
-          </a:prstGeom>
-          <a:solidFill>
-            <a:srgbClr val="EDF5F7"/>
-          </a:solidFill>
-          <a:ln/>
-        </p:spPr>
-      </p:sp>
-      <p:sp>
-        <p:nvSpPr>
-          <p:cNvPr id="96" name="Text 94"/>
-          <p:cNvSpPr txBox="1"/>
-          <p:nvPr/>
-        </p:nvSpPr>
-        <p:spPr>
-          <a:xfrm>
-            <a:off x="2057400" y="3685032"/>
-            <a:ext cx="1051560" cy="164592"/>
-          </a:xfrm>
-          <a:prstGeom prst="rect">
-            <a:avLst/>
-          </a:prstGeom>
-          <a:noFill/>
-          <a:ln/>
-        </p:spPr>
-        <p:txBody>
-          <a:bodyPr wrap="square" lIns="0" tIns="0" rIns="0" bIns="0" rtlCol="0" anchor="ctr"/>
-          <a:lstStyle/>
-          <a:p>
-            <a:pPr algn="ctr" indent="0" marL="0">
-              <a:buNone/>
-            </a:pPr>
-            <a:r>
-              <a:rPr lang="en-US" sz="680" dirty="0">
-                <a:solidFill>
-                  <a:srgbClr val="12293A"/>
-                </a:solidFill>
-                <a:latin typeface="Poppins" pitchFamily="34" charset="0"/>
-                <a:ea typeface="Poppins" pitchFamily="34" charset="-122"/>
-                <a:cs typeface="Poppins" pitchFamily="34" charset="-120"/>
-              </a:rPr>
-              <a:t>19,535</a:t>
-            </a:r>
-            <a:endParaRPr lang="en-US" sz="680" dirty="0"/>
-          </a:p>
-        </p:txBody>
-      </p:sp>
-      <p:sp>
-        <p:nvSpPr>
-          <p:cNvPr id="97" name="Shape 95"/>
-          <p:cNvSpPr/>
-          <p:nvPr/>
-        </p:nvSpPr>
-        <p:spPr>
-          <a:xfrm>
-            <a:off x="3163824" y="3692347"/>
-            <a:ext cx="996696" cy="150876"/>
-          </a:xfrm>
-          <a:prstGeom prst="rect">
-            <a:avLst/>
-          </a:prstGeom>
-          <a:solidFill>
-            <a:srgbClr val="EDF5F7"/>
-          </a:solidFill>
-          <a:ln/>
-        </p:spPr>
-      </p:sp>
-      <p:sp>
-        <p:nvSpPr>
-          <p:cNvPr id="98" name="Text 96"/>
-          <p:cNvSpPr txBox="1"/>
-          <p:nvPr/>
-        </p:nvSpPr>
-        <p:spPr>
-          <a:xfrm>
-            <a:off x="3136392" y="3685032"/>
-            <a:ext cx="1051560" cy="164592"/>
-          </a:xfrm>
-          <a:prstGeom prst="rect">
-            <a:avLst/>
-          </a:prstGeom>
-          <a:noFill/>
-          <a:ln/>
-        </p:spPr>
-        <p:txBody>
-          <a:bodyPr wrap="square" lIns="0" tIns="0" rIns="0" bIns="0" rtlCol="0" anchor="ctr"/>
-          <a:lstStyle/>
-          <a:p>
-            <a:pPr algn="ctr" indent="0" marL="0">
-              <a:buNone/>
-            </a:pPr>
-            <a:r>
-              <a:rPr lang="en-US" sz="680" dirty="0">
-                <a:solidFill>
-                  <a:srgbClr val="12293A"/>
-                </a:solidFill>
-                <a:latin typeface="Poppins" pitchFamily="34" charset="0"/>
-                <a:ea typeface="Poppins" pitchFamily="34" charset="-122"/>
-                <a:cs typeface="Poppins" pitchFamily="34" charset="-120"/>
-              </a:rPr>
-              <a:t>12,856</a:t>
-            </a:r>
-            <a:endParaRPr lang="en-US" sz="680" dirty="0"/>
-          </a:p>
-        </p:txBody>
-      </p:sp>
-      <p:sp>
-        <p:nvSpPr>
-          <p:cNvPr id="99" name="Shape 97"/>
-          <p:cNvSpPr/>
-          <p:nvPr/>
-        </p:nvSpPr>
-        <p:spPr>
-          <a:xfrm>
-            <a:off x="4242816" y="3692347"/>
-            <a:ext cx="996696" cy="150876"/>
-          </a:xfrm>
-          <a:prstGeom prst="rect">
-            <a:avLst/>
-          </a:prstGeom>
-          <a:solidFill>
-            <a:srgbClr val="EDF5F7"/>
-          </a:solidFill>
-          <a:ln/>
-        </p:spPr>
-      </p:sp>
-      <p:sp>
-        <p:nvSpPr>
-          <p:cNvPr id="100" name="Text 98"/>
-          <p:cNvSpPr txBox="1"/>
-          <p:nvPr/>
-        </p:nvSpPr>
-        <p:spPr>
-          <a:xfrm>
-            <a:off x="4215384" y="3685032"/>
-            <a:ext cx="1051560" cy="164592"/>
-          </a:xfrm>
-          <a:prstGeom prst="rect">
-            <a:avLst/>
-          </a:prstGeom>
-          <a:noFill/>
-          <a:ln/>
-        </p:spPr>
-        <p:txBody>
-          <a:bodyPr wrap="square" lIns="0" tIns="0" rIns="0" bIns="0" rtlCol="0" anchor="ctr"/>
-          <a:lstStyle/>
-          <a:p>
-            <a:pPr algn="ctr" indent="0" marL="0">
-              <a:buNone/>
-            </a:pPr>
-            <a:r>
-              <a:rPr lang="en-US" sz="680" dirty="0">
-                <a:solidFill>
-                  <a:srgbClr val="12293A"/>
-                </a:solidFill>
-                <a:latin typeface="Poppins" pitchFamily="34" charset="0"/>
-                <a:ea typeface="Poppins" pitchFamily="34" charset="-122"/>
-                <a:cs typeface="Poppins" pitchFamily="34" charset="-120"/>
-              </a:rPr>
-              <a:t>17,516</a:t>
-            </a:r>
-            <a:endParaRPr lang="en-US" sz="680" dirty="0"/>
-          </a:p>
-        </p:txBody>
-      </p:sp>
-      <p:sp>
-        <p:nvSpPr>
-          <p:cNvPr id="101" name="Shape 99"/>
-          <p:cNvSpPr/>
-          <p:nvPr/>
-        </p:nvSpPr>
-        <p:spPr>
-          <a:xfrm>
-            <a:off x="5321808" y="3692347"/>
-            <a:ext cx="996696" cy="150876"/>
-          </a:xfrm>
-          <a:prstGeom prst="rect">
-            <a:avLst/>
-          </a:prstGeom>
-          <a:solidFill>
-            <a:srgbClr val="EDF5F7"/>
-          </a:solidFill>
-          <a:ln/>
-        </p:spPr>
-      </p:sp>
-      <p:sp>
-        <p:nvSpPr>
-          <p:cNvPr id="102" name="Text 100"/>
-          <p:cNvSpPr txBox="1"/>
-          <p:nvPr/>
-        </p:nvSpPr>
-        <p:spPr>
-          <a:xfrm>
-            <a:off x="5294376" y="3685032"/>
-            <a:ext cx="1051560" cy="164592"/>
-          </a:xfrm>
-          <a:prstGeom prst="rect">
-            <a:avLst/>
-          </a:prstGeom>
-          <a:noFill/>
-          <a:ln/>
-        </p:spPr>
-        <p:txBody>
-          <a:bodyPr wrap="square" lIns="0" tIns="0" rIns="0" bIns="0" rtlCol="0" anchor="ctr"/>
-          <a:lstStyle/>
-          <a:p>
-            <a:pPr algn="ctr" indent="0" marL="0">
-              <a:buNone/>
-            </a:pPr>
-            <a:r>
-              <a:rPr lang="en-US" sz="680" dirty="0">
-                <a:solidFill>
-                  <a:srgbClr val="12293A"/>
-                </a:solidFill>
-                <a:latin typeface="Poppins" pitchFamily="34" charset="0"/>
-                <a:ea typeface="Poppins" pitchFamily="34" charset="-122"/>
-                <a:cs typeface="Poppins" pitchFamily="34" charset="-120"/>
-              </a:rPr>
-              <a:t>3,013</a:t>
-            </a:r>
-            <a:endParaRPr lang="en-US" sz="680" dirty="0"/>
-          </a:p>
-        </p:txBody>
-      </p:sp>
-      <p:sp>
-        <p:nvSpPr>
-          <p:cNvPr id="103" name="Text 101"/>
-          <p:cNvSpPr txBox="1"/>
-          <p:nvPr/>
-        </p:nvSpPr>
-        <p:spPr>
-          <a:xfrm>
-            <a:off x="6400800" y="3685032"/>
-            <a:ext cx="1280160" cy="164592"/>
-          </a:xfrm>
-          <a:prstGeom prst="rect">
-            <a:avLst/>
-          </a:prstGeom>
-          <a:noFill/>
-          <a:ln/>
-        </p:spPr>
-        <p:txBody>
-          <a:bodyPr wrap="square" lIns="0" tIns="0" rIns="0" bIns="0" rtlCol="0" anchor="ctr"/>
-          <a:lstStyle/>
-          <a:p>
-            <a:pPr algn="r" indent="0" marL="0">
-              <a:buNone/>
-            </a:pPr>
-            <a:r>
-              <a:rPr lang="en-US" sz="700" b="1" dirty="0">
-                <a:solidFill>
-                  <a:srgbClr val="5E7280"/>
-                </a:solidFill>
-                <a:latin typeface="Poppins" pitchFamily="34" charset="0"/>
-                <a:ea typeface="Poppins" pitchFamily="34" charset="-122"/>
-                <a:cs typeface="Poppins" pitchFamily="34" charset="-120"/>
-              </a:rPr>
-              <a:t>52,920</a:t>
-            </a:r>
-            <a:endParaRPr lang="en-US" sz="700" dirty="0"/>
-          </a:p>
-        </p:txBody>
-      </p:sp>
-      <p:sp>
-        <p:nvSpPr>
-          <p:cNvPr id="104" name="Text 102"/>
-          <p:cNvSpPr txBox="1"/>
-          <p:nvPr/>
-        </p:nvSpPr>
-        <p:spPr>
-          <a:xfrm>
-            <a:off x="594360" y="3858768"/>
-            <a:ext cx="1417320" cy="164592"/>
-          </a:xfrm>
-          <a:prstGeom prst="rect">
-            <a:avLst/>
-          </a:prstGeom>
-          <a:noFill/>
-          <a:ln/>
-        </p:spPr>
-        <p:txBody>
-          <a:bodyPr wrap="square" lIns="0" tIns="0" rIns="0" bIns="0" rtlCol="0" anchor="ctr"/>
-          <a:lstStyle/>
-          <a:p>
-            <a:pPr indent="0" marL="0">
-              <a:buNone/>
-            </a:pPr>
-            <a:r>
-              <a:rPr lang="en-US" sz="720" b="1" dirty="0">
-                <a:solidFill>
-                  <a:srgbClr val="12293A"/>
-                </a:solidFill>
-                <a:latin typeface="Poppins" pitchFamily="34" charset="0"/>
-                <a:ea typeface="Poppins" pitchFamily="34" charset="-122"/>
-                <a:cs typeface="Poppins" pitchFamily="34" charset="-120"/>
-              </a:rPr>
-              <a:t>Rahul Kumar</a:t>
-            </a:r>
-            <a:endParaRPr lang="en-US" sz="720" dirty="0"/>
-          </a:p>
-        </p:txBody>
-      </p:sp>
-      <p:sp>
-        <p:nvSpPr>
-          <p:cNvPr id="105" name="Text 103"/>
-          <p:cNvSpPr txBox="1"/>
-          <p:nvPr/>
-        </p:nvSpPr>
-        <p:spPr>
-          <a:xfrm>
-            <a:off x="2057400" y="3858768"/>
-            <a:ext cx="1051560" cy="164592"/>
-          </a:xfrm>
-          <a:prstGeom prst="rect">
-            <a:avLst/>
-          </a:prstGeom>
-          <a:noFill/>
-          <a:ln/>
-        </p:spPr>
-        <p:txBody>
-          <a:bodyPr wrap="square" lIns="0" tIns="0" rIns="0" bIns="0" rtlCol="0" anchor="ctr"/>
-          <a:lstStyle/>
-          <a:p>
-            <a:pPr algn="ctr" indent="0" marL="0">
-              <a:buNone/>
-            </a:pPr>
-            <a:r>
-              <a:rPr lang="en-US" sz="680" dirty="0">
-                <a:solidFill>
-                  <a:srgbClr val="8FA1AC"/>
-                </a:solidFill>
-                <a:latin typeface="Poppins" pitchFamily="34" charset="0"/>
-                <a:ea typeface="Poppins" pitchFamily="34" charset="-122"/>
-                <a:cs typeface="Poppins" pitchFamily="34" charset="-120"/>
-              </a:rPr>
-              <a:t>—</a:t>
-            </a:r>
-            <a:endParaRPr lang="en-US" sz="680" dirty="0"/>
-          </a:p>
-        </p:txBody>
-      </p:sp>
-      <p:sp>
-        <p:nvSpPr>
-          <p:cNvPr id="106" name="Shape 104"/>
-          <p:cNvSpPr/>
-          <p:nvPr/>
-        </p:nvSpPr>
-        <p:spPr>
-          <a:xfrm>
-            <a:off x="3163824" y="3866083"/>
-            <a:ext cx="996696" cy="150876"/>
-          </a:xfrm>
-          <a:prstGeom prst="rect">
-            <a:avLst/>
-          </a:prstGeom>
-          <a:solidFill>
-            <a:srgbClr val="D4E9ED"/>
-          </a:solidFill>
-          <a:ln/>
-        </p:spPr>
-      </p:sp>
-      <p:sp>
-        <p:nvSpPr>
-          <p:cNvPr id="107" name="Text 105"/>
-          <p:cNvSpPr txBox="1"/>
-          <p:nvPr/>
-        </p:nvSpPr>
-        <p:spPr>
-          <a:xfrm>
-            <a:off x="3136392" y="3858768"/>
-            <a:ext cx="1051560" cy="164592"/>
-          </a:xfrm>
-          <a:prstGeom prst="rect">
-            <a:avLst/>
-          </a:prstGeom>
-          <a:noFill/>
-          <a:ln/>
-        </p:spPr>
-        <p:txBody>
-          <a:bodyPr wrap="square" lIns="0" tIns="0" rIns="0" bIns="0" rtlCol="0" anchor="ctr"/>
-          <a:lstStyle/>
-          <a:p>
-            <a:pPr algn="ctr" indent="0" marL="0">
-              <a:buNone/>
-            </a:pPr>
-            <a:r>
-              <a:rPr lang="en-US" sz="680" dirty="0">
-                <a:solidFill>
-                  <a:srgbClr val="12293A"/>
-                </a:solidFill>
-                <a:latin typeface="Poppins" pitchFamily="34" charset="0"/>
-                <a:ea typeface="Poppins" pitchFamily="34" charset="-122"/>
-                <a:cs typeface="Poppins" pitchFamily="34" charset="-120"/>
-              </a:rPr>
-              <a:t>42,859</a:t>
-            </a:r>
-            <a:endParaRPr lang="en-US" sz="680" dirty="0"/>
-          </a:p>
-        </p:txBody>
-      </p:sp>
-      <p:sp>
-        <p:nvSpPr>
-          <p:cNvPr id="108" name="Shape 106"/>
-          <p:cNvSpPr/>
-          <p:nvPr/>
-        </p:nvSpPr>
-        <p:spPr>
-          <a:xfrm>
-            <a:off x="4242816" y="3866083"/>
-            <a:ext cx="996696" cy="150876"/>
-          </a:xfrm>
-          <a:prstGeom prst="rect">
-            <a:avLst/>
-          </a:prstGeom>
-          <a:solidFill>
-            <a:srgbClr val="D4E9ED"/>
-          </a:solidFill>
-          <a:ln/>
-        </p:spPr>
-      </p:sp>
-      <p:sp>
-        <p:nvSpPr>
-          <p:cNvPr id="109" name="Text 107"/>
-          <p:cNvSpPr txBox="1"/>
-          <p:nvPr/>
-        </p:nvSpPr>
-        <p:spPr>
-          <a:xfrm>
-            <a:off x="4215384" y="3858768"/>
-            <a:ext cx="1051560" cy="164592"/>
-          </a:xfrm>
-          <a:prstGeom prst="rect">
-            <a:avLst/>
-          </a:prstGeom>
-          <a:noFill/>
-          <a:ln/>
-        </p:spPr>
-        <p:txBody>
-          <a:bodyPr wrap="square" lIns="0" tIns="0" rIns="0" bIns="0" rtlCol="0" anchor="ctr"/>
-          <a:lstStyle/>
-          <a:p>
-            <a:pPr algn="ctr" indent="0" marL="0">
-              <a:buNone/>
-            </a:pPr>
-            <a:r>
-              <a:rPr lang="en-US" sz="680" dirty="0">
-                <a:solidFill>
-                  <a:srgbClr val="12293A"/>
-                </a:solidFill>
-                <a:latin typeface="Poppins" pitchFamily="34" charset="0"/>
-                <a:ea typeface="Poppins" pitchFamily="34" charset="-122"/>
-                <a:cs typeface="Poppins" pitchFamily="34" charset="-120"/>
-              </a:rPr>
-              <a:t>23,286</a:t>
-            </a:r>
-            <a:endParaRPr lang="en-US" sz="680" dirty="0"/>
-          </a:p>
-        </p:txBody>
-      </p:sp>
-      <p:sp>
-        <p:nvSpPr>
-          <p:cNvPr id="110" name="Shape 108"/>
-          <p:cNvSpPr/>
-          <p:nvPr/>
-        </p:nvSpPr>
-        <p:spPr>
-          <a:xfrm>
-            <a:off x="5321808" y="3866083"/>
-            <a:ext cx="996696" cy="150876"/>
-          </a:xfrm>
-          <a:prstGeom prst="rect">
-            <a:avLst/>
-          </a:prstGeom>
-          <a:solidFill>
-            <a:srgbClr val="EDF5F7"/>
-          </a:solidFill>
-          <a:ln/>
-        </p:spPr>
-      </p:sp>
-      <p:sp>
-        <p:nvSpPr>
-          <p:cNvPr id="111" name="Text 109"/>
-          <p:cNvSpPr txBox="1"/>
-          <p:nvPr/>
-        </p:nvSpPr>
-        <p:spPr>
-          <a:xfrm>
-            <a:off x="5294376" y="3858768"/>
-            <a:ext cx="1051560" cy="164592"/>
-          </a:xfrm>
-          <a:prstGeom prst="rect">
-            <a:avLst/>
-          </a:prstGeom>
-          <a:noFill/>
-          <a:ln/>
-        </p:spPr>
-        <p:txBody>
-          <a:bodyPr wrap="square" lIns="0" tIns="0" rIns="0" bIns="0" rtlCol="0" anchor="ctr"/>
-          <a:lstStyle/>
-          <a:p>
-            <a:pPr algn="ctr" indent="0" marL="0">
-              <a:buNone/>
-            </a:pPr>
-            <a:r>
-              <a:rPr lang="en-US" sz="680" dirty="0">
-                <a:solidFill>
-                  <a:srgbClr val="12293A"/>
-                </a:solidFill>
-                <a:latin typeface="Poppins" pitchFamily="34" charset="0"/>
-                <a:ea typeface="Poppins" pitchFamily="34" charset="-122"/>
-                <a:cs typeface="Poppins" pitchFamily="34" charset="-120"/>
-              </a:rPr>
-              <a:t>1,642</a:t>
-            </a:r>
-            <a:endParaRPr lang="en-US" sz="680" dirty="0"/>
-          </a:p>
-        </p:txBody>
-      </p:sp>
-      <p:sp>
-        <p:nvSpPr>
-          <p:cNvPr id="112" name="Text 110"/>
-          <p:cNvSpPr txBox="1"/>
-          <p:nvPr/>
-        </p:nvSpPr>
-        <p:spPr>
-          <a:xfrm>
-            <a:off x="6400800" y="3858768"/>
-            <a:ext cx="1280160" cy="164592"/>
-          </a:xfrm>
-          <a:prstGeom prst="rect">
-            <a:avLst/>
-          </a:prstGeom>
-          <a:noFill/>
-          <a:ln/>
-        </p:spPr>
-        <p:txBody>
-          <a:bodyPr wrap="square" lIns="0" tIns="0" rIns="0" bIns="0" rtlCol="0" anchor="ctr"/>
-          <a:lstStyle/>
-          <a:p>
-            <a:pPr algn="r" indent="0" marL="0">
-              <a:buNone/>
-            </a:pPr>
-            <a:r>
-              <a:rPr lang="en-US" sz="700" b="1" dirty="0">
-                <a:solidFill>
-                  <a:srgbClr val="5E7280"/>
-                </a:solidFill>
-                <a:latin typeface="Poppins" pitchFamily="34" charset="0"/>
-                <a:ea typeface="Poppins" pitchFamily="34" charset="-122"/>
-                <a:cs typeface="Poppins" pitchFamily="34" charset="-120"/>
-              </a:rPr>
-              <a:t>67,787</a:t>
-            </a:r>
-            <a:endParaRPr lang="en-US" sz="700" dirty="0"/>
-          </a:p>
-        </p:txBody>
-      </p:sp>
-      <p:sp>
-        <p:nvSpPr>
-          <p:cNvPr id="113" name="Text 111"/>
-          <p:cNvSpPr txBox="1"/>
-          <p:nvPr/>
-        </p:nvSpPr>
-        <p:spPr>
-          <a:xfrm>
-            <a:off x="594360" y="4032504"/>
-            <a:ext cx="1417320" cy="164592"/>
-          </a:xfrm>
-          <a:prstGeom prst="rect">
-            <a:avLst/>
-          </a:prstGeom>
-          <a:noFill/>
-          <a:ln/>
-        </p:spPr>
-        <p:txBody>
-          <a:bodyPr wrap="square" lIns="0" tIns="0" rIns="0" bIns="0" rtlCol="0" anchor="ctr"/>
-          <a:lstStyle/>
-          <a:p>
-            <a:pPr indent="0" marL="0">
-              <a:buNone/>
-            </a:pPr>
-            <a:r>
-              <a:rPr lang="en-US" sz="720" b="1" dirty="0">
-                <a:solidFill>
-                  <a:srgbClr val="12293A"/>
-                </a:solidFill>
-                <a:latin typeface="Poppins" pitchFamily="34" charset="0"/>
-                <a:ea typeface="Poppins" pitchFamily="34" charset="-122"/>
-                <a:cs typeface="Poppins" pitchFamily="34" charset="-120"/>
-              </a:rPr>
-              <a:t>Mohamed Ammar</a:t>
-            </a:r>
-            <a:endParaRPr lang="en-US" sz="720" dirty="0"/>
-          </a:p>
-        </p:txBody>
-      </p:sp>
-      <p:sp>
-        <p:nvSpPr>
-          <p:cNvPr id="114" name="Shape 112"/>
-          <p:cNvSpPr/>
-          <p:nvPr/>
-        </p:nvSpPr>
-        <p:spPr>
-          <a:xfrm>
-            <a:off x="2084832" y="4039819"/>
-            <a:ext cx="996696" cy="150876"/>
-          </a:xfrm>
-          <a:prstGeom prst="rect">
-            <a:avLst/>
-          </a:prstGeom>
-          <a:solidFill>
-            <a:srgbClr val="EDF5F7"/>
-          </a:solidFill>
-          <a:ln/>
-        </p:spPr>
-      </p:sp>
-      <p:sp>
-        <p:nvSpPr>
-          <p:cNvPr id="115" name="Text 113"/>
-          <p:cNvSpPr txBox="1"/>
-          <p:nvPr/>
-        </p:nvSpPr>
-        <p:spPr>
-          <a:xfrm>
-            <a:off x="2057400" y="4032504"/>
-            <a:ext cx="1051560" cy="164592"/>
-          </a:xfrm>
-          <a:prstGeom prst="rect">
-            <a:avLst/>
-          </a:prstGeom>
-          <a:noFill/>
-          <a:ln/>
-        </p:spPr>
-        <p:txBody>
-          <a:bodyPr wrap="square" lIns="0" tIns="0" rIns="0" bIns="0" rtlCol="0" anchor="ctr"/>
-          <a:lstStyle/>
-          <a:p>
-            <a:pPr algn="ctr" indent="0" marL="0">
-              <a:buNone/>
-            </a:pPr>
-            <a:r>
-              <a:rPr lang="en-US" sz="680" dirty="0">
-                <a:solidFill>
-                  <a:srgbClr val="12293A"/>
-                </a:solidFill>
-                <a:latin typeface="Poppins" pitchFamily="34" charset="0"/>
-                <a:ea typeface="Poppins" pitchFamily="34" charset="-122"/>
-                <a:cs typeface="Poppins" pitchFamily="34" charset="-120"/>
-              </a:rPr>
-              <a:t>6,582</a:t>
-            </a:r>
-            <a:endParaRPr lang="en-US" sz="680" dirty="0"/>
-          </a:p>
-        </p:txBody>
-      </p:sp>
-      <p:sp>
-        <p:nvSpPr>
-          <p:cNvPr id="116" name="Shape 114"/>
-          <p:cNvSpPr/>
-          <p:nvPr/>
-        </p:nvSpPr>
-        <p:spPr>
-          <a:xfrm>
-            <a:off x="3163824" y="4039819"/>
-            <a:ext cx="996696" cy="150876"/>
-          </a:xfrm>
-          <a:prstGeom prst="rect">
-            <a:avLst/>
-          </a:prstGeom>
-          <a:solidFill>
-            <a:srgbClr val="D4E9ED"/>
-          </a:solidFill>
-          <a:ln/>
-        </p:spPr>
-      </p:sp>
-      <p:sp>
-        <p:nvSpPr>
-          <p:cNvPr id="117" name="Text 115"/>
-          <p:cNvSpPr txBox="1"/>
-          <p:nvPr/>
-        </p:nvSpPr>
-        <p:spPr>
-          <a:xfrm>
-            <a:off x="3136392" y="4032504"/>
-            <a:ext cx="1051560" cy="164592"/>
-          </a:xfrm>
-          <a:prstGeom prst="rect">
-            <a:avLst/>
-          </a:prstGeom>
-          <a:noFill/>
-          <a:ln/>
-        </p:spPr>
-        <p:txBody>
-          <a:bodyPr wrap="square" lIns="0" tIns="0" rIns="0" bIns="0" rtlCol="0" anchor="ctr"/>
-          <a:lstStyle/>
-          <a:p>
-            <a:pPr algn="ctr" indent="0" marL="0">
-              <a:buNone/>
-            </a:pPr>
-            <a:r>
-              <a:rPr lang="en-US" sz="680" dirty="0">
-                <a:solidFill>
-                  <a:srgbClr val="12293A"/>
-                </a:solidFill>
-                <a:latin typeface="Poppins" pitchFamily="34" charset="0"/>
-                <a:ea typeface="Poppins" pitchFamily="34" charset="-122"/>
-                <a:cs typeface="Poppins" pitchFamily="34" charset="-120"/>
-              </a:rPr>
-              <a:t>23,266</a:t>
-            </a:r>
-            <a:endParaRPr lang="en-US" sz="680" dirty="0"/>
-          </a:p>
-        </p:txBody>
-      </p:sp>
-      <p:sp>
-        <p:nvSpPr>
-          <p:cNvPr id="118" name="Shape 116"/>
-          <p:cNvSpPr/>
-          <p:nvPr/>
-        </p:nvSpPr>
-        <p:spPr>
-          <a:xfrm>
-            <a:off x="4242816" y="4039819"/>
-            <a:ext cx="996696" cy="150876"/>
-          </a:xfrm>
-          <a:prstGeom prst="rect">
-            <a:avLst/>
-          </a:prstGeom>
-          <a:solidFill>
-            <a:srgbClr val="EDF5F7"/>
-          </a:solidFill>
-          <a:ln/>
-        </p:spPr>
-      </p:sp>
-      <p:sp>
-        <p:nvSpPr>
-          <p:cNvPr id="119" name="Text 117"/>
-          <p:cNvSpPr txBox="1"/>
-          <p:nvPr/>
-        </p:nvSpPr>
-        <p:spPr>
-          <a:xfrm>
-            <a:off x="4215384" y="4032504"/>
-            <a:ext cx="1051560" cy="164592"/>
-          </a:xfrm>
-          <a:prstGeom prst="rect">
-            <a:avLst/>
-          </a:prstGeom>
-          <a:noFill/>
-          <a:ln/>
-        </p:spPr>
-        <p:txBody>
-          <a:bodyPr wrap="square" lIns="0" tIns="0" rIns="0" bIns="0" rtlCol="0" anchor="ctr"/>
-          <a:lstStyle/>
-          <a:p>
-            <a:pPr algn="ctr" indent="0" marL="0">
-              <a:buNone/>
-            </a:pPr>
-            <a:r>
-              <a:rPr lang="en-US" sz="680" dirty="0">
-                <a:solidFill>
-                  <a:srgbClr val="12293A"/>
-                </a:solidFill>
-                <a:latin typeface="Poppins" pitchFamily="34" charset="0"/>
-                <a:ea typeface="Poppins" pitchFamily="34" charset="-122"/>
-                <a:cs typeface="Poppins" pitchFamily="34" charset="-120"/>
-              </a:rPr>
-              <a:t>4,322</a:t>
-            </a:r>
-            <a:endParaRPr lang="en-US" sz="680" dirty="0"/>
-          </a:p>
-        </p:txBody>
-      </p:sp>
-      <p:sp>
-        <p:nvSpPr>
-          <p:cNvPr id="120" name="Shape 118"/>
-          <p:cNvSpPr/>
-          <p:nvPr/>
-        </p:nvSpPr>
-        <p:spPr>
-          <a:xfrm>
-            <a:off x="5321808" y="4039819"/>
-            <a:ext cx="996696" cy="150876"/>
-          </a:xfrm>
-          <a:prstGeom prst="rect">
-            <a:avLst/>
-          </a:prstGeom>
-          <a:solidFill>
-            <a:srgbClr val="EDF5F7"/>
-          </a:solidFill>
-          <a:ln/>
-        </p:spPr>
-      </p:sp>
-      <p:sp>
-        <p:nvSpPr>
-          <p:cNvPr id="121" name="Text 119"/>
-          <p:cNvSpPr txBox="1"/>
-          <p:nvPr/>
-        </p:nvSpPr>
-        <p:spPr>
-          <a:xfrm>
-            <a:off x="5294376" y="4032504"/>
-            <a:ext cx="1051560" cy="164592"/>
-          </a:xfrm>
-          <a:prstGeom prst="rect">
-            <a:avLst/>
-          </a:prstGeom>
-          <a:noFill/>
-          <a:ln/>
-        </p:spPr>
-        <p:txBody>
-          <a:bodyPr wrap="square" lIns="0" tIns="0" rIns="0" bIns="0" rtlCol="0" anchor="ctr"/>
-          <a:lstStyle/>
-          <a:p>
-            <a:pPr algn="ctr" indent="0" marL="0">
-              <a:buNone/>
-            </a:pPr>
-            <a:r>
-              <a:rPr lang="en-US" sz="680" dirty="0">
-                <a:solidFill>
-                  <a:srgbClr val="12293A"/>
-                </a:solidFill>
-                <a:latin typeface="Poppins" pitchFamily="34" charset="0"/>
-                <a:ea typeface="Poppins" pitchFamily="34" charset="-122"/>
-                <a:cs typeface="Poppins" pitchFamily="34" charset="-120"/>
-              </a:rPr>
-              <a:t>2,939</a:t>
-            </a:r>
-            <a:endParaRPr lang="en-US" sz="680" dirty="0"/>
-          </a:p>
-        </p:txBody>
-      </p:sp>
-      <p:sp>
-        <p:nvSpPr>
-          <p:cNvPr id="122" name="Text 120"/>
-          <p:cNvSpPr txBox="1"/>
-          <p:nvPr/>
-        </p:nvSpPr>
-        <p:spPr>
-          <a:xfrm>
-            <a:off x="6400800" y="4032504"/>
-            <a:ext cx="1280160" cy="164592"/>
-          </a:xfrm>
-          <a:prstGeom prst="rect">
-            <a:avLst/>
-          </a:prstGeom>
-          <a:noFill/>
-          <a:ln/>
-        </p:spPr>
-        <p:txBody>
-          <a:bodyPr wrap="square" lIns="0" tIns="0" rIns="0" bIns="0" rtlCol="0" anchor="ctr"/>
-          <a:lstStyle/>
-          <a:p>
-            <a:pPr algn="r" indent="0" marL="0">
-              <a:buNone/>
-            </a:pPr>
-            <a:r>
-              <a:rPr lang="en-US" sz="700" b="1" dirty="0">
-                <a:solidFill>
-                  <a:srgbClr val="5E7280"/>
-                </a:solidFill>
-                <a:latin typeface="Poppins" pitchFamily="34" charset="0"/>
-                <a:ea typeface="Poppins" pitchFamily="34" charset="-122"/>
-                <a:cs typeface="Poppins" pitchFamily="34" charset="-120"/>
-              </a:rPr>
-              <a:t>37,109</a:t>
-            </a:r>
-            <a:endParaRPr lang="en-US" sz="700" dirty="0"/>
-          </a:p>
-        </p:txBody>
-      </p:sp>
-      <p:sp>
-        <p:nvSpPr>
-          <p:cNvPr id="123" name="Text 121"/>
-          <p:cNvSpPr txBox="1"/>
-          <p:nvPr/>
-        </p:nvSpPr>
-        <p:spPr>
-          <a:xfrm>
-            <a:off x="594360" y="4206240"/>
-            <a:ext cx="1417320" cy="164592"/>
-          </a:xfrm>
-          <a:prstGeom prst="rect">
-            <a:avLst/>
-          </a:prstGeom>
-          <a:noFill/>
-          <a:ln/>
-        </p:spPr>
-        <p:txBody>
-          <a:bodyPr wrap="square" lIns="0" tIns="0" rIns="0" bIns="0" rtlCol="0" anchor="ctr"/>
-          <a:lstStyle/>
-          <a:p>
-            <a:pPr indent="0" marL="0">
-              <a:buNone/>
-            </a:pPr>
-            <a:r>
-              <a:rPr lang="en-US" sz="720" b="1" dirty="0">
-                <a:solidFill>
-                  <a:srgbClr val="12293A"/>
-                </a:solidFill>
-                <a:latin typeface="Poppins" pitchFamily="34" charset="0"/>
-                <a:ea typeface="Poppins" pitchFamily="34" charset="-122"/>
-                <a:cs typeface="Poppins" pitchFamily="34" charset="-120"/>
-              </a:rPr>
-              <a:t>Tony Ghoussein</a:t>
-            </a:r>
-            <a:endParaRPr lang="en-US" sz="720" dirty="0"/>
-          </a:p>
-        </p:txBody>
-      </p:sp>
-      <p:sp>
-        <p:nvSpPr>
-          <p:cNvPr id="124" name="Shape 122"/>
-          <p:cNvSpPr/>
-          <p:nvPr/>
-        </p:nvSpPr>
-        <p:spPr>
-          <a:xfrm>
-            <a:off x="2084832" y="4213555"/>
-            <a:ext cx="996696" cy="150876"/>
-          </a:xfrm>
-          <a:prstGeom prst="rect">
-            <a:avLst/>
-          </a:prstGeom>
-          <a:solidFill>
-            <a:srgbClr val="EDF5F7"/>
-          </a:solidFill>
-          <a:ln/>
-        </p:spPr>
-      </p:sp>
-      <p:sp>
-        <p:nvSpPr>
-          <p:cNvPr id="125" name="Text 123"/>
-          <p:cNvSpPr txBox="1"/>
-          <p:nvPr/>
-        </p:nvSpPr>
-        <p:spPr>
-          <a:xfrm>
-            <a:off x="2057400" y="4206240"/>
-            <a:ext cx="1051560" cy="164592"/>
-          </a:xfrm>
-          <a:prstGeom prst="rect">
-            <a:avLst/>
-          </a:prstGeom>
-          <a:noFill/>
-          <a:ln/>
-        </p:spPr>
-        <p:txBody>
-          <a:bodyPr wrap="square" lIns="0" tIns="0" rIns="0" bIns="0" rtlCol="0" anchor="ctr"/>
-          <a:lstStyle/>
-          <a:p>
-            <a:pPr algn="ctr" indent="0" marL="0">
-              <a:buNone/>
-            </a:pPr>
-            <a:r>
-              <a:rPr lang="en-US" sz="680" dirty="0">
-                <a:solidFill>
-                  <a:srgbClr val="12293A"/>
-                </a:solidFill>
-                <a:latin typeface="Poppins" pitchFamily="34" charset="0"/>
-                <a:ea typeface="Poppins" pitchFamily="34" charset="-122"/>
-                <a:cs typeface="Poppins" pitchFamily="34" charset="-120"/>
-              </a:rPr>
-              <a:t>6,208</a:t>
-            </a:r>
-            <a:endParaRPr lang="en-US" sz="680" dirty="0"/>
-          </a:p>
-        </p:txBody>
-      </p:sp>
-      <p:sp>
-        <p:nvSpPr>
-          <p:cNvPr id="126" name="Shape 124"/>
-          <p:cNvSpPr/>
-          <p:nvPr/>
-        </p:nvSpPr>
-        <p:spPr>
-          <a:xfrm>
-            <a:off x="3163824" y="4213555"/>
-            <a:ext cx="996696" cy="150876"/>
-          </a:xfrm>
-          <a:prstGeom prst="rect">
-            <a:avLst/>
-          </a:prstGeom>
-          <a:solidFill>
-            <a:srgbClr val="EDF5F7"/>
-          </a:solidFill>
-          <a:ln/>
-        </p:spPr>
-      </p:sp>
-      <p:sp>
-        <p:nvSpPr>
-          <p:cNvPr id="127" name="Text 125"/>
-          <p:cNvSpPr txBox="1"/>
-          <p:nvPr/>
-        </p:nvSpPr>
-        <p:spPr>
-          <a:xfrm>
-            <a:off x="3136392" y="4206240"/>
-            <a:ext cx="1051560" cy="164592"/>
-          </a:xfrm>
-          <a:prstGeom prst="rect">
-            <a:avLst/>
-          </a:prstGeom>
-          <a:noFill/>
-          <a:ln/>
-        </p:spPr>
-        <p:txBody>
-          <a:bodyPr wrap="square" lIns="0" tIns="0" rIns="0" bIns="0" rtlCol="0" anchor="ctr"/>
-          <a:lstStyle/>
-          <a:p>
-            <a:pPr algn="ctr" indent="0" marL="0">
-              <a:buNone/>
-            </a:pPr>
-            <a:r>
-              <a:rPr lang="en-US" sz="680" dirty="0">
-                <a:solidFill>
-                  <a:srgbClr val="12293A"/>
-                </a:solidFill>
-                <a:latin typeface="Poppins" pitchFamily="34" charset="0"/>
-                <a:ea typeface="Poppins" pitchFamily="34" charset="-122"/>
-                <a:cs typeface="Poppins" pitchFamily="34" charset="-120"/>
-              </a:rPr>
-              <a:t>10,369</a:t>
-            </a:r>
-            <a:endParaRPr lang="en-US" sz="680" dirty="0"/>
-          </a:p>
-        </p:txBody>
-      </p:sp>
-      <p:sp>
-        <p:nvSpPr>
-          <p:cNvPr id="128" name="Shape 126"/>
-          <p:cNvSpPr/>
-          <p:nvPr/>
-        </p:nvSpPr>
-        <p:spPr>
-          <a:xfrm>
-            <a:off x="4242816" y="4213555"/>
-            <a:ext cx="996696" cy="150876"/>
-          </a:xfrm>
-          <a:prstGeom prst="rect">
-            <a:avLst/>
-          </a:prstGeom>
-          <a:solidFill>
-            <a:srgbClr val="EDF5F7"/>
-          </a:solidFill>
-          <a:ln/>
-        </p:spPr>
-      </p:sp>
-      <p:sp>
-        <p:nvSpPr>
-          <p:cNvPr id="129" name="Text 127"/>
-          <p:cNvSpPr txBox="1"/>
-          <p:nvPr/>
-        </p:nvSpPr>
-        <p:spPr>
-          <a:xfrm>
-            <a:off x="4215384" y="4206240"/>
-            <a:ext cx="1051560" cy="164592"/>
-          </a:xfrm>
-          <a:prstGeom prst="rect">
-            <a:avLst/>
-          </a:prstGeom>
-          <a:noFill/>
-          <a:ln/>
-        </p:spPr>
-        <p:txBody>
-          <a:bodyPr wrap="square" lIns="0" tIns="0" rIns="0" bIns="0" rtlCol="0" anchor="ctr"/>
-          <a:lstStyle/>
-          <a:p>
-            <a:pPr algn="ctr" indent="0" marL="0">
-              <a:buNone/>
-            </a:pPr>
-            <a:r>
-              <a:rPr lang="en-US" sz="680" dirty="0">
-                <a:solidFill>
-                  <a:srgbClr val="12293A"/>
-                </a:solidFill>
-                <a:latin typeface="Poppins" pitchFamily="34" charset="0"/>
-                <a:ea typeface="Poppins" pitchFamily="34" charset="-122"/>
-                <a:cs typeface="Poppins" pitchFamily="34" charset="-120"/>
-              </a:rPr>
-              <a:t>11,891</a:t>
-            </a:r>
-            <a:endParaRPr lang="en-US" sz="680" dirty="0"/>
-          </a:p>
-        </p:txBody>
-      </p:sp>
-      <p:sp>
-        <p:nvSpPr>
-          <p:cNvPr id="130" name="Shape 128"/>
-          <p:cNvSpPr/>
-          <p:nvPr/>
-        </p:nvSpPr>
-        <p:spPr>
-          <a:xfrm>
-            <a:off x="5321808" y="4213555"/>
-            <a:ext cx="996696" cy="150876"/>
-          </a:xfrm>
-          <a:prstGeom prst="rect">
-            <a:avLst/>
-          </a:prstGeom>
-          <a:solidFill>
-            <a:srgbClr val="EDF5F7"/>
-          </a:solidFill>
-          <a:ln/>
-        </p:spPr>
-      </p:sp>
-      <p:sp>
-        <p:nvSpPr>
-          <p:cNvPr id="131" name="Text 129"/>
-          <p:cNvSpPr txBox="1"/>
-          <p:nvPr/>
-        </p:nvSpPr>
-        <p:spPr>
-          <a:xfrm>
-            <a:off x="5294376" y="4206240"/>
-            <a:ext cx="1051560" cy="164592"/>
-          </a:xfrm>
-          <a:prstGeom prst="rect">
-            <a:avLst/>
-          </a:prstGeom>
-          <a:noFill/>
-          <a:ln/>
-        </p:spPr>
-        <p:txBody>
-          <a:bodyPr wrap="square" lIns="0" tIns="0" rIns="0" bIns="0" rtlCol="0" anchor="ctr"/>
-          <a:lstStyle/>
-          <a:p>
-            <a:pPr algn="ctr" indent="0" marL="0">
-              <a:buNone/>
-            </a:pPr>
-            <a:r>
-              <a:rPr lang="en-US" sz="680" dirty="0">
-                <a:solidFill>
-                  <a:srgbClr val="12293A"/>
-                </a:solidFill>
-                <a:latin typeface="Poppins" pitchFamily="34" charset="0"/>
-                <a:ea typeface="Poppins" pitchFamily="34" charset="-122"/>
-                <a:cs typeface="Poppins" pitchFamily="34" charset="-120"/>
-              </a:rPr>
-              <a:t>7,422</a:t>
-            </a:r>
-            <a:endParaRPr lang="en-US" sz="680" dirty="0"/>
-          </a:p>
-        </p:txBody>
-      </p:sp>
-      <p:sp>
-        <p:nvSpPr>
-          <p:cNvPr id="132" name="Text 130"/>
-          <p:cNvSpPr txBox="1"/>
-          <p:nvPr/>
-        </p:nvSpPr>
-        <p:spPr>
-          <a:xfrm>
-            <a:off x="6400800" y="4206240"/>
-            <a:ext cx="1280160" cy="164592"/>
-          </a:xfrm>
-          <a:prstGeom prst="rect">
-            <a:avLst/>
-          </a:prstGeom>
-          <a:noFill/>
-          <a:ln/>
-        </p:spPr>
-        <p:txBody>
-          <a:bodyPr wrap="square" lIns="0" tIns="0" rIns="0" bIns="0" rtlCol="0" anchor="ctr"/>
-          <a:lstStyle/>
-          <a:p>
-            <a:pPr algn="r" indent="0" marL="0">
-              <a:buNone/>
-            </a:pPr>
-            <a:r>
-              <a:rPr lang="en-US" sz="700" b="1" dirty="0">
-                <a:solidFill>
-                  <a:srgbClr val="5E7280"/>
-                </a:solidFill>
-                <a:latin typeface="Poppins" pitchFamily="34" charset="0"/>
-                <a:ea typeface="Poppins" pitchFamily="34" charset="-122"/>
-                <a:cs typeface="Poppins" pitchFamily="34" charset="-120"/>
-              </a:rPr>
-              <a:t>35,890</a:t>
-            </a:r>
-            <a:endParaRPr lang="en-US" sz="700" dirty="0"/>
-          </a:p>
-        </p:txBody>
-      </p:sp>
-      <p:sp>
-        <p:nvSpPr>
-          <p:cNvPr id="133" name="Text 131"/>
-          <p:cNvSpPr txBox="1"/>
-          <p:nvPr/>
-        </p:nvSpPr>
-        <p:spPr>
-          <a:xfrm>
-            <a:off x="594360" y="4379976"/>
-            <a:ext cx="1417320" cy="164592"/>
-          </a:xfrm>
-          <a:prstGeom prst="rect">
-            <a:avLst/>
-          </a:prstGeom>
-          <a:noFill/>
-          <a:ln/>
-        </p:spPr>
-        <p:txBody>
-          <a:bodyPr wrap="square" lIns="0" tIns="0" rIns="0" bIns="0" rtlCol="0" anchor="ctr"/>
-          <a:lstStyle/>
-          <a:p>
-            <a:pPr indent="0" marL="0">
-              <a:buNone/>
-            </a:pPr>
-            <a:r>
-              <a:rPr lang="en-US" sz="720" b="1" dirty="0">
-                <a:solidFill>
-                  <a:srgbClr val="12293A"/>
-                </a:solidFill>
-                <a:latin typeface="Poppins" pitchFamily="34" charset="0"/>
-                <a:ea typeface="Poppins" pitchFamily="34" charset="-122"/>
-                <a:cs typeface="Poppins" pitchFamily="34" charset="-120"/>
-              </a:rPr>
-              <a:t>Eric Cruz</a:t>
-            </a:r>
-            <a:endParaRPr lang="en-US" sz="720" dirty="0"/>
-          </a:p>
-        </p:txBody>
-      </p:sp>
-      <p:sp>
-        <p:nvSpPr>
-          <p:cNvPr id="134" name="Shape 132"/>
-          <p:cNvSpPr/>
-          <p:nvPr/>
-        </p:nvSpPr>
-        <p:spPr>
-          <a:xfrm>
-            <a:off x="2084832" y="4387291"/>
-            <a:ext cx="996696" cy="150876"/>
-          </a:xfrm>
-          <a:prstGeom prst="rect">
-            <a:avLst/>
-          </a:prstGeom>
-          <a:solidFill>
-            <a:srgbClr val="EDF5F7"/>
-          </a:solidFill>
-          <a:ln/>
-        </p:spPr>
-      </p:sp>
-      <p:sp>
-        <p:nvSpPr>
-          <p:cNvPr id="135" name="Text 133"/>
-          <p:cNvSpPr txBox="1"/>
-          <p:nvPr/>
-        </p:nvSpPr>
-        <p:spPr>
-          <a:xfrm>
-            <a:off x="2057400" y="4379976"/>
-            <a:ext cx="1051560" cy="164592"/>
-          </a:xfrm>
-          <a:prstGeom prst="rect">
-            <a:avLst/>
-          </a:prstGeom>
-          <a:noFill/>
-          <a:ln/>
-        </p:spPr>
-        <p:txBody>
-          <a:bodyPr wrap="square" lIns="0" tIns="0" rIns="0" bIns="0" rtlCol="0" anchor="ctr"/>
-          <a:lstStyle/>
-          <a:p>
-            <a:pPr algn="ctr" indent="0" marL="0">
-              <a:buNone/>
-            </a:pPr>
-            <a:r>
-              <a:rPr lang="en-US" sz="680" dirty="0">
-                <a:solidFill>
-                  <a:srgbClr val="12293A"/>
-                </a:solidFill>
-                <a:latin typeface="Poppins" pitchFamily="34" charset="0"/>
-                <a:ea typeface="Poppins" pitchFamily="34" charset="-122"/>
-                <a:cs typeface="Poppins" pitchFamily="34" charset="-120"/>
-              </a:rPr>
-              <a:t>2,970</a:t>
-            </a:r>
-            <a:endParaRPr lang="en-US" sz="680" dirty="0"/>
-          </a:p>
-        </p:txBody>
-      </p:sp>
-      <p:sp>
-        <p:nvSpPr>
-          <p:cNvPr id="136" name="Shape 134"/>
-          <p:cNvSpPr/>
-          <p:nvPr/>
-        </p:nvSpPr>
-        <p:spPr>
-          <a:xfrm>
-            <a:off x="3163824" y="4387291"/>
-            <a:ext cx="996696" cy="150876"/>
-          </a:xfrm>
-          <a:prstGeom prst="rect">
-            <a:avLst/>
-          </a:prstGeom>
-          <a:solidFill>
-            <a:srgbClr val="EDF5F7"/>
-          </a:solidFill>
-          <a:ln/>
-        </p:spPr>
-      </p:sp>
-      <p:sp>
-        <p:nvSpPr>
-          <p:cNvPr id="137" name="Text 135"/>
-          <p:cNvSpPr txBox="1"/>
-          <p:nvPr/>
-        </p:nvSpPr>
-        <p:spPr>
-          <a:xfrm>
-            <a:off x="3136392" y="4379976"/>
-            <a:ext cx="1051560" cy="164592"/>
-          </a:xfrm>
-          <a:prstGeom prst="rect">
-            <a:avLst/>
-          </a:prstGeom>
-          <a:noFill/>
-          <a:ln/>
-        </p:spPr>
-        <p:txBody>
-          <a:bodyPr wrap="square" lIns="0" tIns="0" rIns="0" bIns="0" rtlCol="0" anchor="ctr"/>
-          <a:lstStyle/>
-          <a:p>
-            <a:pPr algn="ctr" indent="0" marL="0">
-              <a:buNone/>
-            </a:pPr>
-            <a:r>
-              <a:rPr lang="en-US" sz="680" dirty="0">
-                <a:solidFill>
-                  <a:srgbClr val="12293A"/>
-                </a:solidFill>
-                <a:latin typeface="Poppins" pitchFamily="34" charset="0"/>
-                <a:ea typeface="Poppins" pitchFamily="34" charset="-122"/>
-                <a:cs typeface="Poppins" pitchFamily="34" charset="-120"/>
-              </a:rPr>
-              <a:t>7,237</a:t>
-            </a:r>
-            <a:endParaRPr lang="en-US" sz="680" dirty="0"/>
-          </a:p>
-        </p:txBody>
-      </p:sp>
-      <p:sp>
-        <p:nvSpPr>
-          <p:cNvPr id="138" name="Shape 136"/>
-          <p:cNvSpPr/>
-          <p:nvPr/>
-        </p:nvSpPr>
-        <p:spPr>
-          <a:xfrm>
-            <a:off x="4242816" y="4387291"/>
-            <a:ext cx="996696" cy="150876"/>
-          </a:xfrm>
-          <a:prstGeom prst="rect">
-            <a:avLst/>
-          </a:prstGeom>
-          <a:solidFill>
-            <a:srgbClr val="EDF5F7"/>
-          </a:solidFill>
-          <a:ln/>
-        </p:spPr>
-      </p:sp>
-      <p:sp>
-        <p:nvSpPr>
-          <p:cNvPr id="139" name="Text 137"/>
-          <p:cNvSpPr txBox="1"/>
-          <p:nvPr/>
-        </p:nvSpPr>
-        <p:spPr>
-          <a:xfrm>
-            <a:off x="4215384" y="4379976"/>
-            <a:ext cx="1051560" cy="164592"/>
-          </a:xfrm>
-          <a:prstGeom prst="rect">
-            <a:avLst/>
-          </a:prstGeom>
-          <a:noFill/>
-          <a:ln/>
-        </p:spPr>
-        <p:txBody>
-          <a:bodyPr wrap="square" lIns="0" tIns="0" rIns="0" bIns="0" rtlCol="0" anchor="ctr"/>
-          <a:lstStyle/>
-          <a:p>
-            <a:pPr algn="ctr" indent="0" marL="0">
-              <a:buNone/>
-            </a:pPr>
-            <a:r>
-              <a:rPr lang="en-US" sz="680" dirty="0">
-                <a:solidFill>
-                  <a:srgbClr val="12293A"/>
-                </a:solidFill>
-                <a:latin typeface="Poppins" pitchFamily="34" charset="0"/>
-                <a:ea typeface="Poppins" pitchFamily="34" charset="-122"/>
-                <a:cs typeface="Poppins" pitchFamily="34" charset="-120"/>
-              </a:rPr>
-              <a:t>19,289</a:t>
-            </a:r>
-            <a:endParaRPr lang="en-US" sz="680" dirty="0"/>
-          </a:p>
-        </p:txBody>
-      </p:sp>
-      <p:sp>
-        <p:nvSpPr>
-          <p:cNvPr id="140" name="Shape 138"/>
-          <p:cNvSpPr/>
-          <p:nvPr/>
-        </p:nvSpPr>
-        <p:spPr>
-          <a:xfrm>
-            <a:off x="5321808" y="4387291"/>
-            <a:ext cx="996696" cy="150876"/>
-          </a:xfrm>
-          <a:prstGeom prst="rect">
-            <a:avLst/>
-          </a:prstGeom>
-          <a:solidFill>
-            <a:srgbClr val="EDF5F7"/>
-          </a:solidFill>
-          <a:ln/>
-        </p:spPr>
-      </p:sp>
-      <p:sp>
-        <p:nvSpPr>
-          <p:cNvPr id="141" name="Text 139"/>
-          <p:cNvSpPr txBox="1"/>
-          <p:nvPr/>
-        </p:nvSpPr>
-        <p:spPr>
-          <a:xfrm>
-            <a:off x="5294376" y="4379976"/>
-            <a:ext cx="1051560" cy="164592"/>
-          </a:xfrm>
-          <a:prstGeom prst="rect">
-            <a:avLst/>
-          </a:prstGeom>
-          <a:noFill/>
-          <a:ln/>
-        </p:spPr>
-        <p:txBody>
-          <a:bodyPr wrap="square" lIns="0" tIns="0" rIns="0" bIns="0" rtlCol="0" anchor="ctr"/>
-          <a:lstStyle/>
-          <a:p>
-            <a:pPr algn="ctr" indent="0" marL="0">
-              <a:buNone/>
-            </a:pPr>
-            <a:r>
-              <a:rPr lang="en-US" sz="680" dirty="0">
-                <a:solidFill>
-                  <a:srgbClr val="12293A"/>
-                </a:solidFill>
-                <a:latin typeface="Poppins" pitchFamily="34" charset="0"/>
-                <a:ea typeface="Poppins" pitchFamily="34" charset="-122"/>
-                <a:cs typeface="Poppins" pitchFamily="34" charset="-120"/>
-              </a:rPr>
-              <a:t>1,904</a:t>
-            </a:r>
-            <a:endParaRPr lang="en-US" sz="680" dirty="0"/>
-          </a:p>
-        </p:txBody>
-      </p:sp>
-      <p:sp>
-        <p:nvSpPr>
-          <p:cNvPr id="142" name="Text 140"/>
-          <p:cNvSpPr txBox="1"/>
-          <p:nvPr/>
-        </p:nvSpPr>
-        <p:spPr>
-          <a:xfrm>
-            <a:off x="6400800" y="4379976"/>
-            <a:ext cx="1280160" cy="164592"/>
-          </a:xfrm>
-          <a:prstGeom prst="rect">
-            <a:avLst/>
-          </a:prstGeom>
-          <a:noFill/>
-          <a:ln/>
-        </p:spPr>
-        <p:txBody>
-          <a:bodyPr wrap="square" lIns="0" tIns="0" rIns="0" bIns="0" rtlCol="0" anchor="ctr"/>
-          <a:lstStyle/>
-          <a:p>
-            <a:pPr algn="r" indent="0" marL="0">
-              <a:buNone/>
-            </a:pPr>
-            <a:r>
-              <a:rPr lang="en-US" sz="700" b="1" dirty="0">
-                <a:solidFill>
-                  <a:srgbClr val="5E7280"/>
-                </a:solidFill>
-                <a:latin typeface="Poppins" pitchFamily="34" charset="0"/>
-                <a:ea typeface="Poppins" pitchFamily="34" charset="-122"/>
-                <a:cs typeface="Poppins" pitchFamily="34" charset="-120"/>
-              </a:rPr>
-              <a:t>31,400</a:t>
-            </a:r>
-            <a:endParaRPr lang="en-US" sz="700" dirty="0"/>
-          </a:p>
-        </p:txBody>
-      </p:sp>
-      <p:sp>
-        <p:nvSpPr>
-          <p:cNvPr id="143" name="Shape 141"/>
-          <p:cNvSpPr/>
-          <p:nvPr/>
-        </p:nvSpPr>
-        <p:spPr>
-          <a:xfrm>
-            <a:off x="594360" y="4553712"/>
-            <a:ext cx="7132320" cy="10973"/>
-          </a:xfrm>
-          <a:prstGeom prst="rect">
-            <a:avLst/>
-          </a:prstGeom>
-          <a:solidFill>
-            <a:srgbClr val="12293A"/>
-          </a:solidFill>
-          <a:ln/>
-        </p:spPr>
-      </p:sp>
-      <p:sp>
-        <p:nvSpPr>
-          <p:cNvPr id="144" name="Text 142"/>
-          <p:cNvSpPr txBox="1"/>
-          <p:nvPr/>
-        </p:nvSpPr>
-        <p:spPr>
-          <a:xfrm>
-            <a:off x="594360" y="4581144"/>
-            <a:ext cx="1417320" cy="201168"/>
-          </a:xfrm>
-          <a:prstGeom prst="rect">
-            <a:avLst/>
-          </a:prstGeom>
-          <a:noFill/>
-          <a:ln/>
-        </p:spPr>
-        <p:txBody>
-          <a:bodyPr wrap="square" lIns="0" tIns="0" rIns="0" bIns="0" rtlCol="0" anchor="ctr"/>
-          <a:lstStyle/>
-          <a:p>
-            <a:pPr indent="0" marL="0">
-              <a:buNone/>
-            </a:pPr>
-            <a:r>
-              <a:rPr lang="en-US" sz="750" b="1" dirty="0">
-                <a:solidFill>
-                  <a:srgbClr val="12293A"/>
-                </a:solidFill>
-                <a:latin typeface="Poppins" pitchFamily="34" charset="0"/>
-                <a:ea typeface="Poppins" pitchFamily="34" charset="-122"/>
-                <a:cs typeface="Poppins" pitchFamily="34" charset="-120"/>
-              </a:rPr>
-              <a:t>ALL DEVELOPERS</a:t>
-            </a:r>
-            <a:endParaRPr lang="en-US" sz="750" dirty="0"/>
-          </a:p>
-        </p:txBody>
-      </p:sp>
-      <p:sp>
-        <p:nvSpPr>
-          <p:cNvPr id="145" name="Text 143"/>
-          <p:cNvSpPr txBox="1"/>
-          <p:nvPr/>
-        </p:nvSpPr>
-        <p:spPr>
-          <a:xfrm>
-            <a:off x="2057400" y="4581144"/>
-            <a:ext cx="1051560" cy="201168"/>
-          </a:xfrm>
-          <a:prstGeom prst="rect">
-            <a:avLst/>
-          </a:prstGeom>
-          <a:noFill/>
-          <a:ln/>
-        </p:spPr>
-        <p:txBody>
-          <a:bodyPr wrap="square" lIns="0" tIns="0" rIns="0" bIns="0" rtlCol="0" anchor="ctr"/>
-          <a:lstStyle/>
-          <a:p>
-            <a:pPr algn="ctr" indent="0" marL="0">
-              <a:buNone/>
-            </a:pPr>
-            <a:r>
-              <a:rPr lang="en-US" sz="750" b="1" dirty="0">
-                <a:solidFill>
-                  <a:srgbClr val="2C8394"/>
-                </a:solidFill>
-                <a:latin typeface="Poppins" pitchFamily="34" charset="0"/>
-                <a:ea typeface="Poppins" pitchFamily="34" charset="-122"/>
-                <a:cs typeface="Poppins" pitchFamily="34" charset="-120"/>
-              </a:rPr>
-              <a:t>228,132</a:t>
-            </a:r>
-            <a:endParaRPr lang="en-US" sz="750" dirty="0"/>
-          </a:p>
-        </p:txBody>
-      </p:sp>
-      <p:sp>
-        <p:nvSpPr>
-          <p:cNvPr id="146" name="Text 144"/>
-          <p:cNvSpPr txBox="1"/>
-          <p:nvPr/>
-        </p:nvSpPr>
-        <p:spPr>
-          <a:xfrm>
-            <a:off x="3136392" y="4581144"/>
-            <a:ext cx="1051560" cy="201168"/>
-          </a:xfrm>
-          <a:prstGeom prst="rect">
-            <a:avLst/>
-          </a:prstGeom>
-          <a:noFill/>
-          <a:ln/>
-        </p:spPr>
-        <p:txBody>
-          <a:bodyPr wrap="square" lIns="0" tIns="0" rIns="0" bIns="0" rtlCol="0" anchor="ctr"/>
-          <a:lstStyle/>
-          <a:p>
-            <a:pPr algn="ctr" indent="0" marL="0">
-              <a:buNone/>
-            </a:pPr>
-            <a:r>
-              <a:rPr lang="en-US" sz="750" b="1" dirty="0">
-                <a:solidFill>
-                  <a:srgbClr val="2C8394"/>
-                </a:solidFill>
-                <a:latin typeface="Poppins" pitchFamily="34" charset="0"/>
-                <a:ea typeface="Poppins" pitchFamily="34" charset="-122"/>
-                <a:cs typeface="Poppins" pitchFamily="34" charset="-120"/>
-              </a:rPr>
-              <a:t>293,419</a:t>
-            </a:r>
-            <a:endParaRPr lang="en-US" sz="750" dirty="0"/>
-          </a:p>
-        </p:txBody>
-      </p:sp>
-      <p:sp>
-        <p:nvSpPr>
-          <p:cNvPr id="147" name="Text 145"/>
-          <p:cNvSpPr txBox="1"/>
-          <p:nvPr/>
-        </p:nvSpPr>
-        <p:spPr>
-          <a:xfrm>
-            <a:off x="4215384" y="4581144"/>
-            <a:ext cx="1051560" cy="201168"/>
-          </a:xfrm>
-          <a:prstGeom prst="rect">
-            <a:avLst/>
-          </a:prstGeom>
-          <a:noFill/>
-          <a:ln/>
-        </p:spPr>
-        <p:txBody>
-          <a:bodyPr wrap="square" lIns="0" tIns="0" rIns="0" bIns="0" rtlCol="0" anchor="ctr"/>
-          <a:lstStyle/>
-          <a:p>
-            <a:pPr algn="ctr" indent="0" marL="0">
-              <a:buNone/>
-            </a:pPr>
-            <a:r>
-              <a:rPr lang="en-US" sz="750" b="1" dirty="0">
-                <a:solidFill>
-                  <a:srgbClr val="2C8394"/>
-                </a:solidFill>
-                <a:latin typeface="Poppins" pitchFamily="34" charset="0"/>
-                <a:ea typeface="Poppins" pitchFamily="34" charset="-122"/>
-                <a:cs typeface="Poppins" pitchFamily="34" charset="-120"/>
-              </a:rPr>
-              <a:t>277,261</a:t>
-            </a:r>
-            <a:endParaRPr lang="en-US" sz="750" dirty="0"/>
-          </a:p>
-        </p:txBody>
-      </p:sp>
-      <p:sp>
-        <p:nvSpPr>
-          <p:cNvPr id="148" name="Text 146"/>
-          <p:cNvSpPr txBox="1"/>
-          <p:nvPr/>
-        </p:nvSpPr>
-        <p:spPr>
-          <a:xfrm>
-            <a:off x="5294376" y="4581144"/>
-            <a:ext cx="1051560" cy="201168"/>
-          </a:xfrm>
-          <a:prstGeom prst="rect">
-            <a:avLst/>
-          </a:prstGeom>
-          <a:noFill/>
-          <a:ln/>
-        </p:spPr>
-        <p:txBody>
-          <a:bodyPr wrap="square" lIns="0" tIns="0" rIns="0" bIns="0" rtlCol="0" anchor="ctr"/>
-          <a:lstStyle/>
-          <a:p>
-            <a:pPr algn="ctr" indent="0" marL="0">
-              <a:buNone/>
-            </a:pPr>
-            <a:r>
-              <a:rPr lang="en-US" sz="750" b="1" dirty="0">
-                <a:solidFill>
-                  <a:srgbClr val="2C8394"/>
-                </a:solidFill>
-                <a:latin typeface="Poppins" pitchFamily="34" charset="0"/>
-                <a:ea typeface="Poppins" pitchFamily="34" charset="-122"/>
-                <a:cs typeface="Poppins" pitchFamily="34" charset="-120"/>
-              </a:rPr>
-              <a:t>111,689</a:t>
-            </a:r>
-            <a:endParaRPr lang="en-US" sz="750" dirty="0"/>
-          </a:p>
-        </p:txBody>
-      </p:sp>
-      <p:sp>
-        <p:nvSpPr>
-          <p:cNvPr id="149" name="Text 147"/>
-          <p:cNvSpPr txBox="1"/>
-          <p:nvPr/>
-        </p:nvSpPr>
-        <p:spPr>
-          <a:xfrm>
-            <a:off x="6400800" y="4581144"/>
-            <a:ext cx="1280160" cy="201168"/>
-          </a:xfrm>
-          <a:prstGeom prst="rect">
-            <a:avLst/>
-          </a:prstGeom>
-          <a:noFill/>
-          <a:ln/>
-        </p:spPr>
-        <p:txBody>
-          <a:bodyPr wrap="square" lIns="0" tIns="0" rIns="0" bIns="0" rtlCol="0" anchor="ctr"/>
-          <a:lstStyle/>
-          <a:p>
-            <a:pPr algn="r" indent="0" marL="0">
-              <a:buNone/>
-            </a:pPr>
-            <a:r>
-              <a:rPr lang="en-US" sz="750" b="1" dirty="0">
-                <a:solidFill>
-                  <a:srgbClr val="2C8394"/>
-                </a:solidFill>
-                <a:latin typeface="Poppins" pitchFamily="34" charset="0"/>
-                <a:ea typeface="Poppins" pitchFamily="34" charset="-122"/>
-                <a:cs typeface="Poppins" pitchFamily="34" charset="-120"/>
-              </a:rPr>
-              <a:t>910,501</a:t>
-            </a:r>
-            <a:endParaRPr lang="en-US" sz="750" dirty="0"/>
-          </a:p>
-        </p:txBody>
-      </p:sp>
-      <p:sp>
-        <p:nvSpPr>
-          <p:cNvPr id="150" name="Text 148"/>
-          <p:cNvSpPr txBox="1"/>
-          <p:nvPr/>
-        </p:nvSpPr>
-        <p:spPr>
-          <a:xfrm>
-            <a:off x="594360" y="4892040"/>
-            <a:ext cx="1417320" cy="201168"/>
-          </a:xfrm>
-          <a:prstGeom prst="rect">
-            <a:avLst/>
-          </a:prstGeom>
-          <a:noFill/>
-          <a:ln/>
-        </p:spPr>
-        <p:txBody>
-          <a:bodyPr wrap="square" lIns="0" tIns="0" rIns="0" bIns="0" rtlCol="0" anchor="ctr"/>
-          <a:lstStyle/>
-          <a:p>
-            <a:pPr indent="0" marL="0">
-              <a:buNone/>
-            </a:pPr>
-            <a:r>
-              <a:rPr lang="en-US" sz="750" b="1" dirty="0">
-                <a:solidFill>
-                  <a:srgbClr val="12293A"/>
-                </a:solidFill>
-                <a:latin typeface="Poppins" pitchFamily="34" charset="0"/>
-                <a:ea typeface="Poppins" pitchFamily="34" charset="-122"/>
-                <a:cs typeface="Poppins" pitchFamily="34" charset="-120"/>
-              </a:rPr>
-              <a:t>BY WEEK  </a:t>
-            </a:r>
-            <a:pPr indent="0" marL="0">
-              <a:buNone/>
-            </a:pPr>
-            <a:r>
-              <a:rPr lang="en-US" sz="600" dirty="0">
-                <a:solidFill>
-                  <a:srgbClr val="8FA1AC"/>
-                </a:solidFill>
-                <a:latin typeface="Poppins" pitchFamily="34" charset="0"/>
-                <a:ea typeface="Poppins" pitchFamily="34" charset="-122"/>
-                <a:cs typeface="Poppins" pitchFamily="34" charset="-120"/>
-              </a:rPr>
-              <a:t>cell = one week</a:t>
-            </a:r>
-            <a:endParaRPr lang="en-US" sz="750" dirty="0"/>
-          </a:p>
-        </p:txBody>
-      </p:sp>
-      <p:sp>
-        <p:nvSpPr>
-          <p:cNvPr id="151" name="Shape 149"/>
-          <p:cNvSpPr/>
-          <p:nvPr/>
-        </p:nvSpPr>
-        <p:spPr>
-          <a:xfrm>
-            <a:off x="2075688" y="4892040"/>
-            <a:ext cx="365107" cy="219456"/>
-          </a:xfrm>
-          <a:prstGeom prst="rect">
-            <a:avLst/>
-          </a:prstGeom>
-          <a:solidFill>
-            <a:srgbClr val="D4E9ED"/>
-          </a:solidFill>
-          <a:ln/>
-        </p:spPr>
-      </p:sp>
-      <p:sp>
-        <p:nvSpPr>
-          <p:cNvPr id="152" name="Text 150"/>
-          <p:cNvSpPr txBox="1"/>
-          <p:nvPr/>
-        </p:nvSpPr>
-        <p:spPr>
-          <a:xfrm>
-            <a:off x="2057400" y="4892040"/>
-            <a:ext cx="401683" cy="219456"/>
-          </a:xfrm>
-          <a:prstGeom prst="rect">
-            <a:avLst/>
-          </a:prstGeom>
-          <a:noFill/>
-          <a:ln/>
-        </p:spPr>
-        <p:txBody>
-          <a:bodyPr wrap="square" lIns="0" tIns="0" rIns="0" bIns="0" rtlCol="0" anchor="ctr"/>
-          <a:lstStyle/>
-          <a:p>
-            <a:pPr algn="ctr" indent="0" marL="0">
-              <a:buNone/>
-            </a:pPr>
-            <a:r>
-              <a:rPr lang="en-US" sz="620" dirty="0">
-                <a:solidFill>
-                  <a:srgbClr val="12293A"/>
-                </a:solidFill>
-                <a:latin typeface="Poppins" pitchFamily="34" charset="0"/>
-                <a:ea typeface="Poppins" pitchFamily="34" charset="-122"/>
-                <a:cs typeface="Poppins" pitchFamily="34" charset="-120"/>
-              </a:rPr>
-              <a:t>28k</a:t>
-            </a:r>
-            <a:endParaRPr lang="en-US" sz="620" dirty="0"/>
-          </a:p>
-        </p:txBody>
-      </p:sp>
-      <p:sp>
-        <p:nvSpPr>
-          <p:cNvPr id="153" name="Text 151"/>
-          <p:cNvSpPr txBox="1"/>
-          <p:nvPr/>
-        </p:nvSpPr>
-        <p:spPr>
-          <a:xfrm>
-            <a:off x="2057400" y="5120640"/>
-            <a:ext cx="401683" cy="146304"/>
-          </a:xfrm>
-          <a:prstGeom prst="rect">
-            <a:avLst/>
-          </a:prstGeom>
-          <a:noFill/>
-          <a:ln/>
-        </p:spPr>
-        <p:txBody>
-          <a:bodyPr wrap="square" lIns="0" tIns="0" rIns="0" bIns="0" rtlCol="0" anchor="ctr"/>
-          <a:lstStyle/>
-          <a:p>
-            <a:pPr algn="ctr" indent="0" marL="0">
-              <a:buNone/>
-            </a:pPr>
-            <a:r>
-              <a:rPr lang="en-US" sz="550" dirty="0">
-                <a:solidFill>
-                  <a:srgbClr val="8FA1AC"/>
-                </a:solidFill>
-                <a:latin typeface="Poppins" pitchFamily="34" charset="0"/>
-                <a:ea typeface="Poppins" pitchFamily="34" charset="-122"/>
-                <a:cs typeface="Poppins" pitchFamily="34" charset="-120"/>
-              </a:rPr>
-              <a:t>07</a:t>
+              <a:t>06</a:t>
             </a:r>
             <a:endParaRPr lang="en-US" sz="550" dirty="0"/>
           </a:p>
@@ -25400,1281 +26928,7 @@
       </p:sp>
       <p:sp>
         <p:nvSpPr>
-          <p:cNvPr id="154" name="Shape 152"/>
-          <p:cNvSpPr/>
-          <p:nvPr/>
-        </p:nvSpPr>
-        <p:spPr>
-          <a:xfrm>
-            <a:off x="2477371" y="4892040"/>
-            <a:ext cx="365107" cy="219456"/>
-          </a:xfrm>
-          <a:prstGeom prst="rect">
-            <a:avLst/>
-          </a:prstGeom>
-          <a:solidFill>
-            <a:srgbClr val="D4E9ED"/>
-          </a:solidFill>
-          <a:ln/>
-        </p:spPr>
-      </p:sp>
-      <p:sp>
-        <p:nvSpPr>
-          <p:cNvPr id="155" name="Text 153"/>
-          <p:cNvSpPr txBox="1"/>
-          <p:nvPr/>
-        </p:nvSpPr>
-        <p:spPr>
-          <a:xfrm>
-            <a:off x="2459083" y="4892040"/>
-            <a:ext cx="401683" cy="219456"/>
-          </a:xfrm>
-          <a:prstGeom prst="rect">
-            <a:avLst/>
-          </a:prstGeom>
-          <a:noFill/>
-          <a:ln/>
-        </p:spPr>
-        <p:txBody>
-          <a:bodyPr wrap="square" lIns="0" tIns="0" rIns="0" bIns="0" rtlCol="0" anchor="ctr"/>
-          <a:lstStyle/>
-          <a:p>
-            <a:pPr algn="ctr" indent="0" marL="0">
-              <a:buNone/>
-            </a:pPr>
-            <a:r>
-              <a:rPr lang="en-US" sz="620" dirty="0">
-                <a:solidFill>
-                  <a:srgbClr val="12293A"/>
-                </a:solidFill>
-                <a:latin typeface="Poppins" pitchFamily="34" charset="0"/>
-                <a:ea typeface="Poppins" pitchFamily="34" charset="-122"/>
-                <a:cs typeface="Poppins" pitchFamily="34" charset="-120"/>
-              </a:rPr>
-              <a:t>28k</a:t>
-            </a:r>
-            <a:endParaRPr lang="en-US" sz="620" dirty="0"/>
-          </a:p>
-        </p:txBody>
-      </p:sp>
-      <p:sp>
-        <p:nvSpPr>
-          <p:cNvPr id="156" name="Text 154"/>
-          <p:cNvSpPr txBox="1"/>
-          <p:nvPr/>
-        </p:nvSpPr>
-        <p:spPr>
-          <a:xfrm>
-            <a:off x="2459083" y="5120640"/>
-            <a:ext cx="401683" cy="146304"/>
-          </a:xfrm>
-          <a:prstGeom prst="rect">
-            <a:avLst/>
-          </a:prstGeom>
-          <a:noFill/>
-          <a:ln/>
-        </p:spPr>
-        <p:txBody>
-          <a:bodyPr wrap="square" lIns="0" tIns="0" rIns="0" bIns="0" rtlCol="0" anchor="ctr"/>
-          <a:lstStyle/>
-          <a:p>
-            <a:pPr algn="ctr" indent="0" marL="0">
-              <a:buNone/>
-            </a:pPr>
-            <a:r>
-              <a:rPr lang="en-US" sz="550" dirty="0">
-                <a:solidFill>
-                  <a:srgbClr val="8FA1AC"/>
-                </a:solidFill>
-                <a:latin typeface="Poppins" pitchFamily="34" charset="0"/>
-                <a:ea typeface="Poppins" pitchFamily="34" charset="-122"/>
-                <a:cs typeface="Poppins" pitchFamily="34" charset="-120"/>
-              </a:rPr>
-              <a:t>14</a:t>
-            </a:r>
-            <a:endParaRPr lang="en-US" sz="550" dirty="0"/>
-          </a:p>
-        </p:txBody>
-      </p:sp>
-      <p:sp>
-        <p:nvSpPr>
-          <p:cNvPr id="157" name="Shape 155"/>
-          <p:cNvSpPr/>
-          <p:nvPr/>
-        </p:nvSpPr>
-        <p:spPr>
-          <a:xfrm>
-            <a:off x="2879054" y="4892040"/>
-            <a:ext cx="365107" cy="219456"/>
-          </a:xfrm>
-          <a:prstGeom prst="rect">
-            <a:avLst/>
-          </a:prstGeom>
-          <a:solidFill>
-            <a:srgbClr val="D4E9ED"/>
-          </a:solidFill>
-          <a:ln/>
-        </p:spPr>
-      </p:sp>
-      <p:sp>
-        <p:nvSpPr>
-          <p:cNvPr id="158" name="Text 156"/>
-          <p:cNvSpPr txBox="1"/>
-          <p:nvPr/>
-        </p:nvSpPr>
-        <p:spPr>
-          <a:xfrm>
-            <a:off x="2860766" y="4892040"/>
-            <a:ext cx="401683" cy="219456"/>
-          </a:xfrm>
-          <a:prstGeom prst="rect">
-            <a:avLst/>
-          </a:prstGeom>
-          <a:noFill/>
-          <a:ln/>
-        </p:spPr>
-        <p:txBody>
-          <a:bodyPr wrap="square" lIns="0" tIns="0" rIns="0" bIns="0" rtlCol="0" anchor="ctr"/>
-          <a:lstStyle/>
-          <a:p>
-            <a:pPr algn="ctr" indent="0" marL="0">
-              <a:buNone/>
-            </a:pPr>
-            <a:r>
-              <a:rPr lang="en-US" sz="620" dirty="0">
-                <a:solidFill>
-                  <a:srgbClr val="12293A"/>
-                </a:solidFill>
-                <a:latin typeface="Poppins" pitchFamily="34" charset="0"/>
-                <a:ea typeface="Poppins" pitchFamily="34" charset="-122"/>
-                <a:cs typeface="Poppins" pitchFamily="34" charset="-120"/>
-              </a:rPr>
-              <a:t>28k</a:t>
-            </a:r>
-            <a:endParaRPr lang="en-US" sz="620" dirty="0"/>
-          </a:p>
-        </p:txBody>
-      </p:sp>
-      <p:sp>
-        <p:nvSpPr>
-          <p:cNvPr id="159" name="Text 157"/>
-          <p:cNvSpPr txBox="1"/>
-          <p:nvPr/>
-        </p:nvSpPr>
-        <p:spPr>
-          <a:xfrm>
-            <a:off x="2860766" y="5120640"/>
-            <a:ext cx="401683" cy="146304"/>
-          </a:xfrm>
-          <a:prstGeom prst="rect">
-            <a:avLst/>
-          </a:prstGeom>
-          <a:noFill/>
-          <a:ln/>
-        </p:spPr>
-        <p:txBody>
-          <a:bodyPr wrap="square" lIns="0" tIns="0" rIns="0" bIns="0" rtlCol="0" anchor="ctr"/>
-          <a:lstStyle/>
-          <a:p>
-            <a:pPr algn="ctr" indent="0" marL="0">
-              <a:buNone/>
-            </a:pPr>
-            <a:r>
-              <a:rPr lang="en-US" sz="550" dirty="0">
-                <a:solidFill>
-                  <a:srgbClr val="8FA1AC"/>
-                </a:solidFill>
-                <a:latin typeface="Poppins" pitchFamily="34" charset="0"/>
-                <a:ea typeface="Poppins" pitchFamily="34" charset="-122"/>
-                <a:cs typeface="Poppins" pitchFamily="34" charset="-120"/>
-              </a:rPr>
-              <a:t>21</a:t>
-            </a:r>
-            <a:endParaRPr lang="en-US" sz="550" dirty="0"/>
-          </a:p>
-        </p:txBody>
-      </p:sp>
-      <p:sp>
-        <p:nvSpPr>
-          <p:cNvPr id="160" name="Shape 158"/>
-          <p:cNvSpPr/>
-          <p:nvPr/>
-        </p:nvSpPr>
-        <p:spPr>
-          <a:xfrm>
-            <a:off x="3280737" y="4892040"/>
-            <a:ext cx="365107" cy="219456"/>
-          </a:xfrm>
-          <a:prstGeom prst="rect">
-            <a:avLst/>
-          </a:prstGeom>
-          <a:solidFill>
-            <a:srgbClr val="B5D9E0"/>
-          </a:solidFill>
-          <a:ln/>
-        </p:spPr>
-      </p:sp>
-      <p:sp>
-        <p:nvSpPr>
-          <p:cNvPr id="161" name="Text 159"/>
-          <p:cNvSpPr txBox="1"/>
-          <p:nvPr/>
-        </p:nvSpPr>
-        <p:spPr>
-          <a:xfrm>
-            <a:off x="3262449" y="4892040"/>
-            <a:ext cx="401683" cy="219456"/>
-          </a:xfrm>
-          <a:prstGeom prst="rect">
-            <a:avLst/>
-          </a:prstGeom>
-          <a:noFill/>
-          <a:ln/>
-        </p:spPr>
-        <p:txBody>
-          <a:bodyPr wrap="square" lIns="0" tIns="0" rIns="0" bIns="0" rtlCol="0" anchor="ctr"/>
-          <a:lstStyle/>
-          <a:p>
-            <a:pPr algn="ctr" indent="0" marL="0">
-              <a:buNone/>
-            </a:pPr>
-            <a:r>
-              <a:rPr lang="en-US" sz="620" dirty="0">
-                <a:solidFill>
-                  <a:srgbClr val="12293A"/>
-                </a:solidFill>
-                <a:latin typeface="Poppins" pitchFamily="34" charset="0"/>
-                <a:ea typeface="Poppins" pitchFamily="34" charset="-122"/>
-                <a:cs typeface="Poppins" pitchFamily="34" charset="-120"/>
-              </a:rPr>
-              <a:t>41k</a:t>
-            </a:r>
-            <a:endParaRPr lang="en-US" sz="620" dirty="0"/>
-          </a:p>
-        </p:txBody>
-      </p:sp>
-      <p:sp>
-        <p:nvSpPr>
-          <p:cNvPr id="162" name="Text 160"/>
-          <p:cNvSpPr txBox="1"/>
-          <p:nvPr/>
-        </p:nvSpPr>
-        <p:spPr>
-          <a:xfrm>
-            <a:off x="3262449" y="5120640"/>
-            <a:ext cx="401683" cy="146304"/>
-          </a:xfrm>
-          <a:prstGeom prst="rect">
-            <a:avLst/>
-          </a:prstGeom>
-          <a:noFill/>
-          <a:ln/>
-        </p:spPr>
-        <p:txBody>
-          <a:bodyPr wrap="square" lIns="0" tIns="0" rIns="0" bIns="0" rtlCol="0" anchor="ctr"/>
-          <a:lstStyle/>
-          <a:p>
-            <a:pPr algn="ctr" indent="0" marL="0">
-              <a:buNone/>
-            </a:pPr>
-            <a:r>
-              <a:rPr lang="en-US" sz="550" dirty="0">
-                <a:solidFill>
-                  <a:srgbClr val="8FA1AC"/>
-                </a:solidFill>
-                <a:latin typeface="Poppins" pitchFamily="34" charset="0"/>
-                <a:ea typeface="Poppins" pitchFamily="34" charset="-122"/>
-                <a:cs typeface="Poppins" pitchFamily="34" charset="-120"/>
-              </a:rPr>
-              <a:t>28</a:t>
-            </a:r>
-            <a:endParaRPr lang="en-US" sz="550" dirty="0"/>
-          </a:p>
-        </p:txBody>
-      </p:sp>
-      <p:sp>
-        <p:nvSpPr>
-          <p:cNvPr id="163" name="Shape 161"/>
-          <p:cNvSpPr/>
-          <p:nvPr/>
-        </p:nvSpPr>
-        <p:spPr>
-          <a:xfrm>
-            <a:off x="3682419" y="4892040"/>
-            <a:ext cx="365107" cy="219456"/>
-          </a:xfrm>
-          <a:prstGeom prst="rect">
-            <a:avLst/>
-          </a:prstGeom>
-          <a:solidFill>
-            <a:srgbClr val="B5D9E0"/>
-          </a:solidFill>
-          <a:ln/>
-        </p:spPr>
-      </p:sp>
-      <p:sp>
-        <p:nvSpPr>
-          <p:cNvPr id="164" name="Text 162"/>
-          <p:cNvSpPr txBox="1"/>
-          <p:nvPr/>
-        </p:nvSpPr>
-        <p:spPr>
-          <a:xfrm>
-            <a:off x="3664131" y="4892040"/>
-            <a:ext cx="401683" cy="219456"/>
-          </a:xfrm>
-          <a:prstGeom prst="rect">
-            <a:avLst/>
-          </a:prstGeom>
-          <a:noFill/>
-          <a:ln/>
-        </p:spPr>
-        <p:txBody>
-          <a:bodyPr wrap="square" lIns="0" tIns="0" rIns="0" bIns="0" rtlCol="0" anchor="ctr"/>
-          <a:lstStyle/>
-          <a:p>
-            <a:pPr algn="ctr" indent="0" marL="0">
-              <a:buNone/>
-            </a:pPr>
-            <a:r>
-              <a:rPr lang="en-US" sz="620" dirty="0">
-                <a:solidFill>
-                  <a:srgbClr val="12293A"/>
-                </a:solidFill>
-                <a:latin typeface="Poppins" pitchFamily="34" charset="0"/>
-                <a:ea typeface="Poppins" pitchFamily="34" charset="-122"/>
-                <a:cs typeface="Poppins" pitchFamily="34" charset="-120"/>
-              </a:rPr>
-              <a:t>52k</a:t>
-            </a:r>
-            <a:endParaRPr lang="en-US" sz="620" dirty="0"/>
-          </a:p>
-        </p:txBody>
-      </p:sp>
-      <p:sp>
-        <p:nvSpPr>
-          <p:cNvPr id="165" name="Text 163"/>
-          <p:cNvSpPr txBox="1"/>
-          <p:nvPr/>
-        </p:nvSpPr>
-        <p:spPr>
-          <a:xfrm>
-            <a:off x="3664131" y="5120640"/>
-            <a:ext cx="401683" cy="146304"/>
-          </a:xfrm>
-          <a:prstGeom prst="rect">
-            <a:avLst/>
-          </a:prstGeom>
-          <a:noFill/>
-          <a:ln/>
-        </p:spPr>
-        <p:txBody>
-          <a:bodyPr wrap="square" lIns="0" tIns="0" rIns="0" bIns="0" rtlCol="0" anchor="ctr"/>
-          <a:lstStyle/>
-          <a:p>
-            <a:pPr algn="ctr" indent="0" marL="0">
-              <a:buNone/>
-            </a:pPr>
-            <a:r>
-              <a:rPr lang="en-US" sz="550" dirty="0">
-                <a:solidFill>
-                  <a:srgbClr val="8FA1AC"/>
-                </a:solidFill>
-                <a:latin typeface="Poppins" pitchFamily="34" charset="0"/>
-                <a:ea typeface="Poppins" pitchFamily="34" charset="-122"/>
-                <a:cs typeface="Poppins" pitchFamily="34" charset="-120"/>
-              </a:rPr>
-              <a:t>05</a:t>
-            </a:r>
-            <a:endParaRPr lang="en-US" sz="550" dirty="0"/>
-          </a:p>
-        </p:txBody>
-      </p:sp>
-      <p:sp>
-        <p:nvSpPr>
-          <p:cNvPr id="166" name="Shape 164"/>
-          <p:cNvSpPr/>
-          <p:nvPr/>
-        </p:nvSpPr>
-        <p:spPr>
-          <a:xfrm>
-            <a:off x="4084102" y="4892040"/>
-            <a:ext cx="365107" cy="219456"/>
-          </a:xfrm>
-          <a:prstGeom prst="rect">
-            <a:avLst/>
-          </a:prstGeom>
-          <a:solidFill>
-            <a:srgbClr val="B5D9E0"/>
-          </a:solidFill>
-          <a:ln/>
-        </p:spPr>
-      </p:sp>
-      <p:sp>
-        <p:nvSpPr>
-          <p:cNvPr id="167" name="Text 165"/>
-          <p:cNvSpPr txBox="1"/>
-          <p:nvPr/>
-        </p:nvSpPr>
-        <p:spPr>
-          <a:xfrm>
-            <a:off x="4065814" y="4892040"/>
-            <a:ext cx="401683" cy="219456"/>
-          </a:xfrm>
-          <a:prstGeom prst="rect">
-            <a:avLst/>
-          </a:prstGeom>
-          <a:noFill/>
-          <a:ln/>
-        </p:spPr>
-        <p:txBody>
-          <a:bodyPr wrap="square" lIns="0" tIns="0" rIns="0" bIns="0" rtlCol="0" anchor="ctr"/>
-          <a:lstStyle/>
-          <a:p>
-            <a:pPr algn="ctr" indent="0" marL="0">
-              <a:buNone/>
-            </a:pPr>
-            <a:r>
-              <a:rPr lang="en-US" sz="620" dirty="0">
-                <a:solidFill>
-                  <a:srgbClr val="12293A"/>
-                </a:solidFill>
-                <a:latin typeface="Poppins" pitchFamily="34" charset="0"/>
-                <a:ea typeface="Poppins" pitchFamily="34" charset="-122"/>
-                <a:cs typeface="Poppins" pitchFamily="34" charset="-120"/>
-              </a:rPr>
-              <a:t>52k</a:t>
-            </a:r>
-            <a:endParaRPr lang="en-US" sz="620" dirty="0"/>
-          </a:p>
-        </p:txBody>
-      </p:sp>
-      <p:sp>
-        <p:nvSpPr>
-          <p:cNvPr id="168" name="Text 166"/>
-          <p:cNvSpPr txBox="1"/>
-          <p:nvPr/>
-        </p:nvSpPr>
-        <p:spPr>
-          <a:xfrm>
-            <a:off x="4065814" y="5120640"/>
-            <a:ext cx="401683" cy="146304"/>
-          </a:xfrm>
-          <a:prstGeom prst="rect">
-            <a:avLst/>
-          </a:prstGeom>
-          <a:noFill/>
-          <a:ln/>
-        </p:spPr>
-        <p:txBody>
-          <a:bodyPr wrap="square" lIns="0" tIns="0" rIns="0" bIns="0" rtlCol="0" anchor="ctr"/>
-          <a:lstStyle/>
-          <a:p>
-            <a:pPr algn="ctr" indent="0" marL="0">
-              <a:buNone/>
-            </a:pPr>
-            <a:r>
-              <a:rPr lang="en-US" sz="550" dirty="0">
-                <a:solidFill>
-                  <a:srgbClr val="8FA1AC"/>
-                </a:solidFill>
-                <a:latin typeface="Poppins" pitchFamily="34" charset="0"/>
-                <a:ea typeface="Poppins" pitchFamily="34" charset="-122"/>
-                <a:cs typeface="Poppins" pitchFamily="34" charset="-120"/>
-              </a:rPr>
-              <a:t>12</a:t>
-            </a:r>
-            <a:endParaRPr lang="en-US" sz="550" dirty="0"/>
-          </a:p>
-        </p:txBody>
-      </p:sp>
-      <p:sp>
-        <p:nvSpPr>
-          <p:cNvPr id="169" name="Shape 167"/>
-          <p:cNvSpPr/>
-          <p:nvPr/>
-        </p:nvSpPr>
-        <p:spPr>
-          <a:xfrm>
-            <a:off x="4485785" y="4892040"/>
-            <a:ext cx="365107" cy="219456"/>
-          </a:xfrm>
-          <a:prstGeom prst="rect">
-            <a:avLst/>
-          </a:prstGeom>
-          <a:solidFill>
-            <a:srgbClr val="B5D9E0"/>
-          </a:solidFill>
-          <a:ln/>
-        </p:spPr>
-      </p:sp>
-      <p:sp>
-        <p:nvSpPr>
-          <p:cNvPr id="170" name="Text 168"/>
-          <p:cNvSpPr txBox="1"/>
-          <p:nvPr/>
-        </p:nvSpPr>
-        <p:spPr>
-          <a:xfrm>
-            <a:off x="4467497" y="4892040"/>
-            <a:ext cx="401683" cy="219456"/>
-          </a:xfrm>
-          <a:prstGeom prst="rect">
-            <a:avLst/>
-          </a:prstGeom>
-          <a:noFill/>
-          <a:ln/>
-        </p:spPr>
-        <p:txBody>
-          <a:bodyPr wrap="square" lIns="0" tIns="0" rIns="0" bIns="0" rtlCol="0" anchor="ctr"/>
-          <a:lstStyle/>
-          <a:p>
-            <a:pPr algn="ctr" indent="0" marL="0">
-              <a:buNone/>
-            </a:pPr>
-            <a:r>
-              <a:rPr lang="en-US" sz="620" dirty="0">
-                <a:solidFill>
-                  <a:srgbClr val="12293A"/>
-                </a:solidFill>
-                <a:latin typeface="Poppins" pitchFamily="34" charset="0"/>
-                <a:ea typeface="Poppins" pitchFamily="34" charset="-122"/>
-                <a:cs typeface="Poppins" pitchFamily="34" charset="-120"/>
-              </a:rPr>
-              <a:t>52k</a:t>
-            </a:r>
-            <a:endParaRPr lang="en-US" sz="620" dirty="0"/>
-          </a:p>
-        </p:txBody>
-      </p:sp>
-      <p:sp>
-        <p:nvSpPr>
-          <p:cNvPr id="171" name="Text 169"/>
-          <p:cNvSpPr txBox="1"/>
-          <p:nvPr/>
-        </p:nvSpPr>
-        <p:spPr>
-          <a:xfrm>
-            <a:off x="4467497" y="5120640"/>
-            <a:ext cx="401683" cy="146304"/>
-          </a:xfrm>
-          <a:prstGeom prst="rect">
-            <a:avLst/>
-          </a:prstGeom>
-          <a:noFill/>
-          <a:ln/>
-        </p:spPr>
-        <p:txBody>
-          <a:bodyPr wrap="square" lIns="0" tIns="0" rIns="0" bIns="0" rtlCol="0" anchor="ctr"/>
-          <a:lstStyle/>
-          <a:p>
-            <a:pPr algn="ctr" indent="0" marL="0">
-              <a:buNone/>
-            </a:pPr>
-            <a:r>
-              <a:rPr lang="en-US" sz="550" dirty="0">
-                <a:solidFill>
-                  <a:srgbClr val="8FA1AC"/>
-                </a:solidFill>
-                <a:latin typeface="Poppins" pitchFamily="34" charset="0"/>
-                <a:ea typeface="Poppins" pitchFamily="34" charset="-122"/>
-                <a:cs typeface="Poppins" pitchFamily="34" charset="-120"/>
-              </a:rPr>
-              <a:t>19</a:t>
-            </a:r>
-            <a:endParaRPr lang="en-US" sz="550" dirty="0"/>
-          </a:p>
-        </p:txBody>
-      </p:sp>
-      <p:sp>
-        <p:nvSpPr>
-          <p:cNvPr id="172" name="Shape 170"/>
-          <p:cNvSpPr/>
-          <p:nvPr/>
-        </p:nvSpPr>
-        <p:spPr>
-          <a:xfrm>
-            <a:off x="4887468" y="4892040"/>
-            <a:ext cx="365107" cy="219456"/>
-          </a:xfrm>
-          <a:prstGeom prst="rect">
-            <a:avLst/>
-          </a:prstGeom>
-          <a:solidFill>
-            <a:srgbClr val="B5D9E0"/>
-          </a:solidFill>
-          <a:ln/>
-        </p:spPr>
-      </p:sp>
-      <p:sp>
-        <p:nvSpPr>
-          <p:cNvPr id="173" name="Text 171"/>
-          <p:cNvSpPr txBox="1"/>
-          <p:nvPr/>
-        </p:nvSpPr>
-        <p:spPr>
-          <a:xfrm>
-            <a:off x="4869180" y="4892040"/>
-            <a:ext cx="401683" cy="219456"/>
-          </a:xfrm>
-          <a:prstGeom prst="rect">
-            <a:avLst/>
-          </a:prstGeom>
-          <a:noFill/>
-          <a:ln/>
-        </p:spPr>
-        <p:txBody>
-          <a:bodyPr wrap="square" lIns="0" tIns="0" rIns="0" bIns="0" rtlCol="0" anchor="ctr"/>
-          <a:lstStyle/>
-          <a:p>
-            <a:pPr algn="ctr" indent="0" marL="0">
-              <a:buNone/>
-            </a:pPr>
-            <a:r>
-              <a:rPr lang="en-US" sz="620" dirty="0">
-                <a:solidFill>
-                  <a:srgbClr val="12293A"/>
-                </a:solidFill>
-                <a:latin typeface="Poppins" pitchFamily="34" charset="0"/>
-                <a:ea typeface="Poppins" pitchFamily="34" charset="-122"/>
-                <a:cs typeface="Poppins" pitchFamily="34" charset="-120"/>
-              </a:rPr>
-              <a:t>48k</a:t>
-            </a:r>
-            <a:endParaRPr lang="en-US" sz="620" dirty="0"/>
-          </a:p>
-        </p:txBody>
-      </p:sp>
-      <p:sp>
-        <p:nvSpPr>
-          <p:cNvPr id="174" name="Text 172"/>
-          <p:cNvSpPr txBox="1"/>
-          <p:nvPr/>
-        </p:nvSpPr>
-        <p:spPr>
-          <a:xfrm>
-            <a:off x="4869180" y="5120640"/>
-            <a:ext cx="401683" cy="146304"/>
-          </a:xfrm>
-          <a:prstGeom prst="rect">
-            <a:avLst/>
-          </a:prstGeom>
-          <a:noFill/>
-          <a:ln/>
-        </p:spPr>
-        <p:txBody>
-          <a:bodyPr wrap="square" lIns="0" tIns="0" rIns="0" bIns="0" rtlCol="0" anchor="ctr"/>
-          <a:lstStyle/>
-          <a:p>
-            <a:pPr algn="ctr" indent="0" marL="0">
-              <a:buNone/>
-            </a:pPr>
-            <a:r>
-              <a:rPr lang="en-US" sz="550" dirty="0">
-                <a:solidFill>
-                  <a:srgbClr val="8FA1AC"/>
-                </a:solidFill>
-                <a:latin typeface="Poppins" pitchFamily="34" charset="0"/>
-                <a:ea typeface="Poppins" pitchFamily="34" charset="-122"/>
-                <a:cs typeface="Poppins" pitchFamily="34" charset="-120"/>
-              </a:rPr>
-              <a:t>26</a:t>
-            </a:r>
-            <a:endParaRPr lang="en-US" sz="550" dirty="0"/>
-          </a:p>
-        </p:txBody>
-      </p:sp>
-      <p:sp>
-        <p:nvSpPr>
-          <p:cNvPr id="175" name="Shape 173"/>
-          <p:cNvSpPr/>
-          <p:nvPr/>
-        </p:nvSpPr>
-        <p:spPr>
-          <a:xfrm>
-            <a:off x="5289151" y="4892040"/>
-            <a:ext cx="365107" cy="219456"/>
-          </a:xfrm>
-          <a:prstGeom prst="rect">
-            <a:avLst/>
-          </a:prstGeom>
-          <a:solidFill>
-            <a:srgbClr val="D4E9ED"/>
-          </a:solidFill>
-          <a:ln/>
-        </p:spPr>
-      </p:sp>
-      <p:sp>
-        <p:nvSpPr>
-          <p:cNvPr id="176" name="Text 174"/>
-          <p:cNvSpPr txBox="1"/>
-          <p:nvPr/>
-        </p:nvSpPr>
-        <p:spPr>
-          <a:xfrm>
-            <a:off x="5270863" y="4892040"/>
-            <a:ext cx="401683" cy="219456"/>
-          </a:xfrm>
-          <a:prstGeom prst="rect">
-            <a:avLst/>
-          </a:prstGeom>
-          <a:noFill/>
-          <a:ln/>
-        </p:spPr>
-        <p:txBody>
-          <a:bodyPr wrap="square" lIns="0" tIns="0" rIns="0" bIns="0" rtlCol="0" anchor="ctr"/>
-          <a:lstStyle/>
-          <a:p>
-            <a:pPr algn="ctr" indent="0" marL="0">
-              <a:buNone/>
-            </a:pPr>
-            <a:r>
-              <a:rPr lang="en-US" sz="620" dirty="0">
-                <a:solidFill>
-                  <a:srgbClr val="12293A"/>
-                </a:solidFill>
-                <a:latin typeface="Poppins" pitchFamily="34" charset="0"/>
-                <a:ea typeface="Poppins" pitchFamily="34" charset="-122"/>
-                <a:cs typeface="Poppins" pitchFamily="34" charset="-120"/>
-              </a:rPr>
-              <a:t>28k</a:t>
-            </a:r>
-            <a:endParaRPr lang="en-US" sz="620" dirty="0"/>
-          </a:p>
-        </p:txBody>
-      </p:sp>
-      <p:sp>
-        <p:nvSpPr>
-          <p:cNvPr id="177" name="Text 175"/>
-          <p:cNvSpPr txBox="1"/>
-          <p:nvPr/>
-        </p:nvSpPr>
-        <p:spPr>
-          <a:xfrm>
-            <a:off x="5270863" y="5120640"/>
-            <a:ext cx="401683" cy="146304"/>
-          </a:xfrm>
-          <a:prstGeom prst="rect">
-            <a:avLst/>
-          </a:prstGeom>
-          <a:noFill/>
-          <a:ln/>
-        </p:spPr>
-        <p:txBody>
-          <a:bodyPr wrap="square" lIns="0" tIns="0" rIns="0" bIns="0" rtlCol="0" anchor="ctr"/>
-          <a:lstStyle/>
-          <a:p>
-            <a:pPr algn="ctr" indent="0" marL="0">
-              <a:buNone/>
-            </a:pPr>
-            <a:r>
-              <a:rPr lang="en-US" sz="550" dirty="0">
-                <a:solidFill>
-                  <a:srgbClr val="8FA1AC"/>
-                </a:solidFill>
-                <a:latin typeface="Poppins" pitchFamily="34" charset="0"/>
-                <a:ea typeface="Poppins" pitchFamily="34" charset="-122"/>
-                <a:cs typeface="Poppins" pitchFamily="34" charset="-120"/>
-              </a:rPr>
-              <a:t>02</a:t>
-            </a:r>
-            <a:endParaRPr lang="en-US" sz="550" dirty="0"/>
-          </a:p>
-        </p:txBody>
-      </p:sp>
-      <p:sp>
-        <p:nvSpPr>
-          <p:cNvPr id="178" name="Shape 176"/>
-          <p:cNvSpPr/>
-          <p:nvPr/>
-        </p:nvSpPr>
-        <p:spPr>
-          <a:xfrm>
-            <a:off x="5690834" y="4892040"/>
-            <a:ext cx="365107" cy="219456"/>
-          </a:xfrm>
-          <a:prstGeom prst="rect">
-            <a:avLst/>
-          </a:prstGeom>
-          <a:solidFill>
-            <a:srgbClr val="2C8394"/>
-          </a:solidFill>
-          <a:ln/>
-        </p:spPr>
-      </p:sp>
-      <p:sp>
-        <p:nvSpPr>
-          <p:cNvPr id="179" name="Text 177"/>
-          <p:cNvSpPr txBox="1"/>
-          <p:nvPr/>
-        </p:nvSpPr>
-        <p:spPr>
-          <a:xfrm>
-            <a:off x="5672546" y="4892040"/>
-            <a:ext cx="401683" cy="219456"/>
-          </a:xfrm>
-          <a:prstGeom prst="rect">
-            <a:avLst/>
-          </a:prstGeom>
-          <a:noFill/>
-          <a:ln/>
-        </p:spPr>
-        <p:txBody>
-          <a:bodyPr wrap="square" lIns="0" tIns="0" rIns="0" bIns="0" rtlCol="0" anchor="ctr"/>
-          <a:lstStyle/>
-          <a:p>
-            <a:pPr algn="ctr" indent="0" marL="0">
-              <a:buNone/>
-            </a:pPr>
-            <a:r>
-              <a:rPr lang="en-US" sz="620" b="1" dirty="0">
-                <a:solidFill>
-                  <a:srgbClr val="FFFFFF"/>
-                </a:solidFill>
-                <a:latin typeface="Poppins" pitchFamily="34" charset="0"/>
-                <a:ea typeface="Poppins" pitchFamily="34" charset="-122"/>
-                <a:cs typeface="Poppins" pitchFamily="34" charset="-120"/>
-              </a:rPr>
-              <a:t>78k</a:t>
-            </a:r>
-            <a:endParaRPr lang="en-US" sz="620" dirty="0"/>
-          </a:p>
-        </p:txBody>
-      </p:sp>
-      <p:sp>
-        <p:nvSpPr>
-          <p:cNvPr id="180" name="Text 178"/>
-          <p:cNvSpPr txBox="1"/>
-          <p:nvPr/>
-        </p:nvSpPr>
-        <p:spPr>
-          <a:xfrm>
-            <a:off x="5672546" y="5120640"/>
-            <a:ext cx="401683" cy="146304"/>
-          </a:xfrm>
-          <a:prstGeom prst="rect">
-            <a:avLst/>
-          </a:prstGeom>
-          <a:noFill/>
-          <a:ln/>
-        </p:spPr>
-        <p:txBody>
-          <a:bodyPr wrap="square" lIns="0" tIns="0" rIns="0" bIns="0" rtlCol="0" anchor="ctr"/>
-          <a:lstStyle/>
-          <a:p>
-            <a:pPr algn="ctr" indent="0" marL="0">
-              <a:buNone/>
-            </a:pPr>
-            <a:r>
-              <a:rPr lang="en-US" sz="550" dirty="0">
-                <a:solidFill>
-                  <a:srgbClr val="8FA1AC"/>
-                </a:solidFill>
-                <a:latin typeface="Poppins" pitchFamily="34" charset="0"/>
-                <a:ea typeface="Poppins" pitchFamily="34" charset="-122"/>
-                <a:cs typeface="Poppins" pitchFamily="34" charset="-120"/>
-              </a:rPr>
-              <a:t>09</a:t>
-            </a:r>
-            <a:endParaRPr lang="en-US" sz="550" dirty="0"/>
-          </a:p>
-        </p:txBody>
-      </p:sp>
-      <p:sp>
-        <p:nvSpPr>
-          <p:cNvPr id="181" name="Shape 179"/>
-          <p:cNvSpPr/>
-          <p:nvPr/>
-        </p:nvSpPr>
-        <p:spPr>
-          <a:xfrm>
-            <a:off x="6092517" y="4892040"/>
-            <a:ext cx="365107" cy="219456"/>
-          </a:xfrm>
-          <a:prstGeom prst="rect">
-            <a:avLst/>
-          </a:prstGeom>
-          <a:solidFill>
-            <a:srgbClr val="2C8394"/>
-          </a:solidFill>
-          <a:ln/>
-        </p:spPr>
-      </p:sp>
-      <p:sp>
-        <p:nvSpPr>
-          <p:cNvPr id="182" name="Text 180"/>
-          <p:cNvSpPr txBox="1"/>
-          <p:nvPr/>
-        </p:nvSpPr>
-        <p:spPr>
-          <a:xfrm>
-            <a:off x="6074229" y="4892040"/>
-            <a:ext cx="401683" cy="219456"/>
-          </a:xfrm>
-          <a:prstGeom prst="rect">
-            <a:avLst/>
-          </a:prstGeom>
-          <a:noFill/>
-          <a:ln/>
-        </p:spPr>
-        <p:txBody>
-          <a:bodyPr wrap="square" lIns="0" tIns="0" rIns="0" bIns="0" rtlCol="0" anchor="ctr"/>
-          <a:lstStyle/>
-          <a:p>
-            <a:pPr algn="ctr" indent="0" marL="0">
-              <a:buNone/>
-            </a:pPr>
-            <a:r>
-              <a:rPr lang="en-US" sz="620" b="1" dirty="0">
-                <a:solidFill>
-                  <a:srgbClr val="FFFFFF"/>
-                </a:solidFill>
-                <a:latin typeface="Poppins" pitchFamily="34" charset="0"/>
-                <a:ea typeface="Poppins" pitchFamily="34" charset="-122"/>
-                <a:cs typeface="Poppins" pitchFamily="34" charset="-120"/>
-              </a:rPr>
-              <a:t>87k</a:t>
-            </a:r>
-            <a:endParaRPr lang="en-US" sz="620" dirty="0"/>
-          </a:p>
-        </p:txBody>
-      </p:sp>
-      <p:sp>
-        <p:nvSpPr>
-          <p:cNvPr id="183" name="Text 181"/>
-          <p:cNvSpPr txBox="1"/>
-          <p:nvPr/>
-        </p:nvSpPr>
-        <p:spPr>
-          <a:xfrm>
-            <a:off x="6074229" y="5120640"/>
-            <a:ext cx="401683" cy="146304"/>
-          </a:xfrm>
-          <a:prstGeom prst="rect">
-            <a:avLst/>
-          </a:prstGeom>
-          <a:noFill/>
-          <a:ln/>
-        </p:spPr>
-        <p:txBody>
-          <a:bodyPr wrap="square" lIns="0" tIns="0" rIns="0" bIns="0" rtlCol="0" anchor="ctr"/>
-          <a:lstStyle/>
-          <a:p>
-            <a:pPr algn="ctr" indent="0" marL="0">
-              <a:buNone/>
-            </a:pPr>
-            <a:r>
-              <a:rPr lang="en-US" sz="550" dirty="0">
-                <a:solidFill>
-                  <a:srgbClr val="8FA1AC"/>
-                </a:solidFill>
-                <a:latin typeface="Poppins" pitchFamily="34" charset="0"/>
-                <a:ea typeface="Poppins" pitchFamily="34" charset="-122"/>
-                <a:cs typeface="Poppins" pitchFamily="34" charset="-120"/>
-              </a:rPr>
-              <a:t>16</a:t>
-            </a:r>
-            <a:endParaRPr lang="en-US" sz="550" dirty="0"/>
-          </a:p>
-        </p:txBody>
-      </p:sp>
-      <p:sp>
-        <p:nvSpPr>
-          <p:cNvPr id="184" name="Shape 182"/>
-          <p:cNvSpPr/>
-          <p:nvPr/>
-        </p:nvSpPr>
-        <p:spPr>
-          <a:xfrm>
-            <a:off x="6494199" y="4892040"/>
-            <a:ext cx="365107" cy="219456"/>
-          </a:xfrm>
-          <a:prstGeom prst="rect">
-            <a:avLst/>
-          </a:prstGeom>
-          <a:solidFill>
-            <a:srgbClr val="8FC3CC"/>
-          </a:solidFill>
-          <a:ln/>
-        </p:spPr>
-      </p:sp>
-      <p:sp>
-        <p:nvSpPr>
-          <p:cNvPr id="185" name="Text 183"/>
-          <p:cNvSpPr txBox="1"/>
-          <p:nvPr/>
-        </p:nvSpPr>
-        <p:spPr>
-          <a:xfrm>
-            <a:off x="6475911" y="4892040"/>
-            <a:ext cx="401683" cy="219456"/>
-          </a:xfrm>
-          <a:prstGeom prst="rect">
-            <a:avLst/>
-          </a:prstGeom>
-          <a:noFill/>
-          <a:ln/>
-        </p:spPr>
-        <p:txBody>
-          <a:bodyPr wrap="square" lIns="0" tIns="0" rIns="0" bIns="0" rtlCol="0" anchor="ctr"/>
-          <a:lstStyle/>
-          <a:p>
-            <a:pPr algn="ctr" indent="0" marL="0">
-              <a:buNone/>
-            </a:pPr>
-            <a:r>
-              <a:rPr lang="en-US" sz="620" dirty="0">
-                <a:solidFill>
-                  <a:srgbClr val="12293A"/>
-                </a:solidFill>
-                <a:latin typeface="Poppins" pitchFamily="34" charset="0"/>
-                <a:ea typeface="Poppins" pitchFamily="34" charset="-122"/>
-                <a:cs typeface="Poppins" pitchFamily="34" charset="-120"/>
-              </a:rPr>
-              <a:t>68k</a:t>
-            </a:r>
-            <a:endParaRPr lang="en-US" sz="620" dirty="0"/>
-          </a:p>
-        </p:txBody>
-      </p:sp>
-      <p:sp>
-        <p:nvSpPr>
-          <p:cNvPr id="186" name="Text 184"/>
-          <p:cNvSpPr txBox="1"/>
-          <p:nvPr/>
-        </p:nvSpPr>
-        <p:spPr>
-          <a:xfrm>
-            <a:off x="6475911" y="5120640"/>
-            <a:ext cx="401683" cy="146304"/>
-          </a:xfrm>
-          <a:prstGeom prst="rect">
-            <a:avLst/>
-          </a:prstGeom>
-          <a:noFill/>
-          <a:ln/>
-        </p:spPr>
-        <p:txBody>
-          <a:bodyPr wrap="square" lIns="0" tIns="0" rIns="0" bIns="0" rtlCol="0" anchor="ctr"/>
-          <a:lstStyle/>
-          <a:p>
-            <a:pPr algn="ctr" indent="0" marL="0">
-              <a:buNone/>
-            </a:pPr>
-            <a:r>
-              <a:rPr lang="en-US" sz="550" dirty="0">
-                <a:solidFill>
-                  <a:srgbClr val="8FA1AC"/>
-                </a:solidFill>
-                <a:latin typeface="Poppins" pitchFamily="34" charset="0"/>
-                <a:ea typeface="Poppins" pitchFamily="34" charset="-122"/>
-                <a:cs typeface="Poppins" pitchFamily="34" charset="-120"/>
-              </a:rPr>
-              <a:t>23</a:t>
-            </a:r>
-            <a:endParaRPr lang="en-US" sz="550" dirty="0"/>
-          </a:p>
-        </p:txBody>
-      </p:sp>
-      <p:sp>
-        <p:nvSpPr>
-          <p:cNvPr id="187" name="Shape 185"/>
-          <p:cNvSpPr/>
-          <p:nvPr/>
-        </p:nvSpPr>
-        <p:spPr>
-          <a:xfrm>
-            <a:off x="6895882" y="4892040"/>
-            <a:ext cx="365107" cy="219456"/>
-          </a:xfrm>
-          <a:prstGeom prst="rect">
-            <a:avLst/>
-          </a:prstGeom>
-          <a:solidFill>
-            <a:srgbClr val="8FC3CC"/>
-          </a:solidFill>
-          <a:ln/>
-        </p:spPr>
-      </p:sp>
-      <p:sp>
-        <p:nvSpPr>
-          <p:cNvPr id="188" name="Text 186"/>
-          <p:cNvSpPr txBox="1"/>
-          <p:nvPr/>
-        </p:nvSpPr>
-        <p:spPr>
-          <a:xfrm>
-            <a:off x="6877594" y="4892040"/>
-            <a:ext cx="401683" cy="219456"/>
-          </a:xfrm>
-          <a:prstGeom prst="rect">
-            <a:avLst/>
-          </a:prstGeom>
-          <a:noFill/>
-          <a:ln/>
-        </p:spPr>
-        <p:txBody>
-          <a:bodyPr wrap="square" lIns="0" tIns="0" rIns="0" bIns="0" rtlCol="0" anchor="ctr"/>
-          <a:lstStyle/>
-          <a:p>
-            <a:pPr algn="ctr" indent="0" marL="0">
-              <a:buNone/>
-            </a:pPr>
-            <a:r>
-              <a:rPr lang="en-US" sz="620" dirty="0">
-                <a:solidFill>
-                  <a:srgbClr val="12293A"/>
-                </a:solidFill>
-                <a:latin typeface="Poppins" pitchFamily="34" charset="0"/>
-                <a:ea typeface="Poppins" pitchFamily="34" charset="-122"/>
-                <a:cs typeface="Poppins" pitchFamily="34" charset="-120"/>
-              </a:rPr>
-              <a:t>60k</a:t>
-            </a:r>
-            <a:endParaRPr lang="en-US" sz="620" dirty="0"/>
-          </a:p>
-        </p:txBody>
-      </p:sp>
-      <p:sp>
-        <p:nvSpPr>
-          <p:cNvPr id="189" name="Text 187"/>
-          <p:cNvSpPr txBox="1"/>
-          <p:nvPr/>
-        </p:nvSpPr>
-        <p:spPr>
-          <a:xfrm>
-            <a:off x="6877594" y="5120640"/>
-            <a:ext cx="401683" cy="146304"/>
-          </a:xfrm>
-          <a:prstGeom prst="rect">
-            <a:avLst/>
-          </a:prstGeom>
-          <a:noFill/>
-          <a:ln/>
-        </p:spPr>
-        <p:txBody>
-          <a:bodyPr wrap="square" lIns="0" tIns="0" rIns="0" bIns="0" rtlCol="0" anchor="ctr"/>
-          <a:lstStyle/>
-          <a:p>
-            <a:pPr algn="ctr" indent="0" marL="0">
-              <a:buNone/>
-            </a:pPr>
-            <a:r>
-              <a:rPr lang="en-US" sz="550" dirty="0">
-                <a:solidFill>
-                  <a:srgbClr val="8FA1AC"/>
-                </a:solidFill>
-                <a:latin typeface="Poppins" pitchFamily="34" charset="0"/>
-                <a:ea typeface="Poppins" pitchFamily="34" charset="-122"/>
-                <a:cs typeface="Poppins" pitchFamily="34" charset="-120"/>
-              </a:rPr>
-              <a:t>30</a:t>
-            </a:r>
-            <a:endParaRPr lang="en-US" sz="550" dirty="0"/>
-          </a:p>
-        </p:txBody>
-      </p:sp>
-      <p:sp>
-        <p:nvSpPr>
-          <p:cNvPr id="190" name="Shape 188"/>
-          <p:cNvSpPr/>
-          <p:nvPr/>
-        </p:nvSpPr>
-        <p:spPr>
-          <a:xfrm>
-            <a:off x="7297565" y="4892040"/>
-            <a:ext cx="365107" cy="219456"/>
-          </a:xfrm>
-          <a:prstGeom prst="rect">
-            <a:avLst/>
-          </a:prstGeom>
-          <a:solidFill>
-            <a:srgbClr val="8FC3CC"/>
-          </a:solidFill>
-          <a:ln/>
-        </p:spPr>
-      </p:sp>
-      <p:sp>
-        <p:nvSpPr>
-          <p:cNvPr id="191" name="Text 189"/>
-          <p:cNvSpPr txBox="1"/>
-          <p:nvPr/>
-        </p:nvSpPr>
-        <p:spPr>
-          <a:xfrm>
-            <a:off x="7279277" y="4892040"/>
-            <a:ext cx="401683" cy="219456"/>
-          </a:xfrm>
-          <a:prstGeom prst="rect">
-            <a:avLst/>
-          </a:prstGeom>
-          <a:noFill/>
-          <a:ln/>
-        </p:spPr>
-        <p:txBody>
-          <a:bodyPr wrap="square" lIns="0" tIns="0" rIns="0" bIns="0" rtlCol="0" anchor="ctr"/>
-          <a:lstStyle/>
-          <a:p>
-            <a:pPr algn="ctr" indent="0" marL="0">
-              <a:buNone/>
-            </a:pPr>
-            <a:r>
-              <a:rPr lang="en-US" sz="620" dirty="0">
-                <a:solidFill>
-                  <a:srgbClr val="12293A"/>
-                </a:solidFill>
-                <a:latin typeface="Poppins" pitchFamily="34" charset="0"/>
-                <a:ea typeface="Poppins" pitchFamily="34" charset="-122"/>
-                <a:cs typeface="Poppins" pitchFamily="34" charset="-120"/>
-              </a:rPr>
-              <a:t>66k</a:t>
-            </a:r>
-            <a:endParaRPr lang="en-US" sz="620" dirty="0"/>
-          </a:p>
-        </p:txBody>
-      </p:sp>
-      <p:sp>
-        <p:nvSpPr>
-          <p:cNvPr id="192" name="Text 190"/>
-          <p:cNvSpPr txBox="1"/>
-          <p:nvPr/>
-        </p:nvSpPr>
-        <p:spPr>
-          <a:xfrm>
-            <a:off x="7279277" y="5120640"/>
-            <a:ext cx="401683" cy="146304"/>
-          </a:xfrm>
-          <a:prstGeom prst="rect">
-            <a:avLst/>
-          </a:prstGeom>
-          <a:noFill/>
-          <a:ln/>
-        </p:spPr>
-        <p:txBody>
-          <a:bodyPr wrap="square" lIns="0" tIns="0" rIns="0" bIns="0" rtlCol="0" anchor="ctr"/>
-          <a:lstStyle/>
-          <a:p>
-            <a:pPr algn="ctr" indent="0" marL="0">
-              <a:buNone/>
-            </a:pPr>
-            <a:r>
-              <a:rPr lang="en-US" sz="550" dirty="0">
-                <a:solidFill>
-                  <a:srgbClr val="8FA1AC"/>
-                </a:solidFill>
-                <a:latin typeface="Poppins" pitchFamily="34" charset="0"/>
-                <a:ea typeface="Poppins" pitchFamily="34" charset="-122"/>
-                <a:cs typeface="Poppins" pitchFamily="34" charset="-120"/>
-              </a:rPr>
-              <a:t>06</a:t>
-            </a:r>
-            <a:endParaRPr lang="en-US" sz="550" dirty="0"/>
-          </a:p>
-        </p:txBody>
-      </p:sp>
-      <p:sp>
-        <p:nvSpPr>
-          <p:cNvPr id="193" name="Text 191"/>
+          <p:cNvPr id="200" name="Text 198"/>
           <p:cNvSpPr txBox="1"/>
           <p:nvPr/>
         </p:nvSpPr>
@@ -26705,7 +26959,7 @@
                 <a:ea typeface="Poppins" pitchFamily="34" charset="-122"/>
                 <a:cs typeface="Poppins" pitchFamily="34" charset="-120"/>
               </a:rPr>
-              <a:t>cell = one week · series ends w/c 06 Sep — later captures give month-to-date only</a:t>
+              <a:t>cell = one week · series ends w/c 06 Sep — later captures give month-to-date only · Nicolas Ibrahim and Daniel Maddern each have two accounts, combined here; Daniel Maddern is new to the capture, so Jul–Sep are unavailable for him, not zero</a:t>
             </a:r>
             <a:endParaRPr lang="en-US" sz="600" dirty="0"/>
           </a:p>
@@ -26713,7 +26967,7 @@
       </p:sp>
       <p:sp>
         <p:nvSpPr>
-          <p:cNvPr id="194" name="Shape 192"/>
+          <p:cNvPr id="201" name="Shape 199"/>
           <p:cNvSpPr/>
           <p:nvPr/>
         </p:nvSpPr>
@@ -26742,7 +26996,7 @@
       </p:sp>
       <p:sp>
         <p:nvSpPr>
-          <p:cNvPr id="195" name="Text 193"/>
+          <p:cNvPr id="202" name="Text 200"/>
           <p:cNvSpPr txBox="1"/>
           <p:nvPr/>
         </p:nvSpPr>
@@ -26781,7 +27035,7 @@
       </p:sp>
       <p:sp>
         <p:nvSpPr>
-          <p:cNvPr id="196" name="Text 194"/>
+          <p:cNvPr id="203" name="Text 201"/>
           <p:cNvSpPr txBox="1"/>
           <p:nvPr/>
         </p:nvSpPr>
@@ -26812,7 +27066,7 @@
                 <a:ea typeface="Poppins" pitchFamily="34" charset="-122"/>
                 <a:cs typeface="Poppins" pitchFamily="34" charset="-120"/>
               </a:rPr>
-              <a:t>~1012</a:t>
+              <a:t>~1070</a:t>
             </a:r>
             <a:endParaRPr lang="en-US" sz="2600" dirty="0"/>
           </a:p>
@@ -26820,7 +27074,7 @@
       </p:sp>
       <p:sp>
         <p:nvSpPr>
-          <p:cNvPr id="197" name="Text 195"/>
+          <p:cNvPr id="204" name="Text 202"/>
           <p:cNvSpPr txBox="1"/>
           <p:nvPr/>
         </p:nvSpPr>
@@ -26866,7 +27120,7 @@
                 <a:ea typeface="Poppins" pitchFamily="34" charset="-122"/>
                 <a:cs typeface="Poppins" pitchFamily="34" charset="-120"/>
               </a:rPr>
-              <a:t>~770 baseline</a:t>
+              <a:t>~1012 baseline</a:t>
             </a:r>
             <a:endParaRPr lang="en-US" sz="750" dirty="0"/>
           </a:p>
@@ -26874,7 +27128,7 @@
       </p:sp>
       <p:sp>
         <p:nvSpPr>
-          <p:cNvPr id="198" name="Text 196"/>
+          <p:cNvPr id="205" name="Text 203"/>
           <p:cNvSpPr txBox="1"/>
           <p:nvPr/>
         </p:nvSpPr>
@@ -26913,7 +27167,7 @@
       </p:sp>
       <p:sp>
         <p:nvSpPr>
-          <p:cNvPr id="199" name="Text 197"/>
+          <p:cNvPr id="206" name="Text 204"/>
           <p:cNvSpPr txBox="1"/>
           <p:nvPr/>
         </p:nvSpPr>
@@ -26944,7 +27198,7 @@
                 <a:ea typeface="Poppins" pitchFamily="34" charset="-122"/>
                 <a:cs typeface="Poppins" pitchFamily="34" charset="-120"/>
               </a:rPr>
-              <a:t>▲ +211</a:t>
+              <a:t>▲ +69</a:t>
             </a:r>
             <a:endParaRPr lang="en-US" sz="680" dirty="0"/>
           </a:p>
@@ -26952,7 +27206,7 @@
       </p:sp>
       <p:sp>
         <p:nvSpPr>
-          <p:cNvPr id="200" name="Text 198"/>
+          <p:cNvPr id="207" name="Text 205"/>
           <p:cNvSpPr txBox="1"/>
           <p:nvPr/>
         </p:nvSpPr>
@@ -26983,7 +27237,7 @@
                 <a:ea typeface="Poppins" pitchFamily="34" charset="-122"/>
                 <a:cs typeface="Poppins" pitchFamily="34" charset="-120"/>
               </a:rPr>
-              <a:t>~696/wk</a:t>
+              <a:t>~765/wk</a:t>
             </a:r>
             <a:endParaRPr lang="en-US" sz="750" dirty="0"/>
           </a:p>
@@ -26991,7 +27245,7 @@
       </p:sp>
       <p:sp>
         <p:nvSpPr>
-          <p:cNvPr id="201" name="Text 199"/>
+          <p:cNvPr id="208" name="Text 206"/>
           <p:cNvSpPr txBox="1"/>
           <p:nvPr/>
         </p:nvSpPr>
@@ -27030,7 +27284,7 @@
       </p:sp>
       <p:sp>
         <p:nvSpPr>
-          <p:cNvPr id="202" name="Text 200"/>
+          <p:cNvPr id="209" name="Text 207"/>
           <p:cNvSpPr txBox="1"/>
           <p:nvPr/>
         </p:nvSpPr>
@@ -27055,13 +27309,13 @@
             <a:r>
               <a:rPr lang="en-US" sz="680" b="1" dirty="0">
                 <a:solidFill>
-                  <a:srgbClr val="3D8F5F"/>
-                </a:solidFill>
-                <a:latin typeface="Poppins" pitchFamily="34" charset="0"/>
-                <a:ea typeface="Poppins" pitchFamily="34" charset="-122"/>
-                <a:cs typeface="Poppins" pitchFamily="34" charset="-120"/>
-              </a:rPr>
-              <a:t>▲ +32</a:t>
+                  <a:srgbClr val="B4552D"/>
+                </a:solidFill>
+                <a:latin typeface="Poppins" pitchFamily="34" charset="0"/>
+                <a:ea typeface="Poppins" pitchFamily="34" charset="-122"/>
+                <a:cs typeface="Poppins" pitchFamily="34" charset="-120"/>
+              </a:rPr>
+              <a:t>▼ -5</a:t>
             </a:r>
             <a:endParaRPr lang="en-US" sz="680" dirty="0"/>
           </a:p>
@@ -27069,7 +27323,7 @@
       </p:sp>
       <p:sp>
         <p:nvSpPr>
-          <p:cNvPr id="203" name="Text 201"/>
+          <p:cNvPr id="210" name="Text 208"/>
           <p:cNvSpPr txBox="1"/>
           <p:nvPr/>
         </p:nvSpPr>
@@ -27100,7 +27354,7 @@
                 <a:ea typeface="Poppins" pitchFamily="34" charset="-122"/>
                 <a:cs typeface="Poppins" pitchFamily="34" charset="-120"/>
               </a:rPr>
-              <a:t>~168/wk</a:t>
+              <a:t>~163/wk</a:t>
             </a:r>
             <a:endParaRPr lang="en-US" sz="750" dirty="0"/>
           </a:p>
@@ -27108,7 +27362,7 @@
       </p:sp>
       <p:sp>
         <p:nvSpPr>
-          <p:cNvPr id="204" name="Text 202"/>
+          <p:cNvPr id="211" name="Text 209"/>
           <p:cNvSpPr txBox="1"/>
           <p:nvPr/>
         </p:nvSpPr>
@@ -27139,7 +27393,7 @@
                 <a:ea typeface="Poppins" pitchFamily="34" charset="-122"/>
                 <a:cs typeface="Poppins" pitchFamily="34" charset="-120"/>
               </a:rPr>
-              <a:t>Bradford Young</a:t>
+              <a:t>Dave Corbett</a:t>
             </a:r>
             <a:endParaRPr lang="en-US" sz="750" dirty="0"/>
           </a:p>
@@ -27147,7 +27401,7 @@
       </p:sp>
       <p:sp>
         <p:nvSpPr>
-          <p:cNvPr id="205" name="Text 203"/>
+          <p:cNvPr id="212" name="Text 210"/>
           <p:cNvSpPr txBox="1"/>
           <p:nvPr/>
         </p:nvSpPr>
@@ -27172,13 +27426,13 @@
             <a:r>
               <a:rPr lang="en-US" sz="680" b="1" dirty="0">
                 <a:solidFill>
-                  <a:srgbClr val="8FA1AC"/>
-                </a:solidFill>
-                <a:latin typeface="Poppins" pitchFamily="34" charset="0"/>
-                <a:ea typeface="Poppins" pitchFamily="34" charset="-122"/>
-                <a:cs typeface="Poppins" pitchFamily="34" charset="-120"/>
-              </a:rPr>
-              <a:t>—</a:t>
+                  <a:srgbClr val="3D8F5F"/>
+                </a:solidFill>
+                <a:latin typeface="Poppins" pitchFamily="34" charset="0"/>
+                <a:ea typeface="Poppins" pitchFamily="34" charset="-122"/>
+                <a:cs typeface="Poppins" pitchFamily="34" charset="-120"/>
+              </a:rPr>
+              <a:t>▲ +2</a:t>
             </a:r>
             <a:endParaRPr lang="en-US" sz="680" dirty="0"/>
           </a:p>
@@ -27186,7 +27440,7 @@
       </p:sp>
       <p:sp>
         <p:nvSpPr>
-          <p:cNvPr id="206" name="Text 204"/>
+          <p:cNvPr id="213" name="Text 211"/>
           <p:cNvSpPr txBox="1"/>
           <p:nvPr/>
         </p:nvSpPr>
@@ -27217,7 +27471,7 @@
                 <a:ea typeface="Poppins" pitchFamily="34" charset="-122"/>
                 <a:cs typeface="Poppins" pitchFamily="34" charset="-120"/>
               </a:rPr>
-              <a:t>~21/wk</a:t>
+              <a:t>~23/wk</a:t>
             </a:r>
             <a:endParaRPr lang="en-US" sz="750" dirty="0"/>
           </a:p>
@@ -27225,7 +27479,7 @@
       </p:sp>
       <p:sp>
         <p:nvSpPr>
-          <p:cNvPr id="207" name="Text 205"/>
+          <p:cNvPr id="214" name="Text 212"/>
           <p:cNvSpPr txBox="1"/>
           <p:nvPr/>
         </p:nvSpPr>
@@ -27256,7 +27510,7 @@
                 <a:ea typeface="Poppins" pitchFamily="34" charset="-122"/>
                 <a:cs typeface="Poppins" pitchFamily="34" charset="-120"/>
               </a:rPr>
-              <a:t>Dave Corbett</a:t>
+              <a:t>Bradford Young</a:t>
             </a:r>
             <a:endParaRPr lang="en-US" sz="750" dirty="0"/>
           </a:p>
@@ -27264,7 +27518,7 @@
       </p:sp>
       <p:sp>
         <p:nvSpPr>
-          <p:cNvPr id="208" name="Text 206"/>
+          <p:cNvPr id="215" name="Text 213"/>
           <p:cNvSpPr txBox="1"/>
           <p:nvPr/>
         </p:nvSpPr>
@@ -27303,7 +27557,7 @@
       </p:sp>
       <p:sp>
         <p:nvSpPr>
-          <p:cNvPr id="209" name="Text 207"/>
+          <p:cNvPr id="216" name="Text 214"/>
           <p:cNvSpPr txBox="1"/>
           <p:nvPr/>
         </p:nvSpPr>
@@ -27334,7 +27588,7 @@
                 <a:ea typeface="Poppins" pitchFamily="34" charset="-122"/>
                 <a:cs typeface="Poppins" pitchFamily="34" charset="-120"/>
               </a:rPr>
-              <a:t>~21/wk</a:t>
+              <a:t>~22/wk</a:t>
             </a:r>
             <a:endParaRPr lang="en-US" sz="750" dirty="0"/>
           </a:p>
@@ -27342,7 +27596,7 @@
       </p:sp>
       <p:sp>
         <p:nvSpPr>
-          <p:cNvPr id="210" name="Text 208"/>
+          <p:cNvPr id="217" name="Text 215"/>
           <p:cNvSpPr txBox="1"/>
           <p:nvPr/>
         </p:nvSpPr>
@@ -27381,7 +27635,7 @@
       </p:sp>
       <p:sp>
         <p:nvSpPr>
-          <p:cNvPr id="211" name="Text 209"/>
+          <p:cNvPr id="218" name="Text 216"/>
           <p:cNvSpPr txBox="1"/>
           <p:nvPr/>
         </p:nvSpPr>
@@ -27412,7 +27666,7 @@
                 <a:ea typeface="Poppins" pitchFamily="34" charset="-122"/>
                 <a:cs typeface="Poppins" pitchFamily="34" charset="-120"/>
               </a:rPr>
-              <a:t>▲ +2</a:t>
+              <a:t>▲ +1</a:t>
             </a:r>
             <a:endParaRPr lang="en-US" sz="680" dirty="0"/>
           </a:p>
@@ -27420,7 +27674,7 @@
       </p:sp>
       <p:sp>
         <p:nvSpPr>
-          <p:cNvPr id="212" name="Text 210"/>
+          <p:cNvPr id="219" name="Text 217"/>
           <p:cNvSpPr txBox="1"/>
           <p:nvPr/>
         </p:nvSpPr>
@@ -27451,7 +27705,7 @@
                 <a:ea typeface="Poppins" pitchFamily="34" charset="-122"/>
                 <a:cs typeface="Poppins" pitchFamily="34" charset="-120"/>
               </a:rPr>
-              <a:t>~15/wk</a:t>
+              <a:t>~16/wk</a:t>
             </a:r>
             <a:endParaRPr lang="en-US" sz="750" dirty="0"/>
           </a:p>
@@ -27459,7 +27713,7 @@
       </p:sp>
       <p:sp>
         <p:nvSpPr>
-          <p:cNvPr id="213" name="Text 211"/>
+          <p:cNvPr id="220" name="Text 218"/>
           <p:cNvSpPr txBox="1"/>
           <p:nvPr/>
         </p:nvSpPr>
@@ -27490,7 +27744,7 @@
                 <a:ea typeface="Poppins" pitchFamily="34" charset="-122"/>
                 <a:cs typeface="Poppins" pitchFamily="34" charset="-120"/>
               </a:rPr>
-              <a:t>Katherine Fenwick</a:t>
+              <a:t>Harjeet Sammi</a:t>
             </a:r>
             <a:endParaRPr lang="en-US" sz="750" dirty="0"/>
           </a:p>
@@ -27498,7 +27752,7 @@
       </p:sp>
       <p:sp>
         <p:nvSpPr>
-          <p:cNvPr id="214" name="Text 212"/>
+          <p:cNvPr id="221" name="Text 219"/>
           <p:cNvSpPr txBox="1"/>
           <p:nvPr/>
         </p:nvSpPr>
@@ -27537,7 +27791,7 @@
       </p:sp>
       <p:sp>
         <p:nvSpPr>
-          <p:cNvPr id="215" name="Text 213"/>
+          <p:cNvPr id="222" name="Text 220"/>
           <p:cNvSpPr txBox="1"/>
           <p:nvPr/>
         </p:nvSpPr>
@@ -27576,7 +27830,7 @@
       </p:sp>
       <p:sp>
         <p:nvSpPr>
-          <p:cNvPr id="216" name="Text 214"/>
+          <p:cNvPr id="223" name="Text 221"/>
           <p:cNvSpPr txBox="1"/>
           <p:nvPr/>
         </p:nvSpPr>
@@ -27607,7 +27861,7 @@
                 <a:ea typeface="Poppins" pitchFamily="34" charset="-122"/>
                 <a:cs typeface="Poppins" pitchFamily="34" charset="-120"/>
               </a:rPr>
-              <a:t>Harjeet Sammi</a:t>
+              <a:t>Katherine Fenwick</a:t>
             </a:r>
             <a:endParaRPr lang="en-US" sz="750" dirty="0"/>
           </a:p>
@@ -27615,7 +27869,7 @@
       </p:sp>
       <p:sp>
         <p:nvSpPr>
-          <p:cNvPr id="217" name="Text 215"/>
+          <p:cNvPr id="224" name="Text 222"/>
           <p:cNvSpPr txBox="1"/>
           <p:nvPr/>
         </p:nvSpPr>
@@ -27646,7 +27900,7 @@
                 <a:ea typeface="Poppins" pitchFamily="34" charset="-122"/>
                 <a:cs typeface="Poppins" pitchFamily="34" charset="-120"/>
               </a:rPr>
-              <a:t>▼ -1</a:t>
+              <a:t>▼ -2</a:t>
             </a:r>
             <a:endParaRPr lang="en-US" sz="680" dirty="0"/>
           </a:p>
@@ -27654,7 +27908,7 @@
       </p:sp>
       <p:sp>
         <p:nvSpPr>
-          <p:cNvPr id="218" name="Text 216"/>
+          <p:cNvPr id="225" name="Text 223"/>
           <p:cNvSpPr txBox="1"/>
           <p:nvPr/>
         </p:nvSpPr>
@@ -27685,7 +27939,7 @@
                 <a:ea typeface="Poppins" pitchFamily="34" charset="-122"/>
                 <a:cs typeface="Poppins" pitchFamily="34" charset="-120"/>
               </a:rPr>
-              <a:t>~12/wk</a:t>
+              <a:t>~11/wk</a:t>
             </a:r>
             <a:endParaRPr lang="en-US" sz="750" dirty="0"/>
           </a:p>
@@ -27693,7 +27947,7 @@
       </p:sp>
       <p:sp>
         <p:nvSpPr>
-          <p:cNvPr id="219" name="Text 217"/>
+          <p:cNvPr id="226" name="Text 224"/>
           <p:cNvSpPr txBox="1"/>
           <p:nvPr/>
         </p:nvSpPr>
@@ -27732,7 +27986,7 @@
       </p:sp>
       <p:sp>
         <p:nvSpPr>
-          <p:cNvPr id="220" name="Text 218"/>
+          <p:cNvPr id="227" name="Text 225"/>
           <p:cNvSpPr txBox="1"/>
           <p:nvPr/>
         </p:nvSpPr>
@@ -27757,13 +28011,13 @@
             <a:r>
               <a:rPr lang="en-US" sz="680" b="1" dirty="0">
                 <a:solidFill>
-                  <a:srgbClr val="8FA1AC"/>
-                </a:solidFill>
-                <a:latin typeface="Poppins" pitchFamily="34" charset="0"/>
-                <a:ea typeface="Poppins" pitchFamily="34" charset="-122"/>
-                <a:cs typeface="Poppins" pitchFamily="34" charset="-120"/>
-              </a:rPr>
-              <a:t>—</a:t>
+                  <a:srgbClr val="B4552D"/>
+                </a:solidFill>
+                <a:latin typeface="Poppins" pitchFamily="34" charset="0"/>
+                <a:ea typeface="Poppins" pitchFamily="34" charset="-122"/>
+                <a:cs typeface="Poppins" pitchFamily="34" charset="-120"/>
+              </a:rPr>
+              <a:t>▼ -1</a:t>
             </a:r>
             <a:endParaRPr lang="en-US" sz="680" dirty="0"/>
           </a:p>
@@ -27771,7 +28025,7 @@
       </p:sp>
       <p:sp>
         <p:nvSpPr>
-          <p:cNvPr id="221" name="Text 219"/>
+          <p:cNvPr id="228" name="Text 226"/>
           <p:cNvSpPr txBox="1"/>
           <p:nvPr/>
         </p:nvSpPr>
@@ -27802,7 +28056,7 @@
                 <a:ea typeface="Poppins" pitchFamily="34" charset="-122"/>
                 <a:cs typeface="Poppins" pitchFamily="34" charset="-120"/>
               </a:rPr>
-              <a:t>~11/wk</a:t>
+              <a:t>~10/wk</a:t>
             </a:r>
             <a:endParaRPr lang="en-US" sz="750" dirty="0"/>
           </a:p>
@@ -27810,7 +28064,7 @@
       </p:sp>
       <p:sp>
         <p:nvSpPr>
-          <p:cNvPr id="222" name="Text 220"/>
+          <p:cNvPr id="229" name="Text 227"/>
           <p:cNvSpPr txBox="1"/>
           <p:nvPr/>
         </p:nvSpPr>
@@ -27841,7 +28095,7 @@
                 <a:ea typeface="Poppins" pitchFamily="34" charset="-122"/>
                 <a:cs typeface="Poppins" pitchFamily="34" charset="-120"/>
               </a:rPr>
-              <a:t>Isayah Kuhlmann</a:t>
+              <a:t>Rhys Woolcock</a:t>
             </a:r>
             <a:endParaRPr lang="en-US" sz="750" dirty="0"/>
           </a:p>
@@ -27849,7 +28103,7 @@
       </p:sp>
       <p:sp>
         <p:nvSpPr>
-          <p:cNvPr id="223" name="Text 221"/>
+          <p:cNvPr id="230" name="Text 228"/>
           <p:cNvSpPr txBox="1"/>
           <p:nvPr/>
         </p:nvSpPr>
@@ -27874,13 +28128,13 @@
             <a:r>
               <a:rPr lang="en-US" sz="680" b="1" dirty="0">
                 <a:solidFill>
-                  <a:srgbClr val="3D8F5F"/>
-                </a:solidFill>
-                <a:latin typeface="Poppins" pitchFamily="34" charset="0"/>
-                <a:ea typeface="Poppins" pitchFamily="34" charset="-122"/>
-                <a:cs typeface="Poppins" pitchFamily="34" charset="-120"/>
-              </a:rPr>
-              <a:t>▲ +1</a:t>
+                  <a:srgbClr val="B4552D"/>
+                </a:solidFill>
+                <a:latin typeface="Poppins" pitchFamily="34" charset="0"/>
+                <a:ea typeface="Poppins" pitchFamily="34" charset="-122"/>
+                <a:cs typeface="Poppins" pitchFamily="34" charset="-120"/>
+              </a:rPr>
+              <a:t>▼ -1</a:t>
             </a:r>
             <a:endParaRPr lang="en-US" sz="680" dirty="0"/>
           </a:p>
@@ -27888,7 +28142,7 @@
       </p:sp>
       <p:sp>
         <p:nvSpPr>
-          <p:cNvPr id="224" name="Text 222"/>
+          <p:cNvPr id="231" name="Text 229"/>
           <p:cNvSpPr txBox="1"/>
           <p:nvPr/>
         </p:nvSpPr>
@@ -27919,7 +28173,7 @@
                 <a:ea typeface="Poppins" pitchFamily="34" charset="-122"/>
                 <a:cs typeface="Poppins" pitchFamily="34" charset="-120"/>
               </a:rPr>
-              <a:t>~8/wk</a:t>
+              <a:t>~7/wk</a:t>
             </a:r>
             <a:endParaRPr lang="en-US" sz="750" dirty="0"/>
           </a:p>
@@ -27927,7 +28181,7 @@
       </p:sp>
       <p:sp>
         <p:nvSpPr>
-          <p:cNvPr id="225" name="Text 223"/>
+          <p:cNvPr id="232" name="Text 230"/>
           <p:cNvSpPr txBox="1"/>
           <p:nvPr/>
         </p:nvSpPr>
@@ -27958,7 +28212,7 @@
                 <a:ea typeface="Poppins" pitchFamily="34" charset="-122"/>
                 <a:cs typeface="Poppins" pitchFamily="34" charset="-120"/>
               </a:rPr>
-              <a:t>Rhys Woolcock</a:t>
+              <a:t>Isayah Kuhlmann</a:t>
             </a:r>
             <a:endParaRPr lang="en-US" sz="750" dirty="0"/>
           </a:p>
@@ -27966,7 +28220,7 @@
       </p:sp>
       <p:sp>
         <p:nvSpPr>
-          <p:cNvPr id="226" name="Text 224"/>
+          <p:cNvPr id="233" name="Text 231"/>
           <p:cNvSpPr txBox="1"/>
           <p:nvPr/>
         </p:nvSpPr>
@@ -27991,13 +28245,13 @@
             <a:r>
               <a:rPr lang="en-US" sz="680" b="1" dirty="0">
                 <a:solidFill>
-                  <a:srgbClr val="8FA1AC"/>
-                </a:solidFill>
-                <a:latin typeface="Poppins" pitchFamily="34" charset="0"/>
-                <a:ea typeface="Poppins" pitchFamily="34" charset="-122"/>
-                <a:cs typeface="Poppins" pitchFamily="34" charset="-120"/>
-              </a:rPr>
-              <a:t>new</a:t>
+                  <a:srgbClr val="B4552D"/>
+                </a:solidFill>
+                <a:latin typeface="Poppins" pitchFamily="34" charset="0"/>
+                <a:ea typeface="Poppins" pitchFamily="34" charset="-122"/>
+                <a:cs typeface="Poppins" pitchFamily="34" charset="-120"/>
+              </a:rPr>
+              <a:t>▼ -1</a:t>
             </a:r>
             <a:endParaRPr lang="en-US" sz="680" dirty="0"/>
           </a:p>
@@ -28005,7 +28259,7 @@
       </p:sp>
       <p:sp>
         <p:nvSpPr>
-          <p:cNvPr id="227" name="Text 225"/>
+          <p:cNvPr id="234" name="Text 232"/>
           <p:cNvSpPr txBox="1"/>
           <p:nvPr/>
         </p:nvSpPr>
@@ -28036,7 +28290,7 @@
                 <a:ea typeface="Poppins" pitchFamily="34" charset="-122"/>
                 <a:cs typeface="Poppins" pitchFamily="34" charset="-120"/>
               </a:rPr>
-              <a:t>~8/wk</a:t>
+              <a:t>~7/wk</a:t>
             </a:r>
             <a:endParaRPr lang="en-US" sz="750" dirty="0"/>
           </a:p>
@@ -28044,7 +28298,7 @@
       </p:sp>
       <p:sp>
         <p:nvSpPr>
-          <p:cNvPr id="228" name="Text 226"/>
+          <p:cNvPr id="235" name="Text 233"/>
           <p:cNvSpPr txBox="1"/>
           <p:nvPr/>
         </p:nvSpPr>
@@ -28075,7 +28329,7 @@
                 <a:ea typeface="Poppins" pitchFamily="34" charset="-122"/>
                 <a:cs typeface="Poppins" pitchFamily="34" charset="-120"/>
               </a:rPr>
-              <a:t>rate = 30-day sessions ÷ 4.3 · arrow = change vs the 5 Oct capture · new = first capture</a:t>
+              <a:t>rate = 30-day sessions ÷ 4.3 · arrow = change vs the 12 Oct capture</a:t>
             </a:r>
             <a:endParaRPr lang="en-US" sz="600" dirty="0"/>
           </a:p>
@@ -28083,7 +28337,7 @@
       </p:sp>
       <p:sp>
         <p:nvSpPr>
-          <p:cNvPr id="229" name="Shape 227"/>
+          <p:cNvPr id="236" name="Shape 234"/>
           <p:cNvSpPr/>
           <p:nvPr/>
         </p:nvSpPr>
@@ -28112,7 +28366,7 @@
       </p:sp>
       <p:sp>
         <p:nvSpPr>
-          <p:cNvPr id="230" name="Text 228"/>
+          <p:cNvPr id="237" name="Text 235"/>
           <p:cNvSpPr txBox="1"/>
           <p:nvPr/>
         </p:nvSpPr>
@@ -28151,7 +28405,7 @@
       </p:sp>
       <p:sp>
         <p:nvSpPr>
-          <p:cNvPr id="231" name="Text 229"/>
+          <p:cNvPr id="238" name="Text 236"/>
           <p:cNvSpPr txBox="1"/>
           <p:nvPr/>
         </p:nvSpPr>
@@ -28196,7 +28450,7 @@
                 <a:ea typeface="Poppins" pitchFamily="34" charset="-122"/>
                 <a:cs typeface="Poppins" pitchFamily="34" charset="-120"/>
               </a:rPr>
-              <a:t>No Claude Admin capture this week — these are the 12 Oct numbers </a:t>
+              <a:t>40 of 51 active weekly, 14 daily — breadth and depth both back up </a:t>
             </a:r>
             <a:pPr indent="0" marL="0">
               <a:spcAft>
@@ -28213,7 +28467,7 @@
                 <a:ea typeface="Poppins" pitchFamily="34" charset="-122"/>
                 <a:cs typeface="Poppins" pitchFamily="34" charset="-120"/>
               </a:rPr>
-              <a:t>and they are held, not refreshed. At that read: 39 of 47 active weekly but only 12 daily, down from 19 a week earlier, and stickiness had fallen on every surface except Claude Code (Cowork 33% → 24% DAU/MAU, Claude.ai 29% → 7%, Office Agents 11% → 0%, Claude Code 18% → 26%). October code output stood at 111,689 lines, 69% of it Nicolas Ibrahim. Next capture restores the series.</a:t>
+              <a:t>after last week's dip. Claude.ai stickiness recovered 7% → 17% DAU/MAU and Claude Code rose to 28%; Cowork eased 24% → 23% and Office Agents are still at nil. The code number is the headline: 329,436 lines in October to date against 111,689 a week ago, already above any full month this year. Nicolas Ibrahim is 170,962 of it — 52% — and Daniel Maddern enters at 43,288.</a:t>
             </a:r>
             <a:endParaRPr lang="en-US" sz="900" dirty="0"/>
           </a:p>
@@ -28221,14 +28475,14 @@
       </p:sp>
       <p:sp>
         <p:nvSpPr>
-          <p:cNvPr id="232" name="Shape 230"/>
-          <p:cNvSpPr/>
-          <p:nvPr/>
-        </p:nvSpPr>
-        <p:spPr>
-          <a:xfrm>
-            <a:off x="6653174" y="6510528"/>
-            <a:ext cx="5124298" cy="256032"/>
+          <p:cNvPr id="239" name="Shape 237"/>
+          <p:cNvSpPr/>
+          <p:nvPr/>
+        </p:nvSpPr>
+        <p:spPr>
+          <a:xfrm>
+            <a:off x="8332013" y="6510528"/>
+            <a:ext cx="3445459" cy="256032"/>
           </a:xfrm>
           <a:prstGeom prst="roundRect">
             <a:avLst>
@@ -28243,14 +28497,14 @@
       </p:sp>
       <p:sp>
         <p:nvSpPr>
-          <p:cNvPr id="233" name="Text 231"/>
-          <p:cNvSpPr txBox="1"/>
-          <p:nvPr/>
-        </p:nvSpPr>
-        <p:spPr>
-          <a:xfrm>
-            <a:off x="6653174" y="6510528"/>
-            <a:ext cx="5124298" cy="256032"/>
+          <p:cNvPr id="240" name="Text 238"/>
+          <p:cNvSpPr txBox="1"/>
+          <p:nvPr/>
+        </p:nvSpPr>
+        <p:spPr>
+          <a:xfrm>
+            <a:off x="8332013" y="6510528"/>
+            <a:ext cx="3445459" cy="256032"/>
           </a:xfrm>
           <a:prstGeom prst="rect">
             <a:avLst/>
@@ -28274,7 +28528,7 @@
                 <a:ea typeface="Poppins" pitchFamily="34" charset="-122"/>
                 <a:cs typeface="Poppins" pitchFamily="34" charset="-120"/>
               </a:rPr>
-              <a:t>Source: Claude Admin weekly capture (30d to 12 Oct) — no new capture this week</a:t>
+              <a:t>Source: Claude Admin weekly capture (30d to 19 Oct)</a:t>
             </a:r>
             <a:endParaRPr lang="en-US" sz="700" dirty="0"/>
           </a:p>
@@ -32607,7 +32861,7 @@
                 <a:ea typeface="Poppins" pitchFamily="34" charset="-122"/>
                 <a:cs typeface="Poppins" pitchFamily="34" charset="-120"/>
               </a:rPr>
-              <a:t>no new Claude Admin capture this week — slide holds the 12 Oct read: 39 of 47 weekly, 12 daily</a:t>
+              <a:t>40 of 51 active weekly, 14 daily — both up; October code output 329,436 lines, already a record month, 52% of it one developer</a:t>
             </a:r>
             <a:endParaRPr lang="en-US" sz="900" dirty="0"/>
           </a:p>

--- a/exec-deck/output/H&L Weekly Update - WC 12 Oct 2026.pptx
+++ b/exec-deck/output/H&L Weekly Update - WC 12 Oct 2026.pptx
@@ -825,22 +825,22 @@
                   <c:v>3839</c:v>
                 </c:pt>
                 <c:pt idx="4">
-                  <c:v>2327</c:v>
+                  <c:v>1967</c:v>
                 </c:pt>
                 <c:pt idx="5">
-                  <c:v>17288</c:v>
+                  <c:v>12943</c:v>
                 </c:pt>
                 <c:pt idx="6">
                   <c:v>969</c:v>
                 </c:pt>
                 <c:pt idx="7">
-                  <c:v>2685</c:v>
+                  <c:v>1935</c:v>
                 </c:pt>
                 <c:pt idx="8">
-                  <c:v>10950</c:v>
+                  <c:v>8778</c:v>
                 </c:pt>
                 <c:pt idx="9">
-                  <c:v>5021</c:v>
+                  <c:v>3889</c:v>
                 </c:pt>
               </c:numCache>
             </c:numRef>
@@ -45044,7 +45044,7 @@
                 <a:ea typeface="Poppins" pitchFamily="34" charset="-122"/>
                 <a:cs typeface="Poppins" pitchFamily="34" charset="-120"/>
               </a:rPr>
-              <a:t>$240k</a:t>
+              <a:t>$233k</a:t>
             </a:r>
             <a:endParaRPr lang="en-US" sz="2000" dirty="0"/>
           </a:p>
@@ -45083,7 +45083,7 @@
                 <a:ea typeface="Poppins" pitchFamily="34" charset="-122"/>
                 <a:cs typeface="Poppins" pitchFamily="34" charset="-120"/>
               </a:rPr>
-              <a:t>20 of the 95 deals won with software MRR in 2026 have no row on the register · Oscars Group is $155k of it</a:t>
+              <a:t>18 of the 78 deals won with software MRR in 2026 have no row on the register · Oscars Group is $155k of it</a:t>
             </a:r>
             <a:endParaRPr lang="en-US" sz="780" dirty="0"/>
           </a:p>
@@ -48003,7 +48003,7 @@
                 <a:ea typeface="Poppins" pitchFamily="34" charset="-122"/>
                 <a:cs typeface="Poppins" pitchFamily="34" charset="-120"/>
               </a:rPr>
-              <a:t>October has won more than it has invoiced, for the first time since June. </a:t>
+              <a:t>October has won more than it has invoiced for a second month. </a:t>
             </a:r>
             <a:pPr indent="0" marL="0">
               <a:spcAft>
@@ -48020,7 +48020,7 @@
                 <a:ea typeface="Poppins" pitchFamily="34" charset="-122"/>
                 <a:cs typeface="Poppins" pitchFamily="34" charset="-120"/>
               </a:rPr>
-              <a:t>$5,021 won against $3,817 invoiced. Ten months of both series read live from HubSpot and the register.</a:t>
+              <a:t>$3,889 won against $3,817 invoiced, after $8,778 against $6,853 in September. Both series read live for ten months, and AVC new sites are now out of the won series.</a:t>
             </a:r>
             <a:endParaRPr lang="en-US" sz="850" dirty="0"/>
           </a:p>
@@ -48099,7 +48099,7 @@
                 <a:ea typeface="Poppins" pitchFamily="34" charset="-122"/>
                 <a:cs typeface="Poppins" pitchFamily="34" charset="-120"/>
               </a:rPr>
-              <a:t>$240k of ARR is won with no row on the register. </a:t>
+              <a:t>$233k of ARR is won with no row on the register. </a:t>
             </a:r>
             <a:pPr indent="0" marL="0">
               <a:spcAft>
@@ -48116,7 +48116,7 @@
                 <a:ea typeface="Poppins" pitchFamily="34" charset="-122"/>
                 <a:cs typeface="Poppins" pitchFamily="34" charset="-120"/>
               </a:rPr>
-              <a:t>20 of the 95 deals that carried software MRR in 2026. Oscars Group is $155k of it — 64%. The PS pack breaks the whole list down by age.</a:t>
+              <a:t>18 of the 78 deals that carried software MRR in 2026. Oscars Group is $155k of it — 66%. The PS pack breaks the whole list down by age.</a:t>
             </a:r>
             <a:endParaRPr lang="en-US" sz="850" dirty="0"/>
           </a:p>
@@ -48133,7 +48133,7 @@
                 <a:ea typeface="Poppins" pitchFamily="34" charset="-122"/>
                 <a:cs typeface="Poppins" pitchFamily="34" charset="-120"/>
               </a:rPr>
-              <a:t>◆ Oscars Group — signed, ~1.5x rollout, held by the old provider's contract terms. AVC new sites excluded where they are parked licences. Ten more sit below the cut, together worth $2.2k/mo. The full list is in the PS pack.</a:t>
+              <a:t>◆ Oscars Group — signed, ~1.5x rollout, held by the old provider's contract terms. AVC new sites are excluded throughout — 17 deals worth $8,759 of 2026 software MRR, parked licences that are not counted in MRR or ARR. Eight more sit below the cut, worth $1.6k/mo.</a:t>
             </a:r>
             <a:endParaRPr lang="en-US" sz="850" dirty="0"/>
           </a:p>
@@ -48233,7 +48233,7 @@
                 <a:ea typeface="Poppins" pitchFamily="34" charset="-122"/>
                 <a:cs typeface="Poppins" pitchFamily="34" charset="-120"/>
               </a:rPr>
-              <a:t>Source: HubSpot closed-won deals (total_software_cost) + MRR movement register (live, 19 Oct) — all series live</a:t>
+              <a:t>Source: HubSpot closed-won deals (total_software_cost, AVC excluded) + MRR movement register (live, 19 Oct)</a:t>
             </a:r>
             <a:endParaRPr lang="en-US" sz="700" dirty="0"/>
           </a:p>
